--- a/02-how-mcp-works.pptx
+++ b/02-how-mcp-works.pptx
@@ -10,15 +10,12 @@
   <p:sldIdLst>
     <p:sldId id="256" r:id="rId2"/>
     <p:sldId id="257" r:id="rId3"/>
-    <p:sldId id="258" r:id="rId4"/>
-    <p:sldId id="259" r:id="rId5"/>
-    <p:sldId id="260" r:id="rId6"/>
-    <p:sldId id="261" r:id="rId7"/>
-    <p:sldId id="262" r:id="rId8"/>
-    <p:sldId id="263" r:id="rId9"/>
-    <p:sldId id="264" r:id="rId10"/>
-    <p:sldId id="265" r:id="rId11"/>
-    <p:sldId id="266" r:id="rId12"/>
+    <p:sldId id="276" r:id="rId27"/>
+    <p:sldId id="277" r:id="rId28"/>
+    <p:sldId id="278" r:id="rId29"/>
+    <p:sldId id="279" r:id="rId30"/>
+    <p:sldId id="280" r:id="rId31"/>
+    <p:sldId id="281" r:id="rId32"/>
     <p:sldId id="267" r:id="rId13"/>
     <p:sldId id="268" r:id="rId14"/>
     <p:sldId id="269" r:id="rId15"/>
@@ -28,6 +25,12 @@
     <p:sldId id="273" r:id="rId19"/>
     <p:sldId id="274" r:id="rId20"/>
     <p:sldId id="275" r:id="rId21"/>
+    <p:sldId id="282" r:id="rId33"/>
+    <p:sldId id="258" r:id="rId4"/>
+    <p:sldId id="259" r:id="rId5"/>
+    <p:sldId id="260" r:id="rId6"/>
+    <p:sldId id="261" r:id="rId7"/>
+    <p:sldId id="262" r:id="rId8"/>
   </p:sldIdLst>
   <p:sldSz cx="9144000" cy="5143500" type="screen16x9"/>
   <p:notesSz cx="5143500" cy="9144000"/>
@@ -3255,6 +3258,10 @@
           </a:solidFill>
           <a:ln/>
         </p:spPr>
+        <p:txBody>
+          <a:bodyPr/>
+          <a:p/>
+        </p:txBody>
       </p:sp>
       <p:sp>
         <p:nvSpPr>
@@ -3289,7 +3296,7 @@
                 <a:ea typeface="Arial Black" pitchFamily="34" charset="-122"/>
                 <a:cs typeface="Arial Black" pitchFamily="34" charset="-120"/>
               </a:rPr>
-              <a:t>03</a:t>
+              <a:t>02</a:t>
             </a:r>
             <a:endParaRPr lang="en-US" sz="4800" dirty="0"/>
           </a:p>
@@ -4905,6 +4912,10 @@
           </a:solidFill>
           <a:ln/>
         </p:spPr>
+        <p:txBody>
+          <a:bodyPr/>
+          <a:p/>
+        </p:txBody>
       </p:sp>
       <p:sp>
         <p:nvSpPr>
@@ -4939,7 +4950,7 @@
                 <a:ea typeface="Arial Black" pitchFamily="34" charset="-122"/>
                 <a:cs typeface="Arial Black" pitchFamily="34" charset="-120"/>
               </a:rPr>
-              <a:t>04</a:t>
+              <a:t>03</a:t>
             </a:r>
             <a:endParaRPr lang="en-US" sz="4800" dirty="0"/>
           </a:p>
@@ -6092,14 +6103,93 @@
       </p:grpSpPr>
       <p:sp>
         <p:nvSpPr>
-          <p:cNvPr id="2" name="Shape 0"/>
+          <p:cNvPr id="2" name="Rectangle 1"/>
           <p:cNvSpPr/>
           <p:nvPr/>
         </p:nvSpPr>
         <p:spPr>
           <a:xfrm>
             <a:off x="0" y="0"/>
-            <a:ext cx="9144000" cy="54864"/>
+            <a:ext cx="9143771" cy="5143500"/>
+          </a:xfrm>
+          <a:prstGeom prst="rect">
+            <a:avLst/>
+          </a:prstGeom>
+          <a:solidFill>
+            <a:srgbClr val="FFFFFF"/>
+          </a:solidFill>
+          <a:ln>
+            <a:noFill/>
+          </a:ln>
+          <a:effectLst/>
+        </p:spPr>
+        <p:style>
+          <a:lnRef idx="1">
+            <a:schemeClr val="accent1"/>
+          </a:lnRef>
+          <a:fillRef idx="3">
+            <a:schemeClr val="accent1"/>
+          </a:fillRef>
+          <a:effectRef idx="2">
+            <a:schemeClr val="accent1"/>
+          </a:effectRef>
+          <a:fontRef idx="minor">
+            <a:schemeClr val="lt1"/>
+          </a:fontRef>
+        </p:style>
+        <p:txBody>
+          <a:bodyPr rtlCol="0" anchor="ctr"/>
+          <a:lstStyle/>
+          <a:p>
+            <a:pPr algn="ctr"/>
+          </a:p>
+        </p:txBody>
+      </p:sp>
+      <p:sp>
+        <p:nvSpPr>
+          <p:cNvPr id="3" name="TextBox 2"/>
+          <p:cNvSpPr txBox="1"/>
+          <p:nvPr/>
+        </p:nvSpPr>
+        <p:spPr>
+          <a:xfrm>
+            <a:off x="514350" y="274320"/>
+            <a:ext cx="8229600" cy="480059"/>
+          </a:xfrm>
+          <a:prstGeom prst="rect">
+            <a:avLst/>
+          </a:prstGeom>
+          <a:noFill/>
+        </p:spPr>
+        <p:txBody>
+          <a:bodyPr wrap="square" lIns="34290" rIns="34290" tIns="13716" bIns="13716" anchor="t">
+            <a:spAutoFit/>
+          </a:bodyPr>
+          <a:lstStyle/>
+          <a:p>
+            <a:pPr algn="l"/>
+            <a:r>
+              <a:rPr sz="2100" b="1" i="0">
+                <a:solidFill>
+                  <a:srgbClr val="1E2761"/>
+                </a:solidFill>
+                <a:latin typeface="Arial Black"/>
+              </a:rPr>
+              <a:t>MCP 整體架構:四層分工</a:t>
+            </a:r>
+          </a:p>
+        </p:txBody>
+      </p:sp>
+      <p:sp>
+        <p:nvSpPr>
+          <p:cNvPr id="4" name="Rectangle 3"/>
+          <p:cNvSpPr/>
+          <p:nvPr/>
+        </p:nvSpPr>
+        <p:spPr>
+          <a:xfrm>
+            <a:off x="514350" y="822959"/>
+            <a:ext cx="2057400" cy="27432"/>
           </a:xfrm>
           <a:prstGeom prst="rect">
             <a:avLst/>
@@ -6107,180 +6197,958 @@
           <a:solidFill>
             <a:srgbClr val="E8793A"/>
           </a:solidFill>
-          <a:ln/>
-        </p:spPr>
-      </p:sp>
-      <p:sp>
-        <p:nvSpPr>
-          <p:cNvPr id="3" name="Text 1"/>
-          <p:cNvSpPr/>
-          <p:nvPr/>
-        </p:nvSpPr>
-        <p:spPr>
-          <a:xfrm>
-            <a:off x="640080" y="914400"/>
-            <a:ext cx="7863840" cy="548640"/>
-          </a:xfrm>
-          <a:prstGeom prst="rect">
-            <a:avLst/>
-          </a:prstGeom>
-          <a:noFill/>
-          <a:ln/>
-        </p:spPr>
-        <p:txBody>
-          <a:bodyPr wrap="square" lIns="0" tIns="0" rIns="0" bIns="0" rtlCol="0" anchor="ctr"/>
-          <a:lstStyle/>
-          <a:p>
-            <a:pPr marL="0" indent="0">
-              <a:buNone/>
-            </a:pPr>
-            <a:r>
-              <a:rPr lang="en-US" sz="2400" b="1" dirty="0">
-                <a:solidFill>
-                  <a:srgbClr val="E8793A"/>
-                </a:solidFill>
-                <a:latin typeface="Arial Black" pitchFamily="34" charset="0"/>
-                <a:ea typeface="Arial Black" pitchFamily="34" charset="-122"/>
-                <a:cs typeface="Arial Black" pitchFamily="34" charset="-120"/>
-              </a:rPr>
-              <a:t>→  切換到互動動畫 Demo</a:t>
-            </a:r>
-            <a:endParaRPr lang="en-US" sz="2400" dirty="0"/>
-          </a:p>
-        </p:txBody>
-      </p:sp>
-      <p:sp>
-        <p:nvSpPr>
-          <p:cNvPr id="4" name="Text 2"/>
-          <p:cNvSpPr/>
-          <p:nvPr/>
-        </p:nvSpPr>
-        <p:spPr>
-          <a:xfrm>
-            <a:off x="640080" y="1554480"/>
-            <a:ext cx="7863840" cy="457200"/>
-          </a:xfrm>
-          <a:prstGeom prst="rect">
-            <a:avLst/>
-          </a:prstGeom>
-          <a:noFill/>
-          <a:ln/>
-        </p:spPr>
-        <p:txBody>
-          <a:bodyPr wrap="square" lIns="0" tIns="0" rIns="0" bIns="0" rtlCol="0" anchor="ctr"/>
-          <a:lstStyle/>
-          <a:p>
-            <a:pPr marL="0" indent="0">
-              <a:buNone/>
-            </a:pPr>
-            <a:r>
-              <a:rPr lang="en-US" sz="1800" dirty="0">
-                <a:solidFill>
-                  <a:srgbClr val="CADCFC"/>
-                </a:solidFill>
-                <a:latin typeface="Consolas" pitchFamily="34" charset="0"/>
-                <a:ea typeface="Consolas" pitchFamily="34" charset="-122"/>
-                <a:cs typeface="Consolas" pitchFamily="34" charset="-120"/>
-              </a:rPr>
-              <a:t>mcp-architecture-animation.html</a:t>
-            </a:r>
-            <a:endParaRPr lang="en-US" sz="1800" dirty="0"/>
-          </a:p>
-        </p:txBody>
-      </p:sp>
-      <p:sp>
-        <p:nvSpPr>
-          <p:cNvPr id="5" name="Text 3"/>
-          <p:cNvSpPr/>
-          <p:nvPr/>
-        </p:nvSpPr>
-        <p:spPr>
-          <a:xfrm>
-            <a:off x="640080" y="2286000"/>
-            <a:ext cx="7863840" cy="2286000"/>
-          </a:xfrm>
-          <a:prstGeom prst="rect">
-            <a:avLst/>
-          </a:prstGeom>
-          <a:noFill/>
-          <a:ln/>
-        </p:spPr>
-        <p:txBody>
-          <a:bodyPr wrap="square" lIns="0" tIns="0" rIns="0" bIns="0" rtlCol="0" anchor="t"/>
-          <a:lstStyle/>
-          <a:p>
-            <a:pPr marL="0" indent="0">
-              <a:buNone/>
-            </a:pPr>
-            <a:r>
-              <a:rPr lang="en-US" sz="1400" b="1" dirty="0">
-                <a:solidFill>
-                  <a:srgbClr val="FFFFFF"/>
-                </a:solidFill>
-              </a:rPr>
-              <a:t>展示重點：
-</a:t>
-            </a:r>
-            <a:endParaRPr lang="en-US" sz="1400" dirty="0"/>
-          </a:p>
-          <a:p>
-            <a:pPr marL="0" indent="0">
-              <a:buNone/>
-            </a:pPr>
-            <a:r>
-              <a:rPr lang="en-US" sz="1300" dirty="0">
-                <a:solidFill>
-                  <a:srgbClr val="CADCFC"/>
-                </a:solidFill>
-              </a:rPr>
-              <a:t>1. Host → Client → Server → Tool 四層架構的完整互動
-</a:t>
-            </a:r>
-            <a:endParaRPr lang="en-US" sz="1400" dirty="0"/>
-          </a:p>
-          <a:p>
-            <a:pPr marL="0" indent="0">
-              <a:buNone/>
-            </a:pPr>
-            <a:r>
-              <a:rPr lang="en-US" sz="1300" dirty="0">
-                <a:solidFill>
-                  <a:srgbClr val="CADCFC"/>
-                </a:solidFill>
-              </a:rPr>
-              <a:t>2. 使用者提問後，LLM 如何透過 Client 呼叫 Server 的工具
-</a:t>
-            </a:r>
-            <a:endParaRPr lang="en-US" sz="1400" dirty="0"/>
-          </a:p>
-          <a:p>
-            <a:pPr marL="0" indent="0">
-              <a:buNone/>
-            </a:pPr>
-            <a:r>
-              <a:rPr lang="en-US" sz="1300" dirty="0">
-                <a:solidFill>
-                  <a:srgbClr val="CADCFC"/>
-                </a:solidFill>
-              </a:rPr>
-              <a:t>3. 工具執行結果如何回傳給 LLM 整合成最終回覆
-</a:t>
-            </a:r>
-            <a:endParaRPr lang="en-US" sz="1400" dirty="0"/>
-          </a:p>
-          <a:p>
-            <a:pPr marL="0" indent="0">
-              <a:buNone/>
-            </a:pPr>
-            <a:r>
-              <a:rPr lang="en-US" sz="1300" dirty="0">
-                <a:solidFill>
-                  <a:srgbClr val="CADCFC"/>
-                </a:solidFill>
-              </a:rPr>
-              <a:t>4. 對照剛剛學到的 JSON-RPC 格式，看實際訊息往返</a:t>
-            </a:r>
-            <a:endParaRPr lang="en-US" sz="1400" dirty="0"/>
+          <a:ln>
+            <a:noFill/>
+          </a:ln>
+          <a:effectLst/>
+        </p:spPr>
+        <p:style>
+          <a:lnRef idx="1">
+            <a:schemeClr val="accent1"/>
+          </a:lnRef>
+          <a:fillRef idx="3">
+            <a:schemeClr val="accent1"/>
+          </a:fillRef>
+          <a:effectRef idx="2">
+            <a:schemeClr val="accent1"/>
+          </a:effectRef>
+          <a:fontRef idx="minor">
+            <a:schemeClr val="lt1"/>
+          </a:fontRef>
+        </p:style>
+        <p:txBody>
+          <a:bodyPr rtlCol="0" anchor="ctr"/>
+          <a:lstStyle/>
+          <a:p>
+            <a:pPr algn="ctr"/>
+          </a:p>
+        </p:txBody>
+      </p:sp>
+      <p:sp>
+        <p:nvSpPr>
+          <p:cNvPr id="5" name="Rounded Rectangle 4"/>
+          <p:cNvSpPr/>
+          <p:nvPr/>
+        </p:nvSpPr>
+        <p:spPr>
+          <a:xfrm>
+            <a:off x="548640" y="1165860"/>
+            <a:ext cx="8229600" cy="685800"/>
+          </a:xfrm>
+          <a:prstGeom prst="roundRect">
+            <a:avLst>
+              <a:gd name="adj" fmla="val 12000"/>
+            </a:avLst>
+          </a:prstGeom>
+          <a:solidFill>
+            <a:srgbClr val="FFFFFF"/>
+          </a:solidFill>
+          <a:ln w="23812">
+            <a:solidFill>
+              <a:srgbClr val="1E2761"/>
+            </a:solidFill>
+          </a:ln>
+          <a:effectLst/>
+        </p:spPr>
+        <p:style>
+          <a:lnRef idx="1">
+            <a:schemeClr val="accent1"/>
+          </a:lnRef>
+          <a:fillRef idx="3">
+            <a:schemeClr val="accent1"/>
+          </a:fillRef>
+          <a:effectRef idx="2">
+            <a:schemeClr val="accent1"/>
+          </a:effectRef>
+          <a:fontRef idx="minor">
+            <a:schemeClr val="lt1"/>
+          </a:fontRef>
+        </p:style>
+        <p:txBody>
+          <a:bodyPr rtlCol="0" anchor="ctr"/>
+          <a:lstStyle/>
+          <a:p>
+            <a:pPr algn="ctr"/>
+          </a:p>
+        </p:txBody>
+      </p:sp>
+      <p:sp>
+        <p:nvSpPr>
+          <p:cNvPr id="6" name="Rectangle 5"/>
+          <p:cNvSpPr/>
+          <p:nvPr/>
+        </p:nvSpPr>
+        <p:spPr>
+          <a:xfrm>
+            <a:off x="582930" y="1207008"/>
+            <a:ext cx="137160" cy="603504"/>
+          </a:xfrm>
+          <a:prstGeom prst="rect">
+            <a:avLst/>
+          </a:prstGeom>
+          <a:solidFill>
+            <a:srgbClr val="1E2761"/>
+          </a:solidFill>
+          <a:ln>
+            <a:noFill/>
+          </a:ln>
+          <a:effectLst/>
+        </p:spPr>
+        <p:style>
+          <a:lnRef idx="1">
+            <a:schemeClr val="accent1"/>
+          </a:lnRef>
+          <a:fillRef idx="3">
+            <a:schemeClr val="accent1"/>
+          </a:fillRef>
+          <a:effectRef idx="2">
+            <a:schemeClr val="accent1"/>
+          </a:effectRef>
+          <a:fontRef idx="minor">
+            <a:schemeClr val="lt1"/>
+          </a:fontRef>
+        </p:style>
+        <p:txBody>
+          <a:bodyPr rtlCol="0" anchor="ctr"/>
+          <a:lstStyle/>
+          <a:p>
+            <a:pPr algn="ctr"/>
+          </a:p>
+        </p:txBody>
+      </p:sp>
+      <p:sp>
+        <p:nvSpPr>
+          <p:cNvPr id="7" name="TextBox 6"/>
+          <p:cNvSpPr txBox="1"/>
+          <p:nvPr/>
+        </p:nvSpPr>
+        <p:spPr>
+          <a:xfrm>
+            <a:off x="822959" y="1165860"/>
+            <a:ext cx="1714500" cy="685800"/>
+          </a:xfrm>
+          <a:prstGeom prst="rect">
+            <a:avLst/>
+          </a:prstGeom>
+          <a:noFill/>
+        </p:spPr>
+        <p:txBody>
+          <a:bodyPr wrap="square" lIns="34290" rIns="34290" tIns="13716" bIns="13716" anchor="ctr">
+            <a:spAutoFit/>
+          </a:bodyPr>
+          <a:lstStyle/>
+          <a:p>
+            <a:pPr algn="l"/>
+            <a:r>
+              <a:rPr sz="1800" b="1" i="0">
+                <a:solidFill>
+                  <a:srgbClr val="1E2761"/>
+                </a:solidFill>
+                <a:latin typeface="Arial Black"/>
+              </a:rPr>
+              <a:t>Host</a:t>
+            </a:r>
+          </a:p>
+        </p:txBody>
+      </p:sp>
+      <p:sp>
+        <p:nvSpPr>
+          <p:cNvPr id="8" name="TextBox 7"/>
+          <p:cNvSpPr txBox="1"/>
+          <p:nvPr/>
+        </p:nvSpPr>
+        <p:spPr>
+          <a:xfrm>
+            <a:off x="2743200" y="1165860"/>
+            <a:ext cx="2948939" cy="685800"/>
+          </a:xfrm>
+          <a:prstGeom prst="rect">
+            <a:avLst/>
+          </a:prstGeom>
+          <a:noFill/>
+        </p:spPr>
+        <p:txBody>
+          <a:bodyPr wrap="square" lIns="34290" rIns="34290" tIns="13716" bIns="13716" anchor="ctr">
+            <a:spAutoFit/>
+          </a:bodyPr>
+          <a:lstStyle/>
+          <a:p>
+            <a:pPr algn="l"/>
+            <a:r>
+              <a:rPr sz="1350" b="0" i="0">
+                <a:solidFill>
+                  <a:srgbClr val="1A1A1A"/>
+                </a:solidFill>
+                <a:latin typeface="Calibri"/>
+              </a:rPr>
+              <a:t>應用程式 / 入口</a:t>
+            </a:r>
+          </a:p>
+        </p:txBody>
+      </p:sp>
+      <p:sp>
+        <p:nvSpPr>
+          <p:cNvPr id="9" name="TextBox 8"/>
+          <p:cNvSpPr txBox="1"/>
+          <p:nvPr/>
+        </p:nvSpPr>
+        <p:spPr>
+          <a:xfrm>
+            <a:off x="5829300" y="1165860"/>
+            <a:ext cx="2948939" cy="685800"/>
+          </a:xfrm>
+          <a:prstGeom prst="rect">
+            <a:avLst/>
+          </a:prstGeom>
+          <a:noFill/>
+        </p:spPr>
+        <p:txBody>
+          <a:bodyPr wrap="square" lIns="34290" rIns="34290" tIns="13716" bIns="13716" anchor="ctr">
+            <a:spAutoFit/>
+          </a:bodyPr>
+          <a:lstStyle/>
+          <a:p>
+            <a:pPr algn="l"/>
+            <a:r>
+              <a:rPr sz="1050" b="0" i="1">
+                <a:solidFill>
+                  <a:srgbClr val="6B6B6B"/>
+                </a:solidFill>
+                <a:latin typeface="Consolas"/>
+              </a:rPr>
+              <a:t>興大 AI 學伴 web UI</a:t>
+            </a:r>
+          </a:p>
+        </p:txBody>
+      </p:sp>
+      <p:sp>
+        <p:nvSpPr>
+          <p:cNvPr id="10" name="TextBox 9"/>
+          <p:cNvSpPr txBox="1"/>
+          <p:nvPr/>
+        </p:nvSpPr>
+        <p:spPr>
+          <a:xfrm>
+            <a:off x="4389120" y="1872234"/>
+            <a:ext cx="411479" cy="109728"/>
+          </a:xfrm>
+          <a:prstGeom prst="rect">
+            <a:avLst/>
+          </a:prstGeom>
+          <a:noFill/>
+        </p:spPr>
+        <p:txBody>
+          <a:bodyPr wrap="square" lIns="34290" rIns="34290" tIns="13716" bIns="13716" anchor="ctr">
+            <a:spAutoFit/>
+          </a:bodyPr>
+          <a:lstStyle/>
+          <a:p>
+            <a:pPr algn="ctr"/>
+            <a:r>
+              <a:rPr sz="1200" b="0" i="0">
+                <a:solidFill>
+                  <a:srgbClr val="6B6B6B"/>
+                </a:solidFill>
+                <a:latin typeface="Calibri"/>
+              </a:rPr>
+              <a:t>▼</a:t>
+            </a:r>
+          </a:p>
+        </p:txBody>
+      </p:sp>
+      <p:sp>
+        <p:nvSpPr>
+          <p:cNvPr id="11" name="Rounded Rectangle 10"/>
+          <p:cNvSpPr/>
+          <p:nvPr/>
+        </p:nvSpPr>
+        <p:spPr>
+          <a:xfrm>
+            <a:off x="548640" y="1988819"/>
+            <a:ext cx="8229600" cy="685800"/>
+          </a:xfrm>
+          <a:prstGeom prst="roundRect">
+            <a:avLst>
+              <a:gd name="adj" fmla="val 12000"/>
+            </a:avLst>
+          </a:prstGeom>
+          <a:solidFill>
+            <a:srgbClr val="FFFFFF"/>
+          </a:solidFill>
+          <a:ln w="23812">
+            <a:solidFill>
+              <a:srgbClr val="5B8DE8"/>
+            </a:solidFill>
+          </a:ln>
+          <a:effectLst/>
+        </p:spPr>
+        <p:style>
+          <a:lnRef idx="1">
+            <a:schemeClr val="accent1"/>
+          </a:lnRef>
+          <a:fillRef idx="3">
+            <a:schemeClr val="accent1"/>
+          </a:fillRef>
+          <a:effectRef idx="2">
+            <a:schemeClr val="accent1"/>
+          </a:effectRef>
+          <a:fontRef idx="minor">
+            <a:schemeClr val="lt1"/>
+          </a:fontRef>
+        </p:style>
+        <p:txBody>
+          <a:bodyPr rtlCol="0" anchor="ctr"/>
+          <a:lstStyle/>
+          <a:p>
+            <a:pPr algn="ctr"/>
+          </a:p>
+        </p:txBody>
+      </p:sp>
+      <p:sp>
+        <p:nvSpPr>
+          <p:cNvPr id="12" name="Rectangle 11"/>
+          <p:cNvSpPr/>
+          <p:nvPr/>
+        </p:nvSpPr>
+        <p:spPr>
+          <a:xfrm>
+            <a:off x="582930" y="2029967"/>
+            <a:ext cx="137160" cy="603504"/>
+          </a:xfrm>
+          <a:prstGeom prst="rect">
+            <a:avLst/>
+          </a:prstGeom>
+          <a:solidFill>
+            <a:srgbClr val="5B8DE8"/>
+          </a:solidFill>
+          <a:ln>
+            <a:noFill/>
+          </a:ln>
+          <a:effectLst/>
+        </p:spPr>
+        <p:style>
+          <a:lnRef idx="1">
+            <a:schemeClr val="accent1"/>
+          </a:lnRef>
+          <a:fillRef idx="3">
+            <a:schemeClr val="accent1"/>
+          </a:fillRef>
+          <a:effectRef idx="2">
+            <a:schemeClr val="accent1"/>
+          </a:effectRef>
+          <a:fontRef idx="minor">
+            <a:schemeClr val="lt1"/>
+          </a:fontRef>
+        </p:style>
+        <p:txBody>
+          <a:bodyPr rtlCol="0" anchor="ctr"/>
+          <a:lstStyle/>
+          <a:p>
+            <a:pPr algn="ctr"/>
+          </a:p>
+        </p:txBody>
+      </p:sp>
+      <p:sp>
+        <p:nvSpPr>
+          <p:cNvPr id="13" name="TextBox 12"/>
+          <p:cNvSpPr txBox="1"/>
+          <p:nvPr/>
+        </p:nvSpPr>
+        <p:spPr>
+          <a:xfrm>
+            <a:off x="822959" y="1988819"/>
+            <a:ext cx="1714500" cy="685800"/>
+          </a:xfrm>
+          <a:prstGeom prst="rect">
+            <a:avLst/>
+          </a:prstGeom>
+          <a:noFill/>
+        </p:spPr>
+        <p:txBody>
+          <a:bodyPr wrap="square" lIns="34290" rIns="34290" tIns="13716" bIns="13716" anchor="ctr">
+            <a:spAutoFit/>
+          </a:bodyPr>
+          <a:lstStyle/>
+          <a:p>
+            <a:pPr algn="l"/>
+            <a:r>
+              <a:rPr sz="1800" b="1" i="0">
+                <a:solidFill>
+                  <a:srgbClr val="5B8DE8"/>
+                </a:solidFill>
+                <a:latin typeface="Arial Black"/>
+              </a:rPr>
+              <a:t>Client</a:t>
+            </a:r>
+          </a:p>
+        </p:txBody>
+      </p:sp>
+      <p:sp>
+        <p:nvSpPr>
+          <p:cNvPr id="14" name="TextBox 13"/>
+          <p:cNvSpPr txBox="1"/>
+          <p:nvPr/>
+        </p:nvSpPr>
+        <p:spPr>
+          <a:xfrm>
+            <a:off x="2743200" y="1988819"/>
+            <a:ext cx="2948939" cy="685800"/>
+          </a:xfrm>
+          <a:prstGeom prst="rect">
+            <a:avLst/>
+          </a:prstGeom>
+          <a:noFill/>
+        </p:spPr>
+        <p:txBody>
+          <a:bodyPr wrap="square" lIns="34290" rIns="34290" tIns="13716" bIns="13716" anchor="ctr">
+            <a:spAutoFit/>
+          </a:bodyPr>
+          <a:lstStyle/>
+          <a:p>
+            <a:pPr algn="l"/>
+            <a:r>
+              <a:rPr sz="1350" b="0" i="0">
+                <a:solidFill>
+                  <a:srgbClr val="1A1A1A"/>
+                </a:solidFill>
+                <a:latin typeface="Calibri"/>
+              </a:rPr>
+              <a:t>包含 LLM + MCP client 邏輯</a:t>
+            </a:r>
+          </a:p>
+        </p:txBody>
+      </p:sp>
+      <p:sp>
+        <p:nvSpPr>
+          <p:cNvPr id="15" name="TextBox 14"/>
+          <p:cNvSpPr txBox="1"/>
+          <p:nvPr/>
+        </p:nvSpPr>
+        <p:spPr>
+          <a:xfrm>
+            <a:off x="5829300" y="1988819"/>
+            <a:ext cx="2948939" cy="685800"/>
+          </a:xfrm>
+          <a:prstGeom prst="rect">
+            <a:avLst/>
+          </a:prstGeom>
+          <a:noFill/>
+        </p:spPr>
+        <p:txBody>
+          <a:bodyPr wrap="square" lIns="34290" rIns="34290" tIns="13716" bIns="13716" anchor="ctr">
+            <a:spAutoFit/>
+          </a:bodyPr>
+          <a:lstStyle/>
+          <a:p>
+            <a:pPr algn="l"/>
+            <a:r>
+              <a:rPr sz="1050" b="0" i="1">
+                <a:solidFill>
+                  <a:srgbClr val="6B6B6B"/>
+                </a:solidFill>
+                <a:latin typeface="Consolas"/>
+              </a:rPr>
+              <a:t>Node.js + Sonnet  (= 影片裡的 Parent)</a:t>
+            </a:r>
+          </a:p>
+        </p:txBody>
+      </p:sp>
+      <p:sp>
+        <p:nvSpPr>
+          <p:cNvPr id="16" name="TextBox 15"/>
+          <p:cNvSpPr txBox="1"/>
+          <p:nvPr/>
+        </p:nvSpPr>
+        <p:spPr>
+          <a:xfrm>
+            <a:off x="4389120" y="2695194"/>
+            <a:ext cx="411479" cy="109728"/>
+          </a:xfrm>
+          <a:prstGeom prst="rect">
+            <a:avLst/>
+          </a:prstGeom>
+          <a:noFill/>
+        </p:spPr>
+        <p:txBody>
+          <a:bodyPr wrap="square" lIns="34290" rIns="34290" tIns="13716" bIns="13716" anchor="ctr">
+            <a:spAutoFit/>
+          </a:bodyPr>
+          <a:lstStyle/>
+          <a:p>
+            <a:pPr algn="ctr"/>
+            <a:r>
+              <a:rPr sz="1200" b="0" i="0">
+                <a:solidFill>
+                  <a:srgbClr val="6B6B6B"/>
+                </a:solidFill>
+                <a:latin typeface="Calibri"/>
+              </a:rPr>
+              <a:t>▼</a:t>
+            </a:r>
+          </a:p>
+        </p:txBody>
+      </p:sp>
+      <p:sp>
+        <p:nvSpPr>
+          <p:cNvPr id="17" name="Rounded Rectangle 16"/>
+          <p:cNvSpPr/>
+          <p:nvPr/>
+        </p:nvSpPr>
+        <p:spPr>
+          <a:xfrm>
+            <a:off x="548640" y="2811779"/>
+            <a:ext cx="8229600" cy="685800"/>
+          </a:xfrm>
+          <a:prstGeom prst="roundRect">
+            <a:avLst>
+              <a:gd name="adj" fmla="val 12000"/>
+            </a:avLst>
+          </a:prstGeom>
+          <a:solidFill>
+            <a:srgbClr val="FFFFFF"/>
+          </a:solidFill>
+          <a:ln w="23812">
+            <a:solidFill>
+              <a:srgbClr val="2DB5C9"/>
+            </a:solidFill>
+          </a:ln>
+          <a:effectLst/>
+        </p:spPr>
+        <p:style>
+          <a:lnRef idx="1">
+            <a:schemeClr val="accent1"/>
+          </a:lnRef>
+          <a:fillRef idx="3">
+            <a:schemeClr val="accent1"/>
+          </a:fillRef>
+          <a:effectRef idx="2">
+            <a:schemeClr val="accent1"/>
+          </a:effectRef>
+          <a:fontRef idx="minor">
+            <a:schemeClr val="lt1"/>
+          </a:fontRef>
+        </p:style>
+        <p:txBody>
+          <a:bodyPr rtlCol="0" anchor="ctr"/>
+          <a:lstStyle/>
+          <a:p>
+            <a:pPr algn="ctr"/>
+          </a:p>
+        </p:txBody>
+      </p:sp>
+      <p:sp>
+        <p:nvSpPr>
+          <p:cNvPr id="18" name="Rectangle 17"/>
+          <p:cNvSpPr/>
+          <p:nvPr/>
+        </p:nvSpPr>
+        <p:spPr>
+          <a:xfrm>
+            <a:off x="582930" y="2852927"/>
+            <a:ext cx="137160" cy="603504"/>
+          </a:xfrm>
+          <a:prstGeom prst="rect">
+            <a:avLst/>
+          </a:prstGeom>
+          <a:solidFill>
+            <a:srgbClr val="2DB5C9"/>
+          </a:solidFill>
+          <a:ln>
+            <a:noFill/>
+          </a:ln>
+          <a:effectLst/>
+        </p:spPr>
+        <p:style>
+          <a:lnRef idx="1">
+            <a:schemeClr val="accent1"/>
+          </a:lnRef>
+          <a:fillRef idx="3">
+            <a:schemeClr val="accent1"/>
+          </a:fillRef>
+          <a:effectRef idx="2">
+            <a:schemeClr val="accent1"/>
+          </a:effectRef>
+          <a:fontRef idx="minor">
+            <a:schemeClr val="lt1"/>
+          </a:fontRef>
+        </p:style>
+        <p:txBody>
+          <a:bodyPr rtlCol="0" anchor="ctr"/>
+          <a:lstStyle/>
+          <a:p>
+            <a:pPr algn="ctr"/>
+          </a:p>
+        </p:txBody>
+      </p:sp>
+      <p:sp>
+        <p:nvSpPr>
+          <p:cNvPr id="19" name="TextBox 18"/>
+          <p:cNvSpPr txBox="1"/>
+          <p:nvPr/>
+        </p:nvSpPr>
+        <p:spPr>
+          <a:xfrm>
+            <a:off x="822959" y="2811779"/>
+            <a:ext cx="1714500" cy="685800"/>
+          </a:xfrm>
+          <a:prstGeom prst="rect">
+            <a:avLst/>
+          </a:prstGeom>
+          <a:noFill/>
+        </p:spPr>
+        <p:txBody>
+          <a:bodyPr wrap="square" lIns="34290" rIns="34290" tIns="13716" bIns="13716" anchor="ctr">
+            <a:spAutoFit/>
+          </a:bodyPr>
+          <a:lstStyle/>
+          <a:p>
+            <a:pPr algn="l"/>
+            <a:r>
+              <a:rPr sz="1800" b="1" i="0">
+                <a:solidFill>
+                  <a:srgbClr val="2DB5C9"/>
+                </a:solidFill>
+                <a:latin typeface="Arial Black"/>
+              </a:rPr>
+              <a:t>Server</a:t>
+            </a:r>
+          </a:p>
+        </p:txBody>
+      </p:sp>
+      <p:sp>
+        <p:nvSpPr>
+          <p:cNvPr id="20" name="TextBox 19"/>
+          <p:cNvSpPr txBox="1"/>
+          <p:nvPr/>
+        </p:nvSpPr>
+        <p:spPr>
+          <a:xfrm>
+            <a:off x="2743200" y="2811779"/>
+            <a:ext cx="2948939" cy="685800"/>
+          </a:xfrm>
+          <a:prstGeom prst="rect">
+            <a:avLst/>
+          </a:prstGeom>
+          <a:noFill/>
+        </p:spPr>
+        <p:txBody>
+          <a:bodyPr wrap="square" lIns="34290" rIns="34290" tIns="13716" bIns="13716" anchor="ctr">
+            <a:spAutoFit/>
+          </a:bodyPr>
+          <a:lstStyle/>
+          <a:p>
+            <a:pPr algn="l"/>
+            <a:r>
+              <a:rPr sz="1350" b="0" i="0">
+                <a:solidFill>
+                  <a:srgbClr val="1A1A1A"/>
+                </a:solidFill>
+                <a:latin typeface="Calibri"/>
+              </a:rPr>
+              <a:t>個別 MCP server 子程序</a:t>
+            </a:r>
+          </a:p>
+        </p:txBody>
+      </p:sp>
+      <p:sp>
+        <p:nvSpPr>
+          <p:cNvPr id="21" name="TextBox 20"/>
+          <p:cNvSpPr txBox="1"/>
+          <p:nvPr/>
+        </p:nvSpPr>
+        <p:spPr>
+          <a:xfrm>
+            <a:off x="5829300" y="2811779"/>
+            <a:ext cx="2948939" cy="685800"/>
+          </a:xfrm>
+          <a:prstGeom prst="rect">
+            <a:avLst/>
+          </a:prstGeom>
+          <a:noFill/>
+        </p:spPr>
+        <p:txBody>
+          <a:bodyPr wrap="square" lIns="34290" rIns="34290" tIns="13716" bIns="13716" anchor="ctr">
+            <a:spAutoFit/>
+          </a:bodyPr>
+          <a:lstStyle/>
+          <a:p>
+            <a:pPr algn="l"/>
+            <a:r>
+              <a:rPr sz="1050" b="0" i="1">
+                <a:solidFill>
+                  <a:srgbClr val="6B6B6B"/>
+                </a:solidFill>
+                <a:latin typeface="Consolas"/>
+              </a:rPr>
+              <a:t>Python MCP Server  (= 影片裡的 Child)</a:t>
+            </a:r>
+          </a:p>
+        </p:txBody>
+      </p:sp>
+      <p:sp>
+        <p:nvSpPr>
+          <p:cNvPr id="22" name="TextBox 21"/>
+          <p:cNvSpPr txBox="1"/>
+          <p:nvPr/>
+        </p:nvSpPr>
+        <p:spPr>
+          <a:xfrm>
+            <a:off x="4389120" y="3518154"/>
+            <a:ext cx="411479" cy="109728"/>
+          </a:xfrm>
+          <a:prstGeom prst="rect">
+            <a:avLst/>
+          </a:prstGeom>
+          <a:noFill/>
+        </p:spPr>
+        <p:txBody>
+          <a:bodyPr wrap="square" lIns="34290" rIns="34290" tIns="13716" bIns="13716" anchor="ctr">
+            <a:spAutoFit/>
+          </a:bodyPr>
+          <a:lstStyle/>
+          <a:p>
+            <a:pPr algn="ctr"/>
+            <a:r>
+              <a:rPr sz="1200" b="0" i="0">
+                <a:solidFill>
+                  <a:srgbClr val="6B6B6B"/>
+                </a:solidFill>
+                <a:latin typeface="Calibri"/>
+              </a:rPr>
+              <a:t>▼</a:t>
+            </a:r>
+          </a:p>
+        </p:txBody>
+      </p:sp>
+      <p:sp>
+        <p:nvSpPr>
+          <p:cNvPr id="23" name="Rounded Rectangle 22"/>
+          <p:cNvSpPr/>
+          <p:nvPr/>
+        </p:nvSpPr>
+        <p:spPr>
+          <a:xfrm>
+            <a:off x="548640" y="3634739"/>
+            <a:ext cx="8229600" cy="685800"/>
+          </a:xfrm>
+          <a:prstGeom prst="roundRect">
+            <a:avLst>
+              <a:gd name="adj" fmla="val 12000"/>
+            </a:avLst>
+          </a:prstGeom>
+          <a:solidFill>
+            <a:srgbClr val="FFFFFF"/>
+          </a:solidFill>
+          <a:ln w="23812">
+            <a:solidFill>
+              <a:srgbClr val="5CB85C"/>
+            </a:solidFill>
+          </a:ln>
+          <a:effectLst/>
+        </p:spPr>
+        <p:style>
+          <a:lnRef idx="1">
+            <a:schemeClr val="accent1"/>
+          </a:lnRef>
+          <a:fillRef idx="3">
+            <a:schemeClr val="accent1"/>
+          </a:fillRef>
+          <a:effectRef idx="2">
+            <a:schemeClr val="accent1"/>
+          </a:effectRef>
+          <a:fontRef idx="minor">
+            <a:schemeClr val="lt1"/>
+          </a:fontRef>
+        </p:style>
+        <p:txBody>
+          <a:bodyPr rtlCol="0" anchor="ctr"/>
+          <a:lstStyle/>
+          <a:p>
+            <a:pPr algn="ctr"/>
+          </a:p>
+        </p:txBody>
+      </p:sp>
+      <p:sp>
+        <p:nvSpPr>
+          <p:cNvPr id="24" name="Rectangle 23"/>
+          <p:cNvSpPr/>
+          <p:nvPr/>
+        </p:nvSpPr>
+        <p:spPr>
+          <a:xfrm>
+            <a:off x="582930" y="3675887"/>
+            <a:ext cx="137160" cy="603504"/>
+          </a:xfrm>
+          <a:prstGeom prst="rect">
+            <a:avLst/>
+          </a:prstGeom>
+          <a:solidFill>
+            <a:srgbClr val="5CB85C"/>
+          </a:solidFill>
+          <a:ln>
+            <a:noFill/>
+          </a:ln>
+          <a:effectLst/>
+        </p:spPr>
+        <p:style>
+          <a:lnRef idx="1">
+            <a:schemeClr val="accent1"/>
+          </a:lnRef>
+          <a:fillRef idx="3">
+            <a:schemeClr val="accent1"/>
+          </a:fillRef>
+          <a:effectRef idx="2">
+            <a:schemeClr val="accent1"/>
+          </a:effectRef>
+          <a:fontRef idx="minor">
+            <a:schemeClr val="lt1"/>
+          </a:fontRef>
+        </p:style>
+        <p:txBody>
+          <a:bodyPr rtlCol="0" anchor="ctr"/>
+          <a:lstStyle/>
+          <a:p>
+            <a:pPr algn="ctr"/>
+          </a:p>
+        </p:txBody>
+      </p:sp>
+      <p:sp>
+        <p:nvSpPr>
+          <p:cNvPr id="25" name="TextBox 24"/>
+          <p:cNvSpPr txBox="1"/>
+          <p:nvPr/>
+        </p:nvSpPr>
+        <p:spPr>
+          <a:xfrm>
+            <a:off x="822959" y="3634739"/>
+            <a:ext cx="1714500" cy="685800"/>
+          </a:xfrm>
+          <a:prstGeom prst="rect">
+            <a:avLst/>
+          </a:prstGeom>
+          <a:noFill/>
+        </p:spPr>
+        <p:txBody>
+          <a:bodyPr wrap="square" lIns="34290" rIns="34290" tIns="13716" bIns="13716" anchor="ctr">
+            <a:spAutoFit/>
+          </a:bodyPr>
+          <a:lstStyle/>
+          <a:p>
+            <a:pPr algn="l"/>
+            <a:r>
+              <a:rPr sz="1800" b="1" i="0">
+                <a:solidFill>
+                  <a:srgbClr val="5CB85C"/>
+                </a:solidFill>
+                <a:latin typeface="Arial Black"/>
+              </a:rPr>
+              <a:t>Tool</a:t>
+            </a:r>
+          </a:p>
+        </p:txBody>
+      </p:sp>
+      <p:sp>
+        <p:nvSpPr>
+          <p:cNvPr id="26" name="TextBox 25"/>
+          <p:cNvSpPr txBox="1"/>
+          <p:nvPr/>
+        </p:nvSpPr>
+        <p:spPr>
+          <a:xfrm>
+            <a:off x="2743200" y="3634739"/>
+            <a:ext cx="2948939" cy="685800"/>
+          </a:xfrm>
+          <a:prstGeom prst="rect">
+            <a:avLst/>
+          </a:prstGeom>
+          <a:noFill/>
+        </p:spPr>
+        <p:txBody>
+          <a:bodyPr wrap="square" lIns="34290" rIns="34290" tIns="13716" bIns="13716" anchor="ctr">
+            <a:spAutoFit/>
+          </a:bodyPr>
+          <a:lstStyle/>
+          <a:p>
+            <a:pPr algn="l"/>
+            <a:r>
+              <a:rPr sz="1350" b="0" i="0">
+                <a:solidFill>
+                  <a:srgbClr val="1A1A1A"/>
+                </a:solidFill>
+                <a:latin typeface="Calibri"/>
+              </a:rPr>
+              <a:t>個別工具函式</a:t>
+            </a:r>
+          </a:p>
+        </p:txBody>
+      </p:sp>
+      <p:sp>
+        <p:nvSpPr>
+          <p:cNvPr id="27" name="TextBox 26"/>
+          <p:cNvSpPr txBox="1"/>
+          <p:nvPr/>
+        </p:nvSpPr>
+        <p:spPr>
+          <a:xfrm>
+            <a:off x="5829300" y="3634739"/>
+            <a:ext cx="2948939" cy="685800"/>
+          </a:xfrm>
+          <a:prstGeom prst="rect">
+            <a:avLst/>
+          </a:prstGeom>
+          <a:noFill/>
+        </p:spPr>
+        <p:txBody>
+          <a:bodyPr wrap="square" lIns="34290" rIns="34290" tIns="13716" bIns="13716" anchor="ctr">
+            <a:spAutoFit/>
+          </a:bodyPr>
+          <a:lstStyle/>
+          <a:p>
+            <a:pPr algn="l"/>
+            <a:r>
+              <a:rPr sz="1050" b="0" i="1">
+                <a:solidFill>
+                  <a:srgbClr val="6B6B6B"/>
+                </a:solidFill>
+                <a:latin typeface="Consolas"/>
+              </a:rPr>
+              <a:t>search_new_books / search_courses / search_teachers …</a:t>
+            </a:r>
+          </a:p>
+        </p:txBody>
+      </p:sp>
+      <p:sp>
+        <p:nvSpPr>
+          <p:cNvPr id="28" name="TextBox 27"/>
+          <p:cNvSpPr txBox="1"/>
+          <p:nvPr/>
+        </p:nvSpPr>
+        <p:spPr>
+          <a:xfrm>
+            <a:off x="514350" y="4766310"/>
+            <a:ext cx="8229600" cy="274320"/>
+          </a:xfrm>
+          <a:prstGeom prst="rect">
+            <a:avLst/>
+          </a:prstGeom>
+          <a:noFill/>
+        </p:spPr>
+        <p:txBody>
+          <a:bodyPr wrap="square" lIns="34290" rIns="34290" tIns="13716" bIns="13716" anchor="t">
+            <a:spAutoFit/>
+          </a:bodyPr>
+          <a:lstStyle/>
+          <a:p>
+            <a:pPr algn="ctr"/>
+            <a:r>
+              <a:rPr sz="1050" b="0" i="1">
+                <a:solidFill>
+                  <a:srgbClr val="6B6B6B"/>
+                </a:solidFill>
+                <a:latin typeface="Calibri"/>
+              </a:rPr>
+              <a:t>Host 看不到 JSON-RPC · Client 看不到 Server 實作 · LLM 只看 name + description + inputSchema</a:t>
+            </a:r>
           </a:p>
         </p:txBody>
       </p:sp>
@@ -6319,608 +7187,544 @@
       </p:grpSpPr>
       <p:sp>
         <p:nvSpPr>
-          <p:cNvPr id="2" name="Shape 0"/>
+          <p:cNvPr id="2" name="Rectangle 1"/>
           <p:cNvSpPr/>
           <p:nvPr/>
         </p:nvSpPr>
         <p:spPr>
           <a:xfrm>
             <a:off x="0" y="0"/>
-            <a:ext cx="9144000" cy="54864"/>
+            <a:ext cx="9143771" cy="5143500"/>
           </a:xfrm>
           <a:prstGeom prst="rect">
             <a:avLst/>
           </a:prstGeom>
           <a:solidFill>
-            <a:srgbClr val="065A82"/>
+            <a:srgbClr val="FFFFFF"/>
           </a:solidFill>
-          <a:ln/>
-        </p:spPr>
-      </p:sp>
-      <p:sp>
-        <p:nvSpPr>
-          <p:cNvPr id="3" name="Text 1"/>
-          <p:cNvSpPr/>
-          <p:nvPr/>
-        </p:nvSpPr>
-        <p:spPr>
-          <a:xfrm>
-            <a:off x="640080" y="274320"/>
-            <a:ext cx="7863840" cy="548640"/>
-          </a:xfrm>
-          <a:prstGeom prst="rect">
-            <a:avLst/>
-          </a:prstGeom>
-          <a:noFill/>
-          <a:ln/>
-        </p:spPr>
-        <p:txBody>
-          <a:bodyPr wrap="square" lIns="0" tIns="0" rIns="0" bIns="0" rtlCol="0" anchor="ctr"/>
-          <a:lstStyle/>
-          <a:p>
-            <a:pPr marL="0" indent="0">
-              <a:buNone/>
-            </a:pPr>
-            <a:r>
-              <a:rPr lang="en-US" sz="2600" b="1" dirty="0">
-                <a:solidFill>
-                  <a:srgbClr val="1A1A2E"/>
-                </a:solidFill>
-                <a:latin typeface="Arial Black" pitchFamily="34" charset="0"/>
-                <a:ea typeface="Arial Black" pitchFamily="34" charset="-122"/>
-                <a:cs typeface="Arial Black" pitchFamily="34" charset="-120"/>
+          <a:ln>
+            <a:noFill/>
+          </a:ln>
+          <a:effectLst/>
+        </p:spPr>
+        <p:style>
+          <a:lnRef idx="1">
+            <a:schemeClr val="accent1"/>
+          </a:lnRef>
+          <a:fillRef idx="3">
+            <a:schemeClr val="accent1"/>
+          </a:fillRef>
+          <a:effectRef idx="2">
+            <a:schemeClr val="accent1"/>
+          </a:effectRef>
+          <a:fontRef idx="minor">
+            <a:schemeClr val="lt1"/>
+          </a:fontRef>
+        </p:style>
+        <p:txBody>
+          <a:bodyPr rtlCol="0" anchor="ctr"/>
+          <a:lstStyle/>
+          <a:p>
+            <a:pPr algn="ctr"/>
+          </a:p>
+        </p:txBody>
+      </p:sp>
+      <p:sp>
+        <p:nvSpPr>
+          <p:cNvPr id="3" name="TextBox 2"/>
+          <p:cNvSpPr txBox="1"/>
+          <p:nvPr/>
+        </p:nvSpPr>
+        <p:spPr>
+          <a:xfrm>
+            <a:off x="514350" y="342900"/>
+            <a:ext cx="8229600" cy="548640"/>
+          </a:xfrm>
+          <a:prstGeom prst="rect">
+            <a:avLst/>
+          </a:prstGeom>
+          <a:noFill/>
+        </p:spPr>
+        <p:txBody>
+          <a:bodyPr wrap="square" lIns="34290" rIns="34290" tIns="13716" bIns="13716" anchor="t">
+            <a:spAutoFit/>
+          </a:bodyPr>
+          <a:lstStyle/>
+          <a:p>
+            <a:pPr algn="l"/>
+            <a:r>
+              <a:rPr sz="2700" b="1" i="0">
+                <a:solidFill>
+                  <a:srgbClr val="1E2761"/>
+                </a:solidFill>
+                <a:latin typeface="Arial Black"/>
               </a:rPr>
               <a:t>本講大綱</a:t>
             </a:r>
-            <a:endParaRPr lang="en-US" sz="2600" dirty="0"/>
-          </a:p>
-        </p:txBody>
-      </p:sp>
-      <p:sp>
-        <p:nvSpPr>
-          <p:cNvPr id="4" name="Shape 2"/>
-          <p:cNvSpPr/>
-          <p:nvPr/>
-        </p:nvSpPr>
-        <p:spPr>
-          <a:xfrm>
-            <a:off x="640080" y="1097280"/>
-            <a:ext cx="457200" cy="457200"/>
-          </a:xfrm>
-          <a:prstGeom prst="ellipse">
+          </a:p>
+        </p:txBody>
+      </p:sp>
+      <p:sp>
+        <p:nvSpPr>
+          <p:cNvPr id="4" name="Rectangle 3"/>
+          <p:cNvSpPr/>
+          <p:nvPr/>
+        </p:nvSpPr>
+        <p:spPr>
+          <a:xfrm>
+            <a:off x="514350" y="960119"/>
+            <a:ext cx="2057400" cy="27432"/>
+          </a:xfrm>
+          <a:prstGeom prst="rect">
             <a:avLst/>
           </a:prstGeom>
           <a:solidFill>
-            <a:srgbClr val="065A82"/>
+            <a:srgbClr val="E8793A"/>
           </a:solidFill>
-          <a:ln/>
-        </p:spPr>
-      </p:sp>
-      <p:sp>
-        <p:nvSpPr>
-          <p:cNvPr id="5" name="Text 3"/>
-          <p:cNvSpPr/>
-          <p:nvPr/>
-        </p:nvSpPr>
-        <p:spPr>
-          <a:xfrm>
-            <a:off x="640080" y="1097280"/>
-            <a:ext cx="457200" cy="457200"/>
-          </a:xfrm>
-          <a:prstGeom prst="rect">
-            <a:avLst/>
-          </a:prstGeom>
-          <a:noFill/>
-          <a:ln/>
-        </p:spPr>
-        <p:txBody>
-          <a:bodyPr wrap="square" lIns="0" tIns="0" rIns="0" bIns="0" rtlCol="0" anchor="ctr"/>
-          <a:lstStyle/>
-          <a:p>
-            <a:pPr marL="0" indent="0" algn="ctr">
-              <a:buNone/>
-            </a:pPr>
-            <a:r>
-              <a:rPr lang="en-US" sz="1400" dirty="0">
-                <a:solidFill>
-                  <a:srgbClr val="FFFFFF"/>
-                </a:solidFill>
-                <a:latin typeface="Arial Black" pitchFamily="34" charset="0"/>
-                <a:ea typeface="Arial Black" pitchFamily="34" charset="-122"/>
-                <a:cs typeface="Arial Black" pitchFamily="34" charset="-120"/>
+          <a:ln>
+            <a:noFill/>
+          </a:ln>
+          <a:effectLst/>
+        </p:spPr>
+        <p:style>
+          <a:lnRef idx="1">
+            <a:schemeClr val="accent1"/>
+          </a:lnRef>
+          <a:fillRef idx="3">
+            <a:schemeClr val="accent1"/>
+          </a:fillRef>
+          <a:effectRef idx="2">
+            <a:schemeClr val="accent1"/>
+          </a:effectRef>
+          <a:fontRef idx="minor">
+            <a:schemeClr val="lt1"/>
+          </a:fontRef>
+        </p:style>
+        <p:txBody>
+          <a:bodyPr rtlCol="0" anchor="ctr"/>
+          <a:lstStyle/>
+          <a:p>
+            <a:pPr algn="ctr"/>
+          </a:p>
+        </p:txBody>
+      </p:sp>
+      <p:sp>
+        <p:nvSpPr>
+          <p:cNvPr id="5" name="TextBox 4"/>
+          <p:cNvSpPr txBox="1"/>
+          <p:nvPr/>
+        </p:nvSpPr>
+        <p:spPr>
+          <a:xfrm>
+            <a:off x="548640" y="1371600"/>
+            <a:ext cx="1028700" cy="480059"/>
+          </a:xfrm>
+          <a:prstGeom prst="rect">
+            <a:avLst/>
+          </a:prstGeom>
+          <a:noFill/>
+        </p:spPr>
+        <p:txBody>
+          <a:bodyPr wrap="square" lIns="34290" rIns="34290" tIns="13716" bIns="13716" anchor="ctr">
+            <a:spAutoFit/>
+          </a:bodyPr>
+          <a:lstStyle/>
+          <a:p>
+            <a:pPr algn="l"/>
+            <a:r>
+              <a:rPr sz="3150" b="1" i="0">
+                <a:solidFill>
+                  <a:srgbClr val="E8793A"/>
+                </a:solidFill>
+                <a:latin typeface="Arial Black"/>
               </a:rPr>
               <a:t>01</a:t>
             </a:r>
-            <a:endParaRPr lang="en-US" sz="1400" dirty="0"/>
-          </a:p>
-        </p:txBody>
-      </p:sp>
-      <p:sp>
-        <p:nvSpPr>
-          <p:cNvPr id="6" name="Text 4"/>
-          <p:cNvSpPr/>
-          <p:nvPr/>
-        </p:nvSpPr>
-        <p:spPr>
-          <a:xfrm>
-            <a:off x="1280160" y="1097280"/>
-            <a:ext cx="2743200" cy="256032"/>
-          </a:xfrm>
-          <a:prstGeom prst="rect">
-            <a:avLst/>
-          </a:prstGeom>
-          <a:noFill/>
-          <a:ln/>
-        </p:spPr>
-        <p:txBody>
-          <a:bodyPr wrap="square" lIns="0" tIns="0" rIns="0" bIns="0" rtlCol="0" anchor="ctr"/>
-          <a:lstStyle/>
-          <a:p>
-            <a:pPr marL="0" indent="0">
-              <a:buNone/>
-            </a:pPr>
-            <a:r>
-              <a:rPr lang="en-US" sz="1600" b="1" dirty="0">
-                <a:solidFill>
-                  <a:srgbClr val="1A1A2E"/>
-                </a:solidFill>
-                <a:latin typeface="Arial Black" pitchFamily="34" charset="0"/>
-                <a:ea typeface="Arial Black" pitchFamily="34" charset="-122"/>
-                <a:cs typeface="Arial Black" pitchFamily="34" charset="-120"/>
-              </a:rPr>
-              <a:t>通訊協定</a:t>
-            </a:r>
-            <a:endParaRPr lang="en-US" sz="1600" dirty="0"/>
-          </a:p>
-        </p:txBody>
-      </p:sp>
-      <p:sp>
-        <p:nvSpPr>
-          <p:cNvPr id="7" name="Text 5"/>
-          <p:cNvSpPr/>
-          <p:nvPr/>
-        </p:nvSpPr>
-        <p:spPr>
-          <a:xfrm>
-            <a:off x="1280160" y="1353312"/>
-            <a:ext cx="6400800" cy="228600"/>
-          </a:xfrm>
-          <a:prstGeom prst="rect">
-            <a:avLst/>
-          </a:prstGeom>
-          <a:noFill/>
-          <a:ln/>
-        </p:spPr>
-        <p:txBody>
-          <a:bodyPr wrap="square" lIns="0" tIns="0" rIns="0" bIns="0" rtlCol="0" anchor="ctr"/>
-          <a:lstStyle/>
-          <a:p>
-            <a:pPr marL="0" indent="0">
-              <a:buNone/>
-            </a:pPr>
-            <a:r>
-              <a:rPr lang="en-US" sz="1200" dirty="0">
-                <a:solidFill>
-                  <a:srgbClr val="8899AA"/>
-                </a:solidFill>
-                <a:latin typeface="Calibri" pitchFamily="34" charset="0"/>
-                <a:ea typeface="Calibri" pitchFamily="34" charset="-122"/>
-                <a:cs typeface="Calibri" pitchFamily="34" charset="-120"/>
-              </a:rPr>
-              <a:t>REST vs JSON-RPC，為什麼 MCP 選 JSON-RPC</a:t>
-            </a:r>
-            <a:endParaRPr lang="en-US" sz="1200" dirty="0"/>
-          </a:p>
-        </p:txBody>
-      </p:sp>
-      <p:sp>
-        <p:nvSpPr>
-          <p:cNvPr id="8" name="Shape 6"/>
-          <p:cNvSpPr/>
-          <p:nvPr/>
-        </p:nvSpPr>
-        <p:spPr>
-          <a:xfrm>
-            <a:off x="640080" y="2011680"/>
-            <a:ext cx="457200" cy="457200"/>
-          </a:xfrm>
-          <a:prstGeom prst="ellipse">
-            <a:avLst/>
-          </a:prstGeom>
-          <a:solidFill>
-            <a:srgbClr val="065A82"/>
-          </a:solidFill>
-          <a:ln/>
-        </p:spPr>
-      </p:sp>
-      <p:sp>
-        <p:nvSpPr>
-          <p:cNvPr id="9" name="Text 7"/>
-          <p:cNvSpPr/>
-          <p:nvPr/>
-        </p:nvSpPr>
-        <p:spPr>
-          <a:xfrm>
-            <a:off x="640080" y="2011680"/>
-            <a:ext cx="457200" cy="457200"/>
-          </a:xfrm>
-          <a:prstGeom prst="rect">
-            <a:avLst/>
-          </a:prstGeom>
-          <a:noFill/>
-          <a:ln/>
-        </p:spPr>
-        <p:txBody>
-          <a:bodyPr wrap="square" lIns="0" tIns="0" rIns="0" bIns="0" rtlCol="0" anchor="ctr"/>
-          <a:lstStyle/>
-          <a:p>
-            <a:pPr marL="0" indent="0" algn="ctr">
-              <a:buNone/>
-            </a:pPr>
-            <a:r>
-              <a:rPr lang="en-US" sz="1400" dirty="0">
-                <a:solidFill>
-                  <a:srgbClr val="FFFFFF"/>
-                </a:solidFill>
-                <a:latin typeface="Arial Black" pitchFamily="34" charset="0"/>
-                <a:ea typeface="Arial Black" pitchFamily="34" charset="-122"/>
-                <a:cs typeface="Arial Black" pitchFamily="34" charset="-120"/>
+          </a:p>
+        </p:txBody>
+      </p:sp>
+      <p:sp>
+        <p:nvSpPr>
+          <p:cNvPr id="6" name="TextBox 5"/>
+          <p:cNvSpPr txBox="1"/>
+          <p:nvPr/>
+        </p:nvSpPr>
+        <p:spPr>
+          <a:xfrm>
+            <a:off x="1714500" y="1371600"/>
+            <a:ext cx="6858000" cy="411479"/>
+          </a:xfrm>
+          <a:prstGeom prst="rect">
+            <a:avLst/>
+          </a:prstGeom>
+          <a:noFill/>
+        </p:spPr>
+        <p:txBody>
+          <a:bodyPr wrap="square" lIns="34290" rIns="34290" tIns="13716" bIns="13716" anchor="ctr">
+            <a:spAutoFit/>
+          </a:bodyPr>
+          <a:lstStyle/>
+          <a:p>
+            <a:pPr algn="l"/>
+            <a:r>
+              <a:rPr sz="1950" b="1" i="0">
+                <a:solidFill>
+                  <a:srgbClr val="1E2761"/>
+                </a:solidFill>
+                <a:latin typeface="Arial Black"/>
+              </a:rPr>
+              <a:t>從一個查詢開始</a:t>
+            </a:r>
+          </a:p>
+        </p:txBody>
+      </p:sp>
+      <p:sp>
+        <p:nvSpPr>
+          <p:cNvPr id="7" name="TextBox 6"/>
+          <p:cNvSpPr txBox="1"/>
+          <p:nvPr/>
+        </p:nvSpPr>
+        <p:spPr>
+          <a:xfrm>
+            <a:off x="1714500" y="1783080"/>
+            <a:ext cx="6858000" cy="342900"/>
+          </a:xfrm>
+          <a:prstGeom prst="rect">
+            <a:avLst/>
+          </a:prstGeom>
+          <a:noFill/>
+        </p:spPr>
+        <p:txBody>
+          <a:bodyPr wrap="square" lIns="34290" rIns="34290" tIns="13716" bIns="13716" anchor="ctr">
+            <a:spAutoFit/>
+          </a:bodyPr>
+          <a:lstStyle/>
+          <a:p>
+            <a:pPr algn="l"/>
+            <a:r>
+              <a:rPr sz="1200" b="0" i="0">
+                <a:solidFill>
+                  <a:srgbClr val="6B6B6B"/>
+                </a:solidFill>
+                <a:latin typeface="Calibri"/>
+              </a:rPr>
+              <a:t>場景 → Parent 開出 Child → 兩階段握手 → 工具呼叫</a:t>
+            </a:r>
+          </a:p>
+        </p:txBody>
+      </p:sp>
+      <p:sp>
+        <p:nvSpPr>
+          <p:cNvPr id="8" name="TextBox 7"/>
+          <p:cNvSpPr txBox="1"/>
+          <p:nvPr/>
+        </p:nvSpPr>
+        <p:spPr>
+          <a:xfrm>
+            <a:off x="548640" y="2263139"/>
+            <a:ext cx="1028700" cy="480059"/>
+          </a:xfrm>
+          <a:prstGeom prst="rect">
+            <a:avLst/>
+          </a:prstGeom>
+          <a:noFill/>
+        </p:spPr>
+        <p:txBody>
+          <a:bodyPr wrap="square" lIns="34290" rIns="34290" tIns="13716" bIns="13716" anchor="ctr">
+            <a:spAutoFit/>
+          </a:bodyPr>
+          <a:lstStyle/>
+          <a:p>
+            <a:pPr algn="l"/>
+            <a:r>
+              <a:rPr sz="3150" b="1" i="0">
+                <a:solidFill>
+                  <a:srgbClr val="E8793A"/>
+                </a:solidFill>
+                <a:latin typeface="Arial Black"/>
               </a:rPr>
               <a:t>02</a:t>
             </a:r>
-            <a:endParaRPr lang="en-US" sz="1400" dirty="0"/>
-          </a:p>
-        </p:txBody>
-      </p:sp>
-      <p:sp>
-        <p:nvSpPr>
-          <p:cNvPr id="10" name="Text 8"/>
-          <p:cNvSpPr/>
-          <p:nvPr/>
-        </p:nvSpPr>
-        <p:spPr>
-          <a:xfrm>
-            <a:off x="1280160" y="2011680"/>
-            <a:ext cx="2743200" cy="256032"/>
-          </a:xfrm>
-          <a:prstGeom prst="rect">
-            <a:avLst/>
-          </a:prstGeom>
-          <a:noFill/>
-          <a:ln/>
-        </p:spPr>
-        <p:txBody>
-          <a:bodyPr wrap="square" lIns="0" tIns="0" rIns="0" bIns="0" rtlCol="0" anchor="ctr"/>
-          <a:lstStyle/>
-          <a:p>
-            <a:pPr marL="0" indent="0">
-              <a:buNone/>
-            </a:pPr>
-            <a:r>
-              <a:rPr lang="en-US" sz="1600" b="1" dirty="0">
-                <a:solidFill>
-                  <a:srgbClr val="1A1A2E"/>
-                </a:solidFill>
-                <a:latin typeface="Arial Black" pitchFamily="34" charset="0"/>
-                <a:ea typeface="Arial Black" pitchFamily="34" charset="-122"/>
-                <a:cs typeface="Arial Black" pitchFamily="34" charset="-120"/>
-              </a:rPr>
-              <a:t>Server 生命週期</a:t>
-            </a:r>
-            <a:endParaRPr lang="en-US" sz="1600" dirty="0"/>
-          </a:p>
-        </p:txBody>
-      </p:sp>
-      <p:sp>
-        <p:nvSpPr>
-          <p:cNvPr id="11" name="Text 9"/>
-          <p:cNvSpPr/>
-          <p:nvPr/>
-        </p:nvSpPr>
-        <p:spPr>
-          <a:xfrm>
-            <a:off x="1280160" y="2267712"/>
-            <a:ext cx="6400800" cy="228600"/>
-          </a:xfrm>
-          <a:prstGeom prst="rect">
-            <a:avLst/>
-          </a:prstGeom>
-          <a:noFill/>
-          <a:ln/>
-        </p:spPr>
-        <p:txBody>
-          <a:bodyPr wrap="square" lIns="0" tIns="0" rIns="0" bIns="0" rtlCol="0" anchor="ctr"/>
-          <a:lstStyle/>
-          <a:p>
-            <a:pPr marL="0" indent="0">
-              <a:buNone/>
-            </a:pPr>
-            <a:r>
-              <a:rPr lang="en-US" sz="1200" dirty="0">
-                <a:solidFill>
-                  <a:srgbClr val="8899AA"/>
-                </a:solidFill>
-                <a:latin typeface="Calibri" pitchFamily="34" charset="0"/>
-                <a:ea typeface="Calibri" pitchFamily="34" charset="-122"/>
-                <a:cs typeface="Calibri" pitchFamily="34" charset="-120"/>
-              </a:rPr>
-              <a:t>spawn → initialize → ready → shutdown</a:t>
-            </a:r>
-            <a:endParaRPr lang="en-US" sz="1200" dirty="0"/>
-          </a:p>
-        </p:txBody>
-      </p:sp>
-      <p:sp>
-        <p:nvSpPr>
-          <p:cNvPr id="12" name="Shape 10"/>
-          <p:cNvSpPr/>
-          <p:nvPr/>
-        </p:nvSpPr>
-        <p:spPr>
-          <a:xfrm>
-            <a:off x="640080" y="2926080"/>
-            <a:ext cx="457200" cy="457200"/>
-          </a:xfrm>
-          <a:prstGeom prst="ellipse">
-            <a:avLst/>
-          </a:prstGeom>
-          <a:solidFill>
-            <a:srgbClr val="065A82"/>
-          </a:solidFill>
-          <a:ln/>
-        </p:spPr>
-      </p:sp>
-      <p:sp>
-        <p:nvSpPr>
-          <p:cNvPr id="13" name="Text 11"/>
-          <p:cNvSpPr/>
-          <p:nvPr/>
-        </p:nvSpPr>
-        <p:spPr>
-          <a:xfrm>
-            <a:off x="640080" y="2926080"/>
-            <a:ext cx="457200" cy="457200"/>
-          </a:xfrm>
-          <a:prstGeom prst="rect">
-            <a:avLst/>
-          </a:prstGeom>
-          <a:noFill/>
-          <a:ln/>
-        </p:spPr>
-        <p:txBody>
-          <a:bodyPr wrap="square" lIns="0" tIns="0" rIns="0" bIns="0" rtlCol="0" anchor="ctr"/>
-          <a:lstStyle/>
-          <a:p>
-            <a:pPr marL="0" indent="0" algn="ctr">
-              <a:buNone/>
-            </a:pPr>
-            <a:r>
-              <a:rPr lang="en-US" sz="1400" dirty="0">
-                <a:solidFill>
-                  <a:srgbClr val="FFFFFF"/>
-                </a:solidFill>
-                <a:latin typeface="Arial Black" pitchFamily="34" charset="0"/>
-                <a:ea typeface="Arial Black" pitchFamily="34" charset="-122"/>
-                <a:cs typeface="Arial Black" pitchFamily="34" charset="-120"/>
+          </a:p>
+        </p:txBody>
+      </p:sp>
+      <p:sp>
+        <p:nvSpPr>
+          <p:cNvPr id="9" name="TextBox 8"/>
+          <p:cNvSpPr txBox="1"/>
+          <p:nvPr/>
+        </p:nvSpPr>
+        <p:spPr>
+          <a:xfrm>
+            <a:off x="1714500" y="2263139"/>
+            <a:ext cx="6858000" cy="411479"/>
+          </a:xfrm>
+          <a:prstGeom prst="rect">
+            <a:avLst/>
+          </a:prstGeom>
+          <a:noFill/>
+        </p:spPr>
+        <p:txBody>
+          <a:bodyPr wrap="square" lIns="34290" rIns="34290" tIns="13716" bIns="13716" anchor="ctr">
+            <a:spAutoFit/>
+          </a:bodyPr>
+          <a:lstStyle/>
+          <a:p>
+            <a:pPr algn="l"/>
+            <a:r>
+              <a:rPr sz="1950" b="1" i="0">
+                <a:solidFill>
+                  <a:srgbClr val="1E2761"/>
+                </a:solidFill>
+                <a:latin typeface="Arial Black"/>
+              </a:rPr>
+              <a:t>Tool 註冊與描述</a:t>
+            </a:r>
+          </a:p>
+        </p:txBody>
+      </p:sp>
+      <p:sp>
+        <p:nvSpPr>
+          <p:cNvPr id="10" name="TextBox 9"/>
+          <p:cNvSpPr txBox="1"/>
+          <p:nvPr/>
+        </p:nvSpPr>
+        <p:spPr>
+          <a:xfrm>
+            <a:off x="1714500" y="2674620"/>
+            <a:ext cx="6858000" cy="342900"/>
+          </a:xfrm>
+          <a:prstGeom prst="rect">
+            <a:avLst/>
+          </a:prstGeom>
+          <a:noFill/>
+        </p:spPr>
+        <p:txBody>
+          <a:bodyPr wrap="square" lIns="34290" rIns="34290" tIns="13716" bIns="13716" anchor="ctr">
+            <a:spAutoFit/>
+          </a:bodyPr>
+          <a:lstStyle/>
+          <a:p>
+            <a:pPr algn="l"/>
+            <a:r>
+              <a:rPr sz="1200" b="0" i="0">
+                <a:solidFill>
+                  <a:srgbClr val="6B6B6B"/>
+                </a:solidFill>
+                <a:latin typeface="Calibri"/>
+              </a:rPr>
+              <a:t>JSON Schema · description 如何影響 LLM 選擇</a:t>
+            </a:r>
+          </a:p>
+        </p:txBody>
+      </p:sp>
+      <p:sp>
+        <p:nvSpPr>
+          <p:cNvPr id="11" name="TextBox 10"/>
+          <p:cNvSpPr txBox="1"/>
+          <p:nvPr/>
+        </p:nvSpPr>
+        <p:spPr>
+          <a:xfrm>
+            <a:off x="548640" y="3154679"/>
+            <a:ext cx="1028700" cy="480059"/>
+          </a:xfrm>
+          <a:prstGeom prst="rect">
+            <a:avLst/>
+          </a:prstGeom>
+          <a:noFill/>
+        </p:spPr>
+        <p:txBody>
+          <a:bodyPr wrap="square" lIns="34290" rIns="34290" tIns="13716" bIns="13716" anchor="ctr">
+            <a:spAutoFit/>
+          </a:bodyPr>
+          <a:lstStyle/>
+          <a:p>
+            <a:pPr algn="l"/>
+            <a:r>
+              <a:rPr sz="3150" b="1" i="0">
+                <a:solidFill>
+                  <a:srgbClr val="E8793A"/>
+                </a:solidFill>
+                <a:latin typeface="Arial Black"/>
               </a:rPr>
               <a:t>03</a:t>
             </a:r>
-            <a:endParaRPr lang="en-US" sz="1400" dirty="0"/>
-          </a:p>
-        </p:txBody>
-      </p:sp>
-      <p:sp>
-        <p:nvSpPr>
-          <p:cNvPr id="14" name="Text 12"/>
-          <p:cNvSpPr/>
-          <p:nvPr/>
-        </p:nvSpPr>
-        <p:spPr>
-          <a:xfrm>
-            <a:off x="1280160" y="2926080"/>
-            <a:ext cx="2743200" cy="256032"/>
-          </a:xfrm>
-          <a:prstGeom prst="rect">
-            <a:avLst/>
-          </a:prstGeom>
-          <a:noFill/>
-          <a:ln/>
-        </p:spPr>
-        <p:txBody>
-          <a:bodyPr wrap="square" lIns="0" tIns="0" rIns="0" bIns="0" rtlCol="0" anchor="ctr"/>
-          <a:lstStyle/>
-          <a:p>
-            <a:pPr marL="0" indent="0">
-              <a:buNone/>
-            </a:pPr>
-            <a:r>
-              <a:rPr lang="en-US" sz="1600" b="1" dirty="0">
-                <a:solidFill>
-                  <a:srgbClr val="1A1A2E"/>
-                </a:solidFill>
-                <a:latin typeface="Arial Black" pitchFamily="34" charset="0"/>
-                <a:ea typeface="Arial Black" pitchFamily="34" charset="-122"/>
-                <a:cs typeface="Arial Black" pitchFamily="34" charset="-120"/>
-              </a:rPr>
-              <a:t>Tool 註冊與描述</a:t>
-            </a:r>
-            <a:endParaRPr lang="en-US" sz="1600" dirty="0"/>
-          </a:p>
-        </p:txBody>
-      </p:sp>
-      <p:sp>
-        <p:nvSpPr>
-          <p:cNvPr id="15" name="Text 13"/>
-          <p:cNvSpPr/>
-          <p:nvPr/>
-        </p:nvSpPr>
-        <p:spPr>
-          <a:xfrm>
-            <a:off x="1280160" y="3182112"/>
-            <a:ext cx="6400800" cy="228600"/>
-          </a:xfrm>
-          <a:prstGeom prst="rect">
-            <a:avLst/>
-          </a:prstGeom>
-          <a:noFill/>
-          <a:ln/>
-        </p:spPr>
-        <p:txBody>
-          <a:bodyPr wrap="square" lIns="0" tIns="0" rIns="0" bIns="0" rtlCol="0" anchor="ctr"/>
-          <a:lstStyle/>
-          <a:p>
-            <a:pPr marL="0" indent="0">
-              <a:buNone/>
-            </a:pPr>
-            <a:r>
-              <a:rPr lang="en-US" sz="1200" dirty="0">
-                <a:solidFill>
-                  <a:srgbClr val="8899AA"/>
-                </a:solidFill>
-                <a:latin typeface="Calibri" pitchFamily="34" charset="0"/>
-                <a:ea typeface="Calibri" pitchFamily="34" charset="-122"/>
-                <a:cs typeface="Calibri" pitchFamily="34" charset="-120"/>
-              </a:rPr>
-              <a:t>JSON Schema、description 如何影響 LLM 選擇</a:t>
-            </a:r>
-            <a:endParaRPr lang="en-US" sz="1200" dirty="0"/>
-          </a:p>
-        </p:txBody>
-      </p:sp>
-      <p:sp>
-        <p:nvSpPr>
-          <p:cNvPr id="16" name="Shape 14"/>
-          <p:cNvSpPr/>
-          <p:nvPr/>
-        </p:nvSpPr>
-        <p:spPr>
-          <a:xfrm>
-            <a:off x="640080" y="3840480"/>
-            <a:ext cx="457200" cy="457200"/>
-          </a:xfrm>
-          <a:prstGeom prst="ellipse">
-            <a:avLst/>
-          </a:prstGeom>
-          <a:solidFill>
-            <a:srgbClr val="065A82"/>
-          </a:solidFill>
-          <a:ln/>
-        </p:spPr>
-      </p:sp>
-      <p:sp>
-        <p:nvSpPr>
-          <p:cNvPr id="17" name="Text 15"/>
-          <p:cNvSpPr/>
-          <p:nvPr/>
-        </p:nvSpPr>
-        <p:spPr>
-          <a:xfrm>
-            <a:off x="640080" y="3840480"/>
-            <a:ext cx="457200" cy="457200"/>
-          </a:xfrm>
-          <a:prstGeom prst="rect">
-            <a:avLst/>
-          </a:prstGeom>
-          <a:noFill/>
-          <a:ln/>
-        </p:spPr>
-        <p:txBody>
-          <a:bodyPr wrap="square" lIns="0" tIns="0" rIns="0" bIns="0" rtlCol="0" anchor="ctr"/>
-          <a:lstStyle/>
-          <a:p>
-            <a:pPr marL="0" indent="0" algn="ctr">
-              <a:buNone/>
-            </a:pPr>
-            <a:r>
-              <a:rPr lang="en-US" sz="1400" dirty="0">
-                <a:solidFill>
-                  <a:srgbClr val="FFFFFF"/>
-                </a:solidFill>
-                <a:latin typeface="Arial Black" pitchFamily="34" charset="0"/>
-                <a:ea typeface="Arial Black" pitchFamily="34" charset="-122"/>
-                <a:cs typeface="Arial Black" pitchFamily="34" charset="-120"/>
-              </a:rPr>
-              <a:t>04</a:t>
-            </a:r>
-            <a:endParaRPr lang="en-US" sz="1400" dirty="0"/>
-          </a:p>
-        </p:txBody>
-      </p:sp>
-      <p:sp>
-        <p:nvSpPr>
-          <p:cNvPr id="18" name="Text 16"/>
-          <p:cNvSpPr/>
-          <p:nvPr/>
-        </p:nvSpPr>
-        <p:spPr>
-          <a:xfrm>
-            <a:off x="1280160" y="3840480"/>
-            <a:ext cx="2743200" cy="256032"/>
-          </a:xfrm>
-          <a:prstGeom prst="rect">
-            <a:avLst/>
-          </a:prstGeom>
-          <a:noFill/>
-          <a:ln/>
-        </p:spPr>
-        <p:txBody>
-          <a:bodyPr wrap="square" lIns="0" tIns="0" rIns="0" bIns="0" rtlCol="0" anchor="ctr"/>
-          <a:lstStyle/>
-          <a:p>
-            <a:pPr marL="0" indent="0">
-              <a:buNone/>
-            </a:pPr>
-            <a:r>
-              <a:rPr lang="en-US" sz="1600" b="1" dirty="0">
-                <a:solidFill>
-                  <a:srgbClr val="1A1A2E"/>
-                </a:solidFill>
-                <a:latin typeface="Arial Black" pitchFamily="34" charset="0"/>
-                <a:ea typeface="Arial Black" pitchFamily="34" charset="-122"/>
-                <a:cs typeface="Arial Black" pitchFamily="34" charset="-120"/>
+          </a:p>
+        </p:txBody>
+      </p:sp>
+      <p:sp>
+        <p:nvSpPr>
+          <p:cNvPr id="12" name="TextBox 11"/>
+          <p:cNvSpPr txBox="1"/>
+          <p:nvPr/>
+        </p:nvSpPr>
+        <p:spPr>
+          <a:xfrm>
+            <a:off x="1714500" y="3154679"/>
+            <a:ext cx="6858000" cy="411479"/>
+          </a:xfrm>
+          <a:prstGeom prst="rect">
+            <a:avLst/>
+          </a:prstGeom>
+          <a:noFill/>
+        </p:spPr>
+        <p:txBody>
+          <a:bodyPr wrap="square" lIns="34290" rIns="34290" tIns="13716" bIns="13716" anchor="ctr">
+            <a:spAutoFit/>
+          </a:bodyPr>
+          <a:lstStyle/>
+          <a:p>
+            <a:pPr algn="l"/>
+            <a:r>
+              <a:rPr sz="1950" b="1" i="0">
+                <a:solidFill>
+                  <a:srgbClr val="1E2761"/>
+                </a:solidFill>
+                <a:latin typeface="Arial Black"/>
               </a:rPr>
               <a:t>Client 整合機制</a:t>
             </a:r>
-            <a:endParaRPr lang="en-US" sz="1600" dirty="0"/>
-          </a:p>
-        </p:txBody>
-      </p:sp>
-      <p:sp>
-        <p:nvSpPr>
-          <p:cNvPr id="19" name="Text 17"/>
-          <p:cNvSpPr/>
-          <p:nvPr/>
-        </p:nvSpPr>
-        <p:spPr>
-          <a:xfrm>
-            <a:off x="1280160" y="4096512"/>
-            <a:ext cx="6400800" cy="228600"/>
-          </a:xfrm>
-          <a:prstGeom prst="rect">
-            <a:avLst/>
-          </a:prstGeom>
-          <a:noFill/>
-          <a:ln/>
-        </p:spPr>
-        <p:txBody>
-          <a:bodyPr wrap="square" lIns="0" tIns="0" rIns="0" bIns="0" rtlCol="0" anchor="ctr"/>
-          <a:lstStyle/>
-          <a:p>
-            <a:pPr marL="0" indent="0">
-              <a:buNone/>
-            </a:pPr>
-            <a:r>
-              <a:rPr lang="en-US" sz="1200" dirty="0">
-                <a:solidFill>
-                  <a:srgbClr val="8899AA"/>
-                </a:solidFill>
-                <a:latin typeface="Calibri" pitchFamily="34" charset="0"/>
-                <a:ea typeface="Calibri" pitchFamily="34" charset="-122"/>
-                <a:cs typeface="Calibri" pitchFamily="34" charset="-120"/>
+          </a:p>
+        </p:txBody>
+      </p:sp>
+      <p:sp>
+        <p:nvSpPr>
+          <p:cNvPr id="13" name="TextBox 12"/>
+          <p:cNvSpPr txBox="1"/>
+          <p:nvPr/>
+        </p:nvSpPr>
+        <p:spPr>
+          <a:xfrm>
+            <a:off x="1714500" y="3566159"/>
+            <a:ext cx="6858000" cy="342900"/>
+          </a:xfrm>
+          <a:prstGeom prst="rect">
+            <a:avLst/>
+          </a:prstGeom>
+          <a:noFill/>
+        </p:spPr>
+        <p:txBody>
+          <a:bodyPr wrap="square" lIns="34290" rIns="34290" tIns="13716" bIns="13716" anchor="ctr">
+            <a:spAutoFit/>
+          </a:bodyPr>
+          <a:lstStyle/>
+          <a:p>
+            <a:pPr algn="l"/>
+            <a:r>
+              <a:rPr sz="1200" b="0" i="0">
+                <a:solidFill>
+                  <a:srgbClr val="6B6B6B"/>
+                </a:solidFill>
+                <a:latin typeface="Calibri"/>
               </a:rPr>
               <a:t>工具清單如何注入 LLM 的 system prompt</a:t>
             </a:r>
-            <a:endParaRPr lang="en-US" sz="1200" dirty="0"/>
+          </a:p>
+        </p:txBody>
+      </p:sp>
+      <p:sp>
+        <p:nvSpPr>
+          <p:cNvPr id="14" name="TextBox 13"/>
+          <p:cNvSpPr txBox="1"/>
+          <p:nvPr/>
+        </p:nvSpPr>
+        <p:spPr>
+          <a:xfrm>
+            <a:off x="548640" y="4046220"/>
+            <a:ext cx="1028700" cy="480059"/>
+          </a:xfrm>
+          <a:prstGeom prst="rect">
+            <a:avLst/>
+          </a:prstGeom>
+          <a:noFill/>
+        </p:spPr>
+        <p:txBody>
+          <a:bodyPr wrap="square" lIns="34290" rIns="34290" tIns="13716" bIns="13716" anchor="ctr">
+            <a:spAutoFit/>
+          </a:bodyPr>
+          <a:lstStyle/>
+          <a:p>
+            <a:pPr algn="l"/>
+            <a:r>
+              <a:rPr sz="3150" b="1" i="0">
+                <a:solidFill>
+                  <a:srgbClr val="E8793A"/>
+                </a:solidFill>
+                <a:latin typeface="Arial Black"/>
+              </a:rPr>
+              <a:t>附錄</a:t>
+            </a:r>
+          </a:p>
+        </p:txBody>
+      </p:sp>
+      <p:sp>
+        <p:nvSpPr>
+          <p:cNvPr id="15" name="TextBox 14"/>
+          <p:cNvSpPr txBox="1"/>
+          <p:nvPr/>
+        </p:nvSpPr>
+        <p:spPr>
+          <a:xfrm>
+            <a:off x="1714500" y="4046220"/>
+            <a:ext cx="6858000" cy="411479"/>
+          </a:xfrm>
+          <a:prstGeom prst="rect">
+            <a:avLst/>
+          </a:prstGeom>
+          <a:noFill/>
+        </p:spPr>
+        <p:txBody>
+          <a:bodyPr wrap="square" lIns="34290" rIns="34290" tIns="13716" bIns="13716" anchor="ctr">
+            <a:spAutoFit/>
+          </a:bodyPr>
+          <a:lstStyle/>
+          <a:p>
+            <a:pPr algn="l"/>
+            <a:r>
+              <a:rPr sz="1950" b="1" i="0">
+                <a:solidFill>
+                  <a:srgbClr val="1E2761"/>
+                </a:solidFill>
+                <a:latin typeface="Arial Black"/>
+              </a:rPr>
+              <a:t>技術細節(時間夠就講,不夠就跳)</a:t>
+            </a:r>
+          </a:p>
+        </p:txBody>
+      </p:sp>
+      <p:sp>
+        <p:nvSpPr>
+          <p:cNvPr id="16" name="TextBox 15"/>
+          <p:cNvSpPr txBox="1"/>
+          <p:nvPr/>
+        </p:nvSpPr>
+        <p:spPr>
+          <a:xfrm>
+            <a:off x="1714500" y="4457699"/>
+            <a:ext cx="6858000" cy="342900"/>
+          </a:xfrm>
+          <a:prstGeom prst="rect">
+            <a:avLst/>
+          </a:prstGeom>
+          <a:noFill/>
+        </p:spPr>
+        <p:txBody>
+          <a:bodyPr wrap="square" lIns="34290" rIns="34290" tIns="13716" bIns="13716" anchor="ctr">
+            <a:spAutoFit/>
+          </a:bodyPr>
+          <a:lstStyle/>
+          <a:p>
+            <a:pPr algn="l"/>
+            <a:r>
+              <a:rPr sz="1200" b="0" i="0">
+                <a:solidFill>
+                  <a:srgbClr val="6B6B6B"/>
+                </a:solidFill>
+                <a:latin typeface="Calibri"/>
+              </a:rPr>
+              <a:t>REST vs JSON-RPC · JSON-RPC 三種訊息類型</a:t>
+            </a:r>
           </a:p>
         </p:txBody>
       </p:sp>
@@ -6959,598 +7763,540 @@
       </p:grpSpPr>
       <p:sp>
         <p:nvSpPr>
-          <p:cNvPr id="2" name="Shape 0"/>
+          <p:cNvPr id="2" name="Rectangle 1"/>
           <p:cNvSpPr/>
           <p:nvPr/>
         </p:nvSpPr>
         <p:spPr>
           <a:xfrm>
             <a:off x="0" y="0"/>
-            <a:ext cx="9144000" cy="54864"/>
+            <a:ext cx="9143771" cy="5143500"/>
           </a:xfrm>
           <a:prstGeom prst="rect">
             <a:avLst/>
           </a:prstGeom>
           <a:solidFill>
-            <a:srgbClr val="065A82"/>
+            <a:srgbClr val="FFFFFF"/>
           </a:solidFill>
-          <a:ln/>
-        </p:spPr>
-      </p:sp>
-      <p:sp>
-        <p:nvSpPr>
-          <p:cNvPr id="3" name="Text 1"/>
-          <p:cNvSpPr/>
-          <p:nvPr/>
-        </p:nvSpPr>
-        <p:spPr>
-          <a:xfrm>
-            <a:off x="640080" y="274320"/>
-            <a:ext cx="7863840" cy="548640"/>
-          </a:xfrm>
-          <a:prstGeom prst="rect">
-            <a:avLst/>
-          </a:prstGeom>
-          <a:noFill/>
-          <a:ln/>
-        </p:spPr>
-        <p:txBody>
-          <a:bodyPr wrap="square" lIns="0" tIns="0" rIns="0" bIns="0" rtlCol="0" anchor="ctr"/>
-          <a:lstStyle/>
-          <a:p>
-            <a:pPr marL="0" indent="0">
-              <a:buNone/>
-            </a:pPr>
-            <a:r>
-              <a:rPr lang="en-US" sz="2600" b="1" dirty="0">
-                <a:solidFill>
-                  <a:srgbClr val="1A1A2E"/>
-                </a:solidFill>
-                <a:latin typeface="Arial Black" pitchFamily="34" charset="0"/>
-                <a:ea typeface="Arial Black" pitchFamily="34" charset="-122"/>
-                <a:cs typeface="Arial Black" pitchFamily="34" charset="-120"/>
+          <a:ln>
+            <a:noFill/>
+          </a:ln>
+          <a:effectLst/>
+        </p:spPr>
+        <p:style>
+          <a:lnRef idx="1">
+            <a:schemeClr val="accent1"/>
+          </a:lnRef>
+          <a:fillRef idx="3">
+            <a:schemeClr val="accent1"/>
+          </a:fillRef>
+          <a:effectRef idx="2">
+            <a:schemeClr val="accent1"/>
+          </a:effectRef>
+          <a:fontRef idx="minor">
+            <a:schemeClr val="lt1"/>
+          </a:fontRef>
+        </p:style>
+        <p:txBody>
+          <a:bodyPr rtlCol="0" anchor="ctr"/>
+          <a:lstStyle/>
+          <a:p>
+            <a:pPr algn="ctr"/>
+          </a:p>
+        </p:txBody>
+      </p:sp>
+      <p:sp>
+        <p:nvSpPr>
+          <p:cNvPr id="3" name="TextBox 2"/>
+          <p:cNvSpPr txBox="1"/>
+          <p:nvPr/>
+        </p:nvSpPr>
+        <p:spPr>
+          <a:xfrm>
+            <a:off x="514350" y="342900"/>
+            <a:ext cx="8229600" cy="548640"/>
+          </a:xfrm>
+          <a:prstGeom prst="rect">
+            <a:avLst/>
+          </a:prstGeom>
+          <a:noFill/>
+        </p:spPr>
+        <p:txBody>
+          <a:bodyPr wrap="square" lIns="34290" rIns="34290" tIns="13716" bIns="13716" anchor="t">
+            <a:spAutoFit/>
+          </a:bodyPr>
+          <a:lstStyle/>
+          <a:p>
+            <a:pPr algn="l"/>
+            <a:r>
+              <a:rPr sz="2700" b="1" i="0">
+                <a:solidFill>
+                  <a:srgbClr val="1E2761"/>
+                </a:solidFill>
+                <a:latin typeface="Arial Black"/>
               </a:rPr>
               <a:t>本講重點回顧</a:t>
             </a:r>
-            <a:endParaRPr lang="en-US" sz="2600" dirty="0"/>
-          </a:p>
-        </p:txBody>
-      </p:sp>
-      <p:sp>
-        <p:nvSpPr>
-          <p:cNvPr id="4" name="Shape 2"/>
-          <p:cNvSpPr/>
-          <p:nvPr/>
-        </p:nvSpPr>
-        <p:spPr>
-          <a:xfrm>
-            <a:off x="640080" y="1051560"/>
-            <a:ext cx="457200" cy="457200"/>
+          </a:p>
+        </p:txBody>
+      </p:sp>
+      <p:sp>
+        <p:nvSpPr>
+          <p:cNvPr id="4" name="Rectangle 3"/>
+          <p:cNvSpPr/>
+          <p:nvPr/>
+        </p:nvSpPr>
+        <p:spPr>
+          <a:xfrm>
+            <a:off x="514350" y="960119"/>
+            <a:ext cx="2057400" cy="27432"/>
           </a:xfrm>
           <a:prstGeom prst="rect">
             <a:avLst/>
           </a:prstGeom>
           <a:solidFill>
-            <a:srgbClr val="065A82"/>
+            <a:srgbClr val="E8793A"/>
           </a:solidFill>
-          <a:ln/>
-          <a:effectLst>
-            <a:outerShdw blurRad="76200" dist="25400" dir="8100000" algn="bl" rotWithShape="0">
-              <a:srgbClr val="000000">
-                <a:alpha val="12000"/>
-              </a:srgbClr>
-            </a:outerShdw>
-          </a:effectLst>
-        </p:spPr>
-      </p:sp>
-      <p:sp>
-        <p:nvSpPr>
-          <p:cNvPr id="5" name="Text 3"/>
-          <p:cNvSpPr/>
-          <p:nvPr/>
-        </p:nvSpPr>
-        <p:spPr>
-          <a:xfrm>
-            <a:off x="640080" y="1051560"/>
-            <a:ext cx="457200" cy="457200"/>
-          </a:xfrm>
-          <a:prstGeom prst="rect">
-            <a:avLst/>
-          </a:prstGeom>
-          <a:noFill/>
-          <a:ln/>
-        </p:spPr>
-        <p:txBody>
-          <a:bodyPr wrap="square" lIns="0" tIns="0" rIns="0" bIns="0" rtlCol="0" anchor="ctr"/>
-          <a:lstStyle/>
-          <a:p>
-            <a:pPr marL="0" indent="0" algn="ctr">
-              <a:buNone/>
-            </a:pPr>
-            <a:r>
-              <a:rPr lang="en-US" sz="1600" b="1" dirty="0">
-                <a:solidFill>
-                  <a:srgbClr val="FFFFFF"/>
-                </a:solidFill>
-                <a:latin typeface="Arial Black" pitchFamily="34" charset="0"/>
-                <a:ea typeface="Arial Black" pitchFamily="34" charset="-122"/>
-                <a:cs typeface="Arial Black" pitchFamily="34" charset="-120"/>
+          <a:ln>
+            <a:noFill/>
+          </a:ln>
+          <a:effectLst/>
+        </p:spPr>
+        <p:style>
+          <a:lnRef idx="1">
+            <a:schemeClr val="accent1"/>
+          </a:lnRef>
+          <a:fillRef idx="3">
+            <a:schemeClr val="accent1"/>
+          </a:fillRef>
+          <a:effectRef idx="2">
+            <a:schemeClr val="accent1"/>
+          </a:effectRef>
+          <a:fontRef idx="minor">
+            <a:schemeClr val="lt1"/>
+          </a:fontRef>
+        </p:style>
+        <p:txBody>
+          <a:bodyPr rtlCol="0" anchor="ctr"/>
+          <a:lstStyle/>
+          <a:p>
+            <a:pPr algn="ctr"/>
+          </a:p>
+        </p:txBody>
+      </p:sp>
+      <p:sp>
+        <p:nvSpPr>
+          <p:cNvPr id="5" name="TextBox 4"/>
+          <p:cNvSpPr txBox="1"/>
+          <p:nvPr/>
+        </p:nvSpPr>
+        <p:spPr>
+          <a:xfrm>
+            <a:off x="617220" y="1371600"/>
+            <a:ext cx="548640" cy="342900"/>
+          </a:xfrm>
+          <a:prstGeom prst="rect">
+            <a:avLst/>
+          </a:prstGeom>
+          <a:noFill/>
+        </p:spPr>
+        <p:txBody>
+          <a:bodyPr wrap="square" lIns="34290" rIns="34290" tIns="13716" bIns="13716" anchor="ctr">
+            <a:spAutoFit/>
+          </a:bodyPr>
+          <a:lstStyle/>
+          <a:p>
+            <a:pPr algn="l"/>
+            <a:r>
+              <a:rPr sz="1800" b="1" i="0">
+                <a:solidFill>
+                  <a:srgbClr val="E8793A"/>
+                </a:solidFill>
+                <a:latin typeface="Arial Black"/>
               </a:rPr>
               <a:t>1</a:t>
             </a:r>
-            <a:endParaRPr lang="en-US" sz="1600" dirty="0"/>
-          </a:p>
-        </p:txBody>
-      </p:sp>
-      <p:sp>
-        <p:nvSpPr>
-          <p:cNvPr id="6" name="Text 4"/>
-          <p:cNvSpPr/>
-          <p:nvPr/>
-        </p:nvSpPr>
-        <p:spPr>
-          <a:xfrm>
-            <a:off x="1325880" y="1051560"/>
-            <a:ext cx="7178040" cy="457200"/>
-          </a:xfrm>
-          <a:prstGeom prst="rect">
-            <a:avLst/>
-          </a:prstGeom>
-          <a:noFill/>
-          <a:ln/>
-        </p:spPr>
-        <p:txBody>
-          <a:bodyPr wrap="square" lIns="0" tIns="0" rIns="0" bIns="0" rtlCol="0" anchor="ctr"/>
-          <a:lstStyle/>
-          <a:p>
-            <a:pPr marL="0" indent="0">
-              <a:buNone/>
-            </a:pPr>
-            <a:r>
-              <a:rPr lang="en-US" sz="1300" dirty="0">
-                <a:solidFill>
-                  <a:srgbClr val="1A1A2E"/>
-                </a:solidFill>
-                <a:latin typeface="Calibri" pitchFamily="34" charset="0"/>
-                <a:ea typeface="Calibri" pitchFamily="34" charset="-122"/>
-                <a:cs typeface="Calibri" pitchFamily="34" charset="-120"/>
-              </a:rPr>
-              <a:t>MCP 用 JSON-RPC 2.0 通訊 — 不綁 HTTP，支援 stdio / WebSocket</a:t>
-            </a:r>
-            <a:endParaRPr lang="en-US" sz="1300" dirty="0"/>
-          </a:p>
-        </p:txBody>
-      </p:sp>
-      <p:sp>
-        <p:nvSpPr>
-          <p:cNvPr id="7" name="Shape 5"/>
-          <p:cNvSpPr/>
-          <p:nvPr/>
-        </p:nvSpPr>
-        <p:spPr>
-          <a:xfrm>
-            <a:off x="640080" y="1737360"/>
-            <a:ext cx="457200" cy="457200"/>
-          </a:xfrm>
-          <a:prstGeom prst="rect">
-            <a:avLst/>
-          </a:prstGeom>
-          <a:solidFill>
-            <a:srgbClr val="065A82"/>
-          </a:solidFill>
-          <a:ln/>
-          <a:effectLst>
-            <a:outerShdw blurRad="76200" dist="25400" dir="8100000" algn="bl" rotWithShape="0">
-              <a:srgbClr val="000000">
-                <a:alpha val="12000"/>
-              </a:srgbClr>
-            </a:outerShdw>
-          </a:effectLst>
-        </p:spPr>
-      </p:sp>
-      <p:sp>
-        <p:nvSpPr>
-          <p:cNvPr id="8" name="Text 6"/>
-          <p:cNvSpPr/>
-          <p:nvPr/>
-        </p:nvSpPr>
-        <p:spPr>
-          <a:xfrm>
-            <a:off x="640080" y="1737360"/>
-            <a:ext cx="457200" cy="457200"/>
-          </a:xfrm>
-          <a:prstGeom prst="rect">
-            <a:avLst/>
-          </a:prstGeom>
-          <a:noFill/>
-          <a:ln/>
-        </p:spPr>
-        <p:txBody>
-          <a:bodyPr wrap="square" lIns="0" tIns="0" rIns="0" bIns="0" rtlCol="0" anchor="ctr"/>
-          <a:lstStyle/>
-          <a:p>
-            <a:pPr marL="0" indent="0" algn="ctr">
-              <a:buNone/>
-            </a:pPr>
-            <a:r>
-              <a:rPr lang="en-US" sz="1600" b="1" dirty="0">
-                <a:solidFill>
-                  <a:srgbClr val="FFFFFF"/>
-                </a:solidFill>
-                <a:latin typeface="Arial Black" pitchFamily="34" charset="0"/>
-                <a:ea typeface="Arial Black" pitchFamily="34" charset="-122"/>
-                <a:cs typeface="Arial Black" pitchFamily="34" charset="-120"/>
+          </a:p>
+        </p:txBody>
+      </p:sp>
+      <p:sp>
+        <p:nvSpPr>
+          <p:cNvPr id="6" name="TextBox 5"/>
+          <p:cNvSpPr txBox="1"/>
+          <p:nvPr/>
+        </p:nvSpPr>
+        <p:spPr>
+          <a:xfrm>
+            <a:off x="1234440" y="1371600"/>
+            <a:ext cx="7749540" cy="342900"/>
+          </a:xfrm>
+          <a:prstGeom prst="rect">
+            <a:avLst/>
+          </a:prstGeom>
+          <a:noFill/>
+        </p:spPr>
+        <p:txBody>
+          <a:bodyPr wrap="square" lIns="34290" rIns="34290" tIns="13716" bIns="13716" anchor="ctr">
+            <a:spAutoFit/>
+          </a:bodyPr>
+          <a:lstStyle/>
+          <a:p>
+            <a:pPr algn="l"/>
+            <a:r>
+              <a:rPr sz="1350" b="0" i="0">
+                <a:solidFill>
+                  <a:srgbClr val="1A1A1A"/>
+                </a:solidFill>
+                <a:latin typeface="Calibri"/>
+              </a:rPr>
+              <a:t>MCP 把 LLM ⇄ 工具的通訊抽出來,變成 Parent / Child 兩個 process 之間的雙向管道</a:t>
+            </a:r>
+          </a:p>
+        </p:txBody>
+      </p:sp>
+      <p:sp>
+        <p:nvSpPr>
+          <p:cNvPr id="7" name="TextBox 6"/>
+          <p:cNvSpPr txBox="1"/>
+          <p:nvPr/>
+        </p:nvSpPr>
+        <p:spPr>
+          <a:xfrm>
+            <a:off x="617220" y="1954530"/>
+            <a:ext cx="548640" cy="342900"/>
+          </a:xfrm>
+          <a:prstGeom prst="rect">
+            <a:avLst/>
+          </a:prstGeom>
+          <a:noFill/>
+        </p:spPr>
+        <p:txBody>
+          <a:bodyPr wrap="square" lIns="34290" rIns="34290" tIns="13716" bIns="13716" anchor="ctr">
+            <a:spAutoFit/>
+          </a:bodyPr>
+          <a:lstStyle/>
+          <a:p>
+            <a:pPr algn="l"/>
+            <a:r>
+              <a:rPr sz="1800" b="1" i="0">
+                <a:solidFill>
+                  <a:srgbClr val="E8793A"/>
+                </a:solidFill>
+                <a:latin typeface="Arial Black"/>
               </a:rPr>
               <a:t>2</a:t>
             </a:r>
-            <a:endParaRPr lang="en-US" sz="1600" dirty="0"/>
-          </a:p>
-        </p:txBody>
-      </p:sp>
-      <p:sp>
-        <p:nvSpPr>
-          <p:cNvPr id="9" name="Text 7"/>
-          <p:cNvSpPr/>
-          <p:nvPr/>
-        </p:nvSpPr>
-        <p:spPr>
-          <a:xfrm>
-            <a:off x="1325880" y="1737360"/>
-            <a:ext cx="7178040" cy="457200"/>
-          </a:xfrm>
-          <a:prstGeom prst="rect">
-            <a:avLst/>
-          </a:prstGeom>
-          <a:noFill/>
-          <a:ln/>
-        </p:spPr>
-        <p:txBody>
-          <a:bodyPr wrap="square" lIns="0" tIns="0" rIns="0" bIns="0" rtlCol="0" anchor="ctr"/>
-          <a:lstStyle/>
-          <a:p>
-            <a:pPr marL="0" indent="0">
-              <a:buNone/>
-            </a:pPr>
-            <a:r>
-              <a:rPr lang="en-US" sz="1300" dirty="0">
-                <a:solidFill>
-                  <a:srgbClr val="1A1A2E"/>
-                </a:solidFill>
-                <a:latin typeface="Calibri" pitchFamily="34" charset="0"/>
-                <a:ea typeface="Calibri" pitchFamily="34" charset="-122"/>
-                <a:cs typeface="Calibri" pitchFamily="34" charset="-120"/>
-              </a:rPr>
-              <a:t>Server 生命週期四階段：spawn → initialize → ready → shutdown</a:t>
-            </a:r>
-            <a:endParaRPr lang="en-US" sz="1300" dirty="0"/>
-          </a:p>
-        </p:txBody>
-      </p:sp>
-      <p:sp>
-        <p:nvSpPr>
-          <p:cNvPr id="10" name="Shape 8"/>
-          <p:cNvSpPr/>
-          <p:nvPr/>
-        </p:nvSpPr>
-        <p:spPr>
-          <a:xfrm>
-            <a:off x="640080" y="2423160"/>
-            <a:ext cx="457200" cy="457200"/>
-          </a:xfrm>
-          <a:prstGeom prst="rect">
-            <a:avLst/>
-          </a:prstGeom>
-          <a:solidFill>
-            <a:srgbClr val="065A82"/>
-          </a:solidFill>
-          <a:ln/>
-          <a:effectLst>
-            <a:outerShdw blurRad="76200" dist="25400" dir="8100000" algn="bl" rotWithShape="0">
-              <a:srgbClr val="000000">
-                <a:alpha val="12000"/>
-              </a:srgbClr>
-            </a:outerShdw>
-          </a:effectLst>
-        </p:spPr>
-      </p:sp>
-      <p:sp>
-        <p:nvSpPr>
-          <p:cNvPr id="11" name="Text 9"/>
-          <p:cNvSpPr/>
-          <p:nvPr/>
-        </p:nvSpPr>
-        <p:spPr>
-          <a:xfrm>
-            <a:off x="640080" y="2423160"/>
-            <a:ext cx="457200" cy="457200"/>
-          </a:xfrm>
-          <a:prstGeom prst="rect">
-            <a:avLst/>
-          </a:prstGeom>
-          <a:noFill/>
-          <a:ln/>
-        </p:spPr>
-        <p:txBody>
-          <a:bodyPr wrap="square" lIns="0" tIns="0" rIns="0" bIns="0" rtlCol="0" anchor="ctr"/>
-          <a:lstStyle/>
-          <a:p>
-            <a:pPr marL="0" indent="0" algn="ctr">
-              <a:buNone/>
-            </a:pPr>
-            <a:r>
-              <a:rPr lang="en-US" sz="1600" b="1" dirty="0">
-                <a:solidFill>
-                  <a:srgbClr val="FFFFFF"/>
-                </a:solidFill>
-                <a:latin typeface="Arial Black" pitchFamily="34" charset="0"/>
-                <a:ea typeface="Arial Black" pitchFamily="34" charset="-122"/>
-                <a:cs typeface="Arial Black" pitchFamily="34" charset="-120"/>
+          </a:p>
+        </p:txBody>
+      </p:sp>
+      <p:sp>
+        <p:nvSpPr>
+          <p:cNvPr id="8" name="TextBox 7"/>
+          <p:cNvSpPr txBox="1"/>
+          <p:nvPr/>
+        </p:nvSpPr>
+        <p:spPr>
+          <a:xfrm>
+            <a:off x="1234440" y="1954530"/>
+            <a:ext cx="7749540" cy="342900"/>
+          </a:xfrm>
+          <a:prstGeom prst="rect">
+            <a:avLst/>
+          </a:prstGeom>
+          <a:noFill/>
+        </p:spPr>
+        <p:txBody>
+          <a:bodyPr wrap="square" lIns="34290" rIns="34290" tIns="13716" bIns="13716" anchor="ctr">
+            <a:spAutoFit/>
+          </a:bodyPr>
+          <a:lstStyle/>
+          <a:p>
+            <a:pPr algn="l"/>
+            <a:r>
+              <a:rPr sz="1350" b="0" i="0">
+                <a:solidFill>
+                  <a:srgbClr val="1A1A1A"/>
+                </a:solidFill>
+                <a:latin typeface="Calibri"/>
+              </a:rPr>
+              <a:t>兩階段握手:① 互換能力 → ② 拿到工具清單;兩步都過才算真的連上</a:t>
+            </a:r>
+          </a:p>
+        </p:txBody>
+      </p:sp>
+      <p:sp>
+        <p:nvSpPr>
+          <p:cNvPr id="9" name="TextBox 8"/>
+          <p:cNvSpPr txBox="1"/>
+          <p:nvPr/>
+        </p:nvSpPr>
+        <p:spPr>
+          <a:xfrm>
+            <a:off x="617220" y="2537460"/>
+            <a:ext cx="548640" cy="342900"/>
+          </a:xfrm>
+          <a:prstGeom prst="rect">
+            <a:avLst/>
+          </a:prstGeom>
+          <a:noFill/>
+        </p:spPr>
+        <p:txBody>
+          <a:bodyPr wrap="square" lIns="34290" rIns="34290" tIns="13716" bIns="13716" anchor="ctr">
+            <a:spAutoFit/>
+          </a:bodyPr>
+          <a:lstStyle/>
+          <a:p>
+            <a:pPr algn="l"/>
+            <a:r>
+              <a:rPr sz="1800" b="1" i="0">
+                <a:solidFill>
+                  <a:srgbClr val="E8793A"/>
+                </a:solidFill>
+                <a:latin typeface="Arial Black"/>
               </a:rPr>
               <a:t>3</a:t>
             </a:r>
-            <a:endParaRPr lang="en-US" sz="1600" dirty="0"/>
-          </a:p>
-        </p:txBody>
-      </p:sp>
-      <p:sp>
-        <p:nvSpPr>
-          <p:cNvPr id="12" name="Text 10"/>
-          <p:cNvSpPr/>
-          <p:nvPr/>
-        </p:nvSpPr>
-        <p:spPr>
-          <a:xfrm>
-            <a:off x="1325880" y="2423160"/>
-            <a:ext cx="7178040" cy="457200"/>
-          </a:xfrm>
-          <a:prstGeom prst="rect">
-            <a:avLst/>
-          </a:prstGeom>
-          <a:noFill/>
-          <a:ln/>
-        </p:spPr>
-        <p:txBody>
-          <a:bodyPr wrap="square" lIns="0" tIns="0" rIns="0" bIns="0" rtlCol="0" anchor="ctr"/>
-          <a:lstStyle/>
-          <a:p>
-            <a:pPr marL="0" indent="0">
-              <a:buNone/>
-            </a:pPr>
-            <a:r>
-              <a:rPr lang="en-US" sz="1300" dirty="0">
-                <a:solidFill>
-                  <a:srgbClr val="1A1A2E"/>
-                </a:solidFill>
-                <a:latin typeface="Calibri" pitchFamily="34" charset="0"/>
-                <a:ea typeface="Calibri" pitchFamily="34" charset="-122"/>
-                <a:cs typeface="Calibri" pitchFamily="34" charset="-120"/>
-              </a:rPr>
-              <a:t>每個 Tool 由 name / description / inputSchema 三個欄位定義</a:t>
-            </a:r>
-            <a:endParaRPr lang="en-US" sz="1300" dirty="0"/>
-          </a:p>
-        </p:txBody>
-      </p:sp>
-      <p:sp>
-        <p:nvSpPr>
-          <p:cNvPr id="13" name="Shape 11"/>
-          <p:cNvSpPr/>
-          <p:nvPr/>
-        </p:nvSpPr>
-        <p:spPr>
-          <a:xfrm>
-            <a:off x="640080" y="3108960"/>
-            <a:ext cx="457200" cy="457200"/>
-          </a:xfrm>
-          <a:prstGeom prst="rect">
-            <a:avLst/>
-          </a:prstGeom>
-          <a:solidFill>
-            <a:srgbClr val="065A82"/>
-          </a:solidFill>
-          <a:ln/>
-          <a:effectLst>
-            <a:outerShdw blurRad="76200" dist="25400" dir="8100000" algn="bl" rotWithShape="0">
-              <a:srgbClr val="000000">
-                <a:alpha val="12000"/>
-              </a:srgbClr>
-            </a:outerShdw>
-          </a:effectLst>
-        </p:spPr>
-      </p:sp>
-      <p:sp>
-        <p:nvSpPr>
-          <p:cNvPr id="14" name="Text 12"/>
-          <p:cNvSpPr/>
-          <p:nvPr/>
-        </p:nvSpPr>
-        <p:spPr>
-          <a:xfrm>
-            <a:off x="640080" y="3108960"/>
-            <a:ext cx="457200" cy="457200"/>
-          </a:xfrm>
-          <a:prstGeom prst="rect">
-            <a:avLst/>
-          </a:prstGeom>
-          <a:noFill/>
-          <a:ln/>
-        </p:spPr>
-        <p:txBody>
-          <a:bodyPr wrap="square" lIns="0" tIns="0" rIns="0" bIns="0" rtlCol="0" anchor="ctr"/>
-          <a:lstStyle/>
-          <a:p>
-            <a:pPr marL="0" indent="0" algn="ctr">
-              <a:buNone/>
-            </a:pPr>
-            <a:r>
-              <a:rPr lang="en-US" sz="1600" b="1" dirty="0">
-                <a:solidFill>
-                  <a:srgbClr val="FFFFFF"/>
-                </a:solidFill>
-                <a:latin typeface="Arial Black" pitchFamily="34" charset="0"/>
-                <a:ea typeface="Arial Black" pitchFamily="34" charset="-122"/>
-                <a:cs typeface="Arial Black" pitchFamily="34" charset="-120"/>
+          </a:p>
+        </p:txBody>
+      </p:sp>
+      <p:sp>
+        <p:nvSpPr>
+          <p:cNvPr id="10" name="TextBox 9"/>
+          <p:cNvSpPr txBox="1"/>
+          <p:nvPr/>
+        </p:nvSpPr>
+        <p:spPr>
+          <a:xfrm>
+            <a:off x="1234440" y="2537460"/>
+            <a:ext cx="7749540" cy="342900"/>
+          </a:xfrm>
+          <a:prstGeom prst="rect">
+            <a:avLst/>
+          </a:prstGeom>
+          <a:noFill/>
+        </p:spPr>
+        <p:txBody>
+          <a:bodyPr wrap="square" lIns="34290" rIns="34290" tIns="13716" bIns="13716" anchor="ctr">
+            <a:spAutoFit/>
+          </a:bodyPr>
+          <a:lstStyle/>
+          <a:p>
+            <a:pPr algn="l"/>
+            <a:r>
+              <a:rPr sz="1350" b="0" i="0">
+                <a:solidFill>
+                  <a:srgbClr val="1A1A1A"/>
+                </a:solidFill>
+                <a:latin typeface="Calibri"/>
+              </a:rPr>
+              <a:t>工具呼叫:LLM 決定 → token 飛去 Child → Child 執行 → 結果飛回 → 找到對應請求回給使用者</a:t>
+            </a:r>
+          </a:p>
+        </p:txBody>
+      </p:sp>
+      <p:sp>
+        <p:nvSpPr>
+          <p:cNvPr id="11" name="TextBox 10"/>
+          <p:cNvSpPr txBox="1"/>
+          <p:nvPr/>
+        </p:nvSpPr>
+        <p:spPr>
+          <a:xfrm>
+            <a:off x="617220" y="3120389"/>
+            <a:ext cx="548640" cy="342900"/>
+          </a:xfrm>
+          <a:prstGeom prst="rect">
+            <a:avLst/>
+          </a:prstGeom>
+          <a:noFill/>
+        </p:spPr>
+        <p:txBody>
+          <a:bodyPr wrap="square" lIns="34290" rIns="34290" tIns="13716" bIns="13716" anchor="ctr">
+            <a:spAutoFit/>
+          </a:bodyPr>
+          <a:lstStyle/>
+          <a:p>
+            <a:pPr algn="l"/>
+            <a:r>
+              <a:rPr sz="1800" b="1" i="0">
+                <a:solidFill>
+                  <a:srgbClr val="E8793A"/>
+                </a:solidFill>
+                <a:latin typeface="Arial Black"/>
               </a:rPr>
               <a:t>4</a:t>
             </a:r>
-            <a:endParaRPr lang="en-US" sz="1600" dirty="0"/>
-          </a:p>
-        </p:txBody>
-      </p:sp>
-      <p:sp>
-        <p:nvSpPr>
-          <p:cNvPr id="15" name="Text 13"/>
-          <p:cNvSpPr/>
-          <p:nvPr/>
-        </p:nvSpPr>
-        <p:spPr>
-          <a:xfrm>
-            <a:off x="1325880" y="3108960"/>
-            <a:ext cx="7178040" cy="457200"/>
-          </a:xfrm>
-          <a:prstGeom prst="rect">
-            <a:avLst/>
-          </a:prstGeom>
-          <a:noFill/>
-          <a:ln/>
-        </p:spPr>
-        <p:txBody>
-          <a:bodyPr wrap="square" lIns="0" tIns="0" rIns="0" bIns="0" rtlCol="0" anchor="ctr"/>
-          <a:lstStyle/>
-          <a:p>
-            <a:pPr marL="0" indent="0">
-              <a:buNone/>
-            </a:pPr>
-            <a:r>
-              <a:rPr lang="en-US" sz="1300" dirty="0">
-                <a:solidFill>
-                  <a:srgbClr val="1A1A2E"/>
-                </a:solidFill>
-                <a:latin typeface="Calibri" pitchFamily="34" charset="0"/>
-                <a:ea typeface="Calibri" pitchFamily="34" charset="-122"/>
-                <a:cs typeface="Calibri" pitchFamily="34" charset="-120"/>
-              </a:rPr>
-              <a:t>description 的品質直接決定 LLM 能否正確選用工具</a:t>
-            </a:r>
-            <a:endParaRPr lang="en-US" sz="1300" dirty="0"/>
-          </a:p>
-        </p:txBody>
-      </p:sp>
-      <p:sp>
-        <p:nvSpPr>
-          <p:cNvPr id="16" name="Shape 14"/>
-          <p:cNvSpPr/>
-          <p:nvPr/>
-        </p:nvSpPr>
-        <p:spPr>
-          <a:xfrm>
-            <a:off x="640080" y="3794760"/>
-            <a:ext cx="457200" cy="457200"/>
-          </a:xfrm>
-          <a:prstGeom prst="rect">
-            <a:avLst/>
-          </a:prstGeom>
-          <a:solidFill>
-            <a:srgbClr val="065A82"/>
-          </a:solidFill>
-          <a:ln/>
-          <a:effectLst>
-            <a:outerShdw blurRad="76200" dist="25400" dir="8100000" algn="bl" rotWithShape="0">
-              <a:srgbClr val="000000">
-                <a:alpha val="12000"/>
-              </a:srgbClr>
-            </a:outerShdw>
-          </a:effectLst>
-        </p:spPr>
-      </p:sp>
-      <p:sp>
-        <p:nvSpPr>
-          <p:cNvPr id="17" name="Text 15"/>
-          <p:cNvSpPr/>
-          <p:nvPr/>
-        </p:nvSpPr>
-        <p:spPr>
-          <a:xfrm>
-            <a:off x="640080" y="3794760"/>
-            <a:ext cx="457200" cy="457200"/>
-          </a:xfrm>
-          <a:prstGeom prst="rect">
-            <a:avLst/>
-          </a:prstGeom>
-          <a:noFill/>
-          <a:ln/>
-        </p:spPr>
-        <p:txBody>
-          <a:bodyPr wrap="square" lIns="0" tIns="0" rIns="0" bIns="0" rtlCol="0" anchor="ctr"/>
-          <a:lstStyle/>
-          <a:p>
-            <a:pPr marL="0" indent="0" algn="ctr">
-              <a:buNone/>
-            </a:pPr>
-            <a:r>
-              <a:rPr lang="en-US" sz="1600" b="1" dirty="0">
-                <a:solidFill>
-                  <a:srgbClr val="FFFFFF"/>
-                </a:solidFill>
-                <a:latin typeface="Arial Black" pitchFamily="34" charset="0"/>
-                <a:ea typeface="Arial Black" pitchFamily="34" charset="-122"/>
-                <a:cs typeface="Arial Black" pitchFamily="34" charset="-120"/>
+          </a:p>
+        </p:txBody>
+      </p:sp>
+      <p:sp>
+        <p:nvSpPr>
+          <p:cNvPr id="12" name="TextBox 11"/>
+          <p:cNvSpPr txBox="1"/>
+          <p:nvPr/>
+        </p:nvSpPr>
+        <p:spPr>
+          <a:xfrm>
+            <a:off x="1234440" y="3120389"/>
+            <a:ext cx="7749540" cy="342900"/>
+          </a:xfrm>
+          <a:prstGeom prst="rect">
+            <a:avLst/>
+          </a:prstGeom>
+          <a:noFill/>
+        </p:spPr>
+        <p:txBody>
+          <a:bodyPr wrap="square" lIns="34290" rIns="34290" tIns="13716" bIns="13716" anchor="ctr">
+            <a:spAutoFit/>
+          </a:bodyPr>
+          <a:lstStyle/>
+          <a:p>
+            <a:pPr algn="l"/>
+            <a:r>
+              <a:rPr sz="1350" b="0" i="0">
+                <a:solidFill>
+                  <a:srgbClr val="1A1A1A"/>
+                </a:solidFill>
+                <a:latin typeface="Calibri"/>
+              </a:rPr>
+              <a:t>每個工具由 name / description / inputSchema 三個欄位定義;description 的品質直接決定 LLM 選不選得對</a:t>
+            </a:r>
+          </a:p>
+        </p:txBody>
+      </p:sp>
+      <p:sp>
+        <p:nvSpPr>
+          <p:cNvPr id="13" name="TextBox 12"/>
+          <p:cNvSpPr txBox="1"/>
+          <p:nvPr/>
+        </p:nvSpPr>
+        <p:spPr>
+          <a:xfrm>
+            <a:off x="617220" y="3703320"/>
+            <a:ext cx="548640" cy="342900"/>
+          </a:xfrm>
+          <a:prstGeom prst="rect">
+            <a:avLst/>
+          </a:prstGeom>
+          <a:noFill/>
+        </p:spPr>
+        <p:txBody>
+          <a:bodyPr wrap="square" lIns="34290" rIns="34290" tIns="13716" bIns="13716" anchor="ctr">
+            <a:spAutoFit/>
+          </a:bodyPr>
+          <a:lstStyle/>
+          <a:p>
+            <a:pPr algn="l"/>
+            <a:r>
+              <a:rPr sz="1800" b="1" i="0">
+                <a:solidFill>
+                  <a:srgbClr val="E8793A"/>
+                </a:solidFill>
+                <a:latin typeface="Arial Black"/>
               </a:rPr>
               <a:t>5</a:t>
             </a:r>
-            <a:endParaRPr lang="en-US" sz="1600" dirty="0"/>
-          </a:p>
-        </p:txBody>
-      </p:sp>
-      <p:sp>
-        <p:nvSpPr>
-          <p:cNvPr id="18" name="Text 16"/>
-          <p:cNvSpPr/>
-          <p:nvPr/>
-        </p:nvSpPr>
-        <p:spPr>
-          <a:xfrm>
-            <a:off x="1325880" y="3794760"/>
-            <a:ext cx="7178040" cy="457200"/>
-          </a:xfrm>
-          <a:prstGeom prst="rect">
-            <a:avLst/>
-          </a:prstGeom>
-          <a:noFill/>
-          <a:ln/>
-        </p:spPr>
-        <p:txBody>
-          <a:bodyPr wrap="square" lIns="0" tIns="0" rIns="0" bIns="0" rtlCol="0" anchor="ctr"/>
-          <a:lstStyle/>
-          <a:p>
-            <a:pPr marL="0" indent="0">
-              <a:buNone/>
-            </a:pPr>
-            <a:r>
-              <a:rPr lang="en-US" sz="1300" dirty="0">
-                <a:solidFill>
-                  <a:srgbClr val="1A1A2E"/>
-                </a:solidFill>
-                <a:latin typeface="Calibri" pitchFamily="34" charset="0"/>
-                <a:ea typeface="Calibri" pitchFamily="34" charset="-122"/>
-                <a:cs typeface="Calibri" pitchFamily="34" charset="-120"/>
-              </a:rPr>
-              <a:t>Client 把所有工具定義轉換後注入 LLM API 的 tools 參數</a:t>
-            </a:r>
-            <a:endParaRPr lang="en-US" sz="1300" dirty="0"/>
-          </a:p>
-        </p:txBody>
-      </p:sp>
-      <p:sp>
-        <p:nvSpPr>
-          <p:cNvPr id="19" name="Shape 17"/>
-          <p:cNvSpPr/>
-          <p:nvPr/>
-        </p:nvSpPr>
-        <p:spPr>
-          <a:xfrm>
-            <a:off x="640080" y="4160520"/>
-            <a:ext cx="7863840" cy="502920"/>
+          </a:p>
+        </p:txBody>
+      </p:sp>
+      <p:sp>
+        <p:nvSpPr>
+          <p:cNvPr id="14" name="TextBox 13"/>
+          <p:cNvSpPr txBox="1"/>
+          <p:nvPr/>
+        </p:nvSpPr>
+        <p:spPr>
+          <a:xfrm>
+            <a:off x="1234440" y="3703320"/>
+            <a:ext cx="7749540" cy="342900"/>
+          </a:xfrm>
+          <a:prstGeom prst="rect">
+            <a:avLst/>
+          </a:prstGeom>
+          <a:noFill/>
+        </p:spPr>
+        <p:txBody>
+          <a:bodyPr wrap="square" lIns="34290" rIns="34290" tIns="13716" bIns="13716" anchor="ctr">
+            <a:spAutoFit/>
+          </a:bodyPr>
+          <a:lstStyle/>
+          <a:p>
+            <a:pPr algn="l"/>
+            <a:r>
+              <a:rPr sz="1350" b="0" i="0">
+                <a:solidFill>
+                  <a:srgbClr val="1A1A1A"/>
+                </a:solidFill>
+                <a:latin typeface="Calibri"/>
+              </a:rPr>
+              <a:t>Client 把所有工具定義轉換後,注入 LLM API 的 tools 參數 — LLM 只看得到 name + description + inputSchema</a:t>
+            </a:r>
+          </a:p>
+        </p:txBody>
+      </p:sp>
+      <p:sp>
+        <p:nvSpPr>
+          <p:cNvPr id="15" name="TextBox 14"/>
+          <p:cNvSpPr txBox="1"/>
+          <p:nvPr/>
+        </p:nvSpPr>
+        <p:spPr>
+          <a:xfrm>
+            <a:off x="514350" y="4663440"/>
+            <a:ext cx="8229600" cy="274320"/>
+          </a:xfrm>
+          <a:prstGeom prst="rect">
+            <a:avLst/>
+          </a:prstGeom>
+          <a:noFill/>
+        </p:spPr>
+        <p:txBody>
+          <a:bodyPr wrap="square" lIns="34290" rIns="34290" tIns="13716" bIns="13716" anchor="t">
+            <a:spAutoFit/>
+          </a:bodyPr>
+          <a:lstStyle/>
+          <a:p>
+            <a:pPr algn="l"/>
+            <a:r>
+              <a:rPr sz="1200" b="0" i="1">
+                <a:solidFill>
+                  <a:srgbClr val="1C7293"/>
+                </a:solidFill>
+                <a:latin typeface="Calibri"/>
+              </a:rPr>
+              <a:t>下一講預告:Agentic Tool Loop — LLM 怎麼自主決定該呼叫哪個工具</a:t>
+            </a:r>
+          </a:p>
+        </p:txBody>
+      </p:sp>
+    </p:spTree>
+  </p:cSld>
+  <p:clrMapOvr>
+    <a:masterClrMapping/>
+  </p:clrMapOvr>
+</p:sld>
+</file>
+
+<file path=ppt/slides/slide21.xml><?xml version="1.0" encoding="utf-8"?>
+<p:sld xmlns:a="http://schemas.openxmlformats.org/drawingml/2006/main" xmlns:p="http://schemas.openxmlformats.org/presentationml/2006/main" xmlns:r="http://schemas.openxmlformats.org/officeDocument/2006/relationships">
+  <p:cSld>
+    <p:spTree>
+      <p:nvGrpSpPr>
+        <p:cNvPr id="1" name=""/>
+        <p:cNvGrpSpPr/>
+        <p:nvPr/>
+      </p:nvGrpSpPr>
+      <p:grpSpPr/>
+      <p:sp>
+        <p:nvSpPr>
+          <p:cNvPr id="2" name="Rectangle 1"/>
+          <p:cNvSpPr/>
+          <p:nvPr/>
+        </p:nvSpPr>
+        <p:spPr>
+          <a:xfrm>
+            <a:off x="0" y="0"/>
+            <a:ext cx="9144000" cy="5143500"/>
           </a:xfrm>
           <a:prstGeom prst="rect">
             <a:avLst/>
@@ -7558,52 +8304,4196 @@
           <a:solidFill>
             <a:srgbClr val="1E2761"/>
           </a:solidFill>
-          <a:ln/>
-          <a:effectLst>
-            <a:outerShdw blurRad="76200" dist="25400" dir="8100000" algn="bl" rotWithShape="0">
-              <a:srgbClr val="000000">
-                <a:alpha val="12000"/>
-              </a:srgbClr>
-            </a:outerShdw>
-          </a:effectLst>
-        </p:spPr>
-      </p:sp>
-      <p:sp>
-        <p:nvSpPr>
-          <p:cNvPr id="20" name="Text 18"/>
-          <p:cNvSpPr/>
-          <p:nvPr/>
-        </p:nvSpPr>
-        <p:spPr>
-          <a:xfrm>
-            <a:off x="914400" y="4160520"/>
-            <a:ext cx="7315200" cy="502920"/>
-          </a:xfrm>
-          <a:prstGeom prst="rect">
-            <a:avLst/>
-          </a:prstGeom>
-          <a:noFill/>
-          <a:ln/>
-        </p:spPr>
-        <p:txBody>
-          <a:bodyPr wrap="square" lIns="0" tIns="0" rIns="0" bIns="0" rtlCol="0" anchor="ctr"/>
-          <a:lstStyle/>
-          <a:p>
-            <a:pPr marL="0" indent="0">
-              <a:buNone/>
-            </a:pPr>
-            <a:r>
-              <a:rPr lang="en-US" sz="1300" b="1" dirty="0">
-                <a:solidFill>
-                  <a:srgbClr val="CADCFC"/>
-                </a:solidFill>
-                <a:latin typeface="Calibri" pitchFamily="34" charset="0"/>
-                <a:ea typeface="Calibri" pitchFamily="34" charset="-122"/>
-                <a:cs typeface="Calibri" pitchFamily="34" charset="-120"/>
-              </a:rPr>
-              <a:t>下一講預告：Agentic Tool Loop — 讓 AI 自己決定用什麼工具、用幾次</a:t>
-            </a:r>
-            <a:endParaRPr lang="en-US" sz="1300" dirty="0"/>
+          <a:ln>
+            <a:noFill/>
+          </a:ln>
+        </p:spPr>
+        <p:style>
+          <a:lnRef idx="1">
+            <a:schemeClr val="accent1"/>
+          </a:lnRef>
+          <a:fillRef idx="3">
+            <a:schemeClr val="accent1"/>
+          </a:fillRef>
+          <a:effectRef idx="2">
+            <a:schemeClr val="accent1"/>
+          </a:effectRef>
+          <a:fontRef idx="minor">
+            <a:schemeClr val="lt1"/>
+          </a:fontRef>
+        </p:style>
+        <p:txBody>
+          <a:bodyPr rtlCol="0" anchor="ctr"/>
+          <a:lstStyle/>
+          <a:p>
+            <a:pPr algn="ctr"/>
+          </a:p>
+        </p:txBody>
+      </p:sp>
+      <p:sp>
+        <p:nvSpPr>
+          <p:cNvPr id="3" name="TextBox 2"/>
+          <p:cNvSpPr txBox="1"/>
+          <p:nvPr/>
+        </p:nvSpPr>
+        <p:spPr>
+          <a:xfrm>
+            <a:off x="514350" y="1028700"/>
+            <a:ext cx="2743200" cy="3086100"/>
+          </a:xfrm>
+          <a:prstGeom prst="rect">
+            <a:avLst/>
+          </a:prstGeom>
+          <a:noFill/>
+        </p:spPr>
+        <p:txBody>
+          <a:bodyPr wrap="square" lIns="34290" rIns="34290" tIns="13716" bIns="13716" anchor="ctr">
+            <a:spAutoFit/>
+          </a:bodyPr>
+          <a:lstStyle/>
+          <a:p>
+            <a:pPr algn="l"/>
+            <a:r>
+              <a:rPr sz="18000" b="1" i="0">
+                <a:solidFill>
+                  <a:srgbClr val="E8793A"/>
+                </a:solidFill>
+                <a:latin typeface="Arial Black"/>
+              </a:rPr>
+              <a:t>01</a:t>
+            </a:r>
+          </a:p>
+        </p:txBody>
+      </p:sp>
+      <p:sp>
+        <p:nvSpPr>
+          <p:cNvPr id="4" name="TextBox 3"/>
+          <p:cNvSpPr txBox="1"/>
+          <p:nvPr/>
+        </p:nvSpPr>
+        <p:spPr>
+          <a:xfrm>
+            <a:off x="3771900" y="1920239"/>
+            <a:ext cx="5143500" cy="1028700"/>
+          </a:xfrm>
+          <a:prstGeom prst="rect">
+            <a:avLst/>
+          </a:prstGeom>
+          <a:noFill/>
+        </p:spPr>
+        <p:txBody>
+          <a:bodyPr wrap="square" lIns="34290" rIns="34290" tIns="13716" bIns="13716" anchor="t">
+            <a:spAutoFit/>
+          </a:bodyPr>
+          <a:lstStyle/>
+          <a:p>
+            <a:pPr algn="l"/>
+            <a:r>
+              <a:rPr sz="4050" b="1" i="0">
+                <a:solidFill>
+                  <a:srgbClr val="FFFFFF"/>
+                </a:solidFill>
+                <a:latin typeface="Arial Black"/>
+              </a:rPr>
+              <a:t>從一個查詢開始</a:t>
+            </a:r>
+          </a:p>
+        </p:txBody>
+      </p:sp>
+      <p:sp>
+        <p:nvSpPr>
+          <p:cNvPr id="5" name="Rectangle 4"/>
+          <p:cNvSpPr/>
+          <p:nvPr/>
+        </p:nvSpPr>
+        <p:spPr>
+          <a:xfrm>
+            <a:off x="3771900" y="2743200"/>
+            <a:ext cx="1714500" cy="27432"/>
+          </a:xfrm>
+          <a:prstGeom prst="rect">
+            <a:avLst/>
+          </a:prstGeom>
+          <a:solidFill>
+            <a:srgbClr val="E8793A"/>
+          </a:solidFill>
+          <a:ln>
+            <a:noFill/>
+          </a:ln>
+          <a:effectLst/>
+        </p:spPr>
+        <p:style>
+          <a:lnRef idx="1">
+            <a:schemeClr val="accent1"/>
+          </a:lnRef>
+          <a:fillRef idx="3">
+            <a:schemeClr val="accent1"/>
+          </a:fillRef>
+          <a:effectRef idx="2">
+            <a:schemeClr val="accent1"/>
+          </a:effectRef>
+          <a:fontRef idx="minor">
+            <a:schemeClr val="lt1"/>
+          </a:fontRef>
+        </p:style>
+        <p:txBody>
+          <a:bodyPr rtlCol="0" anchor="ctr"/>
+          <a:lstStyle/>
+          <a:p>
+            <a:pPr algn="ctr"/>
+          </a:p>
+        </p:txBody>
+      </p:sp>
+      <p:sp>
+        <p:nvSpPr>
+          <p:cNvPr id="6" name="TextBox 5"/>
+          <p:cNvSpPr txBox="1"/>
+          <p:nvPr/>
+        </p:nvSpPr>
+        <p:spPr>
+          <a:xfrm>
+            <a:off x="3771900" y="2880360"/>
+            <a:ext cx="5143500" cy="685800"/>
+          </a:xfrm>
+          <a:prstGeom prst="rect">
+            <a:avLst/>
+          </a:prstGeom>
+          <a:noFill/>
+        </p:spPr>
+        <p:txBody>
+          <a:bodyPr wrap="square" lIns="34290" rIns="34290" tIns="13716" bIns="13716" anchor="t">
+            <a:spAutoFit/>
+          </a:bodyPr>
+          <a:lstStyle/>
+          <a:p>
+            <a:pPr algn="l"/>
+            <a:r>
+              <a:rPr sz="1650" b="0" i="0">
+                <a:solidFill>
+                  <a:srgbClr val="E8EDF3"/>
+                </a:solidFill>
+                <a:latin typeface="Calibri"/>
+              </a:rPr>
+              <a:t>用 search_new_books 走一遍完整流程</a:t>
+            </a:r>
+          </a:p>
+        </p:txBody>
+      </p:sp>
+    </p:spTree>
+  </p:cSld>
+  <p:clrMapOvr>
+    <a:masterClrMapping/>
+  </p:clrMapOvr>
+</p:sld>
+</file>
+
+<file path=ppt/slides/slide22.xml><?xml version="1.0" encoding="utf-8"?>
+<p:sld xmlns:a="http://schemas.openxmlformats.org/drawingml/2006/main" xmlns:p="http://schemas.openxmlformats.org/presentationml/2006/main" xmlns:r="http://schemas.openxmlformats.org/officeDocument/2006/relationships">
+  <p:cSld>
+    <p:spTree>
+      <p:nvGrpSpPr>
+        <p:cNvPr id="1" name=""/>
+        <p:cNvGrpSpPr/>
+        <p:nvPr/>
+      </p:nvGrpSpPr>
+      <p:grpSpPr/>
+      <p:sp>
+        <p:nvSpPr>
+          <p:cNvPr id="2" name="Rectangle 1"/>
+          <p:cNvSpPr/>
+          <p:nvPr/>
+        </p:nvSpPr>
+        <p:spPr>
+          <a:xfrm>
+            <a:off x="0" y="0"/>
+            <a:ext cx="9144000" cy="5143500"/>
+          </a:xfrm>
+          <a:prstGeom prst="rect">
+            <a:avLst/>
+          </a:prstGeom>
+          <a:solidFill>
+            <a:srgbClr val="FFFFFF"/>
+          </a:solidFill>
+          <a:ln>
+            <a:noFill/>
+          </a:ln>
+        </p:spPr>
+        <p:style>
+          <a:lnRef idx="1">
+            <a:schemeClr val="accent1"/>
+          </a:lnRef>
+          <a:fillRef idx="3">
+            <a:schemeClr val="accent1"/>
+          </a:fillRef>
+          <a:effectRef idx="2">
+            <a:schemeClr val="accent1"/>
+          </a:effectRef>
+          <a:fontRef idx="minor">
+            <a:schemeClr val="lt1"/>
+          </a:fontRef>
+        </p:style>
+        <p:txBody>
+          <a:bodyPr rtlCol="0" anchor="ctr"/>
+          <a:lstStyle/>
+          <a:p>
+            <a:pPr algn="ctr"/>
+          </a:p>
+        </p:txBody>
+      </p:sp>
+      <p:sp>
+        <p:nvSpPr>
+          <p:cNvPr id="3" name="TextBox 2"/>
+          <p:cNvSpPr txBox="1"/>
+          <p:nvPr/>
+        </p:nvSpPr>
+        <p:spPr>
+          <a:xfrm>
+            <a:off x="514350" y="274320"/>
+            <a:ext cx="8229600" cy="480059"/>
+          </a:xfrm>
+          <a:prstGeom prst="rect">
+            <a:avLst/>
+          </a:prstGeom>
+          <a:noFill/>
+        </p:spPr>
+        <p:txBody>
+          <a:bodyPr wrap="square" lIns="34290" rIns="34290" tIns="13716" bIns="13716" anchor="t">
+            <a:spAutoFit/>
+          </a:bodyPr>
+          <a:lstStyle/>
+          <a:p>
+            <a:pPr algn="l"/>
+            <a:r>
+              <a:rPr sz="1950" b="1" i="0">
+                <a:solidFill>
+                  <a:srgbClr val="1E2761"/>
+                </a:solidFill>
+                <a:latin typeface="Arial Black"/>
+              </a:rPr>
+              <a:t>場景:使用者問了一個問題,LLM 決定要呼叫工具</a:t>
+            </a:r>
+          </a:p>
+        </p:txBody>
+      </p:sp>
+      <p:sp>
+        <p:nvSpPr>
+          <p:cNvPr id="4" name="Rectangle 3"/>
+          <p:cNvSpPr/>
+          <p:nvPr/>
+        </p:nvSpPr>
+        <p:spPr>
+          <a:xfrm>
+            <a:off x="514350" y="822959"/>
+            <a:ext cx="2057400" cy="27432"/>
+          </a:xfrm>
+          <a:prstGeom prst="rect">
+            <a:avLst/>
+          </a:prstGeom>
+          <a:solidFill>
+            <a:srgbClr val="E8793A"/>
+          </a:solidFill>
+          <a:ln>
+            <a:noFill/>
+          </a:ln>
+          <a:effectLst/>
+        </p:spPr>
+        <p:style>
+          <a:lnRef idx="1">
+            <a:schemeClr val="accent1"/>
+          </a:lnRef>
+          <a:fillRef idx="3">
+            <a:schemeClr val="accent1"/>
+          </a:fillRef>
+          <a:effectRef idx="2">
+            <a:schemeClr val="accent1"/>
+          </a:effectRef>
+          <a:fontRef idx="minor">
+            <a:schemeClr val="lt1"/>
+          </a:fontRef>
+        </p:style>
+        <p:txBody>
+          <a:bodyPr rtlCol="0" anchor="ctr"/>
+          <a:lstStyle/>
+          <a:p>
+            <a:pPr algn="ctr"/>
+          </a:p>
+        </p:txBody>
+      </p:sp>
+      <p:sp>
+        <p:nvSpPr>
+          <p:cNvPr id="5" name="TextBox 4"/>
+          <p:cNvSpPr txBox="1"/>
+          <p:nvPr/>
+        </p:nvSpPr>
+        <p:spPr>
+          <a:xfrm>
+            <a:off x="7543800" y="925830"/>
+            <a:ext cx="1028700" cy="240029"/>
+          </a:xfrm>
+          <a:prstGeom prst="rect">
+            <a:avLst/>
+          </a:prstGeom>
+          <a:noFill/>
+        </p:spPr>
+        <p:txBody>
+          <a:bodyPr wrap="square" lIns="34290" rIns="34290" tIns="13716" bIns="13716" anchor="t">
+            <a:spAutoFit/>
+          </a:bodyPr>
+          <a:lstStyle/>
+          <a:p>
+            <a:pPr algn="r"/>
+            <a:r>
+              <a:rPr sz="1050" b="0" i="0">
+                <a:solidFill>
+                  <a:srgbClr val="6B6B6B"/>
+                </a:solidFill>
+                <a:latin typeface="Calibri"/>
+              </a:rPr>
+              <a:t>使用者</a:t>
+            </a:r>
+          </a:p>
+        </p:txBody>
+      </p:sp>
+      <p:sp>
+        <p:nvSpPr>
+          <p:cNvPr id="6" name="Rounded Rectangle 5"/>
+          <p:cNvSpPr/>
+          <p:nvPr/>
+        </p:nvSpPr>
+        <p:spPr>
+          <a:xfrm>
+            <a:off x="3771900" y="1234440"/>
+            <a:ext cx="4800600" cy="754380"/>
+          </a:xfrm>
+          <a:prstGeom prst="roundRect">
+            <a:avLst>
+              <a:gd name="adj" fmla="val 12000"/>
+            </a:avLst>
+          </a:prstGeom>
+          <a:solidFill>
+            <a:srgbClr val="5B8DE8"/>
+          </a:solidFill>
+          <a:ln w="23812">
+            <a:solidFill>
+              <a:srgbClr val="5B8DE8"/>
+            </a:solidFill>
+          </a:ln>
+          <a:effectLst/>
+        </p:spPr>
+        <p:style>
+          <a:lnRef idx="1">
+            <a:schemeClr val="accent1"/>
+          </a:lnRef>
+          <a:fillRef idx="3">
+            <a:schemeClr val="accent1"/>
+          </a:fillRef>
+          <a:effectRef idx="2">
+            <a:schemeClr val="accent1"/>
+          </a:effectRef>
+          <a:fontRef idx="minor">
+            <a:schemeClr val="lt1"/>
+          </a:fontRef>
+        </p:style>
+        <p:txBody>
+          <a:bodyPr rtlCol="0" anchor="ctr"/>
+          <a:lstStyle/>
+          <a:p>
+            <a:pPr algn="ctr"/>
+          </a:p>
+        </p:txBody>
+      </p:sp>
+      <p:sp>
+        <p:nvSpPr>
+          <p:cNvPr id="7" name="TextBox 6"/>
+          <p:cNvSpPr txBox="1"/>
+          <p:nvPr/>
+        </p:nvSpPr>
+        <p:spPr>
+          <a:xfrm>
+            <a:off x="3771900" y="1234440"/>
+            <a:ext cx="4800600" cy="754380"/>
+          </a:xfrm>
+          <a:prstGeom prst="rect">
+            <a:avLst/>
+          </a:prstGeom>
+          <a:noFill/>
+        </p:spPr>
+        <p:txBody>
+          <a:bodyPr wrap="square" lIns="34290" rIns="34290" tIns="13716" bIns="13716" anchor="ctr">
+            <a:spAutoFit/>
+          </a:bodyPr>
+          <a:lstStyle/>
+          <a:p>
+            <a:pPr algn="ctr"/>
+            <a:r>
+              <a:rPr sz="1650" b="1" i="0">
+                <a:solidFill>
+                  <a:srgbClr val="FFFFFF"/>
+                </a:solidFill>
+                <a:latin typeface="Calibri"/>
+              </a:rPr>
+              <a:t>幫我查最近圖書館有什麼新書</a:t>
+            </a:r>
+          </a:p>
+        </p:txBody>
+      </p:sp>
+      <p:cxnSp>
+        <p:nvCxnSpPr>
+          <p:cNvPr id="8" name="Connector 7"/>
+          <p:cNvCxnSpPr/>
+          <p:nvPr/>
+        </p:nvCxnSpPr>
+        <p:spPr>
+          <a:xfrm flipH="1">
+            <a:off x="3086100" y="2057400"/>
+            <a:ext cx="1371600" cy="822960"/>
+          </a:xfrm>
+          <a:prstGeom prst="line">
+            <a:avLst/>
+          </a:prstGeom>
+          <a:ln w="19050">
+            <a:solidFill>
+              <a:srgbClr val="6B6B6B"/>
+            </a:solidFill>
+            <a:tailEnd type="triangle" w="med" len="med"/>
+          </a:ln>
+        </p:spPr>
+        <p:style>
+          <a:lnRef idx="2">
+            <a:schemeClr val="accent1"/>
+          </a:lnRef>
+          <a:fillRef idx="0">
+            <a:schemeClr val="accent1"/>
+          </a:fillRef>
+          <a:effectRef idx="1">
+            <a:schemeClr val="accent1"/>
+          </a:effectRef>
+          <a:fontRef idx="minor">
+            <a:schemeClr val="tx1"/>
+          </a:fontRef>
+        </p:style>
+      </p:cxnSp>
+      <p:sp>
+        <p:nvSpPr>
+          <p:cNvPr id="9" name="Rounded Rectangle 8"/>
+          <p:cNvSpPr/>
+          <p:nvPr/>
+        </p:nvSpPr>
+        <p:spPr>
+          <a:xfrm>
+            <a:off x="548640" y="2948939"/>
+            <a:ext cx="5143500" cy="1234440"/>
+          </a:xfrm>
+          <a:prstGeom prst="roundRect">
+            <a:avLst>
+              <a:gd name="adj" fmla="val 12000"/>
+            </a:avLst>
+          </a:prstGeom>
+          <a:solidFill>
+            <a:srgbClr val="FCE5D1"/>
+          </a:solidFill>
+          <a:ln w="23812">
+            <a:solidFill>
+              <a:srgbClr val="E8793A"/>
+            </a:solidFill>
+          </a:ln>
+          <a:effectLst/>
+        </p:spPr>
+        <p:style>
+          <a:lnRef idx="1">
+            <a:schemeClr val="accent1"/>
+          </a:lnRef>
+          <a:fillRef idx="3">
+            <a:schemeClr val="accent1"/>
+          </a:fillRef>
+          <a:effectRef idx="2">
+            <a:schemeClr val="accent1"/>
+          </a:effectRef>
+          <a:fontRef idx="minor">
+            <a:schemeClr val="lt1"/>
+          </a:fontRef>
+        </p:style>
+        <p:txBody>
+          <a:bodyPr rtlCol="0" anchor="ctr"/>
+          <a:lstStyle/>
+          <a:p>
+            <a:pPr algn="ctr"/>
+          </a:p>
+        </p:txBody>
+      </p:sp>
+      <p:sp>
+        <p:nvSpPr>
+          <p:cNvPr id="10" name="TextBox 9"/>
+          <p:cNvSpPr txBox="1"/>
+          <p:nvPr/>
+        </p:nvSpPr>
+        <p:spPr>
+          <a:xfrm>
+            <a:off x="754380" y="3120389"/>
+            <a:ext cx="4732020" cy="891540"/>
+          </a:xfrm>
+          <a:prstGeom prst="rect">
+            <a:avLst/>
+          </a:prstGeom>
+          <a:noFill/>
+        </p:spPr>
+        <p:txBody>
+          <a:bodyPr wrap="square" lIns="34290" rIns="34290" anchor="t">
+            <a:spAutoFit/>
+          </a:bodyPr>
+          <a:lstStyle/>
+          <a:p>
+            <a:pPr algn="l"/>
+            <a:r>
+              <a:rPr sz="1500" b="0" i="0">
+                <a:solidFill>
+                  <a:srgbClr val="1A1A1A"/>
+                </a:solidFill>
+                <a:latin typeface="Calibri"/>
+              </a:rPr>
+              <a:t>嗯…需要查新書資料庫</a:t>
+            </a:r>
+          </a:p>
+          <a:p>
+            <a:pPr algn="l">
+              <a:spcAft>
+                <a:spcPts val="0"/>
+              </a:spcAft>
+            </a:pPr>
+            <a:r>
+              <a:rPr sz="1500" b="1" i="0">
+                <a:solidFill>
+                  <a:srgbClr val="E8793A"/>
+                </a:solidFill>
+                <a:latin typeface="Consolas"/>
+              </a:rPr>
+              <a:t>→ 呼叫 search_new_books 工具</a:t>
+            </a:r>
+          </a:p>
+        </p:txBody>
+      </p:sp>
+      <p:sp>
+        <p:nvSpPr>
+          <p:cNvPr id="11" name="TextBox 10"/>
+          <p:cNvSpPr txBox="1"/>
+          <p:nvPr/>
+        </p:nvSpPr>
+        <p:spPr>
+          <a:xfrm>
+            <a:off x="548640" y="4217670"/>
+            <a:ext cx="2743200" cy="240029"/>
+          </a:xfrm>
+          <a:prstGeom prst="rect">
+            <a:avLst/>
+          </a:prstGeom>
+          <a:noFill/>
+        </p:spPr>
+        <p:txBody>
+          <a:bodyPr wrap="square" lIns="34290" rIns="34290" tIns="13716" bIns="13716" anchor="t">
+            <a:spAutoFit/>
+          </a:bodyPr>
+          <a:lstStyle/>
+          <a:p>
+            <a:pPr algn="l"/>
+            <a:r>
+              <a:rPr sz="1050" b="0" i="0">
+                <a:solidFill>
+                  <a:srgbClr val="6B6B6B"/>
+                </a:solidFill>
+                <a:latin typeface="Consolas"/>
+              </a:rPr>
+              <a:t>LLM (Sonnet)</a:t>
+            </a:r>
+          </a:p>
+        </p:txBody>
+      </p:sp>
+      <p:sp>
+        <p:nvSpPr>
+          <p:cNvPr id="12" name="TextBox 11"/>
+          <p:cNvSpPr txBox="1"/>
+          <p:nvPr/>
+        </p:nvSpPr>
+        <p:spPr>
+          <a:xfrm>
+            <a:off x="514350" y="4491990"/>
+            <a:ext cx="8572500" cy="342900"/>
+          </a:xfrm>
+          <a:prstGeom prst="rect">
+            <a:avLst/>
+          </a:prstGeom>
+          <a:noFill/>
+        </p:spPr>
+        <p:txBody>
+          <a:bodyPr wrap="square" lIns="34290" rIns="34290" tIns="13716" bIns="13716" anchor="t">
+            <a:spAutoFit/>
+          </a:bodyPr>
+          <a:lstStyle/>
+          <a:p>
+            <a:pPr algn="ctr"/>
+            <a:r>
+              <a:rPr sz="1500" b="1" i="1">
+                <a:solidFill>
+                  <a:srgbClr val="D9534F"/>
+                </a:solidFill>
+                <a:latin typeface="Calibri"/>
+              </a:rPr>
+              <a:t>但 LLM 自己不會呼叫 — 要靠 Parent 去跟 Child 講話</a:t>
+            </a:r>
+          </a:p>
+        </p:txBody>
+      </p:sp>
+    </p:spTree>
+  </p:cSld>
+  <p:clrMapOvr>
+    <a:masterClrMapping/>
+  </p:clrMapOvr>
+</p:sld>
+</file>
+
+<file path=ppt/slides/slide23.xml><?xml version="1.0" encoding="utf-8"?>
+<p:sld xmlns:a="http://schemas.openxmlformats.org/drawingml/2006/main" xmlns:p="http://schemas.openxmlformats.org/presentationml/2006/main" xmlns:r="http://schemas.openxmlformats.org/officeDocument/2006/relationships">
+  <p:cSld>
+    <p:spTree>
+      <p:nvGrpSpPr>
+        <p:cNvPr id="1" name=""/>
+        <p:cNvGrpSpPr/>
+        <p:nvPr/>
+      </p:nvGrpSpPr>
+      <p:grpSpPr/>
+      <p:sp>
+        <p:nvSpPr>
+          <p:cNvPr id="2" name="Rectangle 1"/>
+          <p:cNvSpPr/>
+          <p:nvPr/>
+        </p:nvSpPr>
+        <p:spPr>
+          <a:xfrm>
+            <a:off x="0" y="0"/>
+            <a:ext cx="9144000" cy="5143500"/>
+          </a:xfrm>
+          <a:prstGeom prst="rect">
+            <a:avLst/>
+          </a:prstGeom>
+          <a:solidFill>
+            <a:srgbClr val="FFFFFF"/>
+          </a:solidFill>
+          <a:ln>
+            <a:noFill/>
+          </a:ln>
+        </p:spPr>
+        <p:style>
+          <a:lnRef idx="1">
+            <a:schemeClr val="accent1"/>
+          </a:lnRef>
+          <a:fillRef idx="3">
+            <a:schemeClr val="accent1"/>
+          </a:fillRef>
+          <a:effectRef idx="2">
+            <a:schemeClr val="accent1"/>
+          </a:effectRef>
+          <a:fontRef idx="minor">
+            <a:schemeClr val="lt1"/>
+          </a:fontRef>
+        </p:style>
+        <p:txBody>
+          <a:bodyPr rtlCol="0" anchor="ctr"/>
+          <a:lstStyle/>
+          <a:p>
+            <a:pPr algn="ctr"/>
+          </a:p>
+        </p:txBody>
+      </p:sp>
+      <p:sp>
+        <p:nvSpPr>
+          <p:cNvPr id="3" name="TextBox 2"/>
+          <p:cNvSpPr txBox="1"/>
+          <p:nvPr/>
+        </p:nvSpPr>
+        <p:spPr>
+          <a:xfrm>
+            <a:off x="514350" y="274320"/>
+            <a:ext cx="8229600" cy="480059"/>
+          </a:xfrm>
+          <a:prstGeom prst="rect">
+            <a:avLst/>
+          </a:prstGeom>
+          <a:noFill/>
+        </p:spPr>
+        <p:txBody>
+          <a:bodyPr wrap="square" lIns="34290" rIns="34290" tIns="13716" bIns="13716" anchor="t">
+            <a:spAutoFit/>
+          </a:bodyPr>
+          <a:lstStyle/>
+          <a:p>
+            <a:pPr algn="l"/>
+            <a:r>
+              <a:rPr sz="2100" b="1" i="0">
+                <a:solidFill>
+                  <a:srgbClr val="1E2761"/>
+                </a:solidFill>
+                <a:latin typeface="Arial Black"/>
+              </a:rPr>
+              <a:t>Act 1 — Parent 開出 Child</a:t>
+            </a:r>
+          </a:p>
+        </p:txBody>
+      </p:sp>
+      <p:sp>
+        <p:nvSpPr>
+          <p:cNvPr id="4" name="Rectangle 3"/>
+          <p:cNvSpPr/>
+          <p:nvPr/>
+        </p:nvSpPr>
+        <p:spPr>
+          <a:xfrm>
+            <a:off x="514350" y="822959"/>
+            <a:ext cx="2057400" cy="27432"/>
+          </a:xfrm>
+          <a:prstGeom prst="rect">
+            <a:avLst/>
+          </a:prstGeom>
+          <a:solidFill>
+            <a:srgbClr val="E8793A"/>
+          </a:solidFill>
+          <a:ln>
+            <a:noFill/>
+          </a:ln>
+          <a:effectLst/>
+        </p:spPr>
+        <p:style>
+          <a:lnRef idx="1">
+            <a:schemeClr val="accent1"/>
+          </a:lnRef>
+          <a:fillRef idx="3">
+            <a:schemeClr val="accent1"/>
+          </a:fillRef>
+          <a:effectRef idx="2">
+            <a:schemeClr val="accent1"/>
+          </a:effectRef>
+          <a:fontRef idx="minor">
+            <a:schemeClr val="lt1"/>
+          </a:fontRef>
+        </p:style>
+        <p:txBody>
+          <a:bodyPr rtlCol="0" anchor="ctr"/>
+          <a:lstStyle/>
+          <a:p>
+            <a:pPr algn="ctr"/>
+          </a:p>
+        </p:txBody>
+      </p:sp>
+      <p:sp>
+        <p:nvSpPr>
+          <p:cNvPr id="5" name="TextBox 4"/>
+          <p:cNvSpPr txBox="1"/>
+          <p:nvPr/>
+        </p:nvSpPr>
+        <p:spPr>
+          <a:xfrm>
+            <a:off x="3086100" y="994409"/>
+            <a:ext cx="4114800" cy="342900"/>
+          </a:xfrm>
+          <a:prstGeom prst="rect">
+            <a:avLst/>
+          </a:prstGeom>
+          <a:noFill/>
+        </p:spPr>
+        <p:txBody>
+          <a:bodyPr wrap="square" lIns="34290" rIns="34290" tIns="13716" bIns="13716" anchor="t">
+            <a:spAutoFit/>
+          </a:bodyPr>
+          <a:lstStyle/>
+          <a:p>
+            <a:pPr algn="ctr"/>
+            <a:r>
+              <a:rPr sz="1650" b="1" i="0">
+                <a:solidFill>
+                  <a:srgbClr val="E8793A"/>
+                </a:solidFill>
+                <a:latin typeface="Consolas"/>
+              </a:rPr>
+              <a:t>▶ 開出 Child</a:t>
+            </a:r>
+          </a:p>
+        </p:txBody>
+      </p:sp>
+      <p:sp>
+        <p:nvSpPr>
+          <p:cNvPr id="6" name="Rounded Rectangle 5"/>
+          <p:cNvSpPr/>
+          <p:nvPr/>
+        </p:nvSpPr>
+        <p:spPr>
+          <a:xfrm>
+            <a:off x="589788" y="1481328"/>
+            <a:ext cx="2880360" cy="1714500"/>
+          </a:xfrm>
+          <a:prstGeom prst="roundRect">
+            <a:avLst>
+              <a:gd name="adj" fmla="val 14000"/>
+            </a:avLst>
+          </a:prstGeom>
+          <a:solidFill>
+            <a:srgbClr val="000000"/>
+          </a:solidFill>
+          <a:ln>
+            <a:noFill/>
+          </a:ln>
+          <a:effectLst/>
+        </p:spPr>
+        <p:style>
+          <a:lnRef idx="1">
+            <a:schemeClr val="accent1"/>
+          </a:lnRef>
+          <a:fillRef idx="3">
+            <a:schemeClr val="accent1"/>
+          </a:fillRef>
+          <a:effectRef idx="2">
+            <a:schemeClr val="accent1"/>
+          </a:effectRef>
+          <a:fontRef idx="minor">
+            <a:schemeClr val="lt1"/>
+          </a:fontRef>
+        </p:style>
+        <p:txBody>
+          <a:bodyPr rtlCol="0" anchor="ctr"/>
+          <a:lstStyle/>
+          <a:p>
+            <a:pPr algn="ctr"/>
+          </a:p>
+        </p:txBody>
+      </p:sp>
+      <p:sp>
+        <p:nvSpPr>
+          <p:cNvPr id="7" name="Rounded Rectangle 6"/>
+          <p:cNvSpPr/>
+          <p:nvPr/>
+        </p:nvSpPr>
+        <p:spPr>
+          <a:xfrm>
+            <a:off x="548640" y="1440180"/>
+            <a:ext cx="2880360" cy="1714500"/>
+          </a:xfrm>
+          <a:prstGeom prst="roundRect">
+            <a:avLst>
+              <a:gd name="adj" fmla="val 14000"/>
+            </a:avLst>
+          </a:prstGeom>
+          <a:solidFill>
+            <a:srgbClr val="FFFFFF"/>
+          </a:solidFill>
+          <a:ln w="23812">
+            <a:solidFill>
+              <a:srgbClr val="5B8DE8"/>
+            </a:solidFill>
+          </a:ln>
+          <a:effectLst/>
+        </p:spPr>
+        <p:style>
+          <a:lnRef idx="1">
+            <a:schemeClr val="accent1"/>
+          </a:lnRef>
+          <a:fillRef idx="3">
+            <a:schemeClr val="accent1"/>
+          </a:fillRef>
+          <a:effectRef idx="2">
+            <a:schemeClr val="accent1"/>
+          </a:effectRef>
+          <a:fontRef idx="minor">
+            <a:schemeClr val="lt1"/>
+          </a:fontRef>
+        </p:style>
+        <p:txBody>
+          <a:bodyPr rtlCol="0" anchor="ctr"/>
+          <a:lstStyle/>
+          <a:p>
+            <a:pPr algn="ctr"/>
+          </a:p>
+        </p:txBody>
+      </p:sp>
+      <p:sp>
+        <p:nvSpPr>
+          <p:cNvPr id="8" name="Rectangle 7"/>
+          <p:cNvSpPr/>
+          <p:nvPr/>
+        </p:nvSpPr>
+        <p:spPr>
+          <a:xfrm>
+            <a:off x="582930" y="1474469"/>
+            <a:ext cx="2811780" cy="411479"/>
+          </a:xfrm>
+          <a:prstGeom prst="rect">
+            <a:avLst/>
+          </a:prstGeom>
+          <a:solidFill>
+            <a:srgbClr val="5B8DE8"/>
+          </a:solidFill>
+          <a:ln>
+            <a:noFill/>
+          </a:ln>
+          <a:effectLst/>
+        </p:spPr>
+        <p:style>
+          <a:lnRef idx="1">
+            <a:schemeClr val="accent1"/>
+          </a:lnRef>
+          <a:fillRef idx="3">
+            <a:schemeClr val="accent1"/>
+          </a:fillRef>
+          <a:effectRef idx="2">
+            <a:schemeClr val="accent1"/>
+          </a:effectRef>
+          <a:fontRef idx="minor">
+            <a:schemeClr val="lt1"/>
+          </a:fontRef>
+        </p:style>
+        <p:txBody>
+          <a:bodyPr rtlCol="0" anchor="ctr"/>
+          <a:lstStyle/>
+          <a:p>
+            <a:pPr algn="ctr"/>
+          </a:p>
+        </p:txBody>
+      </p:sp>
+      <p:sp>
+        <p:nvSpPr>
+          <p:cNvPr id="9" name="TextBox 8"/>
+          <p:cNvSpPr txBox="1"/>
+          <p:nvPr/>
+        </p:nvSpPr>
+        <p:spPr>
+          <a:xfrm>
+            <a:off x="582930" y="1474469"/>
+            <a:ext cx="2811780" cy="411479"/>
+          </a:xfrm>
+          <a:prstGeom prst="rect">
+            <a:avLst/>
+          </a:prstGeom>
+          <a:noFill/>
+        </p:spPr>
+        <p:txBody>
+          <a:bodyPr wrap="square" lIns="34290" rIns="34290" tIns="13716" bIns="13716" anchor="ctr">
+            <a:spAutoFit/>
+          </a:bodyPr>
+          <a:lstStyle/>
+          <a:p>
+            <a:pPr algn="ctr"/>
+            <a:r>
+              <a:rPr sz="1500" b="1" i="0">
+                <a:solidFill>
+                  <a:srgbClr val="FFFFFF"/>
+                </a:solidFill>
+                <a:latin typeface="Arial Black"/>
+              </a:rPr>
+              <a:t>Parent Process</a:t>
+            </a:r>
+          </a:p>
+        </p:txBody>
+      </p:sp>
+      <p:sp>
+        <p:nvSpPr>
+          <p:cNvPr id="10" name="TextBox 9"/>
+          <p:cNvSpPr txBox="1"/>
+          <p:nvPr/>
+        </p:nvSpPr>
+        <p:spPr>
+          <a:xfrm>
+            <a:off x="582930" y="1954530"/>
+            <a:ext cx="2811780" cy="754380"/>
+          </a:xfrm>
+          <a:prstGeom prst="rect">
+            <a:avLst/>
+          </a:prstGeom>
+          <a:noFill/>
+        </p:spPr>
+        <p:txBody>
+          <a:bodyPr wrap="square" lIns="34290" rIns="34290" tIns="13716" bIns="13716" anchor="ctr">
+            <a:spAutoFit/>
+          </a:bodyPr>
+          <a:lstStyle/>
+          <a:p>
+            <a:pPr algn="ctr"/>
+            <a:r>
+              <a:rPr sz="1050" b="0" i="0">
+                <a:solidFill>
+                  <a:srgbClr val="6B6B6B"/>
+                </a:solidFill>
+                <a:latin typeface="Consolas"/>
+              </a:rPr>
+              <a:t>Node.js</a:t>
+            </a:r>
+          </a:p>
+        </p:txBody>
+      </p:sp>
+      <p:sp>
+        <p:nvSpPr>
+          <p:cNvPr id="11" name="Rounded Rectangle 10"/>
+          <p:cNvSpPr/>
+          <p:nvPr/>
+        </p:nvSpPr>
+        <p:spPr>
+          <a:xfrm>
+            <a:off x="2297430" y="2832353"/>
+            <a:ext cx="1028700" cy="219456"/>
+          </a:xfrm>
+          <a:prstGeom prst="roundRect">
+            <a:avLst>
+              <a:gd name="adj" fmla="val 12000"/>
+            </a:avLst>
+          </a:prstGeom>
+          <a:solidFill>
+            <a:srgbClr val="E8793A"/>
+          </a:solidFill>
+          <a:ln w="14287">
+            <a:solidFill>
+              <a:srgbClr val="E8793A"/>
+            </a:solidFill>
+          </a:ln>
+          <a:effectLst/>
+        </p:spPr>
+        <p:style>
+          <a:lnRef idx="1">
+            <a:schemeClr val="accent1"/>
+          </a:lnRef>
+          <a:fillRef idx="3">
+            <a:schemeClr val="accent1"/>
+          </a:fillRef>
+          <a:effectRef idx="2">
+            <a:schemeClr val="accent1"/>
+          </a:effectRef>
+          <a:fontRef idx="minor">
+            <a:schemeClr val="lt1"/>
+          </a:fontRef>
+        </p:style>
+        <p:txBody>
+          <a:bodyPr rtlCol="0" anchor="ctr"/>
+          <a:lstStyle/>
+          <a:p>
+            <a:pPr algn="ctr"/>
+          </a:p>
+        </p:txBody>
+      </p:sp>
+      <p:sp>
+        <p:nvSpPr>
+          <p:cNvPr id="12" name="TextBox 11"/>
+          <p:cNvSpPr txBox="1"/>
+          <p:nvPr/>
+        </p:nvSpPr>
+        <p:spPr>
+          <a:xfrm>
+            <a:off x="2297430" y="2832353"/>
+            <a:ext cx="1028700" cy="219456"/>
+          </a:xfrm>
+          <a:prstGeom prst="rect">
+            <a:avLst/>
+          </a:prstGeom>
+          <a:noFill/>
+        </p:spPr>
+        <p:txBody>
+          <a:bodyPr wrap="square" lIns="34290" rIns="34290" tIns="13716" bIns="13716" anchor="ctr">
+            <a:spAutoFit/>
+          </a:bodyPr>
+          <a:lstStyle/>
+          <a:p>
+            <a:pPr algn="ctr"/>
+            <a:r>
+              <a:rPr sz="825" b="1" i="0">
+                <a:solidFill>
+                  <a:srgbClr val="FFFFFF"/>
+                </a:solidFill>
+                <a:latin typeface="Consolas"/>
+              </a:rPr>
+              <a:t>LLM · Sonnet</a:t>
+            </a:r>
+          </a:p>
+        </p:txBody>
+      </p:sp>
+      <p:sp>
+        <p:nvSpPr>
+          <p:cNvPr id="13" name="Rounded Rectangle 12"/>
+          <p:cNvSpPr/>
+          <p:nvPr/>
+        </p:nvSpPr>
+        <p:spPr>
+          <a:xfrm>
+            <a:off x="5733288" y="1481328"/>
+            <a:ext cx="2880360" cy="1714500"/>
+          </a:xfrm>
+          <a:prstGeom prst="roundRect">
+            <a:avLst>
+              <a:gd name="adj" fmla="val 14000"/>
+            </a:avLst>
+          </a:prstGeom>
+          <a:solidFill>
+            <a:srgbClr val="000000"/>
+          </a:solidFill>
+          <a:ln>
+            <a:noFill/>
+          </a:ln>
+          <a:effectLst/>
+        </p:spPr>
+        <p:style>
+          <a:lnRef idx="1">
+            <a:schemeClr val="accent1"/>
+          </a:lnRef>
+          <a:fillRef idx="3">
+            <a:schemeClr val="accent1"/>
+          </a:fillRef>
+          <a:effectRef idx="2">
+            <a:schemeClr val="accent1"/>
+          </a:effectRef>
+          <a:fontRef idx="minor">
+            <a:schemeClr val="lt1"/>
+          </a:fontRef>
+        </p:style>
+        <p:txBody>
+          <a:bodyPr rtlCol="0" anchor="ctr"/>
+          <a:lstStyle/>
+          <a:p>
+            <a:pPr algn="ctr"/>
+          </a:p>
+        </p:txBody>
+      </p:sp>
+      <p:sp>
+        <p:nvSpPr>
+          <p:cNvPr id="14" name="Rounded Rectangle 13"/>
+          <p:cNvSpPr/>
+          <p:nvPr/>
+        </p:nvSpPr>
+        <p:spPr>
+          <a:xfrm>
+            <a:off x="5692140" y="1440180"/>
+            <a:ext cx="2880360" cy="1714500"/>
+          </a:xfrm>
+          <a:prstGeom prst="roundRect">
+            <a:avLst>
+              <a:gd name="adj" fmla="val 14000"/>
+            </a:avLst>
+          </a:prstGeom>
+          <a:solidFill>
+            <a:srgbClr val="FFFFFF"/>
+          </a:solidFill>
+          <a:ln w="23812">
+            <a:solidFill>
+              <a:srgbClr val="2DB5C9"/>
+            </a:solidFill>
+          </a:ln>
+          <a:effectLst/>
+        </p:spPr>
+        <p:style>
+          <a:lnRef idx="1">
+            <a:schemeClr val="accent1"/>
+          </a:lnRef>
+          <a:fillRef idx="3">
+            <a:schemeClr val="accent1"/>
+          </a:fillRef>
+          <a:effectRef idx="2">
+            <a:schemeClr val="accent1"/>
+          </a:effectRef>
+          <a:fontRef idx="minor">
+            <a:schemeClr val="lt1"/>
+          </a:fontRef>
+        </p:style>
+        <p:txBody>
+          <a:bodyPr rtlCol="0" anchor="ctr"/>
+          <a:lstStyle/>
+          <a:p>
+            <a:pPr algn="ctr"/>
+          </a:p>
+        </p:txBody>
+      </p:sp>
+      <p:sp>
+        <p:nvSpPr>
+          <p:cNvPr id="15" name="Rectangle 14"/>
+          <p:cNvSpPr/>
+          <p:nvPr/>
+        </p:nvSpPr>
+        <p:spPr>
+          <a:xfrm>
+            <a:off x="5726430" y="1474469"/>
+            <a:ext cx="2811780" cy="411479"/>
+          </a:xfrm>
+          <a:prstGeom prst="rect">
+            <a:avLst/>
+          </a:prstGeom>
+          <a:solidFill>
+            <a:srgbClr val="2DB5C9"/>
+          </a:solidFill>
+          <a:ln>
+            <a:noFill/>
+          </a:ln>
+          <a:effectLst/>
+        </p:spPr>
+        <p:style>
+          <a:lnRef idx="1">
+            <a:schemeClr val="accent1"/>
+          </a:lnRef>
+          <a:fillRef idx="3">
+            <a:schemeClr val="accent1"/>
+          </a:fillRef>
+          <a:effectRef idx="2">
+            <a:schemeClr val="accent1"/>
+          </a:effectRef>
+          <a:fontRef idx="minor">
+            <a:schemeClr val="lt1"/>
+          </a:fontRef>
+        </p:style>
+        <p:txBody>
+          <a:bodyPr rtlCol="0" anchor="ctr"/>
+          <a:lstStyle/>
+          <a:p>
+            <a:pPr algn="ctr"/>
+          </a:p>
+        </p:txBody>
+      </p:sp>
+      <p:sp>
+        <p:nvSpPr>
+          <p:cNvPr id="16" name="TextBox 15"/>
+          <p:cNvSpPr txBox="1"/>
+          <p:nvPr/>
+        </p:nvSpPr>
+        <p:spPr>
+          <a:xfrm>
+            <a:off x="5726430" y="1474469"/>
+            <a:ext cx="2811780" cy="411479"/>
+          </a:xfrm>
+          <a:prstGeom prst="rect">
+            <a:avLst/>
+          </a:prstGeom>
+          <a:noFill/>
+        </p:spPr>
+        <p:txBody>
+          <a:bodyPr wrap="square" lIns="34290" rIns="34290" tIns="13716" bIns="13716" anchor="ctr">
+            <a:spAutoFit/>
+          </a:bodyPr>
+          <a:lstStyle/>
+          <a:p>
+            <a:pPr algn="ctr"/>
+            <a:r>
+              <a:rPr sz="1500" b="1" i="0">
+                <a:solidFill>
+                  <a:srgbClr val="FFFFFF"/>
+                </a:solidFill>
+                <a:latin typeface="Arial Black"/>
+              </a:rPr>
+              <a:t>Child Process</a:t>
+            </a:r>
+          </a:p>
+        </p:txBody>
+      </p:sp>
+      <p:sp>
+        <p:nvSpPr>
+          <p:cNvPr id="17" name="TextBox 16"/>
+          <p:cNvSpPr txBox="1"/>
+          <p:nvPr/>
+        </p:nvSpPr>
+        <p:spPr>
+          <a:xfrm>
+            <a:off x="5726430" y="1954530"/>
+            <a:ext cx="2811780" cy="1097280"/>
+          </a:xfrm>
+          <a:prstGeom prst="rect">
+            <a:avLst/>
+          </a:prstGeom>
+          <a:noFill/>
+        </p:spPr>
+        <p:txBody>
+          <a:bodyPr wrap="square" lIns="34290" rIns="34290" tIns="13716" bIns="13716" anchor="ctr">
+            <a:spAutoFit/>
+          </a:bodyPr>
+          <a:lstStyle/>
+          <a:p>
+            <a:pPr algn="ctr"/>
+            <a:r>
+              <a:rPr sz="1050" b="0" i="0">
+                <a:solidFill>
+                  <a:srgbClr val="6B6B6B"/>
+                </a:solidFill>
+                <a:latin typeface="Consolas"/>
+              </a:rPr>
+              <a:t>Python MCP Server</a:t>
+            </a:r>
+          </a:p>
+        </p:txBody>
+      </p:sp>
+      <p:cxnSp>
+        <p:nvCxnSpPr>
+          <p:cNvPr id="18" name="Connector 17"/>
+          <p:cNvCxnSpPr/>
+          <p:nvPr/>
+        </p:nvCxnSpPr>
+        <p:spPr>
+          <a:xfrm>
+            <a:off x="3463289" y="2160270"/>
+            <a:ext cx="2194561" cy="0"/>
+          </a:xfrm>
+          <a:prstGeom prst="line">
+            <a:avLst/>
+          </a:prstGeom>
+          <a:ln w="14287">
+            <a:solidFill>
+              <a:srgbClr val="6B6B6B"/>
+            </a:solidFill>
+          </a:ln>
+        </p:spPr>
+        <p:style>
+          <a:lnRef idx="2">
+            <a:schemeClr val="accent1"/>
+          </a:lnRef>
+          <a:fillRef idx="0">
+            <a:schemeClr val="accent1"/>
+          </a:fillRef>
+          <a:effectRef idx="1">
+            <a:schemeClr val="accent1"/>
+          </a:effectRef>
+          <a:fontRef idx="minor">
+            <a:schemeClr val="tx1"/>
+          </a:fontRef>
+        </p:style>
+      </p:cxnSp>
+      <p:cxnSp>
+        <p:nvCxnSpPr>
+          <p:cNvPr id="19" name="Connector 18"/>
+          <p:cNvCxnSpPr/>
+          <p:nvPr/>
+        </p:nvCxnSpPr>
+        <p:spPr>
+          <a:xfrm>
+            <a:off x="3463289" y="2434590"/>
+            <a:ext cx="2194561" cy="0"/>
+          </a:xfrm>
+          <a:prstGeom prst="line">
+            <a:avLst/>
+          </a:prstGeom>
+          <a:ln w="14287">
+            <a:solidFill>
+              <a:srgbClr val="6B6B6B"/>
+            </a:solidFill>
+          </a:ln>
+        </p:spPr>
+        <p:style>
+          <a:lnRef idx="2">
+            <a:schemeClr val="accent1"/>
+          </a:lnRef>
+          <a:fillRef idx="0">
+            <a:schemeClr val="accent1"/>
+          </a:fillRef>
+          <a:effectRef idx="1">
+            <a:schemeClr val="accent1"/>
+          </a:effectRef>
+          <a:fontRef idx="minor">
+            <a:schemeClr val="tx1"/>
+          </a:fontRef>
+        </p:style>
+      </p:cxnSp>
+      <p:sp>
+        <p:nvSpPr>
+          <p:cNvPr id="20" name="TextBox 19"/>
+          <p:cNvSpPr txBox="1"/>
+          <p:nvPr/>
+        </p:nvSpPr>
+        <p:spPr>
+          <a:xfrm>
+            <a:off x="514350" y="3429000"/>
+            <a:ext cx="8572500" cy="1508760"/>
+          </a:xfrm>
+          <a:prstGeom prst="rect">
+            <a:avLst/>
+          </a:prstGeom>
+          <a:noFill/>
+        </p:spPr>
+        <p:txBody>
+          <a:bodyPr wrap="square" lIns="34290" rIns="34290" anchor="t">
+            <a:spAutoFit/>
+          </a:bodyPr>
+          <a:lstStyle/>
+          <a:p>
+            <a:pPr algn="l">
+              <a:spcAft>
+                <a:spcPts val="600"/>
+              </a:spcAft>
+            </a:pPr>
+            <a:r>
+              <a:rPr sz="1500" b="0" i="0">
+                <a:solidFill>
+                  <a:srgbClr val="1A1A1A"/>
+                </a:solidFill>
+                <a:latin typeface="Calibri"/>
+              </a:rPr>
+              <a:t>• Parent (Node.js) 用 spawn() 開出 Child (Python) 子程序</a:t>
+            </a:r>
+          </a:p>
+          <a:p>
+            <a:pPr algn="l">
+              <a:spcAft>
+                <a:spcPts val="600"/>
+              </a:spcAft>
+            </a:pPr>
+            <a:r>
+              <a:rPr sz="1500" b="0" i="0">
+                <a:solidFill>
+                  <a:srgbClr val="1A1A1A"/>
+                </a:solidFill>
+                <a:latin typeface="Calibri"/>
+              </a:rPr>
+              <a:t>• LLM (Sonnet) 是 Parent 裡的一個 client component — 它住在 Parent 內,不會自己出去呼叫工具</a:t>
+            </a:r>
+          </a:p>
+          <a:p>
+            <a:pPr algn="l">
+              <a:spcAft>
+                <a:spcPts val="0"/>
+              </a:spcAft>
+            </a:pPr>
+            <a:r>
+              <a:rPr sz="1500" b="0" i="0">
+                <a:solidFill>
+                  <a:srgbClr val="1A1A1A"/>
+                </a:solidFill>
+                <a:latin typeface="Calibri"/>
+              </a:rPr>
+              <a:t>• 兩條 stdio pipe 串通 → Parent ⇄ Child 可以雙向講話</a:t>
+            </a:r>
+          </a:p>
+        </p:txBody>
+      </p:sp>
+    </p:spTree>
+  </p:cSld>
+  <p:clrMapOvr>
+    <a:masterClrMapping/>
+  </p:clrMapOvr>
+</p:sld>
+</file>
+
+<file path=ppt/slides/slide24.xml><?xml version="1.0" encoding="utf-8"?>
+<p:sld xmlns:a="http://schemas.openxmlformats.org/drawingml/2006/main" xmlns:p="http://schemas.openxmlformats.org/presentationml/2006/main" xmlns:r="http://schemas.openxmlformats.org/officeDocument/2006/relationships">
+  <p:cSld>
+    <p:spTree>
+      <p:nvGrpSpPr>
+        <p:cNvPr id="1" name=""/>
+        <p:cNvGrpSpPr/>
+        <p:nvPr/>
+      </p:nvGrpSpPr>
+      <p:grpSpPr/>
+      <p:sp>
+        <p:nvSpPr>
+          <p:cNvPr id="2" name="Rectangle 1"/>
+          <p:cNvSpPr/>
+          <p:nvPr/>
+        </p:nvSpPr>
+        <p:spPr>
+          <a:xfrm>
+            <a:off x="0" y="0"/>
+            <a:ext cx="9144000" cy="5143500"/>
+          </a:xfrm>
+          <a:prstGeom prst="rect">
+            <a:avLst/>
+          </a:prstGeom>
+          <a:solidFill>
+            <a:srgbClr val="FFFFFF"/>
+          </a:solidFill>
+          <a:ln>
+            <a:noFill/>
+          </a:ln>
+        </p:spPr>
+        <p:style>
+          <a:lnRef idx="1">
+            <a:schemeClr val="accent1"/>
+          </a:lnRef>
+          <a:fillRef idx="3">
+            <a:schemeClr val="accent1"/>
+          </a:fillRef>
+          <a:effectRef idx="2">
+            <a:schemeClr val="accent1"/>
+          </a:effectRef>
+          <a:fontRef idx="minor">
+            <a:schemeClr val="lt1"/>
+          </a:fontRef>
+        </p:style>
+        <p:txBody>
+          <a:bodyPr rtlCol="0" anchor="ctr"/>
+          <a:lstStyle/>
+          <a:p>
+            <a:pPr algn="ctr"/>
+          </a:p>
+        </p:txBody>
+      </p:sp>
+      <p:sp>
+        <p:nvSpPr>
+          <p:cNvPr id="3" name="TextBox 2"/>
+          <p:cNvSpPr txBox="1"/>
+          <p:nvPr/>
+        </p:nvSpPr>
+        <p:spPr>
+          <a:xfrm>
+            <a:off x="514350" y="274320"/>
+            <a:ext cx="8229600" cy="480059"/>
+          </a:xfrm>
+          <a:prstGeom prst="rect">
+            <a:avLst/>
+          </a:prstGeom>
+          <a:noFill/>
+        </p:spPr>
+        <p:txBody>
+          <a:bodyPr wrap="square" lIns="34290" rIns="34290" tIns="13716" bIns="13716" anchor="t">
+            <a:spAutoFit/>
+          </a:bodyPr>
+          <a:lstStyle/>
+          <a:p>
+            <a:pPr algn="l"/>
+            <a:r>
+              <a:rPr sz="2100" b="1" i="0">
+                <a:solidFill>
+                  <a:srgbClr val="1E2761"/>
+                </a:solidFill>
+                <a:latin typeface="Arial Black"/>
+              </a:rPr>
+              <a:t>Act 2 — 兩階段握手</a:t>
+            </a:r>
+          </a:p>
+        </p:txBody>
+      </p:sp>
+      <p:sp>
+        <p:nvSpPr>
+          <p:cNvPr id="4" name="Rectangle 3"/>
+          <p:cNvSpPr/>
+          <p:nvPr/>
+        </p:nvSpPr>
+        <p:spPr>
+          <a:xfrm>
+            <a:off x="514350" y="822959"/>
+            <a:ext cx="2057400" cy="27432"/>
+          </a:xfrm>
+          <a:prstGeom prst="rect">
+            <a:avLst/>
+          </a:prstGeom>
+          <a:solidFill>
+            <a:srgbClr val="E8793A"/>
+          </a:solidFill>
+          <a:ln>
+            <a:noFill/>
+          </a:ln>
+          <a:effectLst/>
+        </p:spPr>
+        <p:style>
+          <a:lnRef idx="1">
+            <a:schemeClr val="accent1"/>
+          </a:lnRef>
+          <a:fillRef idx="3">
+            <a:schemeClr val="accent1"/>
+          </a:fillRef>
+          <a:effectRef idx="2">
+            <a:schemeClr val="accent1"/>
+          </a:effectRef>
+          <a:fontRef idx="minor">
+            <a:schemeClr val="lt1"/>
+          </a:fontRef>
+        </p:style>
+        <p:txBody>
+          <a:bodyPr rtlCol="0" anchor="ctr"/>
+          <a:lstStyle/>
+          <a:p>
+            <a:pPr algn="ctr"/>
+          </a:p>
+        </p:txBody>
+      </p:sp>
+      <p:sp>
+        <p:nvSpPr>
+          <p:cNvPr id="5" name="Rounded Rectangle 4"/>
+          <p:cNvSpPr/>
+          <p:nvPr/>
+        </p:nvSpPr>
+        <p:spPr>
+          <a:xfrm>
+            <a:off x="589788" y="1412748"/>
+            <a:ext cx="2743200" cy="1028700"/>
+          </a:xfrm>
+          <a:prstGeom prst="roundRect">
+            <a:avLst>
+              <a:gd name="adj" fmla="val 14000"/>
+            </a:avLst>
+          </a:prstGeom>
+          <a:solidFill>
+            <a:srgbClr val="000000"/>
+          </a:solidFill>
+          <a:ln>
+            <a:noFill/>
+          </a:ln>
+          <a:effectLst/>
+        </p:spPr>
+        <p:style>
+          <a:lnRef idx="1">
+            <a:schemeClr val="accent1"/>
+          </a:lnRef>
+          <a:fillRef idx="3">
+            <a:schemeClr val="accent1"/>
+          </a:fillRef>
+          <a:effectRef idx="2">
+            <a:schemeClr val="accent1"/>
+          </a:effectRef>
+          <a:fontRef idx="minor">
+            <a:schemeClr val="lt1"/>
+          </a:fontRef>
+        </p:style>
+        <p:txBody>
+          <a:bodyPr rtlCol="0" anchor="ctr"/>
+          <a:lstStyle/>
+          <a:p>
+            <a:pPr algn="ctr"/>
+          </a:p>
+        </p:txBody>
+      </p:sp>
+      <p:sp>
+        <p:nvSpPr>
+          <p:cNvPr id="6" name="Rounded Rectangle 5"/>
+          <p:cNvSpPr/>
+          <p:nvPr/>
+        </p:nvSpPr>
+        <p:spPr>
+          <a:xfrm>
+            <a:off x="548640" y="1371600"/>
+            <a:ext cx="2743200" cy="1028700"/>
+          </a:xfrm>
+          <a:prstGeom prst="roundRect">
+            <a:avLst>
+              <a:gd name="adj" fmla="val 14000"/>
+            </a:avLst>
+          </a:prstGeom>
+          <a:solidFill>
+            <a:srgbClr val="FFFFFF"/>
+          </a:solidFill>
+          <a:ln w="23812">
+            <a:solidFill>
+              <a:srgbClr val="5B8DE8"/>
+            </a:solidFill>
+          </a:ln>
+          <a:effectLst/>
+        </p:spPr>
+        <p:style>
+          <a:lnRef idx="1">
+            <a:schemeClr val="accent1"/>
+          </a:lnRef>
+          <a:fillRef idx="3">
+            <a:schemeClr val="accent1"/>
+          </a:fillRef>
+          <a:effectRef idx="2">
+            <a:schemeClr val="accent1"/>
+          </a:effectRef>
+          <a:fontRef idx="minor">
+            <a:schemeClr val="lt1"/>
+          </a:fontRef>
+        </p:style>
+        <p:txBody>
+          <a:bodyPr rtlCol="0" anchor="ctr"/>
+          <a:lstStyle/>
+          <a:p>
+            <a:pPr algn="ctr"/>
+          </a:p>
+        </p:txBody>
+      </p:sp>
+      <p:sp>
+        <p:nvSpPr>
+          <p:cNvPr id="7" name="Rectangle 6"/>
+          <p:cNvSpPr/>
+          <p:nvPr/>
+        </p:nvSpPr>
+        <p:spPr>
+          <a:xfrm>
+            <a:off x="582930" y="1405889"/>
+            <a:ext cx="2674620" cy="411479"/>
+          </a:xfrm>
+          <a:prstGeom prst="rect">
+            <a:avLst/>
+          </a:prstGeom>
+          <a:solidFill>
+            <a:srgbClr val="5B8DE8"/>
+          </a:solidFill>
+          <a:ln>
+            <a:noFill/>
+          </a:ln>
+          <a:effectLst/>
+        </p:spPr>
+        <p:style>
+          <a:lnRef idx="1">
+            <a:schemeClr val="accent1"/>
+          </a:lnRef>
+          <a:fillRef idx="3">
+            <a:schemeClr val="accent1"/>
+          </a:fillRef>
+          <a:effectRef idx="2">
+            <a:schemeClr val="accent1"/>
+          </a:effectRef>
+          <a:fontRef idx="minor">
+            <a:schemeClr val="lt1"/>
+          </a:fontRef>
+        </p:style>
+        <p:txBody>
+          <a:bodyPr rtlCol="0" anchor="ctr"/>
+          <a:lstStyle/>
+          <a:p>
+            <a:pPr algn="ctr"/>
+          </a:p>
+        </p:txBody>
+      </p:sp>
+      <p:sp>
+        <p:nvSpPr>
+          <p:cNvPr id="8" name="TextBox 7"/>
+          <p:cNvSpPr txBox="1"/>
+          <p:nvPr/>
+        </p:nvSpPr>
+        <p:spPr>
+          <a:xfrm>
+            <a:off x="582930" y="1405889"/>
+            <a:ext cx="2674620" cy="411479"/>
+          </a:xfrm>
+          <a:prstGeom prst="rect">
+            <a:avLst/>
+          </a:prstGeom>
+          <a:noFill/>
+        </p:spPr>
+        <p:txBody>
+          <a:bodyPr wrap="square" lIns="34290" rIns="34290" tIns="13716" bIns="13716" anchor="ctr">
+            <a:spAutoFit/>
+          </a:bodyPr>
+          <a:lstStyle/>
+          <a:p>
+            <a:pPr algn="ctr"/>
+            <a:r>
+              <a:rPr sz="1500" b="1" i="0">
+                <a:solidFill>
+                  <a:srgbClr val="FFFFFF"/>
+                </a:solidFill>
+                <a:latin typeface="Arial Black"/>
+              </a:rPr>
+              <a:t>Parent</a:t>
+            </a:r>
+          </a:p>
+        </p:txBody>
+      </p:sp>
+      <p:sp>
+        <p:nvSpPr>
+          <p:cNvPr id="9" name="TextBox 8"/>
+          <p:cNvSpPr txBox="1"/>
+          <p:nvPr/>
+        </p:nvSpPr>
+        <p:spPr>
+          <a:xfrm>
+            <a:off x="582930" y="1885950"/>
+            <a:ext cx="2674620" cy="411480"/>
+          </a:xfrm>
+          <a:prstGeom prst="rect">
+            <a:avLst/>
+          </a:prstGeom>
+          <a:noFill/>
+        </p:spPr>
+        <p:txBody>
+          <a:bodyPr wrap="square" lIns="34290" rIns="34290" tIns="13716" bIns="13716" anchor="ctr">
+            <a:spAutoFit/>
+          </a:bodyPr>
+          <a:lstStyle/>
+          <a:p>
+            <a:pPr algn="ctr"/>
+            <a:r>
+              <a:rPr sz="1050" b="0" i="0">
+                <a:solidFill>
+                  <a:srgbClr val="6B6B6B"/>
+                </a:solidFill>
+                <a:latin typeface="Consolas"/>
+              </a:rPr>
+              <a:t>Node.js</a:t>
+            </a:r>
+          </a:p>
+        </p:txBody>
+      </p:sp>
+      <p:sp>
+        <p:nvSpPr>
+          <p:cNvPr id="10" name="Rounded Rectangle 9"/>
+          <p:cNvSpPr/>
+          <p:nvPr/>
+        </p:nvSpPr>
+        <p:spPr>
+          <a:xfrm>
+            <a:off x="589788" y="2990087"/>
+            <a:ext cx="2743200" cy="1028700"/>
+          </a:xfrm>
+          <a:prstGeom prst="roundRect">
+            <a:avLst>
+              <a:gd name="adj" fmla="val 14000"/>
+            </a:avLst>
+          </a:prstGeom>
+          <a:solidFill>
+            <a:srgbClr val="000000"/>
+          </a:solidFill>
+          <a:ln>
+            <a:noFill/>
+          </a:ln>
+          <a:effectLst/>
+        </p:spPr>
+        <p:style>
+          <a:lnRef idx="1">
+            <a:schemeClr val="accent1"/>
+          </a:lnRef>
+          <a:fillRef idx="3">
+            <a:schemeClr val="accent1"/>
+          </a:fillRef>
+          <a:effectRef idx="2">
+            <a:schemeClr val="accent1"/>
+          </a:effectRef>
+          <a:fontRef idx="minor">
+            <a:schemeClr val="lt1"/>
+          </a:fontRef>
+        </p:style>
+        <p:txBody>
+          <a:bodyPr rtlCol="0" anchor="ctr"/>
+          <a:lstStyle/>
+          <a:p>
+            <a:pPr algn="ctr"/>
+          </a:p>
+        </p:txBody>
+      </p:sp>
+      <p:sp>
+        <p:nvSpPr>
+          <p:cNvPr id="11" name="Rounded Rectangle 10"/>
+          <p:cNvSpPr/>
+          <p:nvPr/>
+        </p:nvSpPr>
+        <p:spPr>
+          <a:xfrm>
+            <a:off x="548640" y="2948939"/>
+            <a:ext cx="2743200" cy="1028700"/>
+          </a:xfrm>
+          <a:prstGeom prst="roundRect">
+            <a:avLst>
+              <a:gd name="adj" fmla="val 14000"/>
+            </a:avLst>
+          </a:prstGeom>
+          <a:solidFill>
+            <a:srgbClr val="FFFFFF"/>
+          </a:solidFill>
+          <a:ln w="23812">
+            <a:solidFill>
+              <a:srgbClr val="2DB5C9"/>
+            </a:solidFill>
+          </a:ln>
+          <a:effectLst/>
+        </p:spPr>
+        <p:style>
+          <a:lnRef idx="1">
+            <a:schemeClr val="accent1"/>
+          </a:lnRef>
+          <a:fillRef idx="3">
+            <a:schemeClr val="accent1"/>
+          </a:fillRef>
+          <a:effectRef idx="2">
+            <a:schemeClr val="accent1"/>
+          </a:effectRef>
+          <a:fontRef idx="minor">
+            <a:schemeClr val="lt1"/>
+          </a:fontRef>
+        </p:style>
+        <p:txBody>
+          <a:bodyPr rtlCol="0" anchor="ctr"/>
+          <a:lstStyle/>
+          <a:p>
+            <a:pPr algn="ctr"/>
+          </a:p>
+        </p:txBody>
+      </p:sp>
+      <p:sp>
+        <p:nvSpPr>
+          <p:cNvPr id="12" name="Rectangle 11"/>
+          <p:cNvSpPr/>
+          <p:nvPr/>
+        </p:nvSpPr>
+        <p:spPr>
+          <a:xfrm>
+            <a:off x="582930" y="2983229"/>
+            <a:ext cx="2674620" cy="411479"/>
+          </a:xfrm>
+          <a:prstGeom prst="rect">
+            <a:avLst/>
+          </a:prstGeom>
+          <a:solidFill>
+            <a:srgbClr val="2DB5C9"/>
+          </a:solidFill>
+          <a:ln>
+            <a:noFill/>
+          </a:ln>
+          <a:effectLst/>
+        </p:spPr>
+        <p:style>
+          <a:lnRef idx="1">
+            <a:schemeClr val="accent1"/>
+          </a:lnRef>
+          <a:fillRef idx="3">
+            <a:schemeClr val="accent1"/>
+          </a:fillRef>
+          <a:effectRef idx="2">
+            <a:schemeClr val="accent1"/>
+          </a:effectRef>
+          <a:fontRef idx="minor">
+            <a:schemeClr val="lt1"/>
+          </a:fontRef>
+        </p:style>
+        <p:txBody>
+          <a:bodyPr rtlCol="0" anchor="ctr"/>
+          <a:lstStyle/>
+          <a:p>
+            <a:pPr algn="ctr"/>
+          </a:p>
+        </p:txBody>
+      </p:sp>
+      <p:sp>
+        <p:nvSpPr>
+          <p:cNvPr id="13" name="TextBox 12"/>
+          <p:cNvSpPr txBox="1"/>
+          <p:nvPr/>
+        </p:nvSpPr>
+        <p:spPr>
+          <a:xfrm>
+            <a:off x="582930" y="2983229"/>
+            <a:ext cx="2674620" cy="411479"/>
+          </a:xfrm>
+          <a:prstGeom prst="rect">
+            <a:avLst/>
+          </a:prstGeom>
+          <a:noFill/>
+        </p:spPr>
+        <p:txBody>
+          <a:bodyPr wrap="square" lIns="34290" rIns="34290" tIns="13716" bIns="13716" anchor="ctr">
+            <a:spAutoFit/>
+          </a:bodyPr>
+          <a:lstStyle/>
+          <a:p>
+            <a:pPr algn="ctr"/>
+            <a:r>
+              <a:rPr sz="1500" b="1" i="0">
+                <a:solidFill>
+                  <a:srgbClr val="FFFFFF"/>
+                </a:solidFill>
+                <a:latin typeface="Arial Black"/>
+              </a:rPr>
+              <a:t>Child</a:t>
+            </a:r>
+          </a:p>
+        </p:txBody>
+      </p:sp>
+      <p:sp>
+        <p:nvSpPr>
+          <p:cNvPr id="14" name="TextBox 13"/>
+          <p:cNvSpPr txBox="1"/>
+          <p:nvPr/>
+        </p:nvSpPr>
+        <p:spPr>
+          <a:xfrm>
+            <a:off x="582930" y="3463289"/>
+            <a:ext cx="2674620" cy="411480"/>
+          </a:xfrm>
+          <a:prstGeom prst="rect">
+            <a:avLst/>
+          </a:prstGeom>
+          <a:noFill/>
+        </p:spPr>
+        <p:txBody>
+          <a:bodyPr wrap="square" lIns="34290" rIns="34290" tIns="13716" bIns="13716" anchor="ctr">
+            <a:spAutoFit/>
+          </a:bodyPr>
+          <a:lstStyle/>
+          <a:p>
+            <a:pPr algn="ctr"/>
+            <a:r>
+              <a:rPr sz="1050" b="0" i="0">
+                <a:solidFill>
+                  <a:srgbClr val="6B6B6B"/>
+                </a:solidFill>
+                <a:latin typeface="Consolas"/>
+              </a:rPr>
+              <a:t>Python</a:t>
+            </a:r>
+          </a:p>
+        </p:txBody>
+      </p:sp>
+      <p:cxnSp>
+        <p:nvCxnSpPr>
+          <p:cNvPr id="15" name="Connector 14"/>
+          <p:cNvCxnSpPr/>
+          <p:nvPr/>
+        </p:nvCxnSpPr>
+        <p:spPr>
+          <a:xfrm>
+            <a:off x="1920239" y="2400300"/>
+            <a:ext cx="0" cy="548639"/>
+          </a:xfrm>
+          <a:prstGeom prst="line">
+            <a:avLst/>
+          </a:prstGeom>
+          <a:ln w="28575">
+            <a:solidFill>
+              <a:srgbClr val="E8793A"/>
+            </a:solidFill>
+            <a:tailEnd type="triangle" w="med" len="med"/>
+          </a:ln>
+        </p:spPr>
+        <p:style>
+          <a:lnRef idx="2">
+            <a:schemeClr val="accent1"/>
+          </a:lnRef>
+          <a:fillRef idx="0">
+            <a:schemeClr val="accent1"/>
+          </a:fillRef>
+          <a:effectRef idx="1">
+            <a:schemeClr val="accent1"/>
+          </a:effectRef>
+          <a:fontRef idx="minor">
+            <a:schemeClr val="tx1"/>
+          </a:fontRef>
+        </p:style>
+      </p:cxnSp>
+      <p:cxnSp>
+        <p:nvCxnSpPr>
+          <p:cNvPr id="16" name="Connector 15"/>
+          <p:cNvCxnSpPr/>
+          <p:nvPr/>
+        </p:nvCxnSpPr>
+        <p:spPr>
+          <a:xfrm>
+            <a:off x="1920239" y="3977639"/>
+            <a:ext cx="0" cy="480061"/>
+          </a:xfrm>
+          <a:prstGeom prst="line">
+            <a:avLst/>
+          </a:prstGeom>
+          <a:ln w="28575">
+            <a:solidFill>
+              <a:srgbClr val="5CB85C"/>
+            </a:solidFill>
+            <a:tailEnd type="triangle" w="med" len="med"/>
+          </a:ln>
+        </p:spPr>
+        <p:style>
+          <a:lnRef idx="2">
+            <a:schemeClr val="accent1"/>
+          </a:lnRef>
+          <a:fillRef idx="0">
+            <a:schemeClr val="accent1"/>
+          </a:fillRef>
+          <a:effectRef idx="1">
+            <a:schemeClr val="accent1"/>
+          </a:effectRef>
+          <a:fontRef idx="minor">
+            <a:schemeClr val="tx1"/>
+          </a:fontRef>
+        </p:style>
+      </p:cxnSp>
+      <p:sp>
+        <p:nvSpPr>
+          <p:cNvPr id="17" name="TextBox 16"/>
+          <p:cNvSpPr txBox="1"/>
+          <p:nvPr/>
+        </p:nvSpPr>
+        <p:spPr>
+          <a:xfrm>
+            <a:off x="3429000" y="2503170"/>
+            <a:ext cx="2743200" cy="274320"/>
+          </a:xfrm>
+          <a:prstGeom prst="rect">
+            <a:avLst/>
+          </a:prstGeom>
+          <a:noFill/>
+        </p:spPr>
+        <p:txBody>
+          <a:bodyPr wrap="square" lIns="34290" rIns="34290" tIns="13716" bIns="13716" anchor="t">
+            <a:spAutoFit/>
+          </a:bodyPr>
+          <a:lstStyle/>
+          <a:p>
+            <a:pPr algn="l"/>
+            <a:r>
+              <a:rPr sz="1125" b="1" i="0">
+                <a:solidFill>
+                  <a:srgbClr val="E8793A"/>
+                </a:solidFill>
+                <a:latin typeface="Calibri"/>
+              </a:rPr>
+              <a:t>→ 我來了 / 給我工具清單</a:t>
+            </a:r>
+          </a:p>
+        </p:txBody>
+      </p:sp>
+      <p:sp>
+        <p:nvSpPr>
+          <p:cNvPr id="18" name="TextBox 17"/>
+          <p:cNvSpPr txBox="1"/>
+          <p:nvPr/>
+        </p:nvSpPr>
+        <p:spPr>
+          <a:xfrm>
+            <a:off x="3429000" y="4011929"/>
+            <a:ext cx="2743200" cy="274320"/>
+          </a:xfrm>
+          <a:prstGeom prst="rect">
+            <a:avLst/>
+          </a:prstGeom>
+          <a:noFill/>
+        </p:spPr>
+        <p:txBody>
+          <a:bodyPr wrap="square" lIns="34290" rIns="34290" tIns="13716" bIns="13716" anchor="t">
+            <a:spAutoFit/>
+          </a:bodyPr>
+          <a:lstStyle/>
+          <a:p>
+            <a:pPr algn="l"/>
+            <a:r>
+              <a:rPr sz="1125" b="1" i="0">
+                <a:solidFill>
+                  <a:srgbClr val="5CB85C"/>
+                </a:solidFill>
+                <a:latin typeface="Calibri"/>
+              </a:rPr>
+              <a:t>← 我能做什麼 / 8 個工具</a:t>
+            </a:r>
+          </a:p>
+        </p:txBody>
+      </p:sp>
+      <p:sp>
+        <p:nvSpPr>
+          <p:cNvPr id="19" name="Rounded Rectangle 18"/>
+          <p:cNvSpPr/>
+          <p:nvPr/>
+        </p:nvSpPr>
+        <p:spPr>
+          <a:xfrm>
+            <a:off x="5486400" y="1371600"/>
+            <a:ext cx="3223260" cy="2606039"/>
+          </a:xfrm>
+          <a:prstGeom prst="roundRect">
+            <a:avLst>
+              <a:gd name="adj" fmla="val 12000"/>
+            </a:avLst>
+          </a:prstGeom>
+          <a:solidFill>
+            <a:srgbClr val="E8EDF3"/>
+          </a:solidFill>
+          <a:ln w="14287">
+            <a:solidFill>
+              <a:srgbClr val="6B6B6B"/>
+            </a:solidFill>
+          </a:ln>
+          <a:effectLst/>
+        </p:spPr>
+        <p:style>
+          <a:lnRef idx="1">
+            <a:schemeClr val="accent1"/>
+          </a:lnRef>
+          <a:fillRef idx="3">
+            <a:schemeClr val="accent1"/>
+          </a:fillRef>
+          <a:effectRef idx="2">
+            <a:schemeClr val="accent1"/>
+          </a:effectRef>
+          <a:fontRef idx="minor">
+            <a:schemeClr val="lt1"/>
+          </a:fontRef>
+        </p:style>
+        <p:txBody>
+          <a:bodyPr rtlCol="0" anchor="ctr"/>
+          <a:lstStyle/>
+          <a:p>
+            <a:pPr algn="ctr"/>
+          </a:p>
+        </p:txBody>
+      </p:sp>
+      <p:sp>
+        <p:nvSpPr>
+          <p:cNvPr id="20" name="TextBox 19"/>
+          <p:cNvSpPr txBox="1"/>
+          <p:nvPr/>
+        </p:nvSpPr>
+        <p:spPr>
+          <a:xfrm>
+            <a:off x="5692140" y="1508760"/>
+            <a:ext cx="2811780" cy="342900"/>
+          </a:xfrm>
+          <a:prstGeom prst="rect">
+            <a:avLst/>
+          </a:prstGeom>
+          <a:noFill/>
+        </p:spPr>
+        <p:txBody>
+          <a:bodyPr wrap="square" lIns="34290" rIns="34290" tIns="13716" bIns="13716" anchor="t">
+            <a:spAutoFit/>
+          </a:bodyPr>
+          <a:lstStyle/>
+          <a:p>
+            <a:pPr algn="l"/>
+            <a:r>
+              <a:rPr sz="1350" b="1" i="0">
+                <a:solidFill>
+                  <a:srgbClr val="1E2761"/>
+                </a:solidFill>
+                <a:latin typeface="Arial Black"/>
+              </a:rPr>
+              <a:t>握手進度</a:t>
+            </a:r>
+          </a:p>
+        </p:txBody>
+      </p:sp>
+      <p:sp>
+        <p:nvSpPr>
+          <p:cNvPr id="21" name="Rounded Rectangle 20"/>
+          <p:cNvSpPr/>
+          <p:nvPr/>
+        </p:nvSpPr>
+        <p:spPr>
+          <a:xfrm>
+            <a:off x="5760720" y="1988819"/>
+            <a:ext cx="342900" cy="342900"/>
+          </a:xfrm>
+          <a:prstGeom prst="roundRect">
+            <a:avLst>
+              <a:gd name="adj" fmla="val 12000"/>
+            </a:avLst>
+          </a:prstGeom>
+          <a:solidFill>
+            <a:srgbClr val="5CB85C"/>
+          </a:solidFill>
+          <a:ln w="19050">
+            <a:solidFill>
+              <a:srgbClr val="5CB85C"/>
+            </a:solidFill>
+          </a:ln>
+          <a:effectLst/>
+        </p:spPr>
+        <p:style>
+          <a:lnRef idx="1">
+            <a:schemeClr val="accent1"/>
+          </a:lnRef>
+          <a:fillRef idx="3">
+            <a:schemeClr val="accent1"/>
+          </a:fillRef>
+          <a:effectRef idx="2">
+            <a:schemeClr val="accent1"/>
+          </a:effectRef>
+          <a:fontRef idx="minor">
+            <a:schemeClr val="lt1"/>
+          </a:fontRef>
+        </p:style>
+        <p:txBody>
+          <a:bodyPr rtlCol="0" anchor="ctr"/>
+          <a:lstStyle/>
+          <a:p>
+            <a:pPr algn="ctr"/>
+          </a:p>
+        </p:txBody>
+      </p:sp>
+      <p:sp>
+        <p:nvSpPr>
+          <p:cNvPr id="22" name="TextBox 21"/>
+          <p:cNvSpPr txBox="1"/>
+          <p:nvPr/>
+        </p:nvSpPr>
+        <p:spPr>
+          <a:xfrm>
+            <a:off x="5760720" y="1988819"/>
+            <a:ext cx="342900" cy="342900"/>
+          </a:xfrm>
+          <a:prstGeom prst="rect">
+            <a:avLst/>
+          </a:prstGeom>
+          <a:noFill/>
+        </p:spPr>
+        <p:txBody>
+          <a:bodyPr wrap="square" lIns="34290" rIns="34290" tIns="13716" bIns="13716" anchor="ctr">
+            <a:spAutoFit/>
+          </a:bodyPr>
+          <a:lstStyle/>
+          <a:p>
+            <a:pPr algn="ctr"/>
+            <a:r>
+              <a:rPr sz="1650" b="1" i="0">
+                <a:solidFill>
+                  <a:srgbClr val="FFFFFF"/>
+                </a:solidFill>
+                <a:latin typeface="Arial Black"/>
+              </a:rPr>
+              <a:t>✓</a:t>
+            </a:r>
+          </a:p>
+        </p:txBody>
+      </p:sp>
+      <p:sp>
+        <p:nvSpPr>
+          <p:cNvPr id="23" name="TextBox 22"/>
+          <p:cNvSpPr txBox="1"/>
+          <p:nvPr/>
+        </p:nvSpPr>
+        <p:spPr>
+          <a:xfrm>
+            <a:off x="6240779" y="1988819"/>
+            <a:ext cx="2400300" cy="342900"/>
+          </a:xfrm>
+          <a:prstGeom prst="rect">
+            <a:avLst/>
+          </a:prstGeom>
+          <a:noFill/>
+        </p:spPr>
+        <p:txBody>
+          <a:bodyPr wrap="square" lIns="34290" rIns="34290" tIns="13716" bIns="13716" anchor="ctr">
+            <a:spAutoFit/>
+          </a:bodyPr>
+          <a:lstStyle/>
+          <a:p>
+            <a:pPr algn="l"/>
+            <a:r>
+              <a:rPr sz="1500" b="1" i="0">
+                <a:solidFill>
+                  <a:srgbClr val="5CB85C"/>
+                </a:solidFill>
+                <a:latin typeface="Calibri"/>
+              </a:rPr>
+              <a:t>Step 1:打過招呼</a:t>
+            </a:r>
+          </a:p>
+        </p:txBody>
+      </p:sp>
+      <p:sp>
+        <p:nvSpPr>
+          <p:cNvPr id="24" name="Rounded Rectangle 23"/>
+          <p:cNvSpPr/>
+          <p:nvPr/>
+        </p:nvSpPr>
+        <p:spPr>
+          <a:xfrm>
+            <a:off x="5760720" y="2640329"/>
+            <a:ext cx="342900" cy="342900"/>
+          </a:xfrm>
+          <a:prstGeom prst="roundRect">
+            <a:avLst>
+              <a:gd name="adj" fmla="val 12000"/>
+            </a:avLst>
+          </a:prstGeom>
+          <a:solidFill>
+            <a:srgbClr val="5CB85C"/>
+          </a:solidFill>
+          <a:ln w="19050">
+            <a:solidFill>
+              <a:srgbClr val="5CB85C"/>
+            </a:solidFill>
+          </a:ln>
+          <a:effectLst/>
+        </p:spPr>
+        <p:style>
+          <a:lnRef idx="1">
+            <a:schemeClr val="accent1"/>
+          </a:lnRef>
+          <a:fillRef idx="3">
+            <a:schemeClr val="accent1"/>
+          </a:fillRef>
+          <a:effectRef idx="2">
+            <a:schemeClr val="accent1"/>
+          </a:effectRef>
+          <a:fontRef idx="minor">
+            <a:schemeClr val="lt1"/>
+          </a:fontRef>
+        </p:style>
+        <p:txBody>
+          <a:bodyPr rtlCol="0" anchor="ctr"/>
+          <a:lstStyle/>
+          <a:p>
+            <a:pPr algn="ctr"/>
+          </a:p>
+        </p:txBody>
+      </p:sp>
+      <p:sp>
+        <p:nvSpPr>
+          <p:cNvPr id="25" name="TextBox 24"/>
+          <p:cNvSpPr txBox="1"/>
+          <p:nvPr/>
+        </p:nvSpPr>
+        <p:spPr>
+          <a:xfrm>
+            <a:off x="5760720" y="2640329"/>
+            <a:ext cx="342900" cy="342900"/>
+          </a:xfrm>
+          <a:prstGeom prst="rect">
+            <a:avLst/>
+          </a:prstGeom>
+          <a:noFill/>
+        </p:spPr>
+        <p:txBody>
+          <a:bodyPr wrap="square" lIns="34290" rIns="34290" tIns="13716" bIns="13716" anchor="ctr">
+            <a:spAutoFit/>
+          </a:bodyPr>
+          <a:lstStyle/>
+          <a:p>
+            <a:pPr algn="ctr"/>
+            <a:r>
+              <a:rPr sz="1650" b="1" i="0">
+                <a:solidFill>
+                  <a:srgbClr val="FFFFFF"/>
+                </a:solidFill>
+                <a:latin typeface="Arial Black"/>
+              </a:rPr>
+              <a:t>✓</a:t>
+            </a:r>
+          </a:p>
+        </p:txBody>
+      </p:sp>
+      <p:sp>
+        <p:nvSpPr>
+          <p:cNvPr id="26" name="TextBox 25"/>
+          <p:cNvSpPr txBox="1"/>
+          <p:nvPr/>
+        </p:nvSpPr>
+        <p:spPr>
+          <a:xfrm>
+            <a:off x="6240779" y="2640329"/>
+            <a:ext cx="2400300" cy="342900"/>
+          </a:xfrm>
+          <a:prstGeom prst="rect">
+            <a:avLst/>
+          </a:prstGeom>
+          <a:noFill/>
+        </p:spPr>
+        <p:txBody>
+          <a:bodyPr wrap="square" lIns="34290" rIns="34290" tIns="13716" bIns="13716" anchor="ctr">
+            <a:spAutoFit/>
+          </a:bodyPr>
+          <a:lstStyle/>
+          <a:p>
+            <a:pPr algn="l"/>
+            <a:r>
+              <a:rPr sz="1500" b="1" i="0">
+                <a:solidFill>
+                  <a:srgbClr val="5CB85C"/>
+                </a:solidFill>
+                <a:latin typeface="Calibri"/>
+              </a:rPr>
+              <a:t>Step 2:拿到工具清單</a:t>
+            </a:r>
+          </a:p>
+        </p:txBody>
+      </p:sp>
+      <p:sp>
+        <p:nvSpPr>
+          <p:cNvPr id="27" name="TextBox 26"/>
+          <p:cNvSpPr txBox="1"/>
+          <p:nvPr/>
+        </p:nvSpPr>
+        <p:spPr>
+          <a:xfrm>
+            <a:off x="5692140" y="3291839"/>
+            <a:ext cx="2811780" cy="411479"/>
+          </a:xfrm>
+          <a:prstGeom prst="rect">
+            <a:avLst/>
+          </a:prstGeom>
+          <a:noFill/>
+        </p:spPr>
+        <p:txBody>
+          <a:bodyPr wrap="square" lIns="34290" rIns="34290" tIns="13716" bIns="13716" anchor="ctr">
+            <a:spAutoFit/>
+          </a:bodyPr>
+          <a:lstStyle/>
+          <a:p>
+            <a:pPr algn="ctr"/>
+            <a:r>
+              <a:rPr sz="1350" b="1" i="1">
+                <a:solidFill>
+                  <a:srgbClr val="1E2761"/>
+                </a:solidFill>
+                <a:latin typeface="Calibri"/>
+              </a:rPr>
+              <a:t>兩個都打勾 才算真的連上</a:t>
+            </a:r>
+          </a:p>
+        </p:txBody>
+      </p:sp>
+      <p:sp>
+        <p:nvSpPr>
+          <p:cNvPr id="28" name="TextBox 27"/>
+          <p:cNvSpPr txBox="1"/>
+          <p:nvPr/>
+        </p:nvSpPr>
+        <p:spPr>
+          <a:xfrm>
+            <a:off x="514350" y="4389120"/>
+            <a:ext cx="8572500" cy="342900"/>
+          </a:xfrm>
+          <a:prstGeom prst="rect">
+            <a:avLst/>
+          </a:prstGeom>
+          <a:noFill/>
+        </p:spPr>
+        <p:txBody>
+          <a:bodyPr wrap="square" lIns="34290" rIns="34290" tIns="13716" bIns="13716" anchor="t">
+            <a:spAutoFit/>
+          </a:bodyPr>
+          <a:lstStyle/>
+          <a:p>
+            <a:pPr algn="ctr"/>
+            <a:r>
+              <a:rPr sz="1350" b="0" i="1">
+                <a:solidFill>
+                  <a:srgbClr val="6B6B6B"/>
+                </a:solidFill>
+                <a:latin typeface="Calibri"/>
+              </a:rPr>
+              <a:t>重點:中間時刻(Step 1 ✓ 但 Step 2 ✗)Parent 還不知道工具清單,送 tool call 也沒用</a:t>
+            </a:r>
+          </a:p>
+        </p:txBody>
+      </p:sp>
+    </p:spTree>
+  </p:cSld>
+  <p:clrMapOvr>
+    <a:masterClrMapping/>
+  </p:clrMapOvr>
+</p:sld>
+</file>
+
+<file path=ppt/slides/slide25.xml><?xml version="1.0" encoding="utf-8"?>
+<p:sld xmlns:a="http://schemas.openxmlformats.org/drawingml/2006/main" xmlns:p="http://schemas.openxmlformats.org/presentationml/2006/main" xmlns:r="http://schemas.openxmlformats.org/officeDocument/2006/relationships">
+  <p:cSld>
+    <p:spTree>
+      <p:nvGrpSpPr>
+        <p:cNvPr id="1" name=""/>
+        <p:cNvGrpSpPr/>
+        <p:nvPr/>
+      </p:nvGrpSpPr>
+      <p:grpSpPr/>
+      <p:sp>
+        <p:nvSpPr>
+          <p:cNvPr id="2" name="Rectangle 1"/>
+          <p:cNvSpPr/>
+          <p:nvPr/>
+        </p:nvSpPr>
+        <p:spPr>
+          <a:xfrm>
+            <a:off x="0" y="0"/>
+            <a:ext cx="9144000" cy="5143500"/>
+          </a:xfrm>
+          <a:prstGeom prst="rect">
+            <a:avLst/>
+          </a:prstGeom>
+          <a:solidFill>
+            <a:srgbClr val="FFFFFF"/>
+          </a:solidFill>
+          <a:ln>
+            <a:noFill/>
+          </a:ln>
+        </p:spPr>
+        <p:style>
+          <a:lnRef idx="1">
+            <a:schemeClr val="accent1"/>
+          </a:lnRef>
+          <a:fillRef idx="3">
+            <a:schemeClr val="accent1"/>
+          </a:fillRef>
+          <a:effectRef idx="2">
+            <a:schemeClr val="accent1"/>
+          </a:effectRef>
+          <a:fontRef idx="minor">
+            <a:schemeClr val="lt1"/>
+          </a:fontRef>
+        </p:style>
+        <p:txBody>
+          <a:bodyPr rtlCol="0" anchor="ctr"/>
+          <a:lstStyle/>
+          <a:p>
+            <a:pPr algn="ctr"/>
+          </a:p>
+        </p:txBody>
+      </p:sp>
+      <p:sp>
+        <p:nvSpPr>
+          <p:cNvPr id="3" name="TextBox 2"/>
+          <p:cNvSpPr txBox="1"/>
+          <p:nvPr/>
+        </p:nvSpPr>
+        <p:spPr>
+          <a:xfrm>
+            <a:off x="514350" y="274320"/>
+            <a:ext cx="8229600" cy="480059"/>
+          </a:xfrm>
+          <a:prstGeom prst="rect">
+            <a:avLst/>
+          </a:prstGeom>
+          <a:noFill/>
+        </p:spPr>
+        <p:txBody>
+          <a:bodyPr wrap="square" lIns="34290" rIns="34290" tIns="13716" bIns="13716" anchor="t">
+            <a:spAutoFit/>
+          </a:bodyPr>
+          <a:lstStyle/>
+          <a:p>
+            <a:pPr algn="l"/>
+            <a:r>
+              <a:rPr sz="2100" b="1" i="0">
+                <a:solidFill>
+                  <a:srgbClr val="1E2761"/>
+                </a:solidFill>
+                <a:latin typeface="Arial Black"/>
+              </a:rPr>
+              <a:t>Act 3 — 工具呼叫</a:t>
+            </a:r>
+          </a:p>
+        </p:txBody>
+      </p:sp>
+      <p:sp>
+        <p:nvSpPr>
+          <p:cNvPr id="4" name="Rectangle 3"/>
+          <p:cNvSpPr/>
+          <p:nvPr/>
+        </p:nvSpPr>
+        <p:spPr>
+          <a:xfrm>
+            <a:off x="514350" y="822959"/>
+            <a:ext cx="2057400" cy="27432"/>
+          </a:xfrm>
+          <a:prstGeom prst="rect">
+            <a:avLst/>
+          </a:prstGeom>
+          <a:solidFill>
+            <a:srgbClr val="E8793A"/>
+          </a:solidFill>
+          <a:ln>
+            <a:noFill/>
+          </a:ln>
+          <a:effectLst/>
+        </p:spPr>
+        <p:style>
+          <a:lnRef idx="1">
+            <a:schemeClr val="accent1"/>
+          </a:lnRef>
+          <a:fillRef idx="3">
+            <a:schemeClr val="accent1"/>
+          </a:fillRef>
+          <a:effectRef idx="2">
+            <a:schemeClr val="accent1"/>
+          </a:effectRef>
+          <a:fontRef idx="minor">
+            <a:schemeClr val="lt1"/>
+          </a:fontRef>
+        </p:style>
+        <p:txBody>
+          <a:bodyPr rtlCol="0" anchor="ctr"/>
+          <a:lstStyle/>
+          <a:p>
+            <a:pPr algn="ctr"/>
+          </a:p>
+        </p:txBody>
+      </p:sp>
+      <p:sp>
+        <p:nvSpPr>
+          <p:cNvPr id="5" name="Rounded Rectangle 4"/>
+          <p:cNvSpPr/>
+          <p:nvPr/>
+        </p:nvSpPr>
+        <p:spPr>
+          <a:xfrm>
+            <a:off x="589788" y="1207008"/>
+            <a:ext cx="2468880" cy="960119"/>
+          </a:xfrm>
+          <a:prstGeom prst="roundRect">
+            <a:avLst>
+              <a:gd name="adj" fmla="val 14000"/>
+            </a:avLst>
+          </a:prstGeom>
+          <a:solidFill>
+            <a:srgbClr val="000000"/>
+          </a:solidFill>
+          <a:ln>
+            <a:noFill/>
+          </a:ln>
+          <a:effectLst/>
+        </p:spPr>
+        <p:style>
+          <a:lnRef idx="1">
+            <a:schemeClr val="accent1"/>
+          </a:lnRef>
+          <a:fillRef idx="3">
+            <a:schemeClr val="accent1"/>
+          </a:fillRef>
+          <a:effectRef idx="2">
+            <a:schemeClr val="accent1"/>
+          </a:effectRef>
+          <a:fontRef idx="minor">
+            <a:schemeClr val="lt1"/>
+          </a:fontRef>
+        </p:style>
+        <p:txBody>
+          <a:bodyPr rtlCol="0" anchor="ctr"/>
+          <a:lstStyle/>
+          <a:p>
+            <a:pPr algn="ctr"/>
+          </a:p>
+        </p:txBody>
+      </p:sp>
+      <p:sp>
+        <p:nvSpPr>
+          <p:cNvPr id="6" name="Rounded Rectangle 5"/>
+          <p:cNvSpPr/>
+          <p:nvPr/>
+        </p:nvSpPr>
+        <p:spPr>
+          <a:xfrm>
+            <a:off x="548640" y="1165860"/>
+            <a:ext cx="2468880" cy="960119"/>
+          </a:xfrm>
+          <a:prstGeom prst="roundRect">
+            <a:avLst>
+              <a:gd name="adj" fmla="val 14000"/>
+            </a:avLst>
+          </a:prstGeom>
+          <a:solidFill>
+            <a:srgbClr val="FFFFFF"/>
+          </a:solidFill>
+          <a:ln w="23812">
+            <a:solidFill>
+              <a:srgbClr val="5B8DE8"/>
+            </a:solidFill>
+          </a:ln>
+          <a:effectLst/>
+        </p:spPr>
+        <p:style>
+          <a:lnRef idx="1">
+            <a:schemeClr val="accent1"/>
+          </a:lnRef>
+          <a:fillRef idx="3">
+            <a:schemeClr val="accent1"/>
+          </a:fillRef>
+          <a:effectRef idx="2">
+            <a:schemeClr val="accent1"/>
+          </a:effectRef>
+          <a:fontRef idx="minor">
+            <a:schemeClr val="lt1"/>
+          </a:fontRef>
+        </p:style>
+        <p:txBody>
+          <a:bodyPr rtlCol="0" anchor="ctr"/>
+          <a:lstStyle/>
+          <a:p>
+            <a:pPr algn="ctr"/>
+          </a:p>
+        </p:txBody>
+      </p:sp>
+      <p:sp>
+        <p:nvSpPr>
+          <p:cNvPr id="7" name="Rectangle 6"/>
+          <p:cNvSpPr/>
+          <p:nvPr/>
+        </p:nvSpPr>
+        <p:spPr>
+          <a:xfrm>
+            <a:off x="582930" y="1200150"/>
+            <a:ext cx="2400300" cy="411479"/>
+          </a:xfrm>
+          <a:prstGeom prst="rect">
+            <a:avLst/>
+          </a:prstGeom>
+          <a:solidFill>
+            <a:srgbClr val="5B8DE8"/>
+          </a:solidFill>
+          <a:ln>
+            <a:noFill/>
+          </a:ln>
+          <a:effectLst/>
+        </p:spPr>
+        <p:style>
+          <a:lnRef idx="1">
+            <a:schemeClr val="accent1"/>
+          </a:lnRef>
+          <a:fillRef idx="3">
+            <a:schemeClr val="accent1"/>
+          </a:fillRef>
+          <a:effectRef idx="2">
+            <a:schemeClr val="accent1"/>
+          </a:effectRef>
+          <a:fontRef idx="minor">
+            <a:schemeClr val="lt1"/>
+          </a:fontRef>
+        </p:style>
+        <p:txBody>
+          <a:bodyPr rtlCol="0" anchor="ctr"/>
+          <a:lstStyle/>
+          <a:p>
+            <a:pPr algn="ctr"/>
+          </a:p>
+        </p:txBody>
+      </p:sp>
+      <p:sp>
+        <p:nvSpPr>
+          <p:cNvPr id="8" name="TextBox 7"/>
+          <p:cNvSpPr txBox="1"/>
+          <p:nvPr/>
+        </p:nvSpPr>
+        <p:spPr>
+          <a:xfrm>
+            <a:off x="582930" y="1200150"/>
+            <a:ext cx="2400300" cy="411479"/>
+          </a:xfrm>
+          <a:prstGeom prst="rect">
+            <a:avLst/>
+          </a:prstGeom>
+          <a:noFill/>
+        </p:spPr>
+        <p:txBody>
+          <a:bodyPr wrap="square" lIns="34290" rIns="34290" tIns="13716" bIns="13716" anchor="ctr">
+            <a:spAutoFit/>
+          </a:bodyPr>
+          <a:lstStyle/>
+          <a:p>
+            <a:pPr algn="ctr"/>
+            <a:r>
+              <a:rPr sz="1500" b="1" i="0">
+                <a:solidFill>
+                  <a:srgbClr val="FFFFFF"/>
+                </a:solidFill>
+                <a:latin typeface="Arial Black"/>
+              </a:rPr>
+              <a:t>Parent</a:t>
+            </a:r>
+          </a:p>
+        </p:txBody>
+      </p:sp>
+      <p:sp>
+        <p:nvSpPr>
+          <p:cNvPr id="9" name="TextBox 8"/>
+          <p:cNvSpPr txBox="1"/>
+          <p:nvPr/>
+        </p:nvSpPr>
+        <p:spPr>
+          <a:xfrm>
+            <a:off x="582930" y="1680210"/>
+            <a:ext cx="2400300" cy="0"/>
+          </a:xfrm>
+          <a:prstGeom prst="rect">
+            <a:avLst/>
+          </a:prstGeom>
+          <a:noFill/>
+        </p:spPr>
+        <p:txBody>
+          <a:bodyPr wrap="square" lIns="34290" rIns="34290" tIns="13716" bIns="13716" anchor="ctr">
+            <a:spAutoFit/>
+          </a:bodyPr>
+          <a:lstStyle/>
+          <a:p>
+            <a:pPr algn="ctr"/>
+            <a:r>
+              <a:rPr sz="1050" b="0" i="0">
+                <a:solidFill>
+                  <a:srgbClr val="6B6B6B"/>
+                </a:solidFill>
+                <a:latin typeface="Consolas"/>
+              </a:rPr>
+              <a:t>Node.js</a:t>
+            </a:r>
+          </a:p>
+        </p:txBody>
+      </p:sp>
+      <p:sp>
+        <p:nvSpPr>
+          <p:cNvPr id="10" name="Rounded Rectangle 9"/>
+          <p:cNvSpPr/>
+          <p:nvPr/>
+        </p:nvSpPr>
+        <p:spPr>
+          <a:xfrm>
+            <a:off x="1885950" y="1803654"/>
+            <a:ext cx="1028700" cy="219456"/>
+          </a:xfrm>
+          <a:prstGeom prst="roundRect">
+            <a:avLst>
+              <a:gd name="adj" fmla="val 12000"/>
+            </a:avLst>
+          </a:prstGeom>
+          <a:solidFill>
+            <a:srgbClr val="E8793A"/>
+          </a:solidFill>
+          <a:ln w="14287">
+            <a:solidFill>
+              <a:srgbClr val="E8793A"/>
+            </a:solidFill>
+          </a:ln>
+          <a:effectLst/>
+        </p:spPr>
+        <p:style>
+          <a:lnRef idx="1">
+            <a:schemeClr val="accent1"/>
+          </a:lnRef>
+          <a:fillRef idx="3">
+            <a:schemeClr val="accent1"/>
+          </a:fillRef>
+          <a:effectRef idx="2">
+            <a:schemeClr val="accent1"/>
+          </a:effectRef>
+          <a:fontRef idx="minor">
+            <a:schemeClr val="lt1"/>
+          </a:fontRef>
+        </p:style>
+        <p:txBody>
+          <a:bodyPr rtlCol="0" anchor="ctr"/>
+          <a:lstStyle/>
+          <a:p>
+            <a:pPr algn="ctr"/>
+          </a:p>
+        </p:txBody>
+      </p:sp>
+      <p:sp>
+        <p:nvSpPr>
+          <p:cNvPr id="11" name="TextBox 10"/>
+          <p:cNvSpPr txBox="1"/>
+          <p:nvPr/>
+        </p:nvSpPr>
+        <p:spPr>
+          <a:xfrm>
+            <a:off x="1885950" y="1803654"/>
+            <a:ext cx="1028700" cy="219456"/>
+          </a:xfrm>
+          <a:prstGeom prst="rect">
+            <a:avLst/>
+          </a:prstGeom>
+          <a:noFill/>
+        </p:spPr>
+        <p:txBody>
+          <a:bodyPr wrap="square" lIns="34290" rIns="34290" tIns="13716" bIns="13716" anchor="ctr">
+            <a:spAutoFit/>
+          </a:bodyPr>
+          <a:lstStyle/>
+          <a:p>
+            <a:pPr algn="ctr"/>
+            <a:r>
+              <a:rPr sz="825" b="1" i="0">
+                <a:solidFill>
+                  <a:srgbClr val="FFFFFF"/>
+                </a:solidFill>
+                <a:latin typeface="Consolas"/>
+              </a:rPr>
+              <a:t>LLM · Sonnet</a:t>
+            </a:r>
+          </a:p>
+        </p:txBody>
+      </p:sp>
+      <p:sp>
+        <p:nvSpPr>
+          <p:cNvPr id="12" name="Rounded Rectangle 11"/>
+          <p:cNvSpPr/>
+          <p:nvPr/>
+        </p:nvSpPr>
+        <p:spPr>
+          <a:xfrm>
+            <a:off x="6213348" y="1207008"/>
+            <a:ext cx="2468880" cy="960119"/>
+          </a:xfrm>
+          <a:prstGeom prst="roundRect">
+            <a:avLst>
+              <a:gd name="adj" fmla="val 14000"/>
+            </a:avLst>
+          </a:prstGeom>
+          <a:solidFill>
+            <a:srgbClr val="000000"/>
+          </a:solidFill>
+          <a:ln>
+            <a:noFill/>
+          </a:ln>
+          <a:effectLst/>
+        </p:spPr>
+        <p:style>
+          <a:lnRef idx="1">
+            <a:schemeClr val="accent1"/>
+          </a:lnRef>
+          <a:fillRef idx="3">
+            <a:schemeClr val="accent1"/>
+          </a:fillRef>
+          <a:effectRef idx="2">
+            <a:schemeClr val="accent1"/>
+          </a:effectRef>
+          <a:fontRef idx="minor">
+            <a:schemeClr val="lt1"/>
+          </a:fontRef>
+        </p:style>
+        <p:txBody>
+          <a:bodyPr rtlCol="0" anchor="ctr"/>
+          <a:lstStyle/>
+          <a:p>
+            <a:pPr algn="ctr"/>
+          </a:p>
+        </p:txBody>
+      </p:sp>
+      <p:sp>
+        <p:nvSpPr>
+          <p:cNvPr id="13" name="Rounded Rectangle 12"/>
+          <p:cNvSpPr/>
+          <p:nvPr/>
+        </p:nvSpPr>
+        <p:spPr>
+          <a:xfrm>
+            <a:off x="6172200" y="1165860"/>
+            <a:ext cx="2468880" cy="960119"/>
+          </a:xfrm>
+          <a:prstGeom prst="roundRect">
+            <a:avLst>
+              <a:gd name="adj" fmla="val 14000"/>
+            </a:avLst>
+          </a:prstGeom>
+          <a:solidFill>
+            <a:srgbClr val="FFFFFF"/>
+          </a:solidFill>
+          <a:ln w="23812">
+            <a:solidFill>
+              <a:srgbClr val="2DB5C9"/>
+            </a:solidFill>
+          </a:ln>
+          <a:effectLst/>
+        </p:spPr>
+        <p:style>
+          <a:lnRef idx="1">
+            <a:schemeClr val="accent1"/>
+          </a:lnRef>
+          <a:fillRef idx="3">
+            <a:schemeClr val="accent1"/>
+          </a:fillRef>
+          <a:effectRef idx="2">
+            <a:schemeClr val="accent1"/>
+          </a:effectRef>
+          <a:fontRef idx="minor">
+            <a:schemeClr val="lt1"/>
+          </a:fontRef>
+        </p:style>
+        <p:txBody>
+          <a:bodyPr rtlCol="0" anchor="ctr"/>
+          <a:lstStyle/>
+          <a:p>
+            <a:pPr algn="ctr"/>
+          </a:p>
+        </p:txBody>
+      </p:sp>
+      <p:sp>
+        <p:nvSpPr>
+          <p:cNvPr id="14" name="Rectangle 13"/>
+          <p:cNvSpPr/>
+          <p:nvPr/>
+        </p:nvSpPr>
+        <p:spPr>
+          <a:xfrm>
+            <a:off x="6206490" y="1200150"/>
+            <a:ext cx="2400300" cy="411479"/>
+          </a:xfrm>
+          <a:prstGeom prst="rect">
+            <a:avLst/>
+          </a:prstGeom>
+          <a:solidFill>
+            <a:srgbClr val="2DB5C9"/>
+          </a:solidFill>
+          <a:ln>
+            <a:noFill/>
+          </a:ln>
+          <a:effectLst/>
+        </p:spPr>
+        <p:style>
+          <a:lnRef idx="1">
+            <a:schemeClr val="accent1"/>
+          </a:lnRef>
+          <a:fillRef idx="3">
+            <a:schemeClr val="accent1"/>
+          </a:fillRef>
+          <a:effectRef idx="2">
+            <a:schemeClr val="accent1"/>
+          </a:effectRef>
+          <a:fontRef idx="minor">
+            <a:schemeClr val="lt1"/>
+          </a:fontRef>
+        </p:style>
+        <p:txBody>
+          <a:bodyPr rtlCol="0" anchor="ctr"/>
+          <a:lstStyle/>
+          <a:p>
+            <a:pPr algn="ctr"/>
+          </a:p>
+        </p:txBody>
+      </p:sp>
+      <p:sp>
+        <p:nvSpPr>
+          <p:cNvPr id="15" name="TextBox 14"/>
+          <p:cNvSpPr txBox="1"/>
+          <p:nvPr/>
+        </p:nvSpPr>
+        <p:spPr>
+          <a:xfrm>
+            <a:off x="6206490" y="1200150"/>
+            <a:ext cx="2400300" cy="411479"/>
+          </a:xfrm>
+          <a:prstGeom prst="rect">
+            <a:avLst/>
+          </a:prstGeom>
+          <a:noFill/>
+        </p:spPr>
+        <p:txBody>
+          <a:bodyPr wrap="square" lIns="34290" rIns="34290" tIns="13716" bIns="13716" anchor="ctr">
+            <a:spAutoFit/>
+          </a:bodyPr>
+          <a:lstStyle/>
+          <a:p>
+            <a:pPr algn="ctr"/>
+            <a:r>
+              <a:rPr sz="1500" b="1" i="0">
+                <a:solidFill>
+                  <a:srgbClr val="FFFFFF"/>
+                </a:solidFill>
+                <a:latin typeface="Arial Black"/>
+              </a:rPr>
+              <a:t>Child</a:t>
+            </a:r>
+          </a:p>
+        </p:txBody>
+      </p:sp>
+      <p:sp>
+        <p:nvSpPr>
+          <p:cNvPr id="16" name="TextBox 15"/>
+          <p:cNvSpPr txBox="1"/>
+          <p:nvPr/>
+        </p:nvSpPr>
+        <p:spPr>
+          <a:xfrm>
+            <a:off x="6206490" y="1680210"/>
+            <a:ext cx="2400300" cy="342899"/>
+          </a:xfrm>
+          <a:prstGeom prst="rect">
+            <a:avLst/>
+          </a:prstGeom>
+          <a:noFill/>
+        </p:spPr>
+        <p:txBody>
+          <a:bodyPr wrap="square" lIns="34290" rIns="34290" tIns="13716" bIns="13716" anchor="ctr">
+            <a:spAutoFit/>
+          </a:bodyPr>
+          <a:lstStyle/>
+          <a:p>
+            <a:pPr algn="ctr"/>
+            <a:r>
+              <a:rPr sz="1050" b="0" i="0">
+                <a:solidFill>
+                  <a:srgbClr val="6B6B6B"/>
+                </a:solidFill>
+                <a:latin typeface="Consolas"/>
+              </a:rPr>
+              <a:t>Python</a:t>
+            </a:r>
+          </a:p>
+        </p:txBody>
+      </p:sp>
+      <p:cxnSp>
+        <p:nvCxnSpPr>
+          <p:cNvPr id="17" name="Connector 16"/>
+          <p:cNvCxnSpPr/>
+          <p:nvPr/>
+        </p:nvCxnSpPr>
+        <p:spPr>
+          <a:xfrm>
+            <a:off x="3017520" y="1645919"/>
+            <a:ext cx="3154680" cy="0"/>
+          </a:xfrm>
+          <a:prstGeom prst="line">
+            <a:avLst/>
+          </a:prstGeom>
+          <a:ln w="28575">
+            <a:solidFill>
+              <a:srgbClr val="E8793A"/>
+            </a:solidFill>
+            <a:tailEnd type="triangle" w="med" len="med"/>
+          </a:ln>
+        </p:spPr>
+        <p:style>
+          <a:lnRef idx="2">
+            <a:schemeClr val="accent1"/>
+          </a:lnRef>
+          <a:fillRef idx="0">
+            <a:schemeClr val="accent1"/>
+          </a:fillRef>
+          <a:effectRef idx="1">
+            <a:schemeClr val="accent1"/>
+          </a:effectRef>
+          <a:fontRef idx="minor">
+            <a:schemeClr val="tx1"/>
+          </a:fontRef>
+        </p:style>
+      </p:cxnSp>
+      <p:sp>
+        <p:nvSpPr>
+          <p:cNvPr id="18" name="Rounded Rectangle 17"/>
+          <p:cNvSpPr/>
+          <p:nvPr/>
+        </p:nvSpPr>
+        <p:spPr>
+          <a:xfrm>
+            <a:off x="3771900" y="1405889"/>
+            <a:ext cx="1714500" cy="377190"/>
+          </a:xfrm>
+          <a:prstGeom prst="roundRect">
+            <a:avLst>
+              <a:gd name="adj" fmla="val 12000"/>
+            </a:avLst>
+          </a:prstGeom>
+          <a:solidFill>
+            <a:srgbClr val="E8793A"/>
+          </a:solidFill>
+          <a:ln w="19050">
+            <a:solidFill>
+              <a:srgbClr val="E8793A"/>
+            </a:solidFill>
+          </a:ln>
+          <a:effectLst/>
+        </p:spPr>
+        <p:style>
+          <a:lnRef idx="1">
+            <a:schemeClr val="accent1"/>
+          </a:lnRef>
+          <a:fillRef idx="3">
+            <a:schemeClr val="accent1"/>
+          </a:fillRef>
+          <a:effectRef idx="2">
+            <a:schemeClr val="accent1"/>
+          </a:effectRef>
+          <a:fontRef idx="minor">
+            <a:schemeClr val="lt1"/>
+          </a:fontRef>
+        </p:style>
+        <p:txBody>
+          <a:bodyPr rtlCol="0" anchor="ctr"/>
+          <a:lstStyle/>
+          <a:p>
+            <a:pPr algn="ctr"/>
+          </a:p>
+        </p:txBody>
+      </p:sp>
+      <p:sp>
+        <p:nvSpPr>
+          <p:cNvPr id="19" name="TextBox 18"/>
+          <p:cNvSpPr txBox="1"/>
+          <p:nvPr/>
+        </p:nvSpPr>
+        <p:spPr>
+          <a:xfrm>
+            <a:off x="3771900" y="1405889"/>
+            <a:ext cx="1714500" cy="377190"/>
+          </a:xfrm>
+          <a:prstGeom prst="rect">
+            <a:avLst/>
+          </a:prstGeom>
+          <a:noFill/>
+        </p:spPr>
+        <p:txBody>
+          <a:bodyPr wrap="square" lIns="34290" rIns="34290" tIns="13716" bIns="13716" anchor="ctr">
+            <a:spAutoFit/>
+          </a:bodyPr>
+          <a:lstStyle/>
+          <a:p>
+            <a:pPr algn="ctr"/>
+            <a:r>
+              <a:rPr sz="825" b="1" i="0">
+                <a:solidFill>
+                  <a:srgbClr val="FFFFFF"/>
+                </a:solidFill>
+                <a:latin typeface="Consolas"/>
+              </a:rPr>
+              <a:t>search_new_books("新書")</a:t>
+            </a:r>
+          </a:p>
+        </p:txBody>
+      </p:sp>
+      <p:sp>
+        <p:nvSpPr>
+          <p:cNvPr id="20" name="Rounded Rectangle 19"/>
+          <p:cNvSpPr/>
+          <p:nvPr/>
+        </p:nvSpPr>
+        <p:spPr>
+          <a:xfrm>
+            <a:off x="548640" y="2263139"/>
+            <a:ext cx="2468880" cy="411479"/>
+          </a:xfrm>
+          <a:prstGeom prst="roundRect">
+            <a:avLst>
+              <a:gd name="adj" fmla="val 12000"/>
+            </a:avLst>
+          </a:prstGeom>
+          <a:solidFill>
+            <a:srgbClr val="FCE5D1"/>
+          </a:solidFill>
+          <a:ln w="19050">
+            <a:solidFill>
+              <a:srgbClr val="E8793A"/>
+            </a:solidFill>
+          </a:ln>
+          <a:effectLst/>
+        </p:spPr>
+        <p:style>
+          <a:lnRef idx="1">
+            <a:schemeClr val="accent1"/>
+          </a:lnRef>
+          <a:fillRef idx="3">
+            <a:schemeClr val="accent1"/>
+          </a:fillRef>
+          <a:effectRef idx="2">
+            <a:schemeClr val="accent1"/>
+          </a:effectRef>
+          <a:fontRef idx="minor">
+            <a:schemeClr val="lt1"/>
+          </a:fontRef>
+        </p:style>
+        <p:txBody>
+          <a:bodyPr rtlCol="0" anchor="ctr"/>
+          <a:lstStyle/>
+          <a:p>
+            <a:pPr algn="ctr"/>
+          </a:p>
+        </p:txBody>
+      </p:sp>
+      <p:sp>
+        <p:nvSpPr>
+          <p:cNvPr id="21" name="TextBox 20"/>
+          <p:cNvSpPr txBox="1"/>
+          <p:nvPr/>
+        </p:nvSpPr>
+        <p:spPr>
+          <a:xfrm>
+            <a:off x="548640" y="2263139"/>
+            <a:ext cx="2468880" cy="411479"/>
+          </a:xfrm>
+          <a:prstGeom prst="rect">
+            <a:avLst/>
+          </a:prstGeom>
+          <a:noFill/>
+        </p:spPr>
+        <p:txBody>
+          <a:bodyPr wrap="square" lIns="34290" rIns="34290" tIns="13716" bIns="13716" anchor="ctr">
+            <a:spAutoFit/>
+          </a:bodyPr>
+          <a:lstStyle/>
+          <a:p>
+            <a:pPr algn="ctr"/>
+            <a:r>
+              <a:rPr sz="1050" b="1" i="0">
+                <a:solidFill>
+                  <a:srgbClr val="E8793A"/>
+                </a:solidFill>
+                <a:latin typeface="Calibri"/>
+              </a:rPr>
+              <a:t>等候第 4 個請求 · 30s 內</a:t>
+            </a:r>
+          </a:p>
+        </p:txBody>
+      </p:sp>
+      <p:cxnSp>
+        <p:nvCxnSpPr>
+          <p:cNvPr id="22" name="Connector 21"/>
+          <p:cNvCxnSpPr/>
+          <p:nvPr/>
+        </p:nvCxnSpPr>
+        <p:spPr>
+          <a:xfrm flipH="1">
+            <a:off x="3017520" y="3086100"/>
+            <a:ext cx="3154680" cy="0"/>
+          </a:xfrm>
+          <a:prstGeom prst="line">
+            <a:avLst/>
+          </a:prstGeom>
+          <a:ln w="28575">
+            <a:solidFill>
+              <a:srgbClr val="5CB85C"/>
+            </a:solidFill>
+            <a:tailEnd type="triangle" w="med" len="med"/>
+          </a:ln>
+        </p:spPr>
+        <p:style>
+          <a:lnRef idx="2">
+            <a:schemeClr val="accent1"/>
+          </a:lnRef>
+          <a:fillRef idx="0">
+            <a:schemeClr val="accent1"/>
+          </a:fillRef>
+          <a:effectRef idx="1">
+            <a:schemeClr val="accent1"/>
+          </a:effectRef>
+          <a:fontRef idx="minor">
+            <a:schemeClr val="tx1"/>
+          </a:fontRef>
+        </p:style>
+      </p:cxnSp>
+      <p:sp>
+        <p:nvSpPr>
+          <p:cNvPr id="23" name="Rounded Rectangle 22"/>
+          <p:cNvSpPr/>
+          <p:nvPr/>
+        </p:nvSpPr>
+        <p:spPr>
+          <a:xfrm>
+            <a:off x="3771900" y="2866644"/>
+            <a:ext cx="1714500" cy="377190"/>
+          </a:xfrm>
+          <a:prstGeom prst="roundRect">
+            <a:avLst>
+              <a:gd name="adj" fmla="val 12000"/>
+            </a:avLst>
+          </a:prstGeom>
+          <a:solidFill>
+            <a:srgbClr val="5CB85C"/>
+          </a:solidFill>
+          <a:ln w="19050">
+            <a:solidFill>
+              <a:srgbClr val="5CB85C"/>
+            </a:solidFill>
+          </a:ln>
+          <a:effectLst/>
+        </p:spPr>
+        <p:style>
+          <a:lnRef idx="1">
+            <a:schemeClr val="accent1"/>
+          </a:lnRef>
+          <a:fillRef idx="3">
+            <a:schemeClr val="accent1"/>
+          </a:fillRef>
+          <a:effectRef idx="2">
+            <a:schemeClr val="accent1"/>
+          </a:effectRef>
+          <a:fontRef idx="minor">
+            <a:schemeClr val="lt1"/>
+          </a:fontRef>
+        </p:style>
+        <p:txBody>
+          <a:bodyPr rtlCol="0" anchor="ctr"/>
+          <a:lstStyle/>
+          <a:p>
+            <a:pPr algn="ctr"/>
+          </a:p>
+        </p:txBody>
+      </p:sp>
+      <p:sp>
+        <p:nvSpPr>
+          <p:cNvPr id="24" name="TextBox 23"/>
+          <p:cNvSpPr txBox="1"/>
+          <p:nvPr/>
+        </p:nvSpPr>
+        <p:spPr>
+          <a:xfrm>
+            <a:off x="3771900" y="2866644"/>
+            <a:ext cx="1714500" cy="377190"/>
+          </a:xfrm>
+          <a:prstGeom prst="rect">
+            <a:avLst/>
+          </a:prstGeom>
+          <a:noFill/>
+        </p:spPr>
+        <p:txBody>
+          <a:bodyPr wrap="square" lIns="34290" rIns="34290" tIns="13716" bIns="13716" anchor="ctr">
+            <a:spAutoFit/>
+          </a:bodyPr>
+          <a:lstStyle/>
+          <a:p>
+            <a:pPr algn="ctr"/>
+            <a:r>
+              <a:rPr sz="900" b="1" i="0">
+                <a:solidFill>
+                  <a:srgbClr val="FFFFFF"/>
+                </a:solidFill>
+                <a:latin typeface="Consolas"/>
+              </a:rPr>
+              <a:t>結果 · 10 筆新書</a:t>
+            </a:r>
+          </a:p>
+        </p:txBody>
+      </p:sp>
+      <p:sp>
+        <p:nvSpPr>
+          <p:cNvPr id="25" name="Rounded Rectangle 24"/>
+          <p:cNvSpPr/>
+          <p:nvPr/>
+        </p:nvSpPr>
+        <p:spPr>
+          <a:xfrm>
+            <a:off x="548640" y="3429000"/>
+            <a:ext cx="2468880" cy="411479"/>
+          </a:xfrm>
+          <a:prstGeom prst="roundRect">
+            <a:avLst>
+              <a:gd name="adj" fmla="val 12000"/>
+            </a:avLst>
+          </a:prstGeom>
+          <a:solidFill>
+            <a:srgbClr val="DBEEDB"/>
+          </a:solidFill>
+          <a:ln w="19050">
+            <a:solidFill>
+              <a:srgbClr val="5CB85C"/>
+            </a:solidFill>
+          </a:ln>
+          <a:effectLst/>
+        </p:spPr>
+        <p:style>
+          <a:lnRef idx="1">
+            <a:schemeClr val="accent1"/>
+          </a:lnRef>
+          <a:fillRef idx="3">
+            <a:schemeClr val="accent1"/>
+          </a:fillRef>
+          <a:effectRef idx="2">
+            <a:schemeClr val="accent1"/>
+          </a:effectRef>
+          <a:fontRef idx="minor">
+            <a:schemeClr val="lt1"/>
+          </a:fontRef>
+        </p:style>
+        <p:txBody>
+          <a:bodyPr rtlCol="0" anchor="ctr"/>
+          <a:lstStyle/>
+          <a:p>
+            <a:pPr algn="ctr"/>
+          </a:p>
+        </p:txBody>
+      </p:sp>
+      <p:sp>
+        <p:nvSpPr>
+          <p:cNvPr id="26" name="TextBox 25"/>
+          <p:cNvSpPr txBox="1"/>
+          <p:nvPr/>
+        </p:nvSpPr>
+        <p:spPr>
+          <a:xfrm>
+            <a:off x="548640" y="3429000"/>
+            <a:ext cx="2468880" cy="411479"/>
+          </a:xfrm>
+          <a:prstGeom prst="rect">
+            <a:avLst/>
+          </a:prstGeom>
+          <a:noFill/>
+        </p:spPr>
+        <p:txBody>
+          <a:bodyPr wrap="square" lIns="34290" rIns="34290" tIns="13716" bIns="13716" anchor="ctr">
+            <a:spAutoFit/>
+          </a:bodyPr>
+          <a:lstStyle/>
+          <a:p>
+            <a:pPr algn="ctr"/>
+            <a:r>
+              <a:rPr sz="1050" b="1" i="0">
+                <a:solidFill>
+                  <a:srgbClr val="5CB85C"/>
+                </a:solidFill>
+                <a:latin typeface="Calibri"/>
+              </a:rPr>
+              <a:t>第 4 個請求 ✓ 完成</a:t>
+            </a:r>
+          </a:p>
+        </p:txBody>
+      </p:sp>
+      <p:sp>
+        <p:nvSpPr>
+          <p:cNvPr id="27" name="TextBox 26"/>
+          <p:cNvSpPr txBox="1"/>
+          <p:nvPr/>
+        </p:nvSpPr>
+        <p:spPr>
+          <a:xfrm>
+            <a:off x="514350" y="4080510"/>
+            <a:ext cx="8572500" cy="342900"/>
+          </a:xfrm>
+          <a:prstGeom prst="rect">
+            <a:avLst/>
+          </a:prstGeom>
+          <a:noFill/>
+        </p:spPr>
+        <p:txBody>
+          <a:bodyPr wrap="square" lIns="34290" rIns="34290" tIns="13716" bIns="13716" anchor="t">
+            <a:spAutoFit/>
+          </a:bodyPr>
+          <a:lstStyle/>
+          <a:p>
+            <a:pPr algn="ctr"/>
+            <a:r>
+              <a:rPr sz="1200" b="0" i="0">
+                <a:solidFill>
+                  <a:srgbClr val="1A1A1A"/>
+                </a:solidFill>
+                <a:latin typeface="Calibri"/>
+              </a:rPr>
+              <a:t>完整流程:LLM 決定 → token 飛去 Child → Child 執行 → 結果飛回 → Parent 找到對應請求 → 回給使用者</a:t>
+            </a:r>
+          </a:p>
+        </p:txBody>
+      </p:sp>
+      <p:sp>
+        <p:nvSpPr>
+          <p:cNvPr id="28" name="TextBox 27"/>
+          <p:cNvSpPr txBox="1"/>
+          <p:nvPr/>
+        </p:nvSpPr>
+        <p:spPr>
+          <a:xfrm>
+            <a:off x="514350" y="4491990"/>
+            <a:ext cx="8572500" cy="342900"/>
+          </a:xfrm>
+          <a:prstGeom prst="rect">
+            <a:avLst/>
+          </a:prstGeom>
+          <a:noFill/>
+        </p:spPr>
+        <p:txBody>
+          <a:bodyPr wrap="square" lIns="34290" rIns="34290" tIns="13716" bIns="13716" anchor="t">
+            <a:spAutoFit/>
+          </a:bodyPr>
+          <a:lstStyle/>
+          <a:p>
+            <a:pPr algn="ctr"/>
+            <a:r>
+              <a:rPr sz="1050" b="0" i="1">
+                <a:solidFill>
+                  <a:srgbClr val="6B6B6B"/>
+                </a:solidFill>
+                <a:latin typeface="Calibri"/>
+              </a:rPr>
+              <a:t>「第 4 個請求」是 JSON-RPC 給每個 request 的編號,讓 response 能對得回來</a:t>
+            </a:r>
+          </a:p>
+        </p:txBody>
+      </p:sp>
+    </p:spTree>
+  </p:cSld>
+  <p:clrMapOvr>
+    <a:masterClrMapping/>
+  </p:clrMapOvr>
+</p:sld>
+</file>
+
+<file path=ppt/slides/slide26.xml><?xml version="1.0" encoding="utf-8"?>
+<p:sld xmlns:a="http://schemas.openxmlformats.org/drawingml/2006/main" xmlns:p="http://schemas.openxmlformats.org/presentationml/2006/main" xmlns:r="http://schemas.openxmlformats.org/officeDocument/2006/relationships">
+  <p:cSld>
+    <p:spTree>
+      <p:nvGrpSpPr>
+        <p:cNvPr id="1" name=""/>
+        <p:cNvGrpSpPr/>
+        <p:nvPr/>
+      </p:nvGrpSpPr>
+      <p:grpSpPr/>
+      <p:sp>
+        <p:nvSpPr>
+          <p:cNvPr id="2" name="Rectangle 1"/>
+          <p:cNvSpPr/>
+          <p:nvPr/>
+        </p:nvSpPr>
+        <p:spPr>
+          <a:xfrm>
+            <a:off x="0" y="0"/>
+            <a:ext cx="9144000" cy="5143500"/>
+          </a:xfrm>
+          <a:prstGeom prst="rect">
+            <a:avLst/>
+          </a:prstGeom>
+          <a:solidFill>
+            <a:srgbClr val="1E2761"/>
+          </a:solidFill>
+          <a:ln>
+            <a:noFill/>
+          </a:ln>
+        </p:spPr>
+        <p:style>
+          <a:lnRef idx="1">
+            <a:schemeClr val="accent1"/>
+          </a:lnRef>
+          <a:fillRef idx="3">
+            <a:schemeClr val="accent1"/>
+          </a:fillRef>
+          <a:effectRef idx="2">
+            <a:schemeClr val="accent1"/>
+          </a:effectRef>
+          <a:fontRef idx="minor">
+            <a:schemeClr val="lt1"/>
+          </a:fontRef>
+        </p:style>
+        <p:txBody>
+          <a:bodyPr rtlCol="0" anchor="ctr"/>
+          <a:lstStyle/>
+          <a:p>
+            <a:pPr algn="ctr"/>
+          </a:p>
+        </p:txBody>
+      </p:sp>
+      <p:sp>
+        <p:nvSpPr>
+          <p:cNvPr id="3" name="TextBox 2"/>
+          <p:cNvSpPr txBox="1"/>
+          <p:nvPr/>
+        </p:nvSpPr>
+        <p:spPr>
+          <a:xfrm>
+            <a:off x="514350" y="1028700"/>
+            <a:ext cx="8229600" cy="822959"/>
+          </a:xfrm>
+          <a:prstGeom prst="rect">
+            <a:avLst/>
+          </a:prstGeom>
+          <a:noFill/>
+        </p:spPr>
+        <p:txBody>
+          <a:bodyPr wrap="square" lIns="34290" rIns="34290" tIns="13716" bIns="13716" anchor="t">
+            <a:spAutoFit/>
+          </a:bodyPr>
+          <a:lstStyle/>
+          <a:p>
+            <a:pPr algn="l"/>
+            <a:r>
+              <a:rPr sz="4800" b="1" i="0">
+                <a:solidFill>
+                  <a:srgbClr val="E8793A"/>
+                </a:solidFill>
+                <a:latin typeface="Arial Black"/>
+              </a:rPr>
+              <a:t>→  切換到影片</a:t>
+            </a:r>
+          </a:p>
+        </p:txBody>
+      </p:sp>
+      <p:sp>
+        <p:nvSpPr>
+          <p:cNvPr id="4" name="TextBox 3"/>
+          <p:cNvSpPr txBox="1"/>
+          <p:nvPr/>
+        </p:nvSpPr>
+        <p:spPr>
+          <a:xfrm>
+            <a:off x="514350" y="2057400"/>
+            <a:ext cx="8229600" cy="411479"/>
+          </a:xfrm>
+          <a:prstGeom prst="rect">
+            <a:avLst/>
+          </a:prstGeom>
+          <a:noFill/>
+        </p:spPr>
+        <p:txBody>
+          <a:bodyPr wrap="square" lIns="34290" rIns="34290" tIns="13716" bIns="13716" anchor="t">
+            <a:spAutoFit/>
+          </a:bodyPr>
+          <a:lstStyle/>
+          <a:p>
+            <a:pPr algn="l"/>
+            <a:r>
+              <a:rPr sz="1650" b="0" i="0">
+                <a:solidFill>
+                  <a:srgbClr val="FFFFFF"/>
+                </a:solidFill>
+                <a:latin typeface="Consolas"/>
+              </a:rPr>
+              <a:t>02-mcp-connection-video.mp4   ·   2:17</a:t>
+            </a:r>
+          </a:p>
+        </p:txBody>
+      </p:sp>
+      <p:sp>
+        <p:nvSpPr>
+          <p:cNvPr id="5" name="Rectangle 4"/>
+          <p:cNvSpPr/>
+          <p:nvPr/>
+        </p:nvSpPr>
+        <p:spPr>
+          <a:xfrm>
+            <a:off x="514350" y="2640330"/>
+            <a:ext cx="1714500" cy="27432"/>
+          </a:xfrm>
+          <a:prstGeom prst="rect">
+            <a:avLst/>
+          </a:prstGeom>
+          <a:solidFill>
+            <a:srgbClr val="E8793A"/>
+          </a:solidFill>
+          <a:ln>
+            <a:noFill/>
+          </a:ln>
+          <a:effectLst/>
+        </p:spPr>
+        <p:style>
+          <a:lnRef idx="1">
+            <a:schemeClr val="accent1"/>
+          </a:lnRef>
+          <a:fillRef idx="3">
+            <a:schemeClr val="accent1"/>
+          </a:fillRef>
+          <a:effectRef idx="2">
+            <a:schemeClr val="accent1"/>
+          </a:effectRef>
+          <a:fontRef idx="minor">
+            <a:schemeClr val="lt1"/>
+          </a:fontRef>
+        </p:style>
+        <p:txBody>
+          <a:bodyPr rtlCol="0" anchor="ctr"/>
+          <a:lstStyle/>
+          <a:p>
+            <a:pPr algn="ctr"/>
+          </a:p>
+        </p:txBody>
+      </p:sp>
+      <p:sp>
+        <p:nvSpPr>
+          <p:cNvPr id="6" name="TextBox 5"/>
+          <p:cNvSpPr txBox="1"/>
+          <p:nvPr/>
+        </p:nvSpPr>
+        <p:spPr>
+          <a:xfrm>
+            <a:off x="514350" y="2743200"/>
+            <a:ext cx="8229600" cy="2057400"/>
+          </a:xfrm>
+          <a:prstGeom prst="rect">
+            <a:avLst/>
+          </a:prstGeom>
+          <a:noFill/>
+        </p:spPr>
+        <p:txBody>
+          <a:bodyPr wrap="square" lIns="34290" rIns="34290" anchor="t">
+            <a:spAutoFit/>
+          </a:bodyPr>
+          <a:lstStyle/>
+          <a:p>
+            <a:pPr algn="l">
+              <a:spcAft>
+                <a:spcPts val="1050"/>
+              </a:spcAft>
+            </a:pPr>
+            <a:r>
+              <a:rPr sz="1650" b="1" i="0">
+                <a:solidFill>
+                  <a:srgbClr val="FFFFFF"/>
+                </a:solidFill>
+                <a:latin typeface="Calibri"/>
+              </a:rPr>
+              <a:t>影片重點:</a:t>
+            </a:r>
+          </a:p>
+          <a:p>
+            <a:pPr algn="l">
+              <a:spcAft>
+                <a:spcPts val="600"/>
+              </a:spcAft>
+            </a:pPr>
+            <a:r>
+              <a:rPr sz="1425" b="0" i="0">
+                <a:solidFill>
+                  <a:srgbClr val="E8EDF3"/>
+                </a:solidFill>
+                <a:latin typeface="Calibri"/>
+              </a:rPr>
+              <a:t>1. 場景開場 — 使用者問「新書」 → LLM 判斷要呼叫工具</a:t>
+            </a:r>
+          </a:p>
+          <a:p>
+            <a:pPr algn="l">
+              <a:spcAft>
+                <a:spcPts val="600"/>
+              </a:spcAft>
+            </a:pPr>
+            <a:r>
+              <a:rPr sz="1425" b="0" i="0">
+                <a:solidFill>
+                  <a:srgbClr val="E8EDF3"/>
+                </a:solidFill>
+                <a:latin typeface="Calibri"/>
+              </a:rPr>
+              <a:t>2. Act 1 — Parent / Child 的 spawn 與 pipe;LLM (Sonnet) 住在 Parent 內</a:t>
+            </a:r>
+          </a:p>
+          <a:p>
+            <a:pPr algn="l">
+              <a:spcAft>
+                <a:spcPts val="600"/>
+              </a:spcAft>
+            </a:pPr>
+            <a:r>
+              <a:rPr sz="1425" b="0" i="0">
+                <a:solidFill>
+                  <a:srgbClr val="E8EDF3"/>
+                </a:solidFill>
+                <a:latin typeface="Calibri"/>
+              </a:rPr>
+              <a:t>3. Act 2 — 兩階段握手:checkbox ☐打過招呼 → ✓打過招呼 → ☐拿工具 → ✓拿工具</a:t>
+            </a:r>
+          </a:p>
+          <a:p>
+            <a:pPr algn="l">
+              <a:spcAft>
+                <a:spcPts val="600"/>
+              </a:spcAft>
+            </a:pPr>
+            <a:r>
+              <a:rPr sz="1425" b="0" i="0">
+                <a:solidFill>
+                  <a:srgbClr val="E8EDF3"/>
+                </a:solidFill>
+                <a:latin typeface="Calibri"/>
+              </a:rPr>
+              <a:t>4. Act 3 — 工具呼叫:token 飛去、等候第 4 個請求、結果飛回</a:t>
+            </a:r>
+          </a:p>
+          <a:p>
+            <a:pPr algn="l">
+              <a:spcAft>
+                <a:spcPts val="0"/>
+              </a:spcAft>
+            </a:pPr>
+            <a:r>
+              <a:rPr sz="1425" b="0" i="0">
+                <a:solidFill>
+                  <a:srgbClr val="E8EDF3"/>
+                </a:solidFill>
+                <a:latin typeface="Calibri"/>
+              </a:rPr>
+              <a:t>5. Frame closure — 「查新書」→ Child 執行 → 10 筆新書 → 使用者</a:t>
+            </a:r>
+          </a:p>
+        </p:txBody>
+      </p:sp>
+    </p:spTree>
+  </p:cSld>
+  <p:clrMapOvr>
+    <a:masterClrMapping/>
+  </p:clrMapOvr>
+</p:sld>
+</file>
+
+<file path=ppt/slides/slide27.xml><?xml version="1.0" encoding="utf-8"?>
+<p:sld xmlns:a="http://schemas.openxmlformats.org/drawingml/2006/main" xmlns:p="http://schemas.openxmlformats.org/presentationml/2006/main" xmlns:r="http://schemas.openxmlformats.org/officeDocument/2006/relationships">
+  <p:cSld>
+    <p:spTree>
+      <p:nvGrpSpPr>
+        <p:cNvPr id="1" name=""/>
+        <p:cNvGrpSpPr/>
+        <p:nvPr/>
+      </p:nvGrpSpPr>
+      <p:grpSpPr/>
+      <p:sp>
+        <p:nvSpPr>
+          <p:cNvPr id="2" name="Rectangle 1"/>
+          <p:cNvSpPr/>
+          <p:nvPr/>
+        </p:nvSpPr>
+        <p:spPr>
+          <a:xfrm>
+            <a:off x="0" y="0"/>
+            <a:ext cx="9144000" cy="5143500"/>
+          </a:xfrm>
+          <a:prstGeom prst="rect">
+            <a:avLst/>
+          </a:prstGeom>
+          <a:solidFill>
+            <a:srgbClr val="1E2761"/>
+          </a:solidFill>
+          <a:ln>
+            <a:noFill/>
+          </a:ln>
+        </p:spPr>
+        <p:style>
+          <a:lnRef idx="1">
+            <a:schemeClr val="accent1"/>
+          </a:lnRef>
+          <a:fillRef idx="3">
+            <a:schemeClr val="accent1"/>
+          </a:fillRef>
+          <a:effectRef idx="2">
+            <a:schemeClr val="accent1"/>
+          </a:effectRef>
+          <a:fontRef idx="minor">
+            <a:schemeClr val="lt1"/>
+          </a:fontRef>
+        </p:style>
+        <p:txBody>
+          <a:bodyPr rtlCol="0" anchor="ctr"/>
+          <a:lstStyle/>
+          <a:p>
+            <a:pPr algn="ctr"/>
+          </a:p>
+        </p:txBody>
+      </p:sp>
+      <p:sp>
+        <p:nvSpPr>
+          <p:cNvPr id="3" name="TextBox 2"/>
+          <p:cNvSpPr txBox="1"/>
+          <p:nvPr/>
+        </p:nvSpPr>
+        <p:spPr>
+          <a:xfrm>
+            <a:off x="514350" y="1234440"/>
+            <a:ext cx="2743200" cy="1714500"/>
+          </a:xfrm>
+          <a:prstGeom prst="rect">
+            <a:avLst/>
+          </a:prstGeom>
+          <a:noFill/>
+        </p:spPr>
+        <p:txBody>
+          <a:bodyPr wrap="square" lIns="34290" rIns="34290" tIns="13716" bIns="13716" anchor="ctr">
+            <a:spAutoFit/>
+          </a:bodyPr>
+          <a:lstStyle/>
+          <a:p>
+            <a:pPr algn="l"/>
+            <a:r>
+              <a:rPr sz="13500" b="1" i="0">
+                <a:solidFill>
+                  <a:srgbClr val="E8793A"/>
+                </a:solidFill>
+                <a:latin typeface="Arial Black"/>
+              </a:rPr>
+              <a:t>附錄</a:t>
+            </a:r>
+          </a:p>
+        </p:txBody>
+      </p:sp>
+      <p:sp>
+        <p:nvSpPr>
+          <p:cNvPr id="4" name="TextBox 3"/>
+          <p:cNvSpPr txBox="1"/>
+          <p:nvPr/>
+        </p:nvSpPr>
+        <p:spPr>
+          <a:xfrm>
+            <a:off x="3771900" y="1920239"/>
+            <a:ext cx="5143500" cy="1028700"/>
+          </a:xfrm>
+          <a:prstGeom prst="rect">
+            <a:avLst/>
+          </a:prstGeom>
+          <a:noFill/>
+        </p:spPr>
+        <p:txBody>
+          <a:bodyPr wrap="square" lIns="34290" rIns="34290" tIns="13716" bIns="13716" anchor="t">
+            <a:spAutoFit/>
+          </a:bodyPr>
+          <a:lstStyle/>
+          <a:p>
+            <a:pPr algn="l"/>
+            <a:r>
+              <a:rPr sz="4050" b="1" i="0">
+                <a:solidFill>
+                  <a:srgbClr val="FFFFFF"/>
+                </a:solidFill>
+                <a:latin typeface="Arial Black"/>
+              </a:rPr>
+              <a:t>Appendix</a:t>
+            </a:r>
+          </a:p>
+        </p:txBody>
+      </p:sp>
+      <p:sp>
+        <p:nvSpPr>
+          <p:cNvPr id="5" name="Rectangle 4"/>
+          <p:cNvSpPr/>
+          <p:nvPr/>
+        </p:nvSpPr>
+        <p:spPr>
+          <a:xfrm>
+            <a:off x="3771900" y="2743200"/>
+            <a:ext cx="1714500" cy="27432"/>
+          </a:xfrm>
+          <a:prstGeom prst="rect">
+            <a:avLst/>
+          </a:prstGeom>
+          <a:solidFill>
+            <a:srgbClr val="E8793A"/>
+          </a:solidFill>
+          <a:ln>
+            <a:noFill/>
+          </a:ln>
+          <a:effectLst/>
+        </p:spPr>
+        <p:style>
+          <a:lnRef idx="1">
+            <a:schemeClr val="accent1"/>
+          </a:lnRef>
+          <a:fillRef idx="3">
+            <a:schemeClr val="accent1"/>
+          </a:fillRef>
+          <a:effectRef idx="2">
+            <a:schemeClr val="accent1"/>
+          </a:effectRef>
+          <a:fontRef idx="minor">
+            <a:schemeClr val="lt1"/>
+          </a:fontRef>
+        </p:style>
+        <p:txBody>
+          <a:bodyPr rtlCol="0" anchor="ctr"/>
+          <a:lstStyle/>
+          <a:p>
+            <a:pPr algn="ctr"/>
+          </a:p>
+        </p:txBody>
+      </p:sp>
+      <p:sp>
+        <p:nvSpPr>
+          <p:cNvPr id="6" name="TextBox 5"/>
+          <p:cNvSpPr txBox="1"/>
+          <p:nvPr/>
+        </p:nvSpPr>
+        <p:spPr>
+          <a:xfrm>
+            <a:off x="3771900" y="2880360"/>
+            <a:ext cx="5143500" cy="1714500"/>
+          </a:xfrm>
+          <a:prstGeom prst="rect">
+            <a:avLst/>
+          </a:prstGeom>
+          <a:noFill/>
+        </p:spPr>
+        <p:txBody>
+          <a:bodyPr wrap="square" lIns="34290" rIns="34290" anchor="t">
+            <a:spAutoFit/>
+          </a:bodyPr>
+          <a:lstStyle/>
+          <a:p>
+            <a:pPr algn="l">
+              <a:spcAft>
+                <a:spcPts val="900"/>
+              </a:spcAft>
+            </a:pPr>
+            <a:r>
+              <a:rPr sz="1800" b="0" i="0">
+                <a:solidFill>
+                  <a:srgbClr val="E8EDF3"/>
+                </a:solidFill>
+                <a:latin typeface="Calibri"/>
+              </a:rPr>
+              <a:t>給技術 curious 老師的細節</a:t>
+            </a:r>
+          </a:p>
+          <a:p>
+            <a:pPr algn="l">
+              <a:spcAft>
+                <a:spcPts val="450"/>
+              </a:spcAft>
+            </a:pPr>
+            <a:r>
+              <a:rPr sz="1500" b="0" i="0">
+                <a:solidFill>
+                  <a:srgbClr val="E8EDF3"/>
+                </a:solidFill>
+                <a:latin typeface="Calibri"/>
+              </a:rPr>
+              <a:t>• REST vs JSON-RPC 比較</a:t>
+            </a:r>
+          </a:p>
+          <a:p>
+            <a:pPr algn="l">
+              <a:spcAft>
+                <a:spcPts val="0"/>
+              </a:spcAft>
+            </a:pPr>
+            <a:r>
+              <a:rPr sz="1500" b="0" i="0">
+                <a:solidFill>
+                  <a:srgbClr val="E8EDF3"/>
+                </a:solidFill>
+                <a:latin typeface="Calibri"/>
+              </a:rPr>
+              <a:t>• JSON-RPC 三種訊息類型(Request / Response / Notification)</a:t>
+            </a:r>
           </a:p>
         </p:txBody>
       </p:sp>

--- a/02-how-mcp-works.pptx
+++ b/02-how-mcp-works.pptx
@@ -6115,7 +6115,7 @@
             <a:avLst/>
           </a:prstGeom>
           <a:solidFill>
-            <a:srgbClr val="FFFFFF"/>
+            <a:srgbClr val="EFF2F7"/>
           </a:solidFill>
           <a:ln>
             <a:noFill/>
@@ -6146,49 +6146,14 @@
       </p:sp>
       <p:sp>
         <p:nvSpPr>
-          <p:cNvPr id="3" name="TextBox 2"/>
-          <p:cNvSpPr txBox="1"/>
-          <p:nvPr/>
-        </p:nvSpPr>
-        <p:spPr>
-          <a:xfrm>
-            <a:off x="514350" y="274320"/>
-            <a:ext cx="8229600" cy="480059"/>
-          </a:xfrm>
-          <a:prstGeom prst="rect">
-            <a:avLst/>
-          </a:prstGeom>
-          <a:noFill/>
-        </p:spPr>
-        <p:txBody>
-          <a:bodyPr wrap="square" lIns="34290" rIns="34290" tIns="13716" bIns="13716" anchor="t">
-            <a:spAutoFit/>
-          </a:bodyPr>
-          <a:lstStyle/>
-          <a:p>
-            <a:pPr algn="l"/>
-            <a:r>
-              <a:rPr sz="2100" b="1" i="0">
-                <a:solidFill>
-                  <a:srgbClr val="1E2761"/>
-                </a:solidFill>
-                <a:latin typeface="Arial Black"/>
-              </a:rPr>
-              <a:t>MCP 整體架構:四層分工</a:t>
-            </a:r>
-          </a:p>
-        </p:txBody>
-      </p:sp>
-      <p:sp>
-        <p:nvSpPr>
-          <p:cNvPr id="4" name="Rectangle 3"/>
-          <p:cNvSpPr/>
-          <p:nvPr/>
-        </p:nvSpPr>
-        <p:spPr>
-          <a:xfrm>
-            <a:off x="514350" y="822959"/>
-            <a:ext cx="2057400" cy="27432"/>
+          <p:cNvPr id="3" name="Rectangle 2"/>
+          <p:cNvSpPr/>
+          <p:nvPr/>
+        </p:nvSpPr>
+        <p:spPr>
+          <a:xfrm>
+            <a:off x="0" y="0"/>
+            <a:ext cx="9143771" cy="68580"/>
           </a:xfrm>
           <a:prstGeom prst="rect">
             <a:avLst/>
@@ -6225,7 +6190,86 @@
       </p:sp>
       <p:sp>
         <p:nvSpPr>
-          <p:cNvPr id="5" name="Rounded Rectangle 4"/>
+          <p:cNvPr id="4" name="TextBox 3"/>
+          <p:cNvSpPr txBox="1"/>
+          <p:nvPr/>
+        </p:nvSpPr>
+        <p:spPr>
+          <a:xfrm>
+            <a:off x="514350" y="274320"/>
+            <a:ext cx="8229600" cy="480059"/>
+          </a:xfrm>
+          <a:prstGeom prst="rect">
+            <a:avLst/>
+          </a:prstGeom>
+          <a:noFill/>
+        </p:spPr>
+        <p:txBody>
+          <a:bodyPr wrap="square" lIns="34290" rIns="34290" tIns="13716" bIns="13716" anchor="t">
+            <a:spAutoFit/>
+          </a:bodyPr>
+          <a:lstStyle/>
+          <a:p>
+            <a:pPr algn="l"/>
+            <a:r>
+              <a:rPr sz="2100" b="1" i="0">
+                <a:solidFill>
+                  <a:srgbClr val="1E2761"/>
+                </a:solidFill>
+                <a:latin typeface="Arial Black"/>
+              </a:rPr>
+              <a:t>MCP 整體架構:四層分工</a:t>
+            </a:r>
+          </a:p>
+        </p:txBody>
+      </p:sp>
+      <p:sp>
+        <p:nvSpPr>
+          <p:cNvPr id="5" name="Rectangle 4"/>
+          <p:cNvSpPr/>
+          <p:nvPr/>
+        </p:nvSpPr>
+        <p:spPr>
+          <a:xfrm>
+            <a:off x="514350" y="822959"/>
+            <a:ext cx="2057400" cy="27432"/>
+          </a:xfrm>
+          <a:prstGeom prst="rect">
+            <a:avLst/>
+          </a:prstGeom>
+          <a:solidFill>
+            <a:srgbClr val="E8793A"/>
+          </a:solidFill>
+          <a:ln>
+            <a:noFill/>
+          </a:ln>
+          <a:effectLst/>
+        </p:spPr>
+        <p:style>
+          <a:lnRef idx="1">
+            <a:schemeClr val="accent1"/>
+          </a:lnRef>
+          <a:fillRef idx="3">
+            <a:schemeClr val="accent1"/>
+          </a:fillRef>
+          <a:effectRef idx="2">
+            <a:schemeClr val="accent1"/>
+          </a:effectRef>
+          <a:fontRef idx="minor">
+            <a:schemeClr val="lt1"/>
+          </a:fontRef>
+        </p:style>
+        <p:txBody>
+          <a:bodyPr rtlCol="0" anchor="ctr"/>
+          <a:lstStyle/>
+          <a:p>
+            <a:pPr algn="ctr"/>
+          </a:p>
+        </p:txBody>
+      </p:sp>
+      <p:sp>
+        <p:nvSpPr>
+          <p:cNvPr id="6" name="Rounded Rectangle 5"/>
           <p:cNvSpPr/>
           <p:nvPr/>
         </p:nvSpPr>
@@ -6273,7 +6317,7 @@
       </p:sp>
       <p:sp>
         <p:nvSpPr>
-          <p:cNvPr id="6" name="Rectangle 5"/>
+          <p:cNvPr id="7" name="Rectangle 6"/>
           <p:cNvSpPr/>
           <p:nvPr/>
         </p:nvSpPr>
@@ -6317,7 +6361,7 @@
       </p:sp>
       <p:sp>
         <p:nvSpPr>
-          <p:cNvPr id="7" name="TextBox 6"/>
+          <p:cNvPr id="8" name="TextBox 7"/>
           <p:cNvSpPr txBox="1"/>
           <p:nvPr/>
         </p:nvSpPr>
@@ -6352,7 +6396,7 @@
       </p:sp>
       <p:sp>
         <p:nvSpPr>
-          <p:cNvPr id="8" name="TextBox 7"/>
+          <p:cNvPr id="9" name="TextBox 8"/>
           <p:cNvSpPr txBox="1"/>
           <p:nvPr/>
         </p:nvSpPr>
@@ -6387,7 +6431,7 @@
       </p:sp>
       <p:sp>
         <p:nvSpPr>
-          <p:cNvPr id="9" name="TextBox 8"/>
+          <p:cNvPr id="10" name="TextBox 9"/>
           <p:cNvSpPr txBox="1"/>
           <p:nvPr/>
         </p:nvSpPr>
@@ -6422,7 +6466,7 @@
       </p:sp>
       <p:sp>
         <p:nvSpPr>
-          <p:cNvPr id="10" name="TextBox 9"/>
+          <p:cNvPr id="11" name="TextBox 10"/>
           <p:cNvSpPr txBox="1"/>
           <p:nvPr/>
         </p:nvSpPr>
@@ -6457,7 +6501,7 @@
       </p:sp>
       <p:sp>
         <p:nvSpPr>
-          <p:cNvPr id="11" name="Rounded Rectangle 10"/>
+          <p:cNvPr id="12" name="Rounded Rectangle 11"/>
           <p:cNvSpPr/>
           <p:nvPr/>
         </p:nvSpPr>
@@ -6505,7 +6549,7 @@
       </p:sp>
       <p:sp>
         <p:nvSpPr>
-          <p:cNvPr id="12" name="Rectangle 11"/>
+          <p:cNvPr id="13" name="Rectangle 12"/>
           <p:cNvSpPr/>
           <p:nvPr/>
         </p:nvSpPr>
@@ -6549,7 +6593,7 @@
       </p:sp>
       <p:sp>
         <p:nvSpPr>
-          <p:cNvPr id="13" name="TextBox 12"/>
+          <p:cNvPr id="14" name="TextBox 13"/>
           <p:cNvSpPr txBox="1"/>
           <p:nvPr/>
         </p:nvSpPr>
@@ -6584,7 +6628,7 @@
       </p:sp>
       <p:sp>
         <p:nvSpPr>
-          <p:cNvPr id="14" name="TextBox 13"/>
+          <p:cNvPr id="15" name="TextBox 14"/>
           <p:cNvSpPr txBox="1"/>
           <p:nvPr/>
         </p:nvSpPr>
@@ -6619,7 +6663,7 @@
       </p:sp>
       <p:sp>
         <p:nvSpPr>
-          <p:cNvPr id="15" name="TextBox 14"/>
+          <p:cNvPr id="16" name="TextBox 15"/>
           <p:cNvSpPr txBox="1"/>
           <p:nvPr/>
         </p:nvSpPr>
@@ -6654,7 +6698,7 @@
       </p:sp>
       <p:sp>
         <p:nvSpPr>
-          <p:cNvPr id="16" name="TextBox 15"/>
+          <p:cNvPr id="17" name="TextBox 16"/>
           <p:cNvSpPr txBox="1"/>
           <p:nvPr/>
         </p:nvSpPr>
@@ -6689,7 +6733,7 @@
       </p:sp>
       <p:sp>
         <p:nvSpPr>
-          <p:cNvPr id="17" name="Rounded Rectangle 16"/>
+          <p:cNvPr id="18" name="Rounded Rectangle 17"/>
           <p:cNvSpPr/>
           <p:nvPr/>
         </p:nvSpPr>
@@ -6737,7 +6781,7 @@
       </p:sp>
       <p:sp>
         <p:nvSpPr>
-          <p:cNvPr id="18" name="Rectangle 17"/>
+          <p:cNvPr id="19" name="Rectangle 18"/>
           <p:cNvSpPr/>
           <p:nvPr/>
         </p:nvSpPr>
@@ -6781,7 +6825,7 @@
       </p:sp>
       <p:sp>
         <p:nvSpPr>
-          <p:cNvPr id="19" name="TextBox 18"/>
+          <p:cNvPr id="20" name="TextBox 19"/>
           <p:cNvSpPr txBox="1"/>
           <p:nvPr/>
         </p:nvSpPr>
@@ -6816,7 +6860,7 @@
       </p:sp>
       <p:sp>
         <p:nvSpPr>
-          <p:cNvPr id="20" name="TextBox 19"/>
+          <p:cNvPr id="21" name="TextBox 20"/>
           <p:cNvSpPr txBox="1"/>
           <p:nvPr/>
         </p:nvSpPr>
@@ -6851,7 +6895,7 @@
       </p:sp>
       <p:sp>
         <p:nvSpPr>
-          <p:cNvPr id="21" name="TextBox 20"/>
+          <p:cNvPr id="22" name="TextBox 21"/>
           <p:cNvSpPr txBox="1"/>
           <p:nvPr/>
         </p:nvSpPr>
@@ -6886,7 +6930,7 @@
       </p:sp>
       <p:sp>
         <p:nvSpPr>
-          <p:cNvPr id="22" name="TextBox 21"/>
+          <p:cNvPr id="23" name="TextBox 22"/>
           <p:cNvSpPr txBox="1"/>
           <p:nvPr/>
         </p:nvSpPr>
@@ -6921,7 +6965,7 @@
       </p:sp>
       <p:sp>
         <p:nvSpPr>
-          <p:cNvPr id="23" name="Rounded Rectangle 22"/>
+          <p:cNvPr id="24" name="Rounded Rectangle 23"/>
           <p:cNvSpPr/>
           <p:nvPr/>
         </p:nvSpPr>
@@ -6969,7 +7013,7 @@
       </p:sp>
       <p:sp>
         <p:nvSpPr>
-          <p:cNvPr id="24" name="Rectangle 23"/>
+          <p:cNvPr id="25" name="Rectangle 24"/>
           <p:cNvSpPr/>
           <p:nvPr/>
         </p:nvSpPr>
@@ -7013,7 +7057,7 @@
       </p:sp>
       <p:sp>
         <p:nvSpPr>
-          <p:cNvPr id="25" name="TextBox 24"/>
+          <p:cNvPr id="26" name="TextBox 25"/>
           <p:cNvSpPr txBox="1"/>
           <p:nvPr/>
         </p:nvSpPr>
@@ -7048,7 +7092,7 @@
       </p:sp>
       <p:sp>
         <p:nvSpPr>
-          <p:cNvPr id="26" name="TextBox 25"/>
+          <p:cNvPr id="27" name="TextBox 26"/>
           <p:cNvSpPr txBox="1"/>
           <p:nvPr/>
         </p:nvSpPr>
@@ -7083,7 +7127,7 @@
       </p:sp>
       <p:sp>
         <p:nvSpPr>
-          <p:cNvPr id="27" name="TextBox 26"/>
+          <p:cNvPr id="28" name="TextBox 27"/>
           <p:cNvSpPr txBox="1"/>
           <p:nvPr/>
         </p:nvSpPr>
@@ -7118,7 +7162,7 @@
       </p:sp>
       <p:sp>
         <p:nvSpPr>
-          <p:cNvPr id="28" name="TextBox 27"/>
+          <p:cNvPr id="29" name="TextBox 28"/>
           <p:cNvSpPr txBox="1"/>
           <p:nvPr/>
         </p:nvSpPr>
@@ -7199,7 +7243,7 @@
             <a:avLst/>
           </a:prstGeom>
           <a:solidFill>
-            <a:srgbClr val="FFFFFF"/>
+            <a:srgbClr val="EFF2F7"/>
           </a:solidFill>
           <a:ln>
             <a:noFill/>
@@ -7230,49 +7274,14 @@
       </p:sp>
       <p:sp>
         <p:nvSpPr>
-          <p:cNvPr id="3" name="TextBox 2"/>
-          <p:cNvSpPr txBox="1"/>
-          <p:nvPr/>
-        </p:nvSpPr>
-        <p:spPr>
-          <a:xfrm>
-            <a:off x="514350" y="342900"/>
-            <a:ext cx="8229600" cy="548640"/>
-          </a:xfrm>
-          <a:prstGeom prst="rect">
-            <a:avLst/>
-          </a:prstGeom>
-          <a:noFill/>
-        </p:spPr>
-        <p:txBody>
-          <a:bodyPr wrap="square" lIns="34290" rIns="34290" tIns="13716" bIns="13716" anchor="t">
-            <a:spAutoFit/>
-          </a:bodyPr>
-          <a:lstStyle/>
-          <a:p>
-            <a:pPr algn="l"/>
-            <a:r>
-              <a:rPr sz="2700" b="1" i="0">
-                <a:solidFill>
-                  <a:srgbClr val="1E2761"/>
-                </a:solidFill>
-                <a:latin typeface="Arial Black"/>
-              </a:rPr>
-              <a:t>本講大綱</a:t>
-            </a:r>
-          </a:p>
-        </p:txBody>
-      </p:sp>
-      <p:sp>
-        <p:nvSpPr>
-          <p:cNvPr id="4" name="Rectangle 3"/>
-          <p:cNvSpPr/>
-          <p:nvPr/>
-        </p:nvSpPr>
-        <p:spPr>
-          <a:xfrm>
-            <a:off x="514350" y="960119"/>
-            <a:ext cx="2057400" cy="27432"/>
+          <p:cNvPr id="3" name="Rectangle 2"/>
+          <p:cNvSpPr/>
+          <p:nvPr/>
+        </p:nvSpPr>
+        <p:spPr>
+          <a:xfrm>
+            <a:off x="0" y="0"/>
+            <a:ext cx="9143771" cy="68580"/>
           </a:xfrm>
           <a:prstGeom prst="rect">
             <a:avLst/>
@@ -7309,7 +7318,86 @@
       </p:sp>
       <p:sp>
         <p:nvSpPr>
-          <p:cNvPr id="5" name="TextBox 4"/>
+          <p:cNvPr id="4" name="TextBox 3"/>
+          <p:cNvSpPr txBox="1"/>
+          <p:nvPr/>
+        </p:nvSpPr>
+        <p:spPr>
+          <a:xfrm>
+            <a:off x="514350" y="342900"/>
+            <a:ext cx="8229600" cy="548640"/>
+          </a:xfrm>
+          <a:prstGeom prst="rect">
+            <a:avLst/>
+          </a:prstGeom>
+          <a:noFill/>
+        </p:spPr>
+        <p:txBody>
+          <a:bodyPr wrap="square" lIns="34290" rIns="34290" tIns="13716" bIns="13716" anchor="t">
+            <a:spAutoFit/>
+          </a:bodyPr>
+          <a:lstStyle/>
+          <a:p>
+            <a:pPr algn="l"/>
+            <a:r>
+              <a:rPr sz="2700" b="1" i="0">
+                <a:solidFill>
+                  <a:srgbClr val="1E2761"/>
+                </a:solidFill>
+                <a:latin typeface="Arial Black"/>
+              </a:rPr>
+              <a:t>本講大綱</a:t>
+            </a:r>
+          </a:p>
+        </p:txBody>
+      </p:sp>
+      <p:sp>
+        <p:nvSpPr>
+          <p:cNvPr id="5" name="Rectangle 4"/>
+          <p:cNvSpPr/>
+          <p:nvPr/>
+        </p:nvSpPr>
+        <p:spPr>
+          <a:xfrm>
+            <a:off x="514350" y="960119"/>
+            <a:ext cx="2057400" cy="27432"/>
+          </a:xfrm>
+          <a:prstGeom prst="rect">
+            <a:avLst/>
+          </a:prstGeom>
+          <a:solidFill>
+            <a:srgbClr val="E8793A"/>
+          </a:solidFill>
+          <a:ln>
+            <a:noFill/>
+          </a:ln>
+          <a:effectLst/>
+        </p:spPr>
+        <p:style>
+          <a:lnRef idx="1">
+            <a:schemeClr val="accent1"/>
+          </a:lnRef>
+          <a:fillRef idx="3">
+            <a:schemeClr val="accent1"/>
+          </a:fillRef>
+          <a:effectRef idx="2">
+            <a:schemeClr val="accent1"/>
+          </a:effectRef>
+          <a:fontRef idx="minor">
+            <a:schemeClr val="lt1"/>
+          </a:fontRef>
+        </p:style>
+        <p:txBody>
+          <a:bodyPr rtlCol="0" anchor="ctr"/>
+          <a:lstStyle/>
+          <a:p>
+            <a:pPr algn="ctr"/>
+          </a:p>
+        </p:txBody>
+      </p:sp>
+      <p:sp>
+        <p:nvSpPr>
+          <p:cNvPr id="6" name="TextBox 5"/>
           <p:cNvSpPr txBox="1"/>
           <p:nvPr/>
         </p:nvSpPr>
@@ -7344,7 +7432,7 @@
       </p:sp>
       <p:sp>
         <p:nvSpPr>
-          <p:cNvPr id="6" name="TextBox 5"/>
+          <p:cNvPr id="7" name="TextBox 6"/>
           <p:cNvSpPr txBox="1"/>
           <p:nvPr/>
         </p:nvSpPr>
@@ -7379,7 +7467,7 @@
       </p:sp>
       <p:sp>
         <p:nvSpPr>
-          <p:cNvPr id="7" name="TextBox 6"/>
+          <p:cNvPr id="8" name="TextBox 7"/>
           <p:cNvSpPr txBox="1"/>
           <p:nvPr/>
         </p:nvSpPr>
@@ -7414,7 +7502,7 @@
       </p:sp>
       <p:sp>
         <p:nvSpPr>
-          <p:cNvPr id="8" name="TextBox 7"/>
+          <p:cNvPr id="9" name="TextBox 8"/>
           <p:cNvSpPr txBox="1"/>
           <p:nvPr/>
         </p:nvSpPr>
@@ -7449,7 +7537,7 @@
       </p:sp>
       <p:sp>
         <p:nvSpPr>
-          <p:cNvPr id="9" name="TextBox 8"/>
+          <p:cNvPr id="10" name="TextBox 9"/>
           <p:cNvSpPr txBox="1"/>
           <p:nvPr/>
         </p:nvSpPr>
@@ -7484,7 +7572,7 @@
       </p:sp>
       <p:sp>
         <p:nvSpPr>
-          <p:cNvPr id="10" name="TextBox 9"/>
+          <p:cNvPr id="11" name="TextBox 10"/>
           <p:cNvSpPr txBox="1"/>
           <p:nvPr/>
         </p:nvSpPr>
@@ -7519,7 +7607,7 @@
       </p:sp>
       <p:sp>
         <p:nvSpPr>
-          <p:cNvPr id="11" name="TextBox 10"/>
+          <p:cNvPr id="12" name="TextBox 11"/>
           <p:cNvSpPr txBox="1"/>
           <p:nvPr/>
         </p:nvSpPr>
@@ -7554,7 +7642,7 @@
       </p:sp>
       <p:sp>
         <p:nvSpPr>
-          <p:cNvPr id="12" name="TextBox 11"/>
+          <p:cNvPr id="13" name="TextBox 12"/>
           <p:cNvSpPr txBox="1"/>
           <p:nvPr/>
         </p:nvSpPr>
@@ -7589,7 +7677,7 @@
       </p:sp>
       <p:sp>
         <p:nvSpPr>
-          <p:cNvPr id="13" name="TextBox 12"/>
+          <p:cNvPr id="14" name="TextBox 13"/>
           <p:cNvSpPr txBox="1"/>
           <p:nvPr/>
         </p:nvSpPr>
@@ -7624,7 +7712,7 @@
       </p:sp>
       <p:sp>
         <p:nvSpPr>
-          <p:cNvPr id="14" name="TextBox 13"/>
+          <p:cNvPr id="15" name="TextBox 14"/>
           <p:cNvSpPr txBox="1"/>
           <p:nvPr/>
         </p:nvSpPr>
@@ -7659,7 +7747,7 @@
       </p:sp>
       <p:sp>
         <p:nvSpPr>
-          <p:cNvPr id="15" name="TextBox 14"/>
+          <p:cNvPr id="16" name="TextBox 15"/>
           <p:cNvSpPr txBox="1"/>
           <p:nvPr/>
         </p:nvSpPr>
@@ -7694,7 +7782,7 @@
       </p:sp>
       <p:sp>
         <p:nvSpPr>
-          <p:cNvPr id="16" name="TextBox 15"/>
+          <p:cNvPr id="17" name="TextBox 16"/>
           <p:cNvSpPr txBox="1"/>
           <p:nvPr/>
         </p:nvSpPr>
@@ -7729,7 +7817,7 @@
       </p:sp>
       <p:sp>
         <p:nvSpPr>
-          <p:cNvPr id="17" name="TextBox 16"/>
+          <p:cNvPr id="18" name="TextBox 17"/>
           <p:cNvSpPr txBox="1"/>
           <p:nvPr/>
         </p:nvSpPr>
@@ -7764,7 +7852,7 @@
       </p:sp>
       <p:sp>
         <p:nvSpPr>
-          <p:cNvPr id="18" name="TextBox 17"/>
+          <p:cNvPr id="19" name="TextBox 18"/>
           <p:cNvSpPr txBox="1"/>
           <p:nvPr/>
         </p:nvSpPr>
@@ -7799,7 +7887,7 @@
       </p:sp>
       <p:sp>
         <p:nvSpPr>
-          <p:cNvPr id="19" name="TextBox 18"/>
+          <p:cNvPr id="20" name="TextBox 19"/>
           <p:cNvSpPr txBox="1"/>
           <p:nvPr/>
         </p:nvSpPr>
@@ -7880,7 +7968,7 @@
             <a:avLst/>
           </a:prstGeom>
           <a:solidFill>
-            <a:srgbClr val="FFFFFF"/>
+            <a:srgbClr val="EFF2F7"/>
           </a:solidFill>
           <a:ln>
             <a:noFill/>
@@ -7911,49 +7999,14 @@
       </p:sp>
       <p:sp>
         <p:nvSpPr>
-          <p:cNvPr id="3" name="TextBox 2"/>
-          <p:cNvSpPr txBox="1"/>
-          <p:nvPr/>
-        </p:nvSpPr>
-        <p:spPr>
-          <a:xfrm>
-            <a:off x="514350" y="342900"/>
-            <a:ext cx="8229600" cy="548640"/>
-          </a:xfrm>
-          <a:prstGeom prst="rect">
-            <a:avLst/>
-          </a:prstGeom>
-          <a:noFill/>
-        </p:spPr>
-        <p:txBody>
-          <a:bodyPr wrap="square" lIns="34290" rIns="34290" tIns="13716" bIns="13716" anchor="t">
-            <a:spAutoFit/>
-          </a:bodyPr>
-          <a:lstStyle/>
-          <a:p>
-            <a:pPr algn="l"/>
-            <a:r>
-              <a:rPr sz="2700" b="1" i="0">
-                <a:solidFill>
-                  <a:srgbClr val="1E2761"/>
-                </a:solidFill>
-                <a:latin typeface="Arial Black"/>
-              </a:rPr>
-              <a:t>本講重點回顧</a:t>
-            </a:r>
-          </a:p>
-        </p:txBody>
-      </p:sp>
-      <p:sp>
-        <p:nvSpPr>
-          <p:cNvPr id="4" name="Rectangle 3"/>
-          <p:cNvSpPr/>
-          <p:nvPr/>
-        </p:nvSpPr>
-        <p:spPr>
-          <a:xfrm>
-            <a:off x="514350" y="960119"/>
-            <a:ext cx="2057400" cy="27432"/>
+          <p:cNvPr id="3" name="Rectangle 2"/>
+          <p:cNvSpPr/>
+          <p:nvPr/>
+        </p:nvSpPr>
+        <p:spPr>
+          <a:xfrm>
+            <a:off x="0" y="0"/>
+            <a:ext cx="9143771" cy="68580"/>
           </a:xfrm>
           <a:prstGeom prst="rect">
             <a:avLst/>
@@ -7990,7 +8043,86 @@
       </p:sp>
       <p:sp>
         <p:nvSpPr>
-          <p:cNvPr id="5" name="TextBox 4"/>
+          <p:cNvPr id="4" name="TextBox 3"/>
+          <p:cNvSpPr txBox="1"/>
+          <p:nvPr/>
+        </p:nvSpPr>
+        <p:spPr>
+          <a:xfrm>
+            <a:off x="514350" y="342900"/>
+            <a:ext cx="8229600" cy="548640"/>
+          </a:xfrm>
+          <a:prstGeom prst="rect">
+            <a:avLst/>
+          </a:prstGeom>
+          <a:noFill/>
+        </p:spPr>
+        <p:txBody>
+          <a:bodyPr wrap="square" lIns="34290" rIns="34290" tIns="13716" bIns="13716" anchor="t">
+            <a:spAutoFit/>
+          </a:bodyPr>
+          <a:lstStyle/>
+          <a:p>
+            <a:pPr algn="l"/>
+            <a:r>
+              <a:rPr sz="2700" b="1" i="0">
+                <a:solidFill>
+                  <a:srgbClr val="1E2761"/>
+                </a:solidFill>
+                <a:latin typeface="Arial Black"/>
+              </a:rPr>
+              <a:t>本講重點回顧</a:t>
+            </a:r>
+          </a:p>
+        </p:txBody>
+      </p:sp>
+      <p:sp>
+        <p:nvSpPr>
+          <p:cNvPr id="5" name="Rectangle 4"/>
+          <p:cNvSpPr/>
+          <p:nvPr/>
+        </p:nvSpPr>
+        <p:spPr>
+          <a:xfrm>
+            <a:off x="514350" y="960119"/>
+            <a:ext cx="2057400" cy="27432"/>
+          </a:xfrm>
+          <a:prstGeom prst="rect">
+            <a:avLst/>
+          </a:prstGeom>
+          <a:solidFill>
+            <a:srgbClr val="E8793A"/>
+          </a:solidFill>
+          <a:ln>
+            <a:noFill/>
+          </a:ln>
+          <a:effectLst/>
+        </p:spPr>
+        <p:style>
+          <a:lnRef idx="1">
+            <a:schemeClr val="accent1"/>
+          </a:lnRef>
+          <a:fillRef idx="3">
+            <a:schemeClr val="accent1"/>
+          </a:fillRef>
+          <a:effectRef idx="2">
+            <a:schemeClr val="accent1"/>
+          </a:effectRef>
+          <a:fontRef idx="minor">
+            <a:schemeClr val="lt1"/>
+          </a:fontRef>
+        </p:style>
+        <p:txBody>
+          <a:bodyPr rtlCol="0" anchor="ctr"/>
+          <a:lstStyle/>
+          <a:p>
+            <a:pPr algn="ctr"/>
+          </a:p>
+        </p:txBody>
+      </p:sp>
+      <p:sp>
+        <p:nvSpPr>
+          <p:cNvPr id="6" name="TextBox 5"/>
           <p:cNvSpPr txBox="1"/>
           <p:nvPr/>
         </p:nvSpPr>
@@ -8025,7 +8157,7 @@
       </p:sp>
       <p:sp>
         <p:nvSpPr>
-          <p:cNvPr id="6" name="TextBox 5"/>
+          <p:cNvPr id="7" name="TextBox 6"/>
           <p:cNvSpPr txBox="1"/>
           <p:nvPr/>
         </p:nvSpPr>
@@ -8060,7 +8192,7 @@
       </p:sp>
       <p:sp>
         <p:nvSpPr>
-          <p:cNvPr id="7" name="TextBox 6"/>
+          <p:cNvPr id="8" name="TextBox 7"/>
           <p:cNvSpPr txBox="1"/>
           <p:nvPr/>
         </p:nvSpPr>
@@ -8095,7 +8227,7 @@
       </p:sp>
       <p:sp>
         <p:nvSpPr>
-          <p:cNvPr id="8" name="TextBox 7"/>
+          <p:cNvPr id="9" name="TextBox 8"/>
           <p:cNvSpPr txBox="1"/>
           <p:nvPr/>
         </p:nvSpPr>
@@ -8130,7 +8262,7 @@
       </p:sp>
       <p:sp>
         <p:nvSpPr>
-          <p:cNvPr id="9" name="TextBox 8"/>
+          <p:cNvPr id="10" name="TextBox 9"/>
           <p:cNvSpPr txBox="1"/>
           <p:nvPr/>
         </p:nvSpPr>
@@ -8165,7 +8297,7 @@
       </p:sp>
       <p:sp>
         <p:nvSpPr>
-          <p:cNvPr id="10" name="TextBox 9"/>
+          <p:cNvPr id="11" name="TextBox 10"/>
           <p:cNvSpPr txBox="1"/>
           <p:nvPr/>
         </p:nvSpPr>
@@ -8200,7 +8332,7 @@
       </p:sp>
       <p:sp>
         <p:nvSpPr>
-          <p:cNvPr id="11" name="TextBox 10"/>
+          <p:cNvPr id="12" name="TextBox 11"/>
           <p:cNvSpPr txBox="1"/>
           <p:nvPr/>
         </p:nvSpPr>
@@ -8235,7 +8367,7 @@
       </p:sp>
       <p:sp>
         <p:nvSpPr>
-          <p:cNvPr id="12" name="TextBox 11"/>
+          <p:cNvPr id="13" name="TextBox 12"/>
           <p:cNvSpPr txBox="1"/>
           <p:nvPr/>
         </p:nvSpPr>
@@ -8270,7 +8402,7 @@
       </p:sp>
       <p:sp>
         <p:nvSpPr>
-          <p:cNvPr id="13" name="TextBox 12"/>
+          <p:cNvPr id="14" name="TextBox 13"/>
           <p:cNvSpPr txBox="1"/>
           <p:nvPr/>
         </p:nvSpPr>
@@ -8305,7 +8437,7 @@
       </p:sp>
       <p:sp>
         <p:nvSpPr>
-          <p:cNvPr id="14" name="TextBox 13"/>
+          <p:cNvPr id="15" name="TextBox 14"/>
           <p:cNvSpPr txBox="1"/>
           <p:nvPr/>
         </p:nvSpPr>
@@ -8340,7 +8472,7 @@
       </p:sp>
       <p:sp>
         <p:nvSpPr>
-          <p:cNvPr id="15" name="TextBox 14"/>
+          <p:cNvPr id="16" name="TextBox 15"/>
           <p:cNvSpPr txBox="1"/>
           <p:nvPr/>
         </p:nvSpPr>
@@ -8375,7 +8507,7 @@
       </p:sp>
       <p:sp>
         <p:nvSpPr>
-          <p:cNvPr id="16" name="TextBox 15"/>
+          <p:cNvPr id="17" name="TextBox 16"/>
           <p:cNvSpPr txBox="1"/>
           <p:nvPr/>
         </p:nvSpPr>
@@ -8410,7 +8542,7 @@
       </p:sp>
       <p:sp>
         <p:nvSpPr>
-          <p:cNvPr id="17" name="TextBox 16"/>
+          <p:cNvPr id="18" name="TextBox 17"/>
           <p:cNvSpPr txBox="1"/>
           <p:nvPr/>
         </p:nvSpPr>
@@ -8476,7 +8608,7 @@
             <a:avLst/>
           </a:prstGeom>
           <a:solidFill>
-            <a:srgbClr val="1E2761"/>
+            <a:srgbClr val="1C7293"/>
           </a:solidFill>
           <a:ln>
             <a:noFill/>
@@ -8506,84 +8638,14 @@
       </p:sp>
       <p:sp>
         <p:nvSpPr>
-          <p:cNvPr id="3" name="TextBox 2"/>
-          <p:cNvSpPr txBox="1"/>
-          <p:nvPr/>
-        </p:nvSpPr>
-        <p:spPr>
-          <a:xfrm>
-            <a:off x="514350" y="1028700"/>
-            <a:ext cx="2743200" cy="3086100"/>
-          </a:xfrm>
-          <a:prstGeom prst="rect">
-            <a:avLst/>
-          </a:prstGeom>
-          <a:noFill/>
-        </p:spPr>
-        <p:txBody>
-          <a:bodyPr wrap="square" lIns="34290" rIns="34290" tIns="13716" bIns="13716" anchor="ctr">
-            <a:spAutoFit/>
-          </a:bodyPr>
-          <a:lstStyle/>
-          <a:p>
-            <a:pPr algn="l"/>
-            <a:r>
-              <a:rPr sz="18000" b="1" i="0">
-                <a:solidFill>
-                  <a:srgbClr val="E8793A"/>
-                </a:solidFill>
-                <a:latin typeface="Arial Black"/>
-              </a:rPr>
-              <a:t>01</a:t>
-            </a:r>
-          </a:p>
-        </p:txBody>
-      </p:sp>
-      <p:sp>
-        <p:nvSpPr>
-          <p:cNvPr id="4" name="TextBox 3"/>
-          <p:cNvSpPr txBox="1"/>
-          <p:nvPr/>
-        </p:nvSpPr>
-        <p:spPr>
-          <a:xfrm>
-            <a:off x="3771900" y="1920239"/>
-            <a:ext cx="5143500" cy="1028700"/>
-          </a:xfrm>
-          <a:prstGeom prst="rect">
-            <a:avLst/>
-          </a:prstGeom>
-          <a:noFill/>
-        </p:spPr>
-        <p:txBody>
-          <a:bodyPr wrap="square" lIns="34290" rIns="34290" tIns="13716" bIns="13716" anchor="t">
-            <a:spAutoFit/>
-          </a:bodyPr>
-          <a:lstStyle/>
-          <a:p>
-            <a:pPr algn="l"/>
-            <a:r>
-              <a:rPr sz="4050" b="1" i="0">
-                <a:solidFill>
-                  <a:srgbClr val="FFFFFF"/>
-                </a:solidFill>
-                <a:latin typeface="Arial Black"/>
-              </a:rPr>
-              <a:t>Function Calling 怎麼運作</a:t>
-            </a:r>
-          </a:p>
-        </p:txBody>
-      </p:sp>
-      <p:sp>
-        <p:nvSpPr>
-          <p:cNvPr id="5" name="Rectangle 4"/>
-          <p:cNvSpPr/>
-          <p:nvPr/>
-        </p:nvSpPr>
-        <p:spPr>
-          <a:xfrm>
-            <a:off x="3771900" y="2743200"/>
-            <a:ext cx="1714500" cy="27432"/>
+          <p:cNvPr id="3" name="Rectangle 2"/>
+          <p:cNvSpPr/>
+          <p:nvPr/>
+        </p:nvSpPr>
+        <p:spPr>
+          <a:xfrm>
+            <a:off x="0" y="0"/>
+            <a:ext cx="9143771" cy="68580"/>
           </a:xfrm>
           <a:prstGeom prst="rect">
             <a:avLst/>
@@ -8620,14 +8682,14 @@
       </p:sp>
       <p:sp>
         <p:nvSpPr>
-          <p:cNvPr id="6" name="TextBox 5"/>
+          <p:cNvPr id="4" name="TextBox 3"/>
           <p:cNvSpPr txBox="1"/>
           <p:nvPr/>
         </p:nvSpPr>
         <p:spPr>
           <a:xfrm>
-            <a:off x="3771900" y="2880360"/>
-            <a:ext cx="5143500" cy="685800"/>
+            <a:off x="582930" y="1371600"/>
+            <a:ext cx="2743200" cy="685800"/>
           </a:xfrm>
           <a:prstGeom prst="rect">
             <a:avLst/>
@@ -8642,7 +8704,77 @@
           <a:p>
             <a:pPr algn="l"/>
             <a:r>
-              <a:rPr sz="1650" b="0" i="0">
+              <a:rPr sz="3450" b="1" i="0">
+                <a:solidFill>
+                  <a:srgbClr val="E8793A"/>
+                </a:solidFill>
+                <a:latin typeface="Arial Black"/>
+              </a:rPr>
+              <a:t>01</a:t>
+            </a:r>
+          </a:p>
+        </p:txBody>
+      </p:sp>
+      <p:sp>
+        <p:nvSpPr>
+          <p:cNvPr id="5" name="TextBox 4"/>
+          <p:cNvSpPr txBox="1"/>
+          <p:nvPr/>
+        </p:nvSpPr>
+        <p:spPr>
+          <a:xfrm>
+            <a:off x="582930" y="2023110"/>
+            <a:ext cx="8229600" cy="685800"/>
+          </a:xfrm>
+          <a:prstGeom prst="rect">
+            <a:avLst/>
+          </a:prstGeom>
+          <a:noFill/>
+        </p:spPr>
+        <p:txBody>
+          <a:bodyPr wrap="square" lIns="34290" rIns="34290" tIns="13716" bIns="13716" anchor="t">
+            <a:spAutoFit/>
+          </a:bodyPr>
+          <a:lstStyle/>
+          <a:p>
+            <a:pPr algn="l"/>
+            <a:r>
+              <a:rPr sz="3150" b="1" i="0">
+                <a:solidFill>
+                  <a:srgbClr val="FFFFFF"/>
+                </a:solidFill>
+                <a:latin typeface="Arial Black"/>
+              </a:rPr>
+              <a:t>Function Calling 怎麼運作</a:t>
+            </a:r>
+          </a:p>
+        </p:txBody>
+      </p:sp>
+      <p:sp>
+        <p:nvSpPr>
+          <p:cNvPr id="6" name="TextBox 5"/>
+          <p:cNvSpPr txBox="1"/>
+          <p:nvPr/>
+        </p:nvSpPr>
+        <p:spPr>
+          <a:xfrm>
+            <a:off x="582930" y="2777489"/>
+            <a:ext cx="8229600" cy="480059"/>
+          </a:xfrm>
+          <a:prstGeom prst="rect">
+            <a:avLst/>
+          </a:prstGeom>
+          <a:noFill/>
+        </p:spPr>
+        <p:txBody>
+          <a:bodyPr wrap="square" lIns="34290" rIns="34290" tIns="13716" bIns="13716" anchor="t">
+            <a:spAutoFit/>
+          </a:bodyPr>
+          <a:lstStyle/>
+          <a:p>
+            <a:pPr algn="l"/>
+            <a:r>
+              <a:rPr sz="1500" b="0" i="0">
                 <a:solidFill>
                   <a:srgbClr val="E8EDF3"/>
                 </a:solidFill>
@@ -8686,7 +8818,7 @@
             <a:avLst/>
           </a:prstGeom>
           <a:solidFill>
-            <a:srgbClr val="FFFFFF"/>
+            <a:srgbClr val="EFF2F7"/>
           </a:solidFill>
           <a:ln>
             <a:noFill/>
@@ -8716,49 +8848,14 @@
       </p:sp>
       <p:sp>
         <p:nvSpPr>
-          <p:cNvPr id="3" name="TextBox 2"/>
-          <p:cNvSpPr txBox="1"/>
-          <p:nvPr/>
-        </p:nvSpPr>
-        <p:spPr>
-          <a:xfrm>
-            <a:off x="514350" y="274320"/>
-            <a:ext cx="8229600" cy="480059"/>
-          </a:xfrm>
-          <a:prstGeom prst="rect">
-            <a:avLst/>
-          </a:prstGeom>
-          <a:noFill/>
-        </p:spPr>
-        <p:txBody>
-          <a:bodyPr wrap="square" lIns="34290" rIns="34290" tIns="13716" bIns="13716" anchor="t">
-            <a:spAutoFit/>
-          </a:bodyPr>
-          <a:lstStyle/>
-          <a:p>
-            <a:pPr algn="l"/>
-            <a:r>
-              <a:rPr sz="2100" b="1" i="0">
-                <a:solidFill>
-                  <a:srgbClr val="1E2761"/>
-                </a:solidFill>
-                <a:latin typeface="Arial Black"/>
-              </a:rPr>
-              <a:t>用一個具體例子搞懂</a:t>
-            </a:r>
-          </a:p>
-        </p:txBody>
-      </p:sp>
-      <p:sp>
-        <p:nvSpPr>
-          <p:cNvPr id="4" name="Rectangle 3"/>
-          <p:cNvSpPr/>
-          <p:nvPr/>
-        </p:nvSpPr>
-        <p:spPr>
-          <a:xfrm>
-            <a:off x="514350" y="822959"/>
-            <a:ext cx="2057400" cy="27432"/>
+          <p:cNvPr id="3" name="Rectangle 2"/>
+          <p:cNvSpPr/>
+          <p:nvPr/>
+        </p:nvSpPr>
+        <p:spPr>
+          <a:xfrm>
+            <a:off x="0" y="0"/>
+            <a:ext cx="9143771" cy="68580"/>
           </a:xfrm>
           <a:prstGeom prst="rect">
             <a:avLst/>
@@ -8795,14 +8892,14 @@
       </p:sp>
       <p:sp>
         <p:nvSpPr>
-          <p:cNvPr id="5" name="TextBox 4"/>
+          <p:cNvPr id="4" name="TextBox 3"/>
           <p:cNvSpPr txBox="1"/>
           <p:nvPr/>
         </p:nvSpPr>
         <p:spPr>
           <a:xfrm>
-            <a:off x="1714500" y="994409"/>
-            <a:ext cx="5486400" cy="240029"/>
+            <a:off x="514350" y="274320"/>
+            <a:ext cx="8229600" cy="480059"/>
           </a:xfrm>
           <a:prstGeom prst="rect">
             <a:avLst/>
@@ -8815,7 +8912,86 @@
           </a:bodyPr>
           <a:lstStyle/>
           <a:p>
+            <a:pPr algn="l"/>
+            <a:r>
+              <a:rPr sz="2100" b="1" i="0">
+                <a:solidFill>
+                  <a:srgbClr val="1E2761"/>
+                </a:solidFill>
+                <a:latin typeface="Arial Black"/>
+              </a:rPr>
+              <a:t>用一個具體例子搞懂</a:t>
+            </a:r>
+          </a:p>
+        </p:txBody>
+      </p:sp>
+      <p:sp>
+        <p:nvSpPr>
+          <p:cNvPr id="5" name="Rectangle 4"/>
+          <p:cNvSpPr/>
+          <p:nvPr/>
+        </p:nvSpPr>
+        <p:spPr>
+          <a:xfrm>
+            <a:off x="514350" y="822959"/>
+            <a:ext cx="2057400" cy="27432"/>
+          </a:xfrm>
+          <a:prstGeom prst="rect">
+            <a:avLst/>
+          </a:prstGeom>
+          <a:solidFill>
+            <a:srgbClr val="E8793A"/>
+          </a:solidFill>
+          <a:ln>
+            <a:noFill/>
+          </a:ln>
+          <a:effectLst/>
+        </p:spPr>
+        <p:style>
+          <a:lnRef idx="1">
+            <a:schemeClr val="accent1"/>
+          </a:lnRef>
+          <a:fillRef idx="3">
+            <a:schemeClr val="accent1"/>
+          </a:fillRef>
+          <a:effectRef idx="2">
+            <a:schemeClr val="accent1"/>
+          </a:effectRef>
+          <a:fontRef idx="minor">
+            <a:schemeClr val="lt1"/>
+          </a:fontRef>
+        </p:style>
+        <p:txBody>
+          <a:bodyPr rtlCol="0" anchor="ctr"/>
+          <a:lstStyle/>
+          <a:p>
             <a:pPr algn="ctr"/>
+          </a:p>
+        </p:txBody>
+      </p:sp>
+      <p:sp>
+        <p:nvSpPr>
+          <p:cNvPr id="6" name="TextBox 5"/>
+          <p:cNvSpPr txBox="1"/>
+          <p:nvPr/>
+        </p:nvSpPr>
+        <p:spPr>
+          <a:xfrm>
+            <a:off x="1714500" y="994409"/>
+            <a:ext cx="5486400" cy="240029"/>
+          </a:xfrm>
+          <a:prstGeom prst="rect">
+            <a:avLst/>
+          </a:prstGeom>
+          <a:noFill/>
+        </p:spPr>
+        <p:txBody>
+          <a:bodyPr wrap="square" lIns="34290" rIns="34290" tIns="13716" bIns="13716" anchor="t">
+            <a:spAutoFit/>
+          </a:bodyPr>
+          <a:lstStyle/>
+          <a:p>
+            <a:pPr algn="ctr"/>
             <a:r>
               <a:rPr sz="1050" b="0" i="0">
                 <a:solidFill>
@@ -8830,7 +9006,7 @@
       </p:sp>
       <p:sp>
         <p:nvSpPr>
-          <p:cNvPr id="6" name="Rounded Rectangle 5"/>
+          <p:cNvPr id="7" name="Rounded Rectangle 6"/>
           <p:cNvSpPr/>
           <p:nvPr/>
         </p:nvSpPr>
@@ -8878,7 +9054,7 @@
       </p:sp>
       <p:sp>
         <p:nvSpPr>
-          <p:cNvPr id="7" name="TextBox 6"/>
+          <p:cNvPr id="8" name="TextBox 7"/>
           <p:cNvSpPr txBox="1"/>
           <p:nvPr/>
         </p:nvSpPr>
@@ -8913,7 +9089,7 @@
       </p:sp>
       <p:sp>
         <p:nvSpPr>
-          <p:cNvPr id="8" name="TextBox 7"/>
+          <p:cNvPr id="9" name="TextBox 8"/>
           <p:cNvSpPr txBox="1"/>
           <p:nvPr/>
         </p:nvSpPr>
@@ -8948,7 +9124,7 @@
       </p:sp>
       <p:sp>
         <p:nvSpPr>
-          <p:cNvPr id="9" name="TextBox 8"/>
+          <p:cNvPr id="10" name="TextBox 9"/>
           <p:cNvSpPr txBox="1"/>
           <p:nvPr/>
         </p:nvSpPr>
@@ -9034,7 +9210,7 @@
             <a:avLst/>
           </a:prstGeom>
           <a:solidFill>
-            <a:srgbClr val="FFFFFF"/>
+            <a:srgbClr val="EFF2F7"/>
           </a:solidFill>
           <a:ln>
             <a:noFill/>
@@ -9064,49 +9240,14 @@
       </p:sp>
       <p:sp>
         <p:nvSpPr>
-          <p:cNvPr id="3" name="TextBox 2"/>
-          <p:cNvSpPr txBox="1"/>
-          <p:nvPr/>
-        </p:nvSpPr>
-        <p:spPr>
-          <a:xfrm>
-            <a:off x="514350" y="274320"/>
-            <a:ext cx="8229600" cy="480059"/>
-          </a:xfrm>
-          <a:prstGeom prst="rect">
-            <a:avLst/>
-          </a:prstGeom>
-          <a:noFill/>
-        </p:spPr>
-        <p:txBody>
-          <a:bodyPr wrap="square" lIns="34290" rIns="34290" tIns="13716" bIns="13716" anchor="t">
-            <a:spAutoFit/>
-          </a:bodyPr>
-          <a:lstStyle/>
-          <a:p>
-            <a:pPr algn="l"/>
-            <a:r>
-              <a:rPr sz="1800" b="1" i="0">
-                <a:solidFill>
-                  <a:srgbClr val="1E2761"/>
-                </a:solidFill>
-                <a:latin typeface="Arial Black"/>
-              </a:rPr>
-              <a:t>Stage 1+2 — 開發者準備工具描述,送出 API call</a:t>
-            </a:r>
-          </a:p>
-        </p:txBody>
-      </p:sp>
-      <p:sp>
-        <p:nvSpPr>
-          <p:cNvPr id="4" name="Rectangle 3"/>
-          <p:cNvSpPr/>
-          <p:nvPr/>
-        </p:nvSpPr>
-        <p:spPr>
-          <a:xfrm>
-            <a:off x="514350" y="822959"/>
-            <a:ext cx="2057400" cy="27432"/>
+          <p:cNvPr id="3" name="Rectangle 2"/>
+          <p:cNvSpPr/>
+          <p:nvPr/>
+        </p:nvSpPr>
+        <p:spPr>
+          <a:xfrm>
+            <a:off x="0" y="0"/>
+            <a:ext cx="9143771" cy="68580"/>
           </a:xfrm>
           <a:prstGeom prst="rect">
             <a:avLst/>
@@ -9143,7 +9284,86 @@
       </p:sp>
       <p:sp>
         <p:nvSpPr>
+          <p:cNvPr id="4" name="TextBox 3"/>
+          <p:cNvSpPr txBox="1"/>
+          <p:nvPr/>
+        </p:nvSpPr>
+        <p:spPr>
+          <a:xfrm>
+            <a:off x="514350" y="274320"/>
+            <a:ext cx="8229600" cy="480059"/>
+          </a:xfrm>
+          <a:prstGeom prst="rect">
+            <a:avLst/>
+          </a:prstGeom>
+          <a:noFill/>
+        </p:spPr>
+        <p:txBody>
+          <a:bodyPr wrap="square" lIns="34290" rIns="34290" tIns="13716" bIns="13716" anchor="t">
+            <a:spAutoFit/>
+          </a:bodyPr>
+          <a:lstStyle/>
+          <a:p>
+            <a:pPr algn="l"/>
+            <a:r>
+              <a:rPr sz="1800" b="1" i="0">
+                <a:solidFill>
+                  <a:srgbClr val="1E2761"/>
+                </a:solidFill>
+                <a:latin typeface="Arial Black"/>
+              </a:rPr>
+              <a:t>Stage 1+2 — 開發者準備工具描述,送出 API call</a:t>
+            </a:r>
+          </a:p>
+        </p:txBody>
+      </p:sp>
+      <p:sp>
+        <p:nvSpPr>
           <p:cNvPr id="5" name="Rectangle 4"/>
+          <p:cNvSpPr/>
+          <p:nvPr/>
+        </p:nvSpPr>
+        <p:spPr>
+          <a:xfrm>
+            <a:off x="514350" y="822959"/>
+            <a:ext cx="2057400" cy="27432"/>
+          </a:xfrm>
+          <a:prstGeom prst="rect">
+            <a:avLst/>
+          </a:prstGeom>
+          <a:solidFill>
+            <a:srgbClr val="E8793A"/>
+          </a:solidFill>
+          <a:ln>
+            <a:noFill/>
+          </a:ln>
+          <a:effectLst/>
+        </p:spPr>
+        <p:style>
+          <a:lnRef idx="1">
+            <a:schemeClr val="accent1"/>
+          </a:lnRef>
+          <a:fillRef idx="3">
+            <a:schemeClr val="accent1"/>
+          </a:fillRef>
+          <a:effectRef idx="2">
+            <a:schemeClr val="accent1"/>
+          </a:effectRef>
+          <a:fontRef idx="minor">
+            <a:schemeClr val="lt1"/>
+          </a:fontRef>
+        </p:style>
+        <p:txBody>
+          <a:bodyPr rtlCol="0" anchor="ctr"/>
+          <a:lstStyle/>
+          <a:p>
+            <a:pPr algn="ctr"/>
+          </a:p>
+        </p:txBody>
+      </p:sp>
+      <p:sp>
+        <p:nvSpPr>
+          <p:cNvPr id="6" name="Rectangle 5"/>
           <p:cNvSpPr/>
           <p:nvPr/>
         </p:nvSpPr>
@@ -9187,7 +9407,7 @@
       </p:sp>
       <p:sp>
         <p:nvSpPr>
-          <p:cNvPr id="6" name="TextBox 5"/>
+          <p:cNvPr id="7" name="TextBox 6"/>
           <p:cNvSpPr txBox="1"/>
           <p:nvPr/>
         </p:nvSpPr>
@@ -9247,7 +9467,7 @@
             <a:r>
               <a:rPr sz="825" b="0" i="0">
                 <a:solidFill>
-                  <a:srgbClr val="E8793A"/>
+                  <a:srgbClr val="5CB85C"/>
                 </a:solidFill>
                 <a:latin typeface="Consolas"/>
               </a:rPr>
@@ -9546,7 +9766,7 @@
       </p:sp>
       <p:sp>
         <p:nvSpPr>
-          <p:cNvPr id="7" name="TextBox 6"/>
+          <p:cNvPr id="8" name="TextBox 7"/>
           <p:cNvSpPr txBox="1"/>
           <p:nvPr/>
         </p:nvSpPr>
@@ -9696,7 +9916,7 @@
             <a:avLst/>
           </a:prstGeom>
           <a:solidFill>
-            <a:srgbClr val="FFFFFF"/>
+            <a:srgbClr val="EFF2F7"/>
           </a:solidFill>
           <a:ln>
             <a:noFill/>
@@ -9726,49 +9946,14 @@
       </p:sp>
       <p:sp>
         <p:nvSpPr>
-          <p:cNvPr id="3" name="TextBox 2"/>
-          <p:cNvSpPr txBox="1"/>
-          <p:nvPr/>
-        </p:nvSpPr>
-        <p:spPr>
-          <a:xfrm>
-            <a:off x="514350" y="274320"/>
-            <a:ext cx="8229600" cy="480059"/>
-          </a:xfrm>
-          <a:prstGeom prst="rect">
-            <a:avLst/>
-          </a:prstGeom>
-          <a:noFill/>
-        </p:spPr>
-        <p:txBody>
-          <a:bodyPr wrap="square" lIns="34290" rIns="34290" tIns="13716" bIns="13716" anchor="t">
-            <a:spAutoFit/>
-          </a:bodyPr>
-          <a:lstStyle/>
-          <a:p>
-            <a:pPr algn="l"/>
-            <a:r>
-              <a:rPr sz="1950" b="1" i="0">
-                <a:solidFill>
-                  <a:srgbClr val="1E2761"/>
-                </a:solidFill>
-                <a:latin typeface="Arial Black"/>
-              </a:rPr>
-              <a:t>Stage 3 — LLM 回了一段 JSON</a:t>
-            </a:r>
-          </a:p>
-        </p:txBody>
-      </p:sp>
-      <p:sp>
-        <p:nvSpPr>
-          <p:cNvPr id="4" name="Rectangle 3"/>
-          <p:cNvSpPr/>
-          <p:nvPr/>
-        </p:nvSpPr>
-        <p:spPr>
-          <a:xfrm>
-            <a:off x="514350" y="822959"/>
-            <a:ext cx="2057400" cy="27432"/>
+          <p:cNvPr id="3" name="Rectangle 2"/>
+          <p:cNvSpPr/>
+          <p:nvPr/>
+        </p:nvSpPr>
+        <p:spPr>
+          <a:xfrm>
+            <a:off x="0" y="0"/>
+            <a:ext cx="9143771" cy="68580"/>
           </a:xfrm>
           <a:prstGeom prst="rect">
             <a:avLst/>
@@ -9805,7 +9990,86 @@
       </p:sp>
       <p:sp>
         <p:nvSpPr>
+          <p:cNvPr id="4" name="TextBox 3"/>
+          <p:cNvSpPr txBox="1"/>
+          <p:nvPr/>
+        </p:nvSpPr>
+        <p:spPr>
+          <a:xfrm>
+            <a:off x="514350" y="274320"/>
+            <a:ext cx="8229600" cy="480059"/>
+          </a:xfrm>
+          <a:prstGeom prst="rect">
+            <a:avLst/>
+          </a:prstGeom>
+          <a:noFill/>
+        </p:spPr>
+        <p:txBody>
+          <a:bodyPr wrap="square" lIns="34290" rIns="34290" tIns="13716" bIns="13716" anchor="t">
+            <a:spAutoFit/>
+          </a:bodyPr>
+          <a:lstStyle/>
+          <a:p>
+            <a:pPr algn="l"/>
+            <a:r>
+              <a:rPr sz="1950" b="1" i="0">
+                <a:solidFill>
+                  <a:srgbClr val="1E2761"/>
+                </a:solidFill>
+                <a:latin typeface="Arial Black"/>
+              </a:rPr>
+              <a:t>Stage 3 — LLM 回了一段 JSON</a:t>
+            </a:r>
+          </a:p>
+        </p:txBody>
+      </p:sp>
+      <p:sp>
+        <p:nvSpPr>
           <p:cNvPr id="5" name="Rectangle 4"/>
+          <p:cNvSpPr/>
+          <p:nvPr/>
+        </p:nvSpPr>
+        <p:spPr>
+          <a:xfrm>
+            <a:off x="514350" y="822959"/>
+            <a:ext cx="2057400" cy="27432"/>
+          </a:xfrm>
+          <a:prstGeom prst="rect">
+            <a:avLst/>
+          </a:prstGeom>
+          <a:solidFill>
+            <a:srgbClr val="E8793A"/>
+          </a:solidFill>
+          <a:ln>
+            <a:noFill/>
+          </a:ln>
+          <a:effectLst/>
+        </p:spPr>
+        <p:style>
+          <a:lnRef idx="1">
+            <a:schemeClr val="accent1"/>
+          </a:lnRef>
+          <a:fillRef idx="3">
+            <a:schemeClr val="accent1"/>
+          </a:fillRef>
+          <a:effectRef idx="2">
+            <a:schemeClr val="accent1"/>
+          </a:effectRef>
+          <a:fontRef idx="minor">
+            <a:schemeClr val="lt1"/>
+          </a:fontRef>
+        </p:style>
+        <p:txBody>
+          <a:bodyPr rtlCol="0" anchor="ctr"/>
+          <a:lstStyle/>
+          <a:p>
+            <a:pPr algn="ctr"/>
+          </a:p>
+        </p:txBody>
+      </p:sp>
+      <p:sp>
+        <p:nvSpPr>
+          <p:cNvPr id="6" name="Rectangle 5"/>
           <p:cNvSpPr/>
           <p:nvPr/>
         </p:nvSpPr>
@@ -9849,7 +10113,7 @@
       </p:sp>
       <p:sp>
         <p:nvSpPr>
-          <p:cNvPr id="6" name="TextBox 5"/>
+          <p:cNvPr id="7" name="TextBox 6"/>
           <p:cNvSpPr txBox="1"/>
           <p:nvPr/>
         </p:nvSpPr>
@@ -10160,7 +10424,7 @@
       </p:sp>
       <p:sp>
         <p:nvSpPr>
-          <p:cNvPr id="7" name="TextBox 6"/>
+          <p:cNvPr id="8" name="TextBox 7"/>
           <p:cNvSpPr txBox="1"/>
           <p:nvPr/>
         </p:nvSpPr>
@@ -10247,7 +10511,7 @@
       </p:sp>
       <p:sp>
         <p:nvSpPr>
-          <p:cNvPr id="8" name="Rounded Rectangle 7"/>
+          <p:cNvPr id="9" name="Rounded Rectangle 8"/>
           <p:cNvSpPr/>
           <p:nvPr/>
         </p:nvSpPr>
@@ -10295,7 +10559,7 @@
       </p:sp>
       <p:sp>
         <p:nvSpPr>
-          <p:cNvPr id="9" name="TextBox 8"/>
+          <p:cNvPr id="10" name="TextBox 9"/>
           <p:cNvSpPr txBox="1"/>
           <p:nvPr/>
         </p:nvSpPr>
@@ -10361,7 +10625,7 @@
             <a:avLst/>
           </a:prstGeom>
           <a:solidFill>
-            <a:srgbClr val="FFFFFF"/>
+            <a:srgbClr val="EFF2F7"/>
           </a:solidFill>
           <a:ln>
             <a:noFill/>
@@ -10391,49 +10655,14 @@
       </p:sp>
       <p:sp>
         <p:nvSpPr>
-          <p:cNvPr id="3" name="TextBox 2"/>
-          <p:cNvSpPr txBox="1"/>
-          <p:nvPr/>
-        </p:nvSpPr>
-        <p:spPr>
-          <a:xfrm>
-            <a:off x="514350" y="274320"/>
-            <a:ext cx="8229600" cy="480059"/>
-          </a:xfrm>
-          <a:prstGeom prst="rect">
-            <a:avLst/>
-          </a:prstGeom>
-          <a:noFill/>
-        </p:spPr>
-        <p:txBody>
-          <a:bodyPr wrap="square" lIns="34290" rIns="34290" tIns="13716" bIns="13716" anchor="t">
-            <a:spAutoFit/>
-          </a:bodyPr>
-          <a:lstStyle/>
-          <a:p>
-            <a:pPr algn="l"/>
-            <a:r>
-              <a:rPr sz="1950" b="1" i="0">
-                <a:solidFill>
-                  <a:srgbClr val="1E2761"/>
-                </a:solidFill>
-                <a:latin typeface="Arial Black"/>
-              </a:rPr>
-              <a:t>Stage 4 — Harness 真的執行</a:t>
-            </a:r>
-          </a:p>
-        </p:txBody>
-      </p:sp>
-      <p:sp>
-        <p:nvSpPr>
-          <p:cNvPr id="4" name="Rectangle 3"/>
-          <p:cNvSpPr/>
-          <p:nvPr/>
-        </p:nvSpPr>
-        <p:spPr>
-          <a:xfrm>
-            <a:off x="514350" y="822959"/>
-            <a:ext cx="2057400" cy="27432"/>
+          <p:cNvPr id="3" name="Rectangle 2"/>
+          <p:cNvSpPr/>
+          <p:nvPr/>
+        </p:nvSpPr>
+        <p:spPr>
+          <a:xfrm>
+            <a:off x="0" y="0"/>
+            <a:ext cx="9143771" cy="68580"/>
           </a:xfrm>
           <a:prstGeom prst="rect">
             <a:avLst/>
@@ -10470,7 +10699,86 @@
       </p:sp>
       <p:sp>
         <p:nvSpPr>
+          <p:cNvPr id="4" name="TextBox 3"/>
+          <p:cNvSpPr txBox="1"/>
+          <p:nvPr/>
+        </p:nvSpPr>
+        <p:spPr>
+          <a:xfrm>
+            <a:off x="514350" y="274320"/>
+            <a:ext cx="8229600" cy="480059"/>
+          </a:xfrm>
+          <a:prstGeom prst="rect">
+            <a:avLst/>
+          </a:prstGeom>
+          <a:noFill/>
+        </p:spPr>
+        <p:txBody>
+          <a:bodyPr wrap="square" lIns="34290" rIns="34290" tIns="13716" bIns="13716" anchor="t">
+            <a:spAutoFit/>
+          </a:bodyPr>
+          <a:lstStyle/>
+          <a:p>
+            <a:pPr algn="l"/>
+            <a:r>
+              <a:rPr sz="1950" b="1" i="0">
+                <a:solidFill>
+                  <a:srgbClr val="1E2761"/>
+                </a:solidFill>
+                <a:latin typeface="Arial Black"/>
+              </a:rPr>
+              <a:t>Stage 4 — Harness 真的執行</a:t>
+            </a:r>
+          </a:p>
+        </p:txBody>
+      </p:sp>
+      <p:sp>
+        <p:nvSpPr>
           <p:cNvPr id="5" name="Rectangle 4"/>
+          <p:cNvSpPr/>
+          <p:nvPr/>
+        </p:nvSpPr>
+        <p:spPr>
+          <a:xfrm>
+            <a:off x="514350" y="822959"/>
+            <a:ext cx="2057400" cy="27432"/>
+          </a:xfrm>
+          <a:prstGeom prst="rect">
+            <a:avLst/>
+          </a:prstGeom>
+          <a:solidFill>
+            <a:srgbClr val="E8793A"/>
+          </a:solidFill>
+          <a:ln>
+            <a:noFill/>
+          </a:ln>
+          <a:effectLst/>
+        </p:spPr>
+        <p:style>
+          <a:lnRef idx="1">
+            <a:schemeClr val="accent1"/>
+          </a:lnRef>
+          <a:fillRef idx="3">
+            <a:schemeClr val="accent1"/>
+          </a:fillRef>
+          <a:effectRef idx="2">
+            <a:schemeClr val="accent1"/>
+          </a:effectRef>
+          <a:fontRef idx="minor">
+            <a:schemeClr val="lt1"/>
+          </a:fontRef>
+        </p:style>
+        <p:txBody>
+          <a:bodyPr rtlCol="0" anchor="ctr"/>
+          <a:lstStyle/>
+          <a:p>
+            <a:pPr algn="ctr"/>
+          </a:p>
+        </p:txBody>
+      </p:sp>
+      <p:sp>
+        <p:nvSpPr>
+          <p:cNvPr id="6" name="Rectangle 5"/>
           <p:cNvSpPr/>
           <p:nvPr/>
         </p:nvSpPr>
@@ -10514,7 +10822,7 @@
       </p:sp>
       <p:sp>
         <p:nvSpPr>
-          <p:cNvPr id="6" name="TextBox 5"/>
+          <p:cNvPr id="7" name="TextBox 6"/>
           <p:cNvSpPr txBox="1"/>
           <p:nvPr/>
         </p:nvSpPr>
@@ -10622,7 +10930,7 @@
             <a:r>
               <a:rPr sz="825" b="0" i="0">
                 <a:solidFill>
-                  <a:srgbClr val="E8793A"/>
+                  <a:srgbClr val="6B6B6B"/>
                 </a:solidFill>
                 <a:latin typeface="Consolas"/>
               </a:rPr>
@@ -10654,7 +10962,7 @@
             <a:r>
               <a:rPr sz="825" b="0" i="0">
                 <a:solidFill>
-                  <a:srgbClr val="E8793A"/>
+                  <a:srgbClr val="DDE4EE"/>
                 </a:solidFill>
                 <a:latin typeface="Consolas"/>
               </a:rPr>
@@ -10686,7 +10994,7 @@
             <a:r>
               <a:rPr sz="825" b="0" i="0">
                 <a:solidFill>
-                  <a:srgbClr val="E8793A"/>
+                  <a:srgbClr val="DDE4EE"/>
                 </a:solidFill>
                 <a:latin typeface="Consolas"/>
               </a:rPr>
@@ -10702,7 +11010,7 @@
             <a:r>
               <a:rPr sz="825" b="0" i="0">
                 <a:solidFill>
-                  <a:srgbClr val="E8793A"/>
+                  <a:srgbClr val="DDE4EE"/>
                 </a:solidFill>
                 <a:latin typeface="Consolas"/>
               </a:rPr>
@@ -10718,7 +11026,7 @@
             <a:r>
               <a:rPr sz="825" b="0" i="0">
                 <a:solidFill>
-                  <a:srgbClr val="E8793A"/>
+                  <a:srgbClr val="DDE4EE"/>
                 </a:solidFill>
                 <a:latin typeface="Consolas"/>
               </a:rPr>
@@ -10734,7 +11042,7 @@
             <a:r>
               <a:rPr sz="825" b="0" i="0">
                 <a:solidFill>
-                  <a:srgbClr val="E8793A"/>
+                  <a:srgbClr val="DDE4EE"/>
                 </a:solidFill>
                 <a:latin typeface="Consolas"/>
               </a:rPr>
@@ -10761,7 +11069,7 @@
       </p:sp>
       <p:sp>
         <p:nvSpPr>
-          <p:cNvPr id="7" name="TextBox 6"/>
+          <p:cNvPr id="8" name="TextBox 7"/>
           <p:cNvSpPr txBox="1"/>
           <p:nvPr/>
         </p:nvSpPr>
@@ -10880,7 +11188,7 @@
       </p:sp>
       <p:sp>
         <p:nvSpPr>
-          <p:cNvPr id="8" name="Rounded Rectangle 7"/>
+          <p:cNvPr id="9" name="Rounded Rectangle 8"/>
           <p:cNvSpPr/>
           <p:nvPr/>
         </p:nvSpPr>
@@ -10928,7 +11236,7 @@
       </p:sp>
       <p:sp>
         <p:nvSpPr>
-          <p:cNvPr id="9" name="TextBox 8"/>
+          <p:cNvPr id="10" name="TextBox 9"/>
           <p:cNvSpPr txBox="1"/>
           <p:nvPr/>
         </p:nvSpPr>
@@ -11030,7 +11338,7 @@
             <a:avLst/>
           </a:prstGeom>
           <a:solidFill>
-            <a:srgbClr val="FFFFFF"/>
+            <a:srgbClr val="EFF2F7"/>
           </a:solidFill>
           <a:ln>
             <a:noFill/>
@@ -11060,49 +11368,14 @@
       </p:sp>
       <p:sp>
         <p:nvSpPr>
-          <p:cNvPr id="3" name="TextBox 2"/>
-          <p:cNvSpPr txBox="1"/>
-          <p:nvPr/>
-        </p:nvSpPr>
-        <p:spPr>
-          <a:xfrm>
-            <a:off x="514350" y="274320"/>
-            <a:ext cx="8229600" cy="480059"/>
-          </a:xfrm>
-          <a:prstGeom prst="rect">
-            <a:avLst/>
-          </a:prstGeom>
-          <a:noFill/>
-        </p:spPr>
-        <p:txBody>
-          <a:bodyPr wrap="square" lIns="34290" rIns="34290" tIns="13716" bIns="13716" anchor="t">
-            <a:spAutoFit/>
-          </a:bodyPr>
-          <a:lstStyle/>
-          <a:p>
-            <a:pPr algn="l"/>
-            <a:r>
-              <a:rPr sz="1800" b="1" i="0">
-                <a:solidFill>
-                  <a:srgbClr val="1E2761"/>
-                </a:solidFill>
-                <a:latin typeface="Arial Black"/>
-              </a:rPr>
-              <a:t>Stage 5+6 — 結果塞回,LLM 給最終答案</a:t>
-            </a:r>
-          </a:p>
-        </p:txBody>
-      </p:sp>
-      <p:sp>
-        <p:nvSpPr>
-          <p:cNvPr id="4" name="Rectangle 3"/>
-          <p:cNvSpPr/>
-          <p:nvPr/>
-        </p:nvSpPr>
-        <p:spPr>
-          <a:xfrm>
-            <a:off x="514350" y="822959"/>
-            <a:ext cx="2057400" cy="27432"/>
+          <p:cNvPr id="3" name="Rectangle 2"/>
+          <p:cNvSpPr/>
+          <p:nvPr/>
+        </p:nvSpPr>
+        <p:spPr>
+          <a:xfrm>
+            <a:off x="0" y="0"/>
+            <a:ext cx="9143771" cy="68580"/>
           </a:xfrm>
           <a:prstGeom prst="rect">
             <a:avLst/>
@@ -11139,14 +11412,14 @@
       </p:sp>
       <p:sp>
         <p:nvSpPr>
-          <p:cNvPr id="5" name="TextBox 4"/>
+          <p:cNvPr id="4" name="TextBox 3"/>
           <p:cNvSpPr txBox="1"/>
           <p:nvPr/>
         </p:nvSpPr>
         <p:spPr>
           <a:xfrm>
-            <a:off x="514350" y="1062990"/>
-            <a:ext cx="5486400" cy="274320"/>
+            <a:off x="514350" y="274320"/>
+            <a:ext cx="8229600" cy="480059"/>
           </a:xfrm>
           <a:prstGeom prst="rect">
             <a:avLst/>
@@ -11161,6 +11434,85 @@
           <a:p>
             <a:pPr algn="l"/>
             <a:r>
+              <a:rPr sz="1800" b="1" i="0">
+                <a:solidFill>
+                  <a:srgbClr val="1E2761"/>
+                </a:solidFill>
+                <a:latin typeface="Arial Black"/>
+              </a:rPr>
+              <a:t>Stage 5+6 — 結果塞回,LLM 給最終答案</a:t>
+            </a:r>
+          </a:p>
+        </p:txBody>
+      </p:sp>
+      <p:sp>
+        <p:nvSpPr>
+          <p:cNvPr id="5" name="Rectangle 4"/>
+          <p:cNvSpPr/>
+          <p:nvPr/>
+        </p:nvSpPr>
+        <p:spPr>
+          <a:xfrm>
+            <a:off x="514350" y="822959"/>
+            <a:ext cx="2057400" cy="27432"/>
+          </a:xfrm>
+          <a:prstGeom prst="rect">
+            <a:avLst/>
+          </a:prstGeom>
+          <a:solidFill>
+            <a:srgbClr val="E8793A"/>
+          </a:solidFill>
+          <a:ln>
+            <a:noFill/>
+          </a:ln>
+          <a:effectLst/>
+        </p:spPr>
+        <p:style>
+          <a:lnRef idx="1">
+            <a:schemeClr val="accent1"/>
+          </a:lnRef>
+          <a:fillRef idx="3">
+            <a:schemeClr val="accent1"/>
+          </a:fillRef>
+          <a:effectRef idx="2">
+            <a:schemeClr val="accent1"/>
+          </a:effectRef>
+          <a:fontRef idx="minor">
+            <a:schemeClr val="lt1"/>
+          </a:fontRef>
+        </p:style>
+        <p:txBody>
+          <a:bodyPr rtlCol="0" anchor="ctr"/>
+          <a:lstStyle/>
+          <a:p>
+            <a:pPr algn="ctr"/>
+          </a:p>
+        </p:txBody>
+      </p:sp>
+      <p:sp>
+        <p:nvSpPr>
+          <p:cNvPr id="6" name="TextBox 5"/>
+          <p:cNvSpPr txBox="1"/>
+          <p:nvPr/>
+        </p:nvSpPr>
+        <p:spPr>
+          <a:xfrm>
+            <a:off x="514350" y="1062990"/>
+            <a:ext cx="5486400" cy="274320"/>
+          </a:xfrm>
+          <a:prstGeom prst="rect">
+            <a:avLst/>
+          </a:prstGeom>
+          <a:noFill/>
+        </p:spPr>
+        <p:txBody>
+          <a:bodyPr wrap="square" lIns="34290" rIns="34290" tIns="13716" bIns="13716" anchor="t">
+            <a:spAutoFit/>
+          </a:bodyPr>
+          <a:lstStyle/>
+          <a:p>
+            <a:pPr algn="l"/>
+            <a:r>
               <a:rPr sz="1050" b="1" i="0">
                 <a:solidFill>
                   <a:srgbClr val="1E2761"/>
@@ -11174,7 +11526,7 @@
       </p:sp>
       <p:sp>
         <p:nvSpPr>
-          <p:cNvPr id="6" name="Rectangle 5"/>
+          <p:cNvPr id="7" name="Rectangle 6"/>
           <p:cNvSpPr/>
           <p:nvPr/>
         </p:nvSpPr>
@@ -11218,7 +11570,7 @@
       </p:sp>
       <p:sp>
         <p:nvSpPr>
-          <p:cNvPr id="7" name="TextBox 6"/>
+          <p:cNvPr id="8" name="TextBox 7"/>
           <p:cNvSpPr txBox="1"/>
           <p:nvPr/>
         </p:nvSpPr>
@@ -11433,7 +11785,7 @@
       </p:sp>
       <p:sp>
         <p:nvSpPr>
-          <p:cNvPr id="8" name="TextBox 7"/>
+          <p:cNvPr id="9" name="TextBox 8"/>
           <p:cNvSpPr txBox="1"/>
           <p:nvPr/>
         </p:nvSpPr>
@@ -11552,7 +11904,7 @@
       </p:sp>
       <p:sp>
         <p:nvSpPr>
-          <p:cNvPr id="9" name="TextBox 8"/>
+          <p:cNvPr id="10" name="TextBox 9"/>
           <p:cNvSpPr txBox="1"/>
           <p:nvPr/>
         </p:nvSpPr>
@@ -11618,7 +11970,7 @@
             <a:avLst/>
           </a:prstGeom>
           <a:solidFill>
-            <a:srgbClr val="FFFFFF"/>
+            <a:srgbClr val="EFF2F7"/>
           </a:solidFill>
           <a:ln>
             <a:noFill/>
@@ -11648,49 +12000,14 @@
       </p:sp>
       <p:sp>
         <p:nvSpPr>
-          <p:cNvPr id="3" name="TextBox 2"/>
-          <p:cNvSpPr txBox="1"/>
-          <p:nvPr/>
-        </p:nvSpPr>
-        <p:spPr>
-          <a:xfrm>
-            <a:off x="514350" y="274320"/>
-            <a:ext cx="8229600" cy="480059"/>
-          </a:xfrm>
-          <a:prstGeom prst="rect">
-            <a:avLst/>
-          </a:prstGeom>
-          <a:noFill/>
-        </p:spPr>
-        <p:txBody>
-          <a:bodyPr wrap="square" lIns="34290" rIns="34290" tIns="13716" bIns="13716" anchor="t">
-            <a:spAutoFit/>
-          </a:bodyPr>
-          <a:lstStyle/>
-          <a:p>
-            <a:pPr algn="l"/>
-            <a:r>
-              <a:rPr sz="2100" b="1" i="0">
-                <a:solidFill>
-                  <a:srgbClr val="1E2761"/>
-                </a:solidFill>
-                <a:latin typeface="Arial Black"/>
-              </a:rPr>
-              <a:t>重點:LLM ↔ Harness 職責分工</a:t>
-            </a:r>
-          </a:p>
-        </p:txBody>
-      </p:sp>
-      <p:sp>
-        <p:nvSpPr>
-          <p:cNvPr id="4" name="Rectangle 3"/>
-          <p:cNvSpPr/>
-          <p:nvPr/>
-        </p:nvSpPr>
-        <p:spPr>
-          <a:xfrm>
-            <a:off x="514350" y="822959"/>
-            <a:ext cx="2057400" cy="27432"/>
+          <p:cNvPr id="3" name="Rectangle 2"/>
+          <p:cNvSpPr/>
+          <p:nvPr/>
+        </p:nvSpPr>
+        <p:spPr>
+          <a:xfrm>
+            <a:off x="0" y="0"/>
+            <a:ext cx="9143771" cy="68580"/>
           </a:xfrm>
           <a:prstGeom prst="rect">
             <a:avLst/>
@@ -11727,7 +12044,86 @@
       </p:sp>
       <p:sp>
         <p:nvSpPr>
-          <p:cNvPr id="5" name="Rounded Rectangle 4"/>
+          <p:cNvPr id="4" name="TextBox 3"/>
+          <p:cNvSpPr txBox="1"/>
+          <p:nvPr/>
+        </p:nvSpPr>
+        <p:spPr>
+          <a:xfrm>
+            <a:off x="514350" y="274320"/>
+            <a:ext cx="8229600" cy="480059"/>
+          </a:xfrm>
+          <a:prstGeom prst="rect">
+            <a:avLst/>
+          </a:prstGeom>
+          <a:noFill/>
+        </p:spPr>
+        <p:txBody>
+          <a:bodyPr wrap="square" lIns="34290" rIns="34290" tIns="13716" bIns="13716" anchor="t">
+            <a:spAutoFit/>
+          </a:bodyPr>
+          <a:lstStyle/>
+          <a:p>
+            <a:pPr algn="l"/>
+            <a:r>
+              <a:rPr sz="2100" b="1" i="0">
+                <a:solidFill>
+                  <a:srgbClr val="1E2761"/>
+                </a:solidFill>
+                <a:latin typeface="Arial Black"/>
+              </a:rPr>
+              <a:t>重點:LLM ↔ Harness 職責分工</a:t>
+            </a:r>
+          </a:p>
+        </p:txBody>
+      </p:sp>
+      <p:sp>
+        <p:nvSpPr>
+          <p:cNvPr id="5" name="Rectangle 4"/>
+          <p:cNvSpPr/>
+          <p:nvPr/>
+        </p:nvSpPr>
+        <p:spPr>
+          <a:xfrm>
+            <a:off x="514350" y="822959"/>
+            <a:ext cx="2057400" cy="27432"/>
+          </a:xfrm>
+          <a:prstGeom prst="rect">
+            <a:avLst/>
+          </a:prstGeom>
+          <a:solidFill>
+            <a:srgbClr val="E8793A"/>
+          </a:solidFill>
+          <a:ln>
+            <a:noFill/>
+          </a:ln>
+          <a:effectLst/>
+        </p:spPr>
+        <p:style>
+          <a:lnRef idx="1">
+            <a:schemeClr val="accent1"/>
+          </a:lnRef>
+          <a:fillRef idx="3">
+            <a:schemeClr val="accent1"/>
+          </a:fillRef>
+          <a:effectRef idx="2">
+            <a:schemeClr val="accent1"/>
+          </a:effectRef>
+          <a:fontRef idx="minor">
+            <a:schemeClr val="lt1"/>
+          </a:fontRef>
+        </p:style>
+        <p:txBody>
+          <a:bodyPr rtlCol="0" anchor="ctr"/>
+          <a:lstStyle/>
+          <a:p>
+            <a:pPr algn="ctr"/>
+          </a:p>
+        </p:txBody>
+      </p:sp>
+      <p:sp>
+        <p:nvSpPr>
+          <p:cNvPr id="6" name="Rounded Rectangle 5"/>
           <p:cNvSpPr/>
           <p:nvPr/>
         </p:nvSpPr>
@@ -11775,7 +12171,7 @@
       </p:sp>
       <p:sp>
         <p:nvSpPr>
-          <p:cNvPr id="6" name="Rectangle 5"/>
+          <p:cNvPr id="7" name="Rectangle 6"/>
           <p:cNvSpPr/>
           <p:nvPr/>
         </p:nvSpPr>
@@ -11819,7 +12215,7 @@
       </p:sp>
       <p:sp>
         <p:nvSpPr>
-          <p:cNvPr id="7" name="TextBox 6"/>
+          <p:cNvPr id="8" name="TextBox 7"/>
           <p:cNvSpPr txBox="1"/>
           <p:nvPr/>
         </p:nvSpPr>
@@ -11854,7 +12250,7 @@
       </p:sp>
       <p:sp>
         <p:nvSpPr>
-          <p:cNvPr id="8" name="TextBox 7"/>
+          <p:cNvPr id="9" name="TextBox 8"/>
           <p:cNvSpPr txBox="1"/>
           <p:nvPr/>
         </p:nvSpPr>
@@ -11957,7 +12353,7 @@
       </p:sp>
       <p:sp>
         <p:nvSpPr>
-          <p:cNvPr id="9" name="Rounded Rectangle 8"/>
+          <p:cNvPr id="10" name="Rounded Rectangle 9"/>
           <p:cNvSpPr/>
           <p:nvPr/>
         </p:nvSpPr>
@@ -12005,7 +12401,7 @@
       </p:sp>
       <p:sp>
         <p:nvSpPr>
-          <p:cNvPr id="10" name="Rectangle 9"/>
+          <p:cNvPr id="11" name="Rectangle 10"/>
           <p:cNvSpPr/>
           <p:nvPr/>
         </p:nvSpPr>
@@ -12049,7 +12445,7 @@
       </p:sp>
       <p:sp>
         <p:nvSpPr>
-          <p:cNvPr id="11" name="TextBox 10"/>
+          <p:cNvPr id="12" name="TextBox 11"/>
           <p:cNvSpPr txBox="1"/>
           <p:nvPr/>
         </p:nvSpPr>
@@ -12084,7 +12480,7 @@
       </p:sp>
       <p:sp>
         <p:nvSpPr>
-          <p:cNvPr id="12" name="TextBox 11"/>
+          <p:cNvPr id="13" name="TextBox 12"/>
           <p:cNvSpPr txBox="1"/>
           <p:nvPr/>
         </p:nvSpPr>
@@ -12187,7 +12583,7 @@
       </p:sp>
       <p:sp>
         <p:nvSpPr>
-          <p:cNvPr id="13" name="TextBox 12"/>
+          <p:cNvPr id="14" name="TextBox 13"/>
           <p:cNvSpPr txBox="1"/>
           <p:nvPr/>
         </p:nvSpPr>
@@ -12253,7 +12649,7 @@
             <a:avLst/>
           </a:prstGeom>
           <a:solidFill>
-            <a:srgbClr val="1E2761"/>
+            <a:srgbClr val="1C7293"/>
           </a:solidFill>
           <a:ln>
             <a:noFill/>
@@ -12283,84 +12679,14 @@
       </p:sp>
       <p:sp>
         <p:nvSpPr>
-          <p:cNvPr id="3" name="TextBox 2"/>
-          <p:cNvSpPr txBox="1"/>
-          <p:nvPr/>
-        </p:nvSpPr>
-        <p:spPr>
-          <a:xfrm>
-            <a:off x="514350" y="1028700"/>
-            <a:ext cx="2743200" cy="3086100"/>
-          </a:xfrm>
-          <a:prstGeom prst="rect">
-            <a:avLst/>
-          </a:prstGeom>
-          <a:noFill/>
-        </p:spPr>
-        <p:txBody>
-          <a:bodyPr wrap="square" lIns="34290" rIns="34290" tIns="13716" bIns="13716" anchor="ctr">
-            <a:spAutoFit/>
-          </a:bodyPr>
-          <a:lstStyle/>
-          <a:p>
-            <a:pPr algn="l"/>
-            <a:r>
-              <a:rPr sz="18000" b="1" i="0">
-                <a:solidFill>
-                  <a:srgbClr val="E8793A"/>
-                </a:solidFill>
-                <a:latin typeface="Arial Black"/>
-              </a:rPr>
-              <a:t>02</a:t>
-            </a:r>
-          </a:p>
-        </p:txBody>
-      </p:sp>
-      <p:sp>
-        <p:nvSpPr>
-          <p:cNvPr id="4" name="TextBox 3"/>
-          <p:cNvSpPr txBox="1"/>
-          <p:nvPr/>
-        </p:nvSpPr>
-        <p:spPr>
-          <a:xfrm>
-            <a:off x="3771900" y="1920239"/>
-            <a:ext cx="5143500" cy="1028700"/>
-          </a:xfrm>
-          <a:prstGeom prst="rect">
-            <a:avLst/>
-          </a:prstGeom>
-          <a:noFill/>
-        </p:spPr>
-        <p:txBody>
-          <a:bodyPr wrap="square" lIns="34290" rIns="34290" tIns="13716" bIns="13716" anchor="t">
-            <a:spAutoFit/>
-          </a:bodyPr>
-          <a:lstStyle/>
-          <a:p>
-            <a:pPr algn="l"/>
-            <a:r>
-              <a:rPr sz="4050" b="1" i="0">
-                <a:solidFill>
-                  <a:srgbClr val="FFFFFF"/>
-                </a:solidFill>
-                <a:latin typeface="Arial Black"/>
-              </a:rPr>
-              <a:t>從一個查詢開始</a:t>
-            </a:r>
-          </a:p>
-        </p:txBody>
-      </p:sp>
-      <p:sp>
-        <p:nvSpPr>
-          <p:cNvPr id="5" name="Rectangle 4"/>
-          <p:cNvSpPr/>
-          <p:nvPr/>
-        </p:nvSpPr>
-        <p:spPr>
-          <a:xfrm>
-            <a:off x="3771900" y="2743200"/>
-            <a:ext cx="1714500" cy="27432"/>
+          <p:cNvPr id="3" name="Rectangle 2"/>
+          <p:cNvSpPr/>
+          <p:nvPr/>
+        </p:nvSpPr>
+        <p:spPr>
+          <a:xfrm>
+            <a:off x="0" y="0"/>
+            <a:ext cx="9143771" cy="68580"/>
           </a:xfrm>
           <a:prstGeom prst="rect">
             <a:avLst/>
@@ -12397,14 +12723,14 @@
       </p:sp>
       <p:sp>
         <p:nvSpPr>
-          <p:cNvPr id="6" name="TextBox 5"/>
+          <p:cNvPr id="4" name="TextBox 3"/>
           <p:cNvSpPr txBox="1"/>
           <p:nvPr/>
         </p:nvSpPr>
         <p:spPr>
           <a:xfrm>
-            <a:off x="3771900" y="2880360"/>
-            <a:ext cx="5143500" cy="685800"/>
+            <a:off x="582930" y="1371600"/>
+            <a:ext cx="2743200" cy="685800"/>
           </a:xfrm>
           <a:prstGeom prst="rect">
             <a:avLst/>
@@ -12419,7 +12745,77 @@
           <a:p>
             <a:pPr algn="l"/>
             <a:r>
-              <a:rPr sz="1650" b="0" i="0">
+              <a:rPr sz="3450" b="1" i="0">
+                <a:solidFill>
+                  <a:srgbClr val="E8793A"/>
+                </a:solidFill>
+                <a:latin typeface="Arial Black"/>
+              </a:rPr>
+              <a:t>02</a:t>
+            </a:r>
+          </a:p>
+        </p:txBody>
+      </p:sp>
+      <p:sp>
+        <p:nvSpPr>
+          <p:cNvPr id="5" name="TextBox 4"/>
+          <p:cNvSpPr txBox="1"/>
+          <p:nvPr/>
+        </p:nvSpPr>
+        <p:spPr>
+          <a:xfrm>
+            <a:off x="582930" y="2023110"/>
+            <a:ext cx="8229600" cy="685800"/>
+          </a:xfrm>
+          <a:prstGeom prst="rect">
+            <a:avLst/>
+          </a:prstGeom>
+          <a:noFill/>
+        </p:spPr>
+        <p:txBody>
+          <a:bodyPr wrap="square" lIns="34290" rIns="34290" tIns="13716" bIns="13716" anchor="t">
+            <a:spAutoFit/>
+          </a:bodyPr>
+          <a:lstStyle/>
+          <a:p>
+            <a:pPr algn="l"/>
+            <a:r>
+              <a:rPr sz="3150" b="1" i="0">
+                <a:solidFill>
+                  <a:srgbClr val="FFFFFF"/>
+                </a:solidFill>
+                <a:latin typeface="Arial Black"/>
+              </a:rPr>
+              <a:t>從一個查詢開始</a:t>
+            </a:r>
+          </a:p>
+        </p:txBody>
+      </p:sp>
+      <p:sp>
+        <p:nvSpPr>
+          <p:cNvPr id="6" name="TextBox 5"/>
+          <p:cNvSpPr txBox="1"/>
+          <p:nvPr/>
+        </p:nvSpPr>
+        <p:spPr>
+          <a:xfrm>
+            <a:off x="582930" y="2777489"/>
+            <a:ext cx="8229600" cy="480059"/>
+          </a:xfrm>
+          <a:prstGeom prst="rect">
+            <a:avLst/>
+          </a:prstGeom>
+          <a:noFill/>
+        </p:spPr>
+        <p:txBody>
+          <a:bodyPr wrap="square" lIns="34290" rIns="34290" tIns="13716" bIns="13716" anchor="t">
+            <a:spAutoFit/>
+          </a:bodyPr>
+          <a:lstStyle/>
+          <a:p>
+            <a:pPr algn="l"/>
+            <a:r>
+              <a:rPr sz="1500" b="0" i="0">
                 <a:solidFill>
                   <a:srgbClr val="E8EDF3"/>
                 </a:solidFill>
@@ -12463,7 +12859,7 @@
             <a:avLst/>
           </a:prstGeom>
           <a:solidFill>
-            <a:srgbClr val="FFFFFF"/>
+            <a:srgbClr val="EFF2F7"/>
           </a:solidFill>
           <a:ln>
             <a:noFill/>
@@ -12493,49 +12889,14 @@
       </p:sp>
       <p:sp>
         <p:nvSpPr>
-          <p:cNvPr id="3" name="TextBox 2"/>
-          <p:cNvSpPr txBox="1"/>
-          <p:nvPr/>
-        </p:nvSpPr>
-        <p:spPr>
-          <a:xfrm>
-            <a:off x="514350" y="274320"/>
-            <a:ext cx="8229600" cy="480059"/>
-          </a:xfrm>
-          <a:prstGeom prst="rect">
-            <a:avLst/>
-          </a:prstGeom>
-          <a:noFill/>
-        </p:spPr>
-        <p:txBody>
-          <a:bodyPr wrap="square" lIns="34290" rIns="34290" tIns="13716" bIns="13716" anchor="t">
-            <a:spAutoFit/>
-          </a:bodyPr>
-          <a:lstStyle/>
-          <a:p>
-            <a:pPr algn="l"/>
-            <a:r>
-              <a:rPr sz="1950" b="1" i="0">
-                <a:solidFill>
-                  <a:srgbClr val="1E2761"/>
-                </a:solidFill>
-                <a:latin typeface="Arial Black"/>
-              </a:rPr>
-              <a:t>場景:使用者問了一個問題,LLM 決定要呼叫工具</a:t>
-            </a:r>
-          </a:p>
-        </p:txBody>
-      </p:sp>
-      <p:sp>
-        <p:nvSpPr>
-          <p:cNvPr id="4" name="Rectangle 3"/>
-          <p:cNvSpPr/>
-          <p:nvPr/>
-        </p:nvSpPr>
-        <p:spPr>
-          <a:xfrm>
-            <a:off x="514350" y="822959"/>
-            <a:ext cx="2057400" cy="27432"/>
+          <p:cNvPr id="3" name="Rectangle 2"/>
+          <p:cNvSpPr/>
+          <p:nvPr/>
+        </p:nvSpPr>
+        <p:spPr>
+          <a:xfrm>
+            <a:off x="0" y="0"/>
+            <a:ext cx="9143771" cy="68580"/>
           </a:xfrm>
           <a:prstGeom prst="rect">
             <a:avLst/>
@@ -12572,14 +12933,14 @@
       </p:sp>
       <p:sp>
         <p:nvSpPr>
-          <p:cNvPr id="5" name="TextBox 4"/>
+          <p:cNvPr id="4" name="TextBox 3"/>
           <p:cNvSpPr txBox="1"/>
           <p:nvPr/>
         </p:nvSpPr>
         <p:spPr>
           <a:xfrm>
-            <a:off x="7543800" y="925830"/>
-            <a:ext cx="1028700" cy="240029"/>
+            <a:off x="514350" y="274320"/>
+            <a:ext cx="8229600" cy="480059"/>
           </a:xfrm>
           <a:prstGeom prst="rect">
             <a:avLst/>
@@ -12592,6 +12953,85 @@
           </a:bodyPr>
           <a:lstStyle/>
           <a:p>
+            <a:pPr algn="l"/>
+            <a:r>
+              <a:rPr sz="1950" b="1" i="0">
+                <a:solidFill>
+                  <a:srgbClr val="1E2761"/>
+                </a:solidFill>
+                <a:latin typeface="Arial Black"/>
+              </a:rPr>
+              <a:t>場景:使用者問了一個問題,LLM 決定要呼叫工具</a:t>
+            </a:r>
+          </a:p>
+        </p:txBody>
+      </p:sp>
+      <p:sp>
+        <p:nvSpPr>
+          <p:cNvPr id="5" name="Rectangle 4"/>
+          <p:cNvSpPr/>
+          <p:nvPr/>
+        </p:nvSpPr>
+        <p:spPr>
+          <a:xfrm>
+            <a:off x="514350" y="822959"/>
+            <a:ext cx="2057400" cy="27432"/>
+          </a:xfrm>
+          <a:prstGeom prst="rect">
+            <a:avLst/>
+          </a:prstGeom>
+          <a:solidFill>
+            <a:srgbClr val="E8793A"/>
+          </a:solidFill>
+          <a:ln>
+            <a:noFill/>
+          </a:ln>
+          <a:effectLst/>
+        </p:spPr>
+        <p:style>
+          <a:lnRef idx="1">
+            <a:schemeClr val="accent1"/>
+          </a:lnRef>
+          <a:fillRef idx="3">
+            <a:schemeClr val="accent1"/>
+          </a:fillRef>
+          <a:effectRef idx="2">
+            <a:schemeClr val="accent1"/>
+          </a:effectRef>
+          <a:fontRef idx="minor">
+            <a:schemeClr val="lt1"/>
+          </a:fontRef>
+        </p:style>
+        <p:txBody>
+          <a:bodyPr rtlCol="0" anchor="ctr"/>
+          <a:lstStyle/>
+          <a:p>
+            <a:pPr algn="ctr"/>
+          </a:p>
+        </p:txBody>
+      </p:sp>
+      <p:sp>
+        <p:nvSpPr>
+          <p:cNvPr id="6" name="TextBox 5"/>
+          <p:cNvSpPr txBox="1"/>
+          <p:nvPr/>
+        </p:nvSpPr>
+        <p:spPr>
+          <a:xfrm>
+            <a:off x="7543800" y="925830"/>
+            <a:ext cx="1028700" cy="240029"/>
+          </a:xfrm>
+          <a:prstGeom prst="rect">
+            <a:avLst/>
+          </a:prstGeom>
+          <a:noFill/>
+        </p:spPr>
+        <p:txBody>
+          <a:bodyPr wrap="square" lIns="34290" rIns="34290" tIns="13716" bIns="13716" anchor="t">
+            <a:spAutoFit/>
+          </a:bodyPr>
+          <a:lstStyle/>
+          <a:p>
             <a:pPr algn="r"/>
             <a:r>
               <a:rPr sz="1050" b="0" i="0">
@@ -12607,7 +13047,7 @@
       </p:sp>
       <p:sp>
         <p:nvSpPr>
-          <p:cNvPr id="6" name="Rounded Rectangle 5"/>
+          <p:cNvPr id="7" name="Rounded Rectangle 6"/>
           <p:cNvSpPr/>
           <p:nvPr/>
         </p:nvSpPr>
@@ -12655,7 +13095,7 @@
       </p:sp>
       <p:sp>
         <p:nvSpPr>
-          <p:cNvPr id="7" name="TextBox 6"/>
+          <p:cNvPr id="8" name="TextBox 7"/>
           <p:cNvSpPr txBox="1"/>
           <p:nvPr/>
         </p:nvSpPr>
@@ -12690,7 +13130,7 @@
       </p:sp>
       <p:cxnSp>
         <p:nvCxnSpPr>
-          <p:cNvPr id="8" name="Connector 7"/>
+          <p:cNvPr id="9" name="Connector 8"/>
           <p:cNvCxnSpPr/>
           <p:nvPr/>
         </p:nvCxnSpPr>
@@ -12726,7 +13166,7 @@
       </p:cxnSp>
       <p:sp>
         <p:nvSpPr>
-          <p:cNvPr id="9" name="Rounded Rectangle 8"/>
+          <p:cNvPr id="10" name="Rounded Rectangle 9"/>
           <p:cNvSpPr/>
           <p:nvPr/>
         </p:nvSpPr>
@@ -12774,7 +13214,7 @@
       </p:sp>
       <p:sp>
         <p:nvSpPr>
-          <p:cNvPr id="10" name="TextBox 9"/>
+          <p:cNvPr id="11" name="TextBox 10"/>
           <p:cNvSpPr txBox="1"/>
           <p:nvPr/>
         </p:nvSpPr>
@@ -12825,7 +13265,7 @@
       </p:sp>
       <p:sp>
         <p:nvSpPr>
-          <p:cNvPr id="11" name="TextBox 10"/>
+          <p:cNvPr id="12" name="TextBox 11"/>
           <p:cNvSpPr txBox="1"/>
           <p:nvPr/>
         </p:nvSpPr>
@@ -12860,7 +13300,7 @@
       </p:sp>
       <p:sp>
         <p:nvSpPr>
-          <p:cNvPr id="12" name="TextBox 11"/>
+          <p:cNvPr id="13" name="TextBox 12"/>
           <p:cNvSpPr txBox="1"/>
           <p:nvPr/>
         </p:nvSpPr>
@@ -13096,7 +13536,7 @@
             <a:avLst/>
           </a:prstGeom>
           <a:solidFill>
-            <a:srgbClr val="FFFFFF"/>
+            <a:srgbClr val="EFF2F7"/>
           </a:solidFill>
           <a:ln>
             <a:noFill/>
@@ -13126,49 +13566,14 @@
       </p:sp>
       <p:sp>
         <p:nvSpPr>
-          <p:cNvPr id="3" name="TextBox 2"/>
-          <p:cNvSpPr txBox="1"/>
-          <p:nvPr/>
-        </p:nvSpPr>
-        <p:spPr>
-          <a:xfrm>
-            <a:off x="514350" y="274320"/>
-            <a:ext cx="8229600" cy="480059"/>
-          </a:xfrm>
-          <a:prstGeom prst="rect">
-            <a:avLst/>
-          </a:prstGeom>
-          <a:noFill/>
-        </p:spPr>
-        <p:txBody>
-          <a:bodyPr wrap="square" lIns="34290" rIns="34290" tIns="13716" bIns="13716" anchor="t">
-            <a:spAutoFit/>
-          </a:bodyPr>
-          <a:lstStyle/>
-          <a:p>
-            <a:pPr algn="l"/>
-            <a:r>
-              <a:rPr sz="2100" b="1" i="0">
-                <a:solidFill>
-                  <a:srgbClr val="1E2761"/>
-                </a:solidFill>
-                <a:latin typeface="Arial Black"/>
-              </a:rPr>
-              <a:t>Act 1 — Parent 開出 Child</a:t>
-            </a:r>
-          </a:p>
-        </p:txBody>
-      </p:sp>
-      <p:sp>
-        <p:nvSpPr>
-          <p:cNvPr id="4" name="Rectangle 3"/>
-          <p:cNvSpPr/>
-          <p:nvPr/>
-        </p:nvSpPr>
-        <p:spPr>
-          <a:xfrm>
-            <a:off x="514350" y="822959"/>
-            <a:ext cx="2057400" cy="27432"/>
+          <p:cNvPr id="3" name="Rectangle 2"/>
+          <p:cNvSpPr/>
+          <p:nvPr/>
+        </p:nvSpPr>
+        <p:spPr>
+          <a:xfrm>
+            <a:off x="0" y="0"/>
+            <a:ext cx="9143771" cy="68580"/>
           </a:xfrm>
           <a:prstGeom prst="rect">
             <a:avLst/>
@@ -13205,14 +13610,14 @@
       </p:sp>
       <p:sp>
         <p:nvSpPr>
-          <p:cNvPr id="5" name="TextBox 4"/>
+          <p:cNvPr id="4" name="TextBox 3"/>
           <p:cNvSpPr txBox="1"/>
           <p:nvPr/>
         </p:nvSpPr>
         <p:spPr>
           <a:xfrm>
-            <a:off x="3086100" y="994409"/>
-            <a:ext cx="4114800" cy="342900"/>
+            <a:off x="514350" y="274320"/>
+            <a:ext cx="8229600" cy="480059"/>
           </a:xfrm>
           <a:prstGeom prst="rect">
             <a:avLst/>
@@ -13225,7 +13630,86 @@
           </a:bodyPr>
           <a:lstStyle/>
           <a:p>
+            <a:pPr algn="l"/>
+            <a:r>
+              <a:rPr sz="2100" b="1" i="0">
+                <a:solidFill>
+                  <a:srgbClr val="1E2761"/>
+                </a:solidFill>
+                <a:latin typeface="Arial Black"/>
+              </a:rPr>
+              <a:t>Act 1 — Parent 開出 Child</a:t>
+            </a:r>
+          </a:p>
+        </p:txBody>
+      </p:sp>
+      <p:sp>
+        <p:nvSpPr>
+          <p:cNvPr id="5" name="Rectangle 4"/>
+          <p:cNvSpPr/>
+          <p:nvPr/>
+        </p:nvSpPr>
+        <p:spPr>
+          <a:xfrm>
+            <a:off x="514350" y="822959"/>
+            <a:ext cx="2057400" cy="27432"/>
+          </a:xfrm>
+          <a:prstGeom prst="rect">
+            <a:avLst/>
+          </a:prstGeom>
+          <a:solidFill>
+            <a:srgbClr val="E8793A"/>
+          </a:solidFill>
+          <a:ln>
+            <a:noFill/>
+          </a:ln>
+          <a:effectLst/>
+        </p:spPr>
+        <p:style>
+          <a:lnRef idx="1">
+            <a:schemeClr val="accent1"/>
+          </a:lnRef>
+          <a:fillRef idx="3">
+            <a:schemeClr val="accent1"/>
+          </a:fillRef>
+          <a:effectRef idx="2">
+            <a:schemeClr val="accent1"/>
+          </a:effectRef>
+          <a:fontRef idx="minor">
+            <a:schemeClr val="lt1"/>
+          </a:fontRef>
+        </p:style>
+        <p:txBody>
+          <a:bodyPr rtlCol="0" anchor="ctr"/>
+          <a:lstStyle/>
+          <a:p>
             <a:pPr algn="ctr"/>
+          </a:p>
+        </p:txBody>
+      </p:sp>
+      <p:sp>
+        <p:nvSpPr>
+          <p:cNvPr id="6" name="TextBox 5"/>
+          <p:cNvSpPr txBox="1"/>
+          <p:nvPr/>
+        </p:nvSpPr>
+        <p:spPr>
+          <a:xfrm>
+            <a:off x="3086100" y="994409"/>
+            <a:ext cx="4114800" cy="342900"/>
+          </a:xfrm>
+          <a:prstGeom prst="rect">
+            <a:avLst/>
+          </a:prstGeom>
+          <a:noFill/>
+        </p:spPr>
+        <p:txBody>
+          <a:bodyPr wrap="square" lIns="34290" rIns="34290" tIns="13716" bIns="13716" anchor="t">
+            <a:spAutoFit/>
+          </a:bodyPr>
+          <a:lstStyle/>
+          <a:p>
+            <a:pPr algn="ctr"/>
             <a:r>
               <a:rPr sz="1650" b="1" i="0">
                 <a:solidFill>
@@ -13240,7 +13724,7 @@
       </p:sp>
       <p:sp>
         <p:nvSpPr>
-          <p:cNvPr id="6" name="Rounded Rectangle 5"/>
+          <p:cNvPr id="7" name="Rounded Rectangle 6"/>
           <p:cNvSpPr/>
           <p:nvPr/>
         </p:nvSpPr>
@@ -13286,7 +13770,7 @@
       </p:sp>
       <p:sp>
         <p:nvSpPr>
-          <p:cNvPr id="7" name="Rounded Rectangle 6"/>
+          <p:cNvPr id="8" name="Rounded Rectangle 7"/>
           <p:cNvSpPr/>
           <p:nvPr/>
         </p:nvSpPr>
@@ -13334,7 +13818,7 @@
       </p:sp>
       <p:sp>
         <p:nvSpPr>
-          <p:cNvPr id="8" name="Rectangle 7"/>
+          <p:cNvPr id="9" name="Rectangle 8"/>
           <p:cNvSpPr/>
           <p:nvPr/>
         </p:nvSpPr>
@@ -13378,7 +13862,7 @@
       </p:sp>
       <p:sp>
         <p:nvSpPr>
-          <p:cNvPr id="9" name="TextBox 8"/>
+          <p:cNvPr id="10" name="TextBox 9"/>
           <p:cNvSpPr txBox="1"/>
           <p:nvPr/>
         </p:nvSpPr>
@@ -13413,7 +13897,7 @@
       </p:sp>
       <p:sp>
         <p:nvSpPr>
-          <p:cNvPr id="10" name="TextBox 9"/>
+          <p:cNvPr id="11" name="TextBox 10"/>
           <p:cNvSpPr txBox="1"/>
           <p:nvPr/>
         </p:nvSpPr>
@@ -13448,7 +13932,7 @@
       </p:sp>
       <p:sp>
         <p:nvSpPr>
-          <p:cNvPr id="11" name="Rounded Rectangle 10"/>
+          <p:cNvPr id="12" name="Rounded Rectangle 11"/>
           <p:cNvSpPr/>
           <p:nvPr/>
         </p:nvSpPr>
@@ -13496,7 +13980,7 @@
       </p:sp>
       <p:sp>
         <p:nvSpPr>
-          <p:cNvPr id="12" name="TextBox 11"/>
+          <p:cNvPr id="13" name="TextBox 12"/>
           <p:cNvSpPr txBox="1"/>
           <p:nvPr/>
         </p:nvSpPr>
@@ -13531,7 +14015,7 @@
       </p:sp>
       <p:sp>
         <p:nvSpPr>
-          <p:cNvPr id="13" name="Rounded Rectangle 12"/>
+          <p:cNvPr id="14" name="Rounded Rectangle 13"/>
           <p:cNvSpPr/>
           <p:nvPr/>
         </p:nvSpPr>
@@ -13577,7 +14061,7 @@
       </p:sp>
       <p:sp>
         <p:nvSpPr>
-          <p:cNvPr id="14" name="Rounded Rectangle 13"/>
+          <p:cNvPr id="15" name="Rounded Rectangle 14"/>
           <p:cNvSpPr/>
           <p:nvPr/>
         </p:nvSpPr>
@@ -13625,7 +14109,7 @@
       </p:sp>
       <p:sp>
         <p:nvSpPr>
-          <p:cNvPr id="15" name="Rectangle 14"/>
+          <p:cNvPr id="16" name="Rectangle 15"/>
           <p:cNvSpPr/>
           <p:nvPr/>
         </p:nvSpPr>
@@ -13669,7 +14153,7 @@
       </p:sp>
       <p:sp>
         <p:nvSpPr>
-          <p:cNvPr id="16" name="TextBox 15"/>
+          <p:cNvPr id="17" name="TextBox 16"/>
           <p:cNvSpPr txBox="1"/>
           <p:nvPr/>
         </p:nvSpPr>
@@ -13704,7 +14188,7 @@
       </p:sp>
       <p:sp>
         <p:nvSpPr>
-          <p:cNvPr id="17" name="TextBox 16"/>
+          <p:cNvPr id="18" name="TextBox 17"/>
           <p:cNvSpPr txBox="1"/>
           <p:nvPr/>
         </p:nvSpPr>
@@ -13739,7 +14223,7 @@
       </p:sp>
       <p:cxnSp>
         <p:nvCxnSpPr>
-          <p:cNvPr id="18" name="Connector 17"/>
+          <p:cNvPr id="19" name="Connector 18"/>
           <p:cNvCxnSpPr/>
           <p:nvPr/>
         </p:nvCxnSpPr>
@@ -13774,7 +14258,7 @@
       </p:cxnSp>
       <p:cxnSp>
         <p:nvCxnSpPr>
-          <p:cNvPr id="19" name="Connector 18"/>
+          <p:cNvPr id="20" name="Connector 19"/>
           <p:cNvCxnSpPr/>
           <p:nvPr/>
         </p:nvCxnSpPr>
@@ -13809,7 +14293,7 @@
       </p:cxnSp>
       <p:sp>
         <p:nvSpPr>
-          <p:cNvPr id="20" name="TextBox 19"/>
+          <p:cNvPr id="21" name="TextBox 20"/>
           <p:cNvSpPr txBox="1"/>
           <p:nvPr/>
         </p:nvSpPr>
@@ -13911,7 +14395,7 @@
             <a:avLst/>
           </a:prstGeom>
           <a:solidFill>
-            <a:srgbClr val="FFFFFF"/>
+            <a:srgbClr val="EFF2F7"/>
           </a:solidFill>
           <a:ln>
             <a:noFill/>
@@ -13941,49 +14425,14 @@
       </p:sp>
       <p:sp>
         <p:nvSpPr>
-          <p:cNvPr id="3" name="TextBox 2"/>
-          <p:cNvSpPr txBox="1"/>
-          <p:nvPr/>
-        </p:nvSpPr>
-        <p:spPr>
-          <a:xfrm>
-            <a:off x="514350" y="274320"/>
-            <a:ext cx="8229600" cy="480059"/>
-          </a:xfrm>
-          <a:prstGeom prst="rect">
-            <a:avLst/>
-          </a:prstGeom>
-          <a:noFill/>
-        </p:spPr>
-        <p:txBody>
-          <a:bodyPr wrap="square" lIns="34290" rIns="34290" tIns="13716" bIns="13716" anchor="t">
-            <a:spAutoFit/>
-          </a:bodyPr>
-          <a:lstStyle/>
-          <a:p>
-            <a:pPr algn="l"/>
-            <a:r>
-              <a:rPr sz="2100" b="1" i="0">
-                <a:solidFill>
-                  <a:srgbClr val="1E2761"/>
-                </a:solidFill>
-                <a:latin typeface="Arial Black"/>
-              </a:rPr>
-              <a:t>Act 2 — 兩階段握手</a:t>
-            </a:r>
-          </a:p>
-        </p:txBody>
-      </p:sp>
-      <p:sp>
-        <p:nvSpPr>
-          <p:cNvPr id="4" name="Rectangle 3"/>
-          <p:cNvSpPr/>
-          <p:nvPr/>
-        </p:nvSpPr>
-        <p:spPr>
-          <a:xfrm>
-            <a:off x="514350" y="822959"/>
-            <a:ext cx="2057400" cy="27432"/>
+          <p:cNvPr id="3" name="Rectangle 2"/>
+          <p:cNvSpPr/>
+          <p:nvPr/>
+        </p:nvSpPr>
+        <p:spPr>
+          <a:xfrm>
+            <a:off x="0" y="0"/>
+            <a:ext cx="9143771" cy="68580"/>
           </a:xfrm>
           <a:prstGeom prst="rect">
             <a:avLst/>
@@ -14020,7 +14469,86 @@
       </p:sp>
       <p:sp>
         <p:nvSpPr>
-          <p:cNvPr id="5" name="Rounded Rectangle 4"/>
+          <p:cNvPr id="4" name="TextBox 3"/>
+          <p:cNvSpPr txBox="1"/>
+          <p:nvPr/>
+        </p:nvSpPr>
+        <p:spPr>
+          <a:xfrm>
+            <a:off x="514350" y="274320"/>
+            <a:ext cx="8229600" cy="480059"/>
+          </a:xfrm>
+          <a:prstGeom prst="rect">
+            <a:avLst/>
+          </a:prstGeom>
+          <a:noFill/>
+        </p:spPr>
+        <p:txBody>
+          <a:bodyPr wrap="square" lIns="34290" rIns="34290" tIns="13716" bIns="13716" anchor="t">
+            <a:spAutoFit/>
+          </a:bodyPr>
+          <a:lstStyle/>
+          <a:p>
+            <a:pPr algn="l"/>
+            <a:r>
+              <a:rPr sz="2100" b="1" i="0">
+                <a:solidFill>
+                  <a:srgbClr val="1E2761"/>
+                </a:solidFill>
+                <a:latin typeface="Arial Black"/>
+              </a:rPr>
+              <a:t>Act 2 — 兩階段握手</a:t>
+            </a:r>
+          </a:p>
+        </p:txBody>
+      </p:sp>
+      <p:sp>
+        <p:nvSpPr>
+          <p:cNvPr id="5" name="Rectangle 4"/>
+          <p:cNvSpPr/>
+          <p:nvPr/>
+        </p:nvSpPr>
+        <p:spPr>
+          <a:xfrm>
+            <a:off x="514350" y="822959"/>
+            <a:ext cx="2057400" cy="27432"/>
+          </a:xfrm>
+          <a:prstGeom prst="rect">
+            <a:avLst/>
+          </a:prstGeom>
+          <a:solidFill>
+            <a:srgbClr val="E8793A"/>
+          </a:solidFill>
+          <a:ln>
+            <a:noFill/>
+          </a:ln>
+          <a:effectLst/>
+        </p:spPr>
+        <p:style>
+          <a:lnRef idx="1">
+            <a:schemeClr val="accent1"/>
+          </a:lnRef>
+          <a:fillRef idx="3">
+            <a:schemeClr val="accent1"/>
+          </a:fillRef>
+          <a:effectRef idx="2">
+            <a:schemeClr val="accent1"/>
+          </a:effectRef>
+          <a:fontRef idx="minor">
+            <a:schemeClr val="lt1"/>
+          </a:fontRef>
+        </p:style>
+        <p:txBody>
+          <a:bodyPr rtlCol="0" anchor="ctr"/>
+          <a:lstStyle/>
+          <a:p>
+            <a:pPr algn="ctr"/>
+          </a:p>
+        </p:txBody>
+      </p:sp>
+      <p:sp>
+        <p:nvSpPr>
+          <p:cNvPr id="6" name="Rounded Rectangle 5"/>
           <p:cNvSpPr/>
           <p:nvPr/>
         </p:nvSpPr>
@@ -14066,7 +14594,7 @@
       </p:sp>
       <p:sp>
         <p:nvSpPr>
-          <p:cNvPr id="6" name="Rounded Rectangle 5"/>
+          <p:cNvPr id="7" name="Rounded Rectangle 6"/>
           <p:cNvSpPr/>
           <p:nvPr/>
         </p:nvSpPr>
@@ -14114,7 +14642,7 @@
       </p:sp>
       <p:sp>
         <p:nvSpPr>
-          <p:cNvPr id="7" name="Rectangle 6"/>
+          <p:cNvPr id="8" name="Rectangle 7"/>
           <p:cNvSpPr/>
           <p:nvPr/>
         </p:nvSpPr>
@@ -14158,7 +14686,7 @@
       </p:sp>
       <p:sp>
         <p:nvSpPr>
-          <p:cNvPr id="8" name="TextBox 7"/>
+          <p:cNvPr id="9" name="TextBox 8"/>
           <p:cNvSpPr txBox="1"/>
           <p:nvPr/>
         </p:nvSpPr>
@@ -14193,7 +14721,7 @@
       </p:sp>
       <p:sp>
         <p:nvSpPr>
-          <p:cNvPr id="9" name="TextBox 8"/>
+          <p:cNvPr id="10" name="TextBox 9"/>
           <p:cNvSpPr txBox="1"/>
           <p:nvPr/>
         </p:nvSpPr>
@@ -14228,7 +14756,7 @@
       </p:sp>
       <p:sp>
         <p:nvSpPr>
-          <p:cNvPr id="10" name="Rounded Rectangle 9"/>
+          <p:cNvPr id="11" name="Rounded Rectangle 10"/>
           <p:cNvSpPr/>
           <p:nvPr/>
         </p:nvSpPr>
@@ -14274,7 +14802,7 @@
       </p:sp>
       <p:sp>
         <p:nvSpPr>
-          <p:cNvPr id="11" name="Rounded Rectangle 10"/>
+          <p:cNvPr id="12" name="Rounded Rectangle 11"/>
           <p:cNvSpPr/>
           <p:nvPr/>
         </p:nvSpPr>
@@ -14322,7 +14850,7 @@
       </p:sp>
       <p:sp>
         <p:nvSpPr>
-          <p:cNvPr id="12" name="Rectangle 11"/>
+          <p:cNvPr id="13" name="Rectangle 12"/>
           <p:cNvSpPr/>
           <p:nvPr/>
         </p:nvSpPr>
@@ -14366,7 +14894,7 @@
       </p:sp>
       <p:sp>
         <p:nvSpPr>
-          <p:cNvPr id="13" name="TextBox 12"/>
+          <p:cNvPr id="14" name="TextBox 13"/>
           <p:cNvSpPr txBox="1"/>
           <p:nvPr/>
         </p:nvSpPr>
@@ -14401,7 +14929,7 @@
       </p:sp>
       <p:sp>
         <p:nvSpPr>
-          <p:cNvPr id="14" name="TextBox 13"/>
+          <p:cNvPr id="15" name="TextBox 14"/>
           <p:cNvSpPr txBox="1"/>
           <p:nvPr/>
         </p:nvSpPr>
@@ -14436,7 +14964,7 @@
       </p:sp>
       <p:cxnSp>
         <p:nvCxnSpPr>
-          <p:cNvPr id="15" name="Connector 14"/>
+          <p:cNvPr id="16" name="Connector 15"/>
           <p:cNvCxnSpPr/>
           <p:nvPr/>
         </p:nvCxnSpPr>
@@ -14472,7 +15000,7 @@
       </p:cxnSp>
       <p:cxnSp>
         <p:nvCxnSpPr>
-          <p:cNvPr id="16" name="Connector 15"/>
+          <p:cNvPr id="17" name="Connector 16"/>
           <p:cNvCxnSpPr/>
           <p:nvPr/>
         </p:nvCxnSpPr>
@@ -14508,7 +15036,7 @@
       </p:cxnSp>
       <p:sp>
         <p:nvSpPr>
-          <p:cNvPr id="17" name="TextBox 16"/>
+          <p:cNvPr id="18" name="TextBox 17"/>
           <p:cNvSpPr txBox="1"/>
           <p:nvPr/>
         </p:nvSpPr>
@@ -14543,7 +15071,7 @@
       </p:sp>
       <p:sp>
         <p:nvSpPr>
-          <p:cNvPr id="18" name="TextBox 17"/>
+          <p:cNvPr id="19" name="TextBox 18"/>
           <p:cNvSpPr txBox="1"/>
           <p:nvPr/>
         </p:nvSpPr>
@@ -14578,7 +15106,7 @@
       </p:sp>
       <p:sp>
         <p:nvSpPr>
-          <p:cNvPr id="19" name="Rounded Rectangle 18"/>
+          <p:cNvPr id="20" name="Rounded Rectangle 19"/>
           <p:cNvSpPr/>
           <p:nvPr/>
         </p:nvSpPr>
@@ -14626,7 +15154,7 @@
       </p:sp>
       <p:sp>
         <p:nvSpPr>
-          <p:cNvPr id="20" name="TextBox 19"/>
+          <p:cNvPr id="21" name="TextBox 20"/>
           <p:cNvSpPr txBox="1"/>
           <p:nvPr/>
         </p:nvSpPr>
@@ -14661,7 +15189,7 @@
       </p:sp>
       <p:sp>
         <p:nvSpPr>
-          <p:cNvPr id="21" name="Rounded Rectangle 20"/>
+          <p:cNvPr id="22" name="Rounded Rectangle 21"/>
           <p:cNvSpPr/>
           <p:nvPr/>
         </p:nvSpPr>
@@ -14709,7 +15237,7 @@
       </p:sp>
       <p:sp>
         <p:nvSpPr>
-          <p:cNvPr id="22" name="TextBox 21"/>
+          <p:cNvPr id="23" name="TextBox 22"/>
           <p:cNvSpPr txBox="1"/>
           <p:nvPr/>
         </p:nvSpPr>
@@ -14744,7 +15272,7 @@
       </p:sp>
       <p:sp>
         <p:nvSpPr>
-          <p:cNvPr id="23" name="TextBox 22"/>
+          <p:cNvPr id="24" name="TextBox 23"/>
           <p:cNvSpPr txBox="1"/>
           <p:nvPr/>
         </p:nvSpPr>
@@ -14779,7 +15307,7 @@
       </p:sp>
       <p:sp>
         <p:nvSpPr>
-          <p:cNvPr id="24" name="Rounded Rectangle 23"/>
+          <p:cNvPr id="25" name="Rounded Rectangle 24"/>
           <p:cNvSpPr/>
           <p:nvPr/>
         </p:nvSpPr>
@@ -14827,7 +15355,7 @@
       </p:sp>
       <p:sp>
         <p:nvSpPr>
-          <p:cNvPr id="25" name="TextBox 24"/>
+          <p:cNvPr id="26" name="TextBox 25"/>
           <p:cNvSpPr txBox="1"/>
           <p:nvPr/>
         </p:nvSpPr>
@@ -14862,7 +15390,7 @@
       </p:sp>
       <p:sp>
         <p:nvSpPr>
-          <p:cNvPr id="26" name="TextBox 25"/>
+          <p:cNvPr id="27" name="TextBox 26"/>
           <p:cNvSpPr txBox="1"/>
           <p:nvPr/>
         </p:nvSpPr>
@@ -14897,7 +15425,7 @@
       </p:sp>
       <p:sp>
         <p:nvSpPr>
-          <p:cNvPr id="27" name="TextBox 26"/>
+          <p:cNvPr id="28" name="TextBox 27"/>
           <p:cNvSpPr txBox="1"/>
           <p:nvPr/>
         </p:nvSpPr>
@@ -14932,7 +15460,7 @@
       </p:sp>
       <p:sp>
         <p:nvSpPr>
-          <p:cNvPr id="28" name="TextBox 27"/>
+          <p:cNvPr id="29" name="TextBox 28"/>
           <p:cNvSpPr txBox="1"/>
           <p:nvPr/>
         </p:nvSpPr>
@@ -14998,7 +15526,7 @@
             <a:avLst/>
           </a:prstGeom>
           <a:solidFill>
-            <a:srgbClr val="FFFFFF"/>
+            <a:srgbClr val="EFF2F7"/>
           </a:solidFill>
           <a:ln>
             <a:noFill/>
@@ -15028,49 +15556,14 @@
       </p:sp>
       <p:sp>
         <p:nvSpPr>
-          <p:cNvPr id="3" name="TextBox 2"/>
-          <p:cNvSpPr txBox="1"/>
-          <p:nvPr/>
-        </p:nvSpPr>
-        <p:spPr>
-          <a:xfrm>
-            <a:off x="514350" y="274320"/>
-            <a:ext cx="8229600" cy="480059"/>
-          </a:xfrm>
-          <a:prstGeom prst="rect">
-            <a:avLst/>
-          </a:prstGeom>
-          <a:noFill/>
-        </p:spPr>
-        <p:txBody>
-          <a:bodyPr wrap="square" lIns="34290" rIns="34290" tIns="13716" bIns="13716" anchor="t">
-            <a:spAutoFit/>
-          </a:bodyPr>
-          <a:lstStyle/>
-          <a:p>
-            <a:pPr algn="l"/>
-            <a:r>
-              <a:rPr sz="2100" b="1" i="0">
-                <a:solidFill>
-                  <a:srgbClr val="1E2761"/>
-                </a:solidFill>
-                <a:latin typeface="Arial Black"/>
-              </a:rPr>
-              <a:t>Act 3 — 工具呼叫</a:t>
-            </a:r>
-          </a:p>
-        </p:txBody>
-      </p:sp>
-      <p:sp>
-        <p:nvSpPr>
-          <p:cNvPr id="4" name="Rectangle 3"/>
-          <p:cNvSpPr/>
-          <p:nvPr/>
-        </p:nvSpPr>
-        <p:spPr>
-          <a:xfrm>
-            <a:off x="514350" y="822959"/>
-            <a:ext cx="2057400" cy="27432"/>
+          <p:cNvPr id="3" name="Rectangle 2"/>
+          <p:cNvSpPr/>
+          <p:nvPr/>
+        </p:nvSpPr>
+        <p:spPr>
+          <a:xfrm>
+            <a:off x="0" y="0"/>
+            <a:ext cx="9143771" cy="68580"/>
           </a:xfrm>
           <a:prstGeom prst="rect">
             <a:avLst/>
@@ -15107,7 +15600,86 @@
       </p:sp>
       <p:sp>
         <p:nvSpPr>
-          <p:cNvPr id="5" name="Rounded Rectangle 4"/>
+          <p:cNvPr id="4" name="TextBox 3"/>
+          <p:cNvSpPr txBox="1"/>
+          <p:nvPr/>
+        </p:nvSpPr>
+        <p:spPr>
+          <a:xfrm>
+            <a:off x="514350" y="274320"/>
+            <a:ext cx="8229600" cy="480059"/>
+          </a:xfrm>
+          <a:prstGeom prst="rect">
+            <a:avLst/>
+          </a:prstGeom>
+          <a:noFill/>
+        </p:spPr>
+        <p:txBody>
+          <a:bodyPr wrap="square" lIns="34290" rIns="34290" tIns="13716" bIns="13716" anchor="t">
+            <a:spAutoFit/>
+          </a:bodyPr>
+          <a:lstStyle/>
+          <a:p>
+            <a:pPr algn="l"/>
+            <a:r>
+              <a:rPr sz="2100" b="1" i="0">
+                <a:solidFill>
+                  <a:srgbClr val="1E2761"/>
+                </a:solidFill>
+                <a:latin typeface="Arial Black"/>
+              </a:rPr>
+              <a:t>Act 3 — 工具呼叫</a:t>
+            </a:r>
+          </a:p>
+        </p:txBody>
+      </p:sp>
+      <p:sp>
+        <p:nvSpPr>
+          <p:cNvPr id="5" name="Rectangle 4"/>
+          <p:cNvSpPr/>
+          <p:nvPr/>
+        </p:nvSpPr>
+        <p:spPr>
+          <a:xfrm>
+            <a:off x="514350" y="822959"/>
+            <a:ext cx="2057400" cy="27432"/>
+          </a:xfrm>
+          <a:prstGeom prst="rect">
+            <a:avLst/>
+          </a:prstGeom>
+          <a:solidFill>
+            <a:srgbClr val="E8793A"/>
+          </a:solidFill>
+          <a:ln>
+            <a:noFill/>
+          </a:ln>
+          <a:effectLst/>
+        </p:spPr>
+        <p:style>
+          <a:lnRef idx="1">
+            <a:schemeClr val="accent1"/>
+          </a:lnRef>
+          <a:fillRef idx="3">
+            <a:schemeClr val="accent1"/>
+          </a:fillRef>
+          <a:effectRef idx="2">
+            <a:schemeClr val="accent1"/>
+          </a:effectRef>
+          <a:fontRef idx="minor">
+            <a:schemeClr val="lt1"/>
+          </a:fontRef>
+        </p:style>
+        <p:txBody>
+          <a:bodyPr rtlCol="0" anchor="ctr"/>
+          <a:lstStyle/>
+          <a:p>
+            <a:pPr algn="ctr"/>
+          </a:p>
+        </p:txBody>
+      </p:sp>
+      <p:sp>
+        <p:nvSpPr>
+          <p:cNvPr id="6" name="Rounded Rectangle 5"/>
           <p:cNvSpPr/>
           <p:nvPr/>
         </p:nvSpPr>
@@ -15153,7 +15725,7 @@
       </p:sp>
       <p:sp>
         <p:nvSpPr>
-          <p:cNvPr id="6" name="Rounded Rectangle 5"/>
+          <p:cNvPr id="7" name="Rounded Rectangle 6"/>
           <p:cNvSpPr/>
           <p:nvPr/>
         </p:nvSpPr>
@@ -15201,7 +15773,7 @@
       </p:sp>
       <p:sp>
         <p:nvSpPr>
-          <p:cNvPr id="7" name="Rectangle 6"/>
+          <p:cNvPr id="8" name="Rectangle 7"/>
           <p:cNvSpPr/>
           <p:nvPr/>
         </p:nvSpPr>
@@ -15245,7 +15817,7 @@
       </p:sp>
       <p:sp>
         <p:nvSpPr>
-          <p:cNvPr id="8" name="TextBox 7"/>
+          <p:cNvPr id="9" name="TextBox 8"/>
           <p:cNvSpPr txBox="1"/>
           <p:nvPr/>
         </p:nvSpPr>
@@ -15280,7 +15852,7 @@
       </p:sp>
       <p:sp>
         <p:nvSpPr>
-          <p:cNvPr id="9" name="TextBox 8"/>
+          <p:cNvPr id="10" name="TextBox 9"/>
           <p:cNvSpPr txBox="1"/>
           <p:nvPr/>
         </p:nvSpPr>
@@ -15315,7 +15887,7 @@
       </p:sp>
       <p:sp>
         <p:nvSpPr>
-          <p:cNvPr id="10" name="Rounded Rectangle 9"/>
+          <p:cNvPr id="11" name="Rounded Rectangle 10"/>
           <p:cNvSpPr/>
           <p:nvPr/>
         </p:nvSpPr>
@@ -15363,7 +15935,7 @@
       </p:sp>
       <p:sp>
         <p:nvSpPr>
-          <p:cNvPr id="11" name="TextBox 10"/>
+          <p:cNvPr id="12" name="TextBox 11"/>
           <p:cNvSpPr txBox="1"/>
           <p:nvPr/>
         </p:nvSpPr>
@@ -15398,7 +15970,7 @@
       </p:sp>
       <p:sp>
         <p:nvSpPr>
-          <p:cNvPr id="12" name="Rounded Rectangle 11"/>
+          <p:cNvPr id="13" name="Rounded Rectangle 12"/>
           <p:cNvSpPr/>
           <p:nvPr/>
         </p:nvSpPr>
@@ -15444,7 +16016,7 @@
       </p:sp>
       <p:sp>
         <p:nvSpPr>
-          <p:cNvPr id="13" name="Rounded Rectangle 12"/>
+          <p:cNvPr id="14" name="Rounded Rectangle 13"/>
           <p:cNvSpPr/>
           <p:nvPr/>
         </p:nvSpPr>
@@ -15492,7 +16064,7 @@
       </p:sp>
       <p:sp>
         <p:nvSpPr>
-          <p:cNvPr id="14" name="Rectangle 13"/>
+          <p:cNvPr id="15" name="Rectangle 14"/>
           <p:cNvSpPr/>
           <p:nvPr/>
         </p:nvSpPr>
@@ -15536,7 +16108,7 @@
       </p:sp>
       <p:sp>
         <p:nvSpPr>
-          <p:cNvPr id="15" name="TextBox 14"/>
+          <p:cNvPr id="16" name="TextBox 15"/>
           <p:cNvSpPr txBox="1"/>
           <p:nvPr/>
         </p:nvSpPr>
@@ -15571,7 +16143,7 @@
       </p:sp>
       <p:sp>
         <p:nvSpPr>
-          <p:cNvPr id="16" name="TextBox 15"/>
+          <p:cNvPr id="17" name="TextBox 16"/>
           <p:cNvSpPr txBox="1"/>
           <p:nvPr/>
         </p:nvSpPr>
@@ -15606,7 +16178,7 @@
       </p:sp>
       <p:cxnSp>
         <p:nvCxnSpPr>
-          <p:cNvPr id="17" name="Connector 16"/>
+          <p:cNvPr id="18" name="Connector 17"/>
           <p:cNvCxnSpPr/>
           <p:nvPr/>
         </p:nvCxnSpPr>
@@ -15642,7 +16214,7 @@
       </p:cxnSp>
       <p:sp>
         <p:nvSpPr>
-          <p:cNvPr id="18" name="Rounded Rectangle 17"/>
+          <p:cNvPr id="19" name="Rounded Rectangle 18"/>
           <p:cNvSpPr/>
           <p:nvPr/>
         </p:nvSpPr>
@@ -15690,7 +16262,7 @@
       </p:sp>
       <p:sp>
         <p:nvSpPr>
-          <p:cNvPr id="19" name="TextBox 18"/>
+          <p:cNvPr id="20" name="TextBox 19"/>
           <p:cNvSpPr txBox="1"/>
           <p:nvPr/>
         </p:nvSpPr>
@@ -15725,7 +16297,7 @@
       </p:sp>
       <p:sp>
         <p:nvSpPr>
-          <p:cNvPr id="20" name="Rounded Rectangle 19"/>
+          <p:cNvPr id="21" name="Rounded Rectangle 20"/>
           <p:cNvSpPr/>
           <p:nvPr/>
         </p:nvSpPr>
@@ -15773,7 +16345,7 @@
       </p:sp>
       <p:sp>
         <p:nvSpPr>
-          <p:cNvPr id="21" name="TextBox 20"/>
+          <p:cNvPr id="22" name="TextBox 21"/>
           <p:cNvSpPr txBox="1"/>
           <p:nvPr/>
         </p:nvSpPr>
@@ -15808,7 +16380,7 @@
       </p:sp>
       <p:cxnSp>
         <p:nvCxnSpPr>
-          <p:cNvPr id="22" name="Connector 21"/>
+          <p:cNvPr id="23" name="Connector 22"/>
           <p:cNvCxnSpPr/>
           <p:nvPr/>
         </p:nvCxnSpPr>
@@ -15844,7 +16416,7 @@
       </p:cxnSp>
       <p:sp>
         <p:nvSpPr>
-          <p:cNvPr id="23" name="Rounded Rectangle 22"/>
+          <p:cNvPr id="24" name="Rounded Rectangle 23"/>
           <p:cNvSpPr/>
           <p:nvPr/>
         </p:nvSpPr>
@@ -15892,7 +16464,7 @@
       </p:sp>
       <p:sp>
         <p:nvSpPr>
-          <p:cNvPr id="24" name="TextBox 23"/>
+          <p:cNvPr id="25" name="TextBox 24"/>
           <p:cNvSpPr txBox="1"/>
           <p:nvPr/>
         </p:nvSpPr>
@@ -15927,7 +16499,7 @@
       </p:sp>
       <p:sp>
         <p:nvSpPr>
-          <p:cNvPr id="25" name="Rounded Rectangle 24"/>
+          <p:cNvPr id="26" name="Rounded Rectangle 25"/>
           <p:cNvSpPr/>
           <p:nvPr/>
         </p:nvSpPr>
@@ -15975,7 +16547,7 @@
       </p:sp>
       <p:sp>
         <p:nvSpPr>
-          <p:cNvPr id="26" name="TextBox 25"/>
+          <p:cNvPr id="27" name="TextBox 26"/>
           <p:cNvSpPr txBox="1"/>
           <p:nvPr/>
         </p:nvSpPr>
@@ -16010,7 +16582,7 @@
       </p:sp>
       <p:sp>
         <p:nvSpPr>
-          <p:cNvPr id="27" name="TextBox 26"/>
+          <p:cNvPr id="28" name="TextBox 27"/>
           <p:cNvSpPr txBox="1"/>
           <p:nvPr/>
         </p:nvSpPr>
@@ -16045,7 +16617,7 @@
       </p:sp>
       <p:sp>
         <p:nvSpPr>
-          <p:cNvPr id="28" name="TextBox 27"/>
+          <p:cNvPr id="29" name="TextBox 28"/>
           <p:cNvSpPr txBox="1"/>
           <p:nvPr/>
         </p:nvSpPr>
@@ -16405,7 +16977,7 @@
             <a:avLst/>
           </a:prstGeom>
           <a:solidFill>
-            <a:srgbClr val="1E2761"/>
+            <a:srgbClr val="1C7293"/>
           </a:solidFill>
           <a:ln>
             <a:noFill/>
@@ -16435,84 +17007,14 @@
       </p:sp>
       <p:sp>
         <p:nvSpPr>
-          <p:cNvPr id="3" name="TextBox 2"/>
-          <p:cNvSpPr txBox="1"/>
-          <p:nvPr/>
-        </p:nvSpPr>
-        <p:spPr>
-          <a:xfrm>
-            <a:off x="514350" y="1234440"/>
-            <a:ext cx="2743200" cy="1714500"/>
-          </a:xfrm>
-          <a:prstGeom prst="rect">
-            <a:avLst/>
-          </a:prstGeom>
-          <a:noFill/>
-        </p:spPr>
-        <p:txBody>
-          <a:bodyPr wrap="square" lIns="34290" rIns="34290" tIns="13716" bIns="13716" anchor="ctr">
-            <a:spAutoFit/>
-          </a:bodyPr>
-          <a:lstStyle/>
-          <a:p>
-            <a:pPr algn="l"/>
-            <a:r>
-              <a:rPr sz="13500" b="1" i="0">
-                <a:solidFill>
-                  <a:srgbClr val="E8793A"/>
-                </a:solidFill>
-                <a:latin typeface="Arial Black"/>
-              </a:rPr>
-              <a:t>附錄</a:t>
-            </a:r>
-          </a:p>
-        </p:txBody>
-      </p:sp>
-      <p:sp>
-        <p:nvSpPr>
-          <p:cNvPr id="4" name="TextBox 3"/>
-          <p:cNvSpPr txBox="1"/>
-          <p:nvPr/>
-        </p:nvSpPr>
-        <p:spPr>
-          <a:xfrm>
-            <a:off x="3771900" y="1920239"/>
-            <a:ext cx="5143500" cy="1028700"/>
-          </a:xfrm>
-          <a:prstGeom prst="rect">
-            <a:avLst/>
-          </a:prstGeom>
-          <a:noFill/>
-        </p:spPr>
-        <p:txBody>
-          <a:bodyPr wrap="square" lIns="34290" rIns="34290" tIns="13716" bIns="13716" anchor="t">
-            <a:spAutoFit/>
-          </a:bodyPr>
-          <a:lstStyle/>
-          <a:p>
-            <a:pPr algn="l"/>
-            <a:r>
-              <a:rPr sz="4050" b="1" i="0">
-                <a:solidFill>
-                  <a:srgbClr val="FFFFFF"/>
-                </a:solidFill>
-                <a:latin typeface="Arial Black"/>
-              </a:rPr>
-              <a:t>Appendix</a:t>
-            </a:r>
-          </a:p>
-        </p:txBody>
-      </p:sp>
-      <p:sp>
-        <p:nvSpPr>
-          <p:cNvPr id="5" name="Rectangle 4"/>
-          <p:cNvSpPr/>
-          <p:nvPr/>
-        </p:nvSpPr>
-        <p:spPr>
-          <a:xfrm>
-            <a:off x="3771900" y="2743200"/>
-            <a:ext cx="1714500" cy="27432"/>
+          <p:cNvPr id="3" name="Rectangle 2"/>
+          <p:cNvSpPr/>
+          <p:nvPr/>
+        </p:nvSpPr>
+        <p:spPr>
+          <a:xfrm>
+            <a:off x="0" y="0"/>
+            <a:ext cx="9143771" cy="68580"/>
           </a:xfrm>
           <a:prstGeom prst="rect">
             <a:avLst/>
@@ -16549,14 +17051,84 @@
       </p:sp>
       <p:sp>
         <p:nvSpPr>
+          <p:cNvPr id="4" name="TextBox 3"/>
+          <p:cNvSpPr txBox="1"/>
+          <p:nvPr/>
+        </p:nvSpPr>
+        <p:spPr>
+          <a:xfrm>
+            <a:off x="582930" y="1371600"/>
+            <a:ext cx="2743200" cy="685800"/>
+          </a:xfrm>
+          <a:prstGeom prst="rect">
+            <a:avLst/>
+          </a:prstGeom>
+          <a:noFill/>
+        </p:spPr>
+        <p:txBody>
+          <a:bodyPr wrap="square" lIns="34290" rIns="34290" tIns="13716" bIns="13716" anchor="t">
+            <a:spAutoFit/>
+          </a:bodyPr>
+          <a:lstStyle/>
+          <a:p>
+            <a:pPr algn="l"/>
+            <a:r>
+              <a:rPr sz="3450" b="1" i="0">
+                <a:solidFill>
+                  <a:srgbClr val="E8793A"/>
+                </a:solidFill>
+                <a:latin typeface="Arial Black"/>
+              </a:rPr>
+              <a:t>附錄</a:t>
+            </a:r>
+          </a:p>
+        </p:txBody>
+      </p:sp>
+      <p:sp>
+        <p:nvSpPr>
+          <p:cNvPr id="5" name="TextBox 4"/>
+          <p:cNvSpPr txBox="1"/>
+          <p:nvPr/>
+        </p:nvSpPr>
+        <p:spPr>
+          <a:xfrm>
+            <a:off x="582930" y="2023110"/>
+            <a:ext cx="8229600" cy="685800"/>
+          </a:xfrm>
+          <a:prstGeom prst="rect">
+            <a:avLst/>
+          </a:prstGeom>
+          <a:noFill/>
+        </p:spPr>
+        <p:txBody>
+          <a:bodyPr wrap="square" lIns="34290" rIns="34290" tIns="13716" bIns="13716" anchor="t">
+            <a:spAutoFit/>
+          </a:bodyPr>
+          <a:lstStyle/>
+          <a:p>
+            <a:pPr algn="l"/>
+            <a:r>
+              <a:rPr sz="3150" b="1" i="0">
+                <a:solidFill>
+                  <a:srgbClr val="FFFFFF"/>
+                </a:solidFill>
+                <a:latin typeface="Arial Black"/>
+              </a:rPr>
+              <a:t>Appendix</a:t>
+            </a:r>
+          </a:p>
+        </p:txBody>
+      </p:sp>
+      <p:sp>
+        <p:nvSpPr>
           <p:cNvPr id="6" name="TextBox 5"/>
           <p:cNvSpPr txBox="1"/>
           <p:nvPr/>
         </p:nvSpPr>
         <p:spPr>
           <a:xfrm>
-            <a:off x="3771900" y="2880360"/>
-            <a:ext cx="5143500" cy="1714500"/>
+            <a:off x="582930" y="2777489"/>
+            <a:ext cx="8229600" cy="1508760"/>
           </a:xfrm>
           <a:prstGeom prst="rect">
             <a:avLst/>
@@ -16571,11 +17143,11 @@
           <a:p>
             <a:pPr algn="l">
               <a:spcAft>
-                <a:spcPts val="900"/>
+                <a:spcPts val="750"/>
               </a:spcAft>
             </a:pPr>
             <a:r>
-              <a:rPr sz="1800" b="0" i="0">
+              <a:rPr sz="1500" b="0" i="0">
                 <a:solidFill>
                   <a:srgbClr val="E8EDF3"/>
                 </a:solidFill>
@@ -16587,11 +17159,11 @@
           <a:p>
             <a:pPr algn="l">
               <a:spcAft>
-                <a:spcPts val="450"/>
+                <a:spcPts val="300"/>
               </a:spcAft>
             </a:pPr>
             <a:r>
-              <a:rPr sz="1500" b="0" i="0">
+              <a:rPr sz="1275" b="0" i="0">
                 <a:solidFill>
                   <a:srgbClr val="E8EDF3"/>
                 </a:solidFill>
@@ -16607,13 +17179,13 @@
               </a:spcAft>
             </a:pPr>
             <a:r>
-              <a:rPr sz="1500" b="0" i="0">
+              <a:rPr sz="1275" b="0" i="0">
                 <a:solidFill>
                   <a:srgbClr val="E8EDF3"/>
                 </a:solidFill>
                 <a:latin typeface="Calibri"/>
               </a:rPr>
-              <a:t>• JSON-RPC 三種訊息類型(Request / Response / Notification)</a:t>
+              <a:t>• JSON-RPC 三種訊息類型 (Request / Response / Notification)</a:t>
             </a:r>
           </a:p>
         </p:txBody>

--- a/02-how-mcp-works.pptx
+++ b/02-how-mcp-works.pptx
@@ -18536,7 +18536,7 @@
                 </a:solidFill>
                 <a:latin typeface="Calibri"/>
               </a:rPr>
-              <a:t>⚠   subprocess.run(LLM 輸出) 本質上就是 eval(LLM 輸出)</a:t>
+              <a:t>△   subprocess.run(LLM 輸出) 本質上就是 eval(LLM 輸出)</a:t>
             </a:r>
           </a:p>
           <a:p>
